--- a/lecons/USA/Population Geography/13_USA_POP_PW04_Calculating_Demographic_Indices.pptx
+++ b/lecons/USA/Population Geography/13_USA_POP_PW04_Calculating_Demographic_Indices.pptx
@@ -58,9 +58,16 @@
     <p:sldId id="306" r:id="rId52"/>
     <p:sldId id="307" r:id="rId53"/>
     <p:sldId id="308" r:id="rId54"/>
+    <p:sldId id="309" r:id="rId55"/>
+    <p:sldId id="310" r:id="rId56"/>
+    <p:sldId id="311" r:id="rId57"/>
+    <p:sldId id="312" r:id="rId58"/>
+    <p:sldId id="313" r:id="rId59"/>
+    <p:sldId id="314" r:id="rId60"/>
+    <p:sldId id="315" r:id="rId61"/>
   </p:sldIdLst>
   <p:notesMasterIdLst>
-    <p:notesMasterId r:id="rId55"/>
+    <p:notesMasterId r:id="rId62"/>
   </p:notesMasterIdLst>
   <p:sldSz cx="12192000" cy="6858000"/>
   <p:notesSz cx="6858000" cy="12192000"/>
@@ -642,7 +649,7 @@
           <a:p>
             <a:r>
               <a:rPr lang="en-US" dirty="0"/>
-              <a:t>Listen carefully to this situation from real life. A region has 1,000,000 people. In one year there were 36,000 births and 9,000 deaths. The planning office asks the class to calculate the growth rate and when the population will double. Think about it, because I am going to ask you some questions.</a:t>
+              <a:t>Take your time to copy this part; we will continue together.</a:t>
             </a:r>
             <a:endParaRPr lang="en-US" dirty="0"/>
           </a:p>
@@ -730,7 +737,7 @@
           <a:p>
             <a:r>
               <a:rPr lang="en-US" dirty="0"/>
-              <a:t>Question 1: What is the problem in the situation? Think for a moment, then raise your hand to answer.</a:t>
+              <a:t>Listen carefully to this situation from real life. The town council of a city of 400,000 people recorded 16,000 births and 4,000 deaths last year. The Mayor wants to know how many schools and health centres will be needed in ten or twenty years. His assistant has the figures but does not know what to do with them. She asks: "How do we calculate the birth rate, the death rate, the growth rate and the time the population will take to double?" Think about it, because I am going to ask you some questions.</a:t>
             </a:r>
             <a:endParaRPr lang="en-US" dirty="0"/>
           </a:p>
@@ -818,7 +825,7 @@
           <a:p>
             <a:r>
               <a:rPr lang="en-US" dirty="0"/>
-              <a:t>Good. The class must calculate demographic indices.</a:t>
+              <a:t>Question 1: What is the problem in the situation? Think for a moment, then raise your hand to answer.</a:t>
             </a:r>
             <a:endParaRPr lang="en-US" dirty="0"/>
           </a:p>
@@ -906,7 +913,7 @@
           <a:p>
             <a:r>
               <a:rPr lang="en-US" dirty="0"/>
-              <a:t>Question 2: What is the first index to calculate? Think for a moment, then raise your hand to answer.</a:t>
+              <a:t>Good. The assistant does not know how to calculate demographic indices.</a:t>
             </a:r>
             <a:endParaRPr lang="en-US" dirty="0"/>
           </a:p>
@@ -994,7 +1001,7 @@
           <a:p>
             <a:r>
               <a:rPr lang="en-US" dirty="0"/>
-              <a:t>Good. The crude birth rate.</a:t>
+              <a:t>Question 2: Which data does she have? Think for a moment, then raise your hand to answer.</a:t>
             </a:r>
             <a:endParaRPr lang="en-US" dirty="0"/>
           </a:p>
@@ -1082,7 +1089,7 @@
           <a:p>
             <a:r>
               <a:rPr lang="en-US" dirty="0"/>
-              <a:t>Question 3: How can we find the doubling time? Think for a moment, then raise your hand to answer.</a:t>
+              <a:t>Good. The population (400,000), the births (16,000) and the deaths (4,000).</a:t>
             </a:r>
             <a:endParaRPr lang="en-US" dirty="0"/>
           </a:p>
@@ -1170,7 +1177,7 @@
           <a:p>
             <a:r>
               <a:rPr lang="en-US" dirty="0"/>
-              <a:t>Good. 70 ÷ growth rate (%).</a:t>
+              <a:t>Question 3: Why does the Mayor need the doubling time? Think for a moment, then raise your hand to answer.</a:t>
             </a:r>
             <a:endParaRPr lang="en-US" dirty="0"/>
           </a:p>
@@ -1258,7 +1265,7 @@
           <a:p>
             <a:r>
               <a:rPr lang="en-US" dirty="0"/>
-              <a:t>From this situation, the action we are working towards in this lesson is the following: calculate demographic indices to describe population change.</a:t>
+              <a:t>Good. To plan schools, health centres and housing for the future population.</a:t>
             </a:r>
             <a:endParaRPr lang="en-US" dirty="0"/>
           </a:p>
@@ -1346,7 +1353,7 @@
           <a:p>
             <a:r>
               <a:rPr lang="en-US" dirty="0"/>
-              <a:t>Why is this lesson important for you? This practical work helps us to use numbers to understand population change.</a:t>
+              <a:t>From this situation, the action we are working towards in this lesson is the following: show the formula, the working and the unit (‰, % or years) in every calculation.</a:t>
             </a:r>
             <a:endParaRPr lang="en-US" dirty="0"/>
           </a:p>
@@ -1434,7 +1441,7 @@
           <a:p>
             <a:r>
               <a:rPr lang="en-US" dirty="0"/>
-              <a:t>Activity 1. Look carefully at this diagram: the main demographic indices. Observe every detail before I ask the question.</a:t>
+              <a:t>Why is this lesson important for you? This practical work gives us the numerical tools used by planners and in examinations to measure population change.</a:t>
             </a:r>
             <a:endParaRPr lang="en-US" dirty="0"/>
           </a:p>
@@ -1610,7 +1617,7 @@
           <a:p>
             <a:r>
               <a:rPr lang="en-US" dirty="0"/>
-              <a:t>Here is the question for Activity 1: Why are birth and death rates given per 1,000? Take one minute to think and write your answer in your rough notebook.</a:t>
+              <a:t>Activity 1. Look carefully at this diagram: the main formulas. Observe every detail before I ask the question.</a:t>
             </a:r>
             <a:endParaRPr lang="en-US" dirty="0"/>
           </a:p>
@@ -1698,7 +1705,7 @@
           <a:p>
             <a:r>
               <a:rPr lang="en-US" dirty="0"/>
-              <a:t>Let us check the answer together. To compare places with different population sizes.</a:t>
+              <a:t>Here is the question for Activity 1: Our class of 50 is a village where 3 babies are born in a year. What is its CBR? Take one minute to think and write your answer in your rough notebook.</a:t>
             </a:r>
             <a:endParaRPr lang="en-US" dirty="0"/>
           </a:p>
@@ -1786,7 +1793,7 @@
           <a:p>
             <a:r>
               <a:rPr lang="en-US" dirty="0"/>
-              <a:t>Activity 2. Look carefully at this diagram: worked example. Observe every detail before I ask the question.</a:t>
+              <a:t>Let us check the answer together. 3 ÷ 50 × 1,000 = 60 per 1,000.</a:t>
             </a:r>
             <a:endParaRPr lang="en-US" dirty="0"/>
           </a:p>
@@ -1874,7 +1881,7 @@
           <a:p>
             <a:r>
               <a:rPr lang="en-US" dirty="0"/>
-              <a:t>Here is the question for Activity 2: Calculate the natural increase in percent. Take one minute to think and write your answer in your rough notebook.</a:t>
+              <a:t>Activity 2. Look carefully at this picture: a worked example. Observe every detail before I ask the question.</a:t>
             </a:r>
             <a:endParaRPr lang="en-US" dirty="0"/>
           </a:p>
@@ -1962,7 +1969,7 @@
           <a:p>
             <a:r>
               <a:rPr lang="en-US" dirty="0"/>
-              <a:t>Let us check the answer together. (36 − 9) ÷ 10 = 2.7 %.</a:t>
+              <a:t>Here is the question for Activity 2: What is the CDR of the town (4,000 deaths, 400,000 people)? Take one minute to think and write your answer in your rough notebook.</a:t>
             </a:r>
             <a:endParaRPr lang="en-US" dirty="0"/>
           </a:p>
@@ -2050,7 +2057,7 @@
           <a:p>
             <a:r>
               <a:rPr lang="en-US" dirty="0"/>
-              <a:t>Activity 3. Look carefully at this diagram: a projection at 2.7 % per year. Observe every detail before I ask the question.</a:t>
+              <a:t>Let us check the answer together. 4,000 ÷ 400,000 × 1,000 = 10 per 1,000.</a:t>
             </a:r>
             <a:endParaRPr lang="en-US" dirty="0"/>
           </a:p>
@@ -2138,7 +2145,7 @@
           <a:p>
             <a:r>
               <a:rPr lang="en-US" dirty="0"/>
-              <a:t>Here is the question for Activity 3: In how many years will the population double? Take one minute to think and write your answer in your rough notebook.</a:t>
+              <a:t>Activity 3. Look carefully at this diagram: data of a country. Observe every detail before I ask the question.</a:t>
             </a:r>
             <a:endParaRPr lang="en-US" dirty="0"/>
           </a:p>
@@ -2226,7 +2233,7 @@
           <a:p>
             <a:r>
               <a:rPr lang="en-US" dirty="0"/>
-              <a:t>Let us check the answer together. 70 ÷ 2.7 ≈ 26 years.</a:t>
+              <a:t>Here is the question for Activity 3: With a CBR of 40 ‰ and a CDR of 10 ‰, what is the RNI? Take one minute to think and write your answer in your rough notebook.</a:t>
             </a:r>
             <a:endParaRPr lang="en-US" dirty="0"/>
           </a:p>
@@ -2314,7 +2321,7 @@
           <a:p>
             <a:r>
               <a:rPr lang="en-US" dirty="0"/>
-              <a:t>Activity 4. Look carefully at this picture: travellers at a bus station. Observe every detail before I ask the question.</a:t>
+              <a:t>Let us check the answer together. (40 − 10) ÷ 10 = 3 %.</a:t>
             </a:r>
             <a:endParaRPr lang="en-US" dirty="0"/>
           </a:p>
@@ -2402,7 +2409,7 @@
           <a:p>
             <a:r>
               <a:rPr lang="en-US" dirty="0"/>
-              <a:t>Here is the question for Activity 4: A town receives 5,000 migrants and loses 2,000. What is its net migration? Take one minute to think and write your answer in your rough notebook.</a:t>
+              <a:t>Activity 4. Look carefully at this diagram: a population doubling. Observe every detail before I ask the question.</a:t>
             </a:r>
             <a:endParaRPr lang="en-US" dirty="0"/>
           </a:p>
@@ -2490,7 +2497,7 @@
           <a:p>
             <a:r>
               <a:rPr lang="en-US" dirty="0"/>
-              <a:t>Our topic is Population Change over Time (Population Growth), and the sub-topic is Population Growth. The key notions we shall use today are: crude birth rate, crude death rate, fertility rate, fecundity, growth rate, doubling time, projection, net migration. At the end, you should be able to do this: learners are able to calculate and interpret the main demographic indices.</a:t>
+              <a:t>Our topic is Population Change over Time (Population Growth), and the sub-topic is Population Growth. The key notions we shall use today are: fecundity, fertility, crude birth rate, crude death rate, rate of natural increase, net migration rate, growth rate, doubling time, rule of 70. At the end, you should be able to do this: learners are able to calculate and interpret the main demographic indices and use them to project population.</a:t>
             </a:r>
             <a:endParaRPr lang="en-US" dirty="0"/>
           </a:p>
@@ -2578,7 +2585,7 @@
           <a:p>
             <a:r>
               <a:rPr lang="en-US" dirty="0"/>
-              <a:t>Let us check the answer together. +3,000.</a:t>
+              <a:t>Here is the question for Activity 4: How long will a population growing at 3 % take to double? Take one minute to think and write your answer in your rough notebook.</a:t>
             </a:r>
             <a:endParaRPr lang="en-US" dirty="0"/>
           </a:p>
@@ -2666,7 +2673,7 @@
           <a:p>
             <a:r>
               <a:rPr lang="en-US" dirty="0"/>
-              <a:t>Activity 5. Look carefully at this diagram: countries at different stages. Observe every detail before I ask the question.</a:t>
+              <a:t>Let us check the answer together. 70 ÷ 3 ≈ 23 years.</a:t>
             </a:r>
             <a:endParaRPr lang="en-US" dirty="0"/>
           </a:p>
@@ -2754,7 +2761,7 @@
           <a:p>
             <a:r>
               <a:rPr lang="en-US" dirty="0"/>
-              <a:t>Here is the question for Activity 5: A country has CBR 12 and CDR 10. Is it growing fast or slowly? Take one minute to think and write your answer in your rough notebook.</a:t>
+              <a:t>Activity 5. Look carefully at this picture: solutions of the exercises. Observe every detail before I ask the question.</a:t>
             </a:r>
             <a:endParaRPr lang="en-US" dirty="0"/>
           </a:p>
@@ -2842,7 +2849,7 @@
           <a:p>
             <a:r>
               <a:rPr lang="en-US" dirty="0"/>
-              <a:t>Let us check the answer together. Slowly (0.2 % per year), like a stage 4 country.</a:t>
+              <a:t>Here is the question for Activity 5: A town of 50,000 has 850 births. What is its CBR? Take one minute to think and write your answer in your rough notebook.</a:t>
             </a:r>
             <a:endParaRPr lang="en-US" dirty="0"/>
           </a:p>
@@ -2930,7 +2937,7 @@
           <a:p>
             <a:r>
               <a:rPr lang="en-US" dirty="0"/>
-              <a:t>Now we are going to copy the board summary. Write the title and the headings neatly in your notebooks. I will give you enough time for each slide, so do not rush.</a:t>
+              <a:t>Let us check the answer together. 850 ÷ 50,000 × 1,000 = 17 per 1,000.</a:t>
             </a:r>
             <a:endParaRPr lang="en-US" dirty="0"/>
           </a:p>
@@ -3018,7 +3025,7 @@
           <a:p>
             <a:r>
               <a:rPr lang="en-US" dirty="0"/>
-              <a:t>Let us copy the definitions. The key terms of this lesson are defined as follows. On this slide we have Fertility and Fecundity. Write each point on a new line, with the key term first, and explain it in your own words when we revise.</a:t>
+              <a:t>Now we are going to copy the board summary. Write the title and the headings neatly in your notebooks. I will give you enough time for each slide, so do not rush.</a:t>
             </a:r>
             <a:endParaRPr lang="en-US" dirty="0"/>
           </a:p>
@@ -3106,7 +3113,7 @@
           <a:p>
             <a:r>
               <a:rPr lang="en-US" dirty="0"/>
-              <a:t>Let us copy Formulas of Demographic Indices. The main indices are calculated as follows. On this slide we have Crude birth rate (CBR). Write each point on a new line, with the key term first, and explain it in your own words when we revise. When you finish, we go to the next slide.</a:t>
+              <a:t>Let us copy the definitions. The key terms of this lesson are defined as follows. On this slide we have Fecundity and Fertility. Write each point on a new line, with the key term first, and explain it in your own words when we revise. When you finish, we go to the next slide.</a:t>
             </a:r>
             <a:endParaRPr lang="en-US" dirty="0"/>
           </a:p>
@@ -3194,7 +3201,7 @@
           <a:p>
             <a:r>
               <a:rPr lang="en-US" dirty="0"/>
-              <a:t>We continue with Formulas of Demographic Indices. On this slide we have Crude death rate (CDR) and Growth rate. Write each point on a new line, with the key term first, and explain it in your own words when we revise.</a:t>
+              <a:t>We continue with the definitions. On this slide we have Crude birth rate (CBR), Crude death rate (CDR) and Doubling time. Write each point on a new line, with the key term first, and explain it in your own words when we revise.</a:t>
             </a:r>
             <a:endParaRPr lang="en-US" dirty="0"/>
           </a:p>
@@ -3282,7 +3289,7 @@
           <a:p>
             <a:r>
               <a:rPr lang="en-US" dirty="0"/>
-              <a:t>Now draw this illustration in your notebook: formulas of demographic indices. Give it a title and label it clearly.</a:t>
+              <a:t>Let us copy Measures of Fertility and Mortality. Fertility and mortality are measured as follows. On this slide we have Fecundity and fertility. Write each point on a new line, with the key term first, and explain it in your own words when we revise.</a:t>
             </a:r>
             <a:endParaRPr lang="en-US" dirty="0"/>
           </a:p>
@@ -3370,7 +3377,7 @@
           <a:p>
             <a:r>
               <a:rPr lang="en-US" dirty="0"/>
-              <a:t>Let us copy Projections, Doubling Time and Migration. Other calculations include. On this slide we have Doubling time. Write each point on a new line, with the key term first, and explain it in your own words when we revise. When you finish, we go to the next slide.</a:t>
+              <a:t>Copy the point on CBR formula on the left, then draw the diagram on the right: the main formulas. Give it a title and label it clearly.</a:t>
             </a:r>
             <a:endParaRPr lang="en-US" dirty="0"/>
           </a:p>
@@ -3458,7 +3465,7 @@
           <a:p>
             <a:r>
               <a:rPr lang="en-US" dirty="0"/>
-              <a:t>Before we start the new lesson, let us correct the homework I gave you at the end of Lesson 9: Population Growth and its Determinants. The question was: Draw the population change system for your village or town. Take out your exercise books.</a:t>
+              <a:t>Before we start the new lesson, let us correct the homework I gave you at the end of Lesson 9: Population Growth and its Determinants. The question was: Define the crude birth rate. Take out your exercise books.</a:t>
             </a:r>
             <a:endParaRPr lang="en-US" dirty="0"/>
           </a:p>
@@ -3546,7 +3553,7 @@
           <a:p>
             <a:r>
               <a:rPr lang="en-US" dirty="0"/>
-              <a:t>We continue with Projections, Doubling Time and Migration. On this slide we have Population projection and Net migration. Write each point on a new line, with the key term first, and explain it in your own words when we revise.</a:t>
+              <a:t>Copy the point on CBR example on the left, then draw the diagram on the right: a worked example. Give it a title and label it clearly.</a:t>
             </a:r>
             <a:endParaRPr lang="en-US" dirty="0"/>
           </a:p>
@@ -3634,7 +3641,7 @@
           <a:p>
             <a:r>
               <a:rPr lang="en-US" dirty="0"/>
-              <a:t>Now draw this illustration in your notebook: population projection and doubling time. Give it a title and label it clearly.</a:t>
+              <a:t>We continue with Measures of Fertility and Mortality. On this slide we have CDR formula and CDR example. Write each point on a new line, with the key term first, and explain it in your own words when we revise.</a:t>
             </a:r>
             <a:endParaRPr lang="en-US" dirty="0"/>
           </a:p>
@@ -3722,7 +3729,7 @@
           <a:p>
             <a:r>
               <a:rPr lang="en-US" dirty="0"/>
-              <a:t>Now let us check what you have understood. Question 1: A town of 50,000 has 1,500 births. Find the CBR. Answer in your exercise book.</a:t>
+              <a:t>Let us copy Calculating Population Change. Population change is calculated as follows. On this slide we have Rate of natural increase (RNI) and RNI example. Write each point on a new line, with the key term first, and explain it in your own words when we revise. When you finish, we go to the next slide.</a:t>
             </a:r>
             <a:endParaRPr lang="en-US" dirty="0"/>
           </a:p>
@@ -3810,7 +3817,7 @@
           <a:p>
             <a:r>
               <a:rPr lang="en-US" dirty="0"/>
-              <a:t>The expected answer is: 1,500 ÷ 50,000 × 1,000 = 30 ‰. If you got it right, well done.</a:t>
+              <a:t>We continue with Calculating Population Change. On this slide we have Net migration rate and Growth rate. Write each point on a new line, with the key term first, and explain it in your own words when we revise.</a:t>
             </a:r>
             <a:endParaRPr lang="en-US" dirty="0"/>
           </a:p>
@@ -3898,7 +3905,7 @@
           <a:p>
             <a:r>
               <a:rPr lang="en-US" dirty="0"/>
-              <a:t>Now let us check what you have understood. Question 2: A population grows at 3.5 %. Find its doubling time. Answer in your exercise book.</a:t>
+              <a:t>Let us copy Projecting Future Population. The future population is projected as follows. Copy the point on Rule of 70 on the left, then draw the diagram on the right: a population doubling. Give it a title and label it clearly.</a:t>
             </a:r>
             <a:endParaRPr lang="en-US" dirty="0"/>
           </a:p>
@@ -3986,7 +3993,7 @@
           <a:p>
             <a:r>
               <a:rPr lang="en-US" dirty="0"/>
-              <a:t>The expected answer is: 70 ÷ 3.5 = 20 years. If you got it right, well done.</a:t>
+              <a:t>We continue with Projecting Future Population. On this slide we have Example and Use for planning. Write each point on a new line, with the key term first, and explain it in your own words when we revise.</a:t>
             </a:r>
             <a:endParaRPr lang="en-US" dirty="0"/>
           </a:p>
@@ -4074,7 +4081,7 @@
           <a:p>
             <a:r>
               <a:rPr lang="en-US" dirty="0"/>
-              <a:t>For those who need more practice, fill in the blanks in your exercise book. The answers are: number 1, 1,000; number 2, 70; number 3, 10.</a:t>
+              <a:t>Let us copy Practical Exercises with Solutions. The solutions of the practical exercises are the following. Copy the point on Exercise 1 (CBR) on the left, then draw the diagram on the right: solutions. Give it a title and label it clearly.</a:t>
             </a:r>
             <a:endParaRPr lang="en-US" dirty="0"/>
           </a:p>
@@ -4162,7 +4169,7 @@
           <a:p>
             <a:r>
               <a:rPr lang="en-US" dirty="0"/>
-              <a:t>For your homework: Find Cameroon's birth and death rates and calculate its natural increase and doubling time. We shall correct it at the beginning of our next lesson.</a:t>
+              <a:t>We continue with Practical Exercises with Solutions. On this slide we have Exercise 2 (CDR) and Exercise 3 (growth rate). Write each point on a new line, with the key term first, and explain it in your own words when we revise. When you finish, we go to the next slide.</a:t>
             </a:r>
             <a:endParaRPr lang="en-US" dirty="0"/>
           </a:p>
@@ -4250,7 +4257,7 @@
           <a:p>
             <a:r>
               <a:rPr lang="en-US" dirty="0"/>
-              <a:t>Our next lesson will be on Lesson 10: Factors of Population Growth. Thank you for your attention, and see you next time.</a:t>
+              <a:t>We continue with Practical Exercises with Solutions. On this slide we have Exercise 4 (doubling time). Write each point on a new line, with the key term first, and explain it in your own words when we revise.</a:t>
             </a:r>
             <a:endParaRPr lang="en-US" dirty="0"/>
           </a:p>
@@ -4338,7 +4345,7 @@
           <a:p>
             <a:r>
               <a:rPr lang="en-US" dirty="0"/>
-              <a:t>Let us play the bilingual game. I say a word in English, and you give me the French word. Then we do the reverse.</a:t>
+              <a:t>Now let us check what you have understood. Question 1: A town of 25,000 people has 1,000 births and 200 deaths. Calculate its CBR, CDR and RNI. Answer in your exercise book.</a:t>
             </a:r>
             <a:endParaRPr lang="en-US" dirty="0"/>
           </a:p>
@@ -4426,7 +4433,7 @@
           <a:p>
             <a:r>
               <a:rPr lang="en-US" dirty="0"/>
-              <a:t>Here is a good answer. Village system: inputs – births and people coming back from town; outputs – deaths and young people leaving for towns; store – the village population. Compare it with your own answer and correct your work in red.</a:t>
+              <a:t>Here is a good answer. The crude birth rate is the number of live births per 1,000 people in a year. Compare it with your own answer and correct your work in red.</a:t>
             </a:r>
             <a:endParaRPr lang="en-US" dirty="0"/>
           </a:p>
@@ -4514,7 +4521,7 @@
           <a:p>
             <a:r>
               <a:rPr lang="en-US" dirty="0"/>
-              <a:t>I record this information in the official logbook of the class after the lesson.</a:t>
+              <a:t>The expected answer is: cBR = 40 ‰; CDR = 8 ‰; RNI = (40 − 8) ÷ 10 = 3.2 %. If you got it right, well done.</a:t>
             </a:r>
             <a:endParaRPr lang="en-US" dirty="0"/>
           </a:p>
@@ -4602,7 +4609,7 @@
           <a:p>
             <a:r>
               <a:rPr lang="en-US" dirty="0"/>
-              <a:t>I complete the second page of the logbook: the matter taught, the evaluation, the homework and the attendance.</a:t>
+              <a:t>Now let us check what you have understood. Question 2: Calculate the doubling time of a population growing at 2 % a year. Answer in your exercise book.</a:t>
             </a:r>
             <a:endParaRPr lang="en-US" dirty="0"/>
           </a:p>
@@ -4690,7 +4697,7 @@
           <a:p>
             <a:r>
               <a:rPr lang="en-US" dirty="0"/>
-              <a:t>This slide is for me, the teacher: it gives the timing of the lesson and what to do if the projector is not available.</a:t>
+              <a:t>The expected answer is: 70 ÷ 2 = 35 years. If you got it right, well done.</a:t>
             </a:r>
             <a:endParaRPr lang="en-US" dirty="0"/>
           </a:p>
@@ -4778,7 +4785,7 @@
           <a:p>
             <a:r>
               <a:rPr lang="en-US" dirty="0"/>
-              <a:t>These are the references and picture credits used to prepare this lesson.</a:t>
+              <a:t>For those who need more practice, fill in the blanks in your exercise book. The answers are: number 1, 1,000; number 2, 10; number 3, 70.</a:t>
             </a:r>
             <a:endParaRPr lang="en-US" dirty="0"/>
           </a:p>
@@ -4802,6 +4809,534 @@
             <a:fld id="{F7021451-1387-4CA6-816F-3879F97B5CBC}" type="slidenum">
               <a:rPr lang="en-US"/>
               <a:t>53</a:t>
+            </a:fld>
+            <a:endParaRPr lang="en-US"/>
+          </a:p>
+        </p:txBody>
+      </p:sp>
+    </p:spTree>
+    <p:extLst>
+      <p:ext uri="{BB962C8B-B14F-4D97-AF65-F5344CB8AC3E}">
+        <p14:creationId xmlns:p14="http://schemas.microsoft.com/office/powerpoint/2010/main" val="1024086991"/>
+      </p:ext>
+    </p:extLst>
+  </p:cSld>
+  <p:clrMapOvr>
+    <a:masterClrMapping/>
+  </p:clrMapOvr>
+</p:notes>
+</file>
+
+<file path=ppt/notesSlides/notesSlide54.xml><?xml version="1.0" encoding="utf-8"?>
+<p:notes xmlns:a="http://schemas.openxmlformats.org/drawingml/2006/main" xmlns:r="http://schemas.openxmlformats.org/officeDocument/2006/relationships" xmlns:p="http://schemas.openxmlformats.org/presentationml/2006/main">
+  <p:cSld>
+    <p:spTree>
+      <p:nvGrpSpPr>
+        <p:cNvPr id="1" name=""/>
+        <p:cNvGrpSpPr/>
+        <p:nvPr/>
+      </p:nvGrpSpPr>
+      <p:grpSpPr>
+        <a:xfrm>
+          <a:off x="0" y="0"/>
+          <a:ext cx="0" cy="0"/>
+          <a:chOff x="0" y="0"/>
+          <a:chExt cx="0" cy="0"/>
+        </a:xfrm>
+      </p:grpSpPr>
+      <p:sp>
+        <p:nvSpPr>
+          <p:cNvPr id="2" name="Slide Image Placeholder 1"/>
+          <p:cNvSpPr>
+            <a:spLocks noGrp="1" noRot="1" noChangeAspect="1"/>
+          </p:cNvSpPr>
+          <p:nvPr>
+            <p:ph type="sldImg"/>
+          </p:nvPr>
+        </p:nvSpPr>
+        <p:spPr/>
+      </p:sp>
+      <p:sp>
+        <p:nvSpPr>
+          <p:cNvPr id="3" name="Notes Placeholder 2"/>
+          <p:cNvSpPr>
+            <a:spLocks noGrp="1"/>
+          </p:cNvSpPr>
+          <p:nvPr>
+            <p:ph type="body" idx="1"/>
+          </p:nvPr>
+        </p:nvSpPr>
+        <p:spPr/>
+        <p:txBody>
+          <a:bodyPr/>
+          <a:lstStyle/>
+          <a:p>
+            <a:r>
+              <a:rPr lang="en-US" dirty="0"/>
+              <a:t>For your homework: Name two non-demographic factors of population growth. We shall correct it at the beginning of our next lesson.</a:t>
+            </a:r>
+            <a:endParaRPr lang="en-US" dirty="0"/>
+          </a:p>
+        </p:txBody>
+      </p:sp>
+      <p:sp>
+        <p:nvSpPr>
+          <p:cNvPr id="4" name="Slide Number Placeholder 3"/>
+          <p:cNvSpPr>
+            <a:spLocks noGrp="1"/>
+          </p:cNvSpPr>
+          <p:nvPr>
+            <p:ph type="sldNum" sz="quarter" idx="10"/>
+          </p:nvPr>
+        </p:nvSpPr>
+        <p:spPr/>
+        <p:txBody>
+          <a:bodyPr/>
+          <a:lstStyle/>
+          <a:p>
+            <a:fld id="{F7021451-1387-4CA6-816F-3879F97B5CBC}" type="slidenum">
+              <a:rPr lang="en-US"/>
+              <a:t>54</a:t>
+            </a:fld>
+            <a:endParaRPr lang="en-US"/>
+          </a:p>
+        </p:txBody>
+      </p:sp>
+    </p:spTree>
+    <p:extLst>
+      <p:ext uri="{BB962C8B-B14F-4D97-AF65-F5344CB8AC3E}">
+        <p14:creationId xmlns:p14="http://schemas.microsoft.com/office/powerpoint/2010/main" val="1024086991"/>
+      </p:ext>
+    </p:extLst>
+  </p:cSld>
+  <p:clrMapOvr>
+    <a:masterClrMapping/>
+  </p:clrMapOvr>
+</p:notes>
+</file>
+
+<file path=ppt/notesSlides/notesSlide55.xml><?xml version="1.0" encoding="utf-8"?>
+<p:notes xmlns:a="http://schemas.openxmlformats.org/drawingml/2006/main" xmlns:r="http://schemas.openxmlformats.org/officeDocument/2006/relationships" xmlns:p="http://schemas.openxmlformats.org/presentationml/2006/main">
+  <p:cSld>
+    <p:spTree>
+      <p:nvGrpSpPr>
+        <p:cNvPr id="1" name=""/>
+        <p:cNvGrpSpPr/>
+        <p:nvPr/>
+      </p:nvGrpSpPr>
+      <p:grpSpPr>
+        <a:xfrm>
+          <a:off x="0" y="0"/>
+          <a:ext cx="0" cy="0"/>
+          <a:chOff x="0" y="0"/>
+          <a:chExt cx="0" cy="0"/>
+        </a:xfrm>
+      </p:grpSpPr>
+      <p:sp>
+        <p:nvSpPr>
+          <p:cNvPr id="2" name="Slide Image Placeholder 1"/>
+          <p:cNvSpPr>
+            <a:spLocks noGrp="1" noRot="1" noChangeAspect="1"/>
+          </p:cNvSpPr>
+          <p:nvPr>
+            <p:ph type="sldImg"/>
+          </p:nvPr>
+        </p:nvSpPr>
+        <p:spPr/>
+      </p:sp>
+      <p:sp>
+        <p:nvSpPr>
+          <p:cNvPr id="3" name="Notes Placeholder 2"/>
+          <p:cNvSpPr>
+            <a:spLocks noGrp="1"/>
+          </p:cNvSpPr>
+          <p:nvPr>
+            <p:ph type="body" idx="1"/>
+          </p:nvPr>
+        </p:nvSpPr>
+        <p:spPr/>
+        <p:txBody>
+          <a:bodyPr/>
+          <a:lstStyle/>
+          <a:p>
+            <a:r>
+              <a:rPr lang="en-US" dirty="0"/>
+              <a:t>Our next lesson will be on Lesson 10: Factors of Population Growth. Thank you for your attention, and see you next time.</a:t>
+            </a:r>
+            <a:endParaRPr lang="en-US" dirty="0"/>
+          </a:p>
+        </p:txBody>
+      </p:sp>
+      <p:sp>
+        <p:nvSpPr>
+          <p:cNvPr id="4" name="Slide Number Placeholder 3"/>
+          <p:cNvSpPr>
+            <a:spLocks noGrp="1"/>
+          </p:cNvSpPr>
+          <p:nvPr>
+            <p:ph type="sldNum" sz="quarter" idx="10"/>
+          </p:nvPr>
+        </p:nvSpPr>
+        <p:spPr/>
+        <p:txBody>
+          <a:bodyPr/>
+          <a:lstStyle/>
+          <a:p>
+            <a:fld id="{F7021451-1387-4CA6-816F-3879F97B5CBC}" type="slidenum">
+              <a:rPr lang="en-US"/>
+              <a:t>55</a:t>
+            </a:fld>
+            <a:endParaRPr lang="en-US"/>
+          </a:p>
+        </p:txBody>
+      </p:sp>
+    </p:spTree>
+    <p:extLst>
+      <p:ext uri="{BB962C8B-B14F-4D97-AF65-F5344CB8AC3E}">
+        <p14:creationId xmlns:p14="http://schemas.microsoft.com/office/powerpoint/2010/main" val="1024086991"/>
+      </p:ext>
+    </p:extLst>
+  </p:cSld>
+  <p:clrMapOvr>
+    <a:masterClrMapping/>
+  </p:clrMapOvr>
+</p:notes>
+</file>
+
+<file path=ppt/notesSlides/notesSlide56.xml><?xml version="1.0" encoding="utf-8"?>
+<p:notes xmlns:a="http://schemas.openxmlformats.org/drawingml/2006/main" xmlns:r="http://schemas.openxmlformats.org/officeDocument/2006/relationships" xmlns:p="http://schemas.openxmlformats.org/presentationml/2006/main">
+  <p:cSld>
+    <p:spTree>
+      <p:nvGrpSpPr>
+        <p:cNvPr id="1" name=""/>
+        <p:cNvGrpSpPr/>
+        <p:nvPr/>
+      </p:nvGrpSpPr>
+      <p:grpSpPr>
+        <a:xfrm>
+          <a:off x="0" y="0"/>
+          <a:ext cx="0" cy="0"/>
+          <a:chOff x="0" y="0"/>
+          <a:chExt cx="0" cy="0"/>
+        </a:xfrm>
+      </p:grpSpPr>
+      <p:sp>
+        <p:nvSpPr>
+          <p:cNvPr id="2" name="Slide Image Placeholder 1"/>
+          <p:cNvSpPr>
+            <a:spLocks noGrp="1" noRot="1" noChangeAspect="1"/>
+          </p:cNvSpPr>
+          <p:nvPr>
+            <p:ph type="sldImg"/>
+          </p:nvPr>
+        </p:nvSpPr>
+        <p:spPr/>
+      </p:sp>
+      <p:sp>
+        <p:nvSpPr>
+          <p:cNvPr id="3" name="Notes Placeholder 2"/>
+          <p:cNvSpPr>
+            <a:spLocks noGrp="1"/>
+          </p:cNvSpPr>
+          <p:nvPr>
+            <p:ph type="body" idx="1"/>
+          </p:nvPr>
+        </p:nvSpPr>
+        <p:spPr/>
+        <p:txBody>
+          <a:bodyPr/>
+          <a:lstStyle/>
+          <a:p>
+            <a:r>
+              <a:rPr lang="en-US" dirty="0"/>
+              <a:t>Let us play the bilingual game. I say a word in English, and you give me the French word. Then we do the reverse.</a:t>
+            </a:r>
+            <a:endParaRPr lang="en-US" dirty="0"/>
+          </a:p>
+        </p:txBody>
+      </p:sp>
+      <p:sp>
+        <p:nvSpPr>
+          <p:cNvPr id="4" name="Slide Number Placeholder 3"/>
+          <p:cNvSpPr>
+            <a:spLocks noGrp="1"/>
+          </p:cNvSpPr>
+          <p:nvPr>
+            <p:ph type="sldNum" sz="quarter" idx="10"/>
+          </p:nvPr>
+        </p:nvSpPr>
+        <p:spPr/>
+        <p:txBody>
+          <a:bodyPr/>
+          <a:lstStyle/>
+          <a:p>
+            <a:fld id="{F7021451-1387-4CA6-816F-3879F97B5CBC}" type="slidenum">
+              <a:rPr lang="en-US"/>
+              <a:t>56</a:t>
+            </a:fld>
+            <a:endParaRPr lang="en-US"/>
+          </a:p>
+        </p:txBody>
+      </p:sp>
+    </p:spTree>
+    <p:extLst>
+      <p:ext uri="{BB962C8B-B14F-4D97-AF65-F5344CB8AC3E}">
+        <p14:creationId xmlns:p14="http://schemas.microsoft.com/office/powerpoint/2010/main" val="1024086991"/>
+      </p:ext>
+    </p:extLst>
+  </p:cSld>
+  <p:clrMapOvr>
+    <a:masterClrMapping/>
+  </p:clrMapOvr>
+</p:notes>
+</file>
+
+<file path=ppt/notesSlides/notesSlide57.xml><?xml version="1.0" encoding="utf-8"?>
+<p:notes xmlns:a="http://schemas.openxmlformats.org/drawingml/2006/main" xmlns:r="http://schemas.openxmlformats.org/officeDocument/2006/relationships" xmlns:p="http://schemas.openxmlformats.org/presentationml/2006/main">
+  <p:cSld>
+    <p:spTree>
+      <p:nvGrpSpPr>
+        <p:cNvPr id="1" name=""/>
+        <p:cNvGrpSpPr/>
+        <p:nvPr/>
+      </p:nvGrpSpPr>
+      <p:grpSpPr>
+        <a:xfrm>
+          <a:off x="0" y="0"/>
+          <a:ext cx="0" cy="0"/>
+          <a:chOff x="0" y="0"/>
+          <a:chExt cx="0" cy="0"/>
+        </a:xfrm>
+      </p:grpSpPr>
+      <p:sp>
+        <p:nvSpPr>
+          <p:cNvPr id="2" name="Slide Image Placeholder 1"/>
+          <p:cNvSpPr>
+            <a:spLocks noGrp="1" noRot="1" noChangeAspect="1"/>
+          </p:cNvSpPr>
+          <p:nvPr>
+            <p:ph type="sldImg"/>
+          </p:nvPr>
+        </p:nvSpPr>
+        <p:spPr/>
+      </p:sp>
+      <p:sp>
+        <p:nvSpPr>
+          <p:cNvPr id="3" name="Notes Placeholder 2"/>
+          <p:cNvSpPr>
+            <a:spLocks noGrp="1"/>
+          </p:cNvSpPr>
+          <p:nvPr>
+            <p:ph type="body" idx="1"/>
+          </p:nvPr>
+        </p:nvSpPr>
+        <p:spPr/>
+        <p:txBody>
+          <a:bodyPr/>
+          <a:lstStyle/>
+          <a:p>
+            <a:r>
+              <a:rPr lang="en-US" dirty="0"/>
+              <a:t>I record this information in the official logbook of the class after the lesson.</a:t>
+            </a:r>
+            <a:endParaRPr lang="en-US" dirty="0"/>
+          </a:p>
+        </p:txBody>
+      </p:sp>
+      <p:sp>
+        <p:nvSpPr>
+          <p:cNvPr id="4" name="Slide Number Placeholder 3"/>
+          <p:cNvSpPr>
+            <a:spLocks noGrp="1"/>
+          </p:cNvSpPr>
+          <p:nvPr>
+            <p:ph type="sldNum" sz="quarter" idx="10"/>
+          </p:nvPr>
+        </p:nvSpPr>
+        <p:spPr/>
+        <p:txBody>
+          <a:bodyPr/>
+          <a:lstStyle/>
+          <a:p>
+            <a:fld id="{F7021451-1387-4CA6-816F-3879F97B5CBC}" type="slidenum">
+              <a:rPr lang="en-US"/>
+              <a:t>57</a:t>
+            </a:fld>
+            <a:endParaRPr lang="en-US"/>
+          </a:p>
+        </p:txBody>
+      </p:sp>
+    </p:spTree>
+    <p:extLst>
+      <p:ext uri="{BB962C8B-B14F-4D97-AF65-F5344CB8AC3E}">
+        <p14:creationId xmlns:p14="http://schemas.microsoft.com/office/powerpoint/2010/main" val="1024086991"/>
+      </p:ext>
+    </p:extLst>
+  </p:cSld>
+  <p:clrMapOvr>
+    <a:masterClrMapping/>
+  </p:clrMapOvr>
+</p:notes>
+</file>
+
+<file path=ppt/notesSlides/notesSlide58.xml><?xml version="1.0" encoding="utf-8"?>
+<p:notes xmlns:a="http://schemas.openxmlformats.org/drawingml/2006/main" xmlns:r="http://schemas.openxmlformats.org/officeDocument/2006/relationships" xmlns:p="http://schemas.openxmlformats.org/presentationml/2006/main">
+  <p:cSld>
+    <p:spTree>
+      <p:nvGrpSpPr>
+        <p:cNvPr id="1" name=""/>
+        <p:cNvGrpSpPr/>
+        <p:nvPr/>
+      </p:nvGrpSpPr>
+      <p:grpSpPr>
+        <a:xfrm>
+          <a:off x="0" y="0"/>
+          <a:ext cx="0" cy="0"/>
+          <a:chOff x="0" y="0"/>
+          <a:chExt cx="0" cy="0"/>
+        </a:xfrm>
+      </p:grpSpPr>
+      <p:sp>
+        <p:nvSpPr>
+          <p:cNvPr id="2" name="Slide Image Placeholder 1"/>
+          <p:cNvSpPr>
+            <a:spLocks noGrp="1" noRot="1" noChangeAspect="1"/>
+          </p:cNvSpPr>
+          <p:nvPr>
+            <p:ph type="sldImg"/>
+          </p:nvPr>
+        </p:nvSpPr>
+        <p:spPr/>
+      </p:sp>
+      <p:sp>
+        <p:nvSpPr>
+          <p:cNvPr id="3" name="Notes Placeholder 2"/>
+          <p:cNvSpPr>
+            <a:spLocks noGrp="1"/>
+          </p:cNvSpPr>
+          <p:nvPr>
+            <p:ph type="body" idx="1"/>
+          </p:nvPr>
+        </p:nvSpPr>
+        <p:spPr/>
+        <p:txBody>
+          <a:bodyPr/>
+          <a:lstStyle/>
+          <a:p>
+            <a:r>
+              <a:rPr lang="en-US" dirty="0"/>
+              <a:t>I complete the second page of the logbook: the matter taught, the evaluation, the homework and the attendance.</a:t>
+            </a:r>
+            <a:endParaRPr lang="en-US" dirty="0"/>
+          </a:p>
+        </p:txBody>
+      </p:sp>
+      <p:sp>
+        <p:nvSpPr>
+          <p:cNvPr id="4" name="Slide Number Placeholder 3"/>
+          <p:cNvSpPr>
+            <a:spLocks noGrp="1"/>
+          </p:cNvSpPr>
+          <p:nvPr>
+            <p:ph type="sldNum" sz="quarter" idx="10"/>
+          </p:nvPr>
+        </p:nvSpPr>
+        <p:spPr/>
+        <p:txBody>
+          <a:bodyPr/>
+          <a:lstStyle/>
+          <a:p>
+            <a:fld id="{F7021451-1387-4CA6-816F-3879F97B5CBC}" type="slidenum">
+              <a:rPr lang="en-US"/>
+              <a:t>58</a:t>
+            </a:fld>
+            <a:endParaRPr lang="en-US"/>
+          </a:p>
+        </p:txBody>
+      </p:sp>
+    </p:spTree>
+    <p:extLst>
+      <p:ext uri="{BB962C8B-B14F-4D97-AF65-F5344CB8AC3E}">
+        <p14:creationId xmlns:p14="http://schemas.microsoft.com/office/powerpoint/2010/main" val="1024086991"/>
+      </p:ext>
+    </p:extLst>
+  </p:cSld>
+  <p:clrMapOvr>
+    <a:masterClrMapping/>
+  </p:clrMapOvr>
+</p:notes>
+</file>
+
+<file path=ppt/notesSlides/notesSlide59.xml><?xml version="1.0" encoding="utf-8"?>
+<p:notes xmlns:a="http://schemas.openxmlformats.org/drawingml/2006/main" xmlns:r="http://schemas.openxmlformats.org/officeDocument/2006/relationships" xmlns:p="http://schemas.openxmlformats.org/presentationml/2006/main">
+  <p:cSld>
+    <p:spTree>
+      <p:nvGrpSpPr>
+        <p:cNvPr id="1" name=""/>
+        <p:cNvGrpSpPr/>
+        <p:nvPr/>
+      </p:nvGrpSpPr>
+      <p:grpSpPr>
+        <a:xfrm>
+          <a:off x="0" y="0"/>
+          <a:ext cx="0" cy="0"/>
+          <a:chOff x="0" y="0"/>
+          <a:chExt cx="0" cy="0"/>
+        </a:xfrm>
+      </p:grpSpPr>
+      <p:sp>
+        <p:nvSpPr>
+          <p:cNvPr id="2" name="Slide Image Placeholder 1"/>
+          <p:cNvSpPr>
+            <a:spLocks noGrp="1" noRot="1" noChangeAspect="1"/>
+          </p:cNvSpPr>
+          <p:nvPr>
+            <p:ph type="sldImg"/>
+          </p:nvPr>
+        </p:nvSpPr>
+        <p:spPr/>
+      </p:sp>
+      <p:sp>
+        <p:nvSpPr>
+          <p:cNvPr id="3" name="Notes Placeholder 2"/>
+          <p:cNvSpPr>
+            <a:spLocks noGrp="1"/>
+          </p:cNvSpPr>
+          <p:nvPr>
+            <p:ph type="body" idx="1"/>
+          </p:nvPr>
+        </p:nvSpPr>
+        <p:spPr/>
+        <p:txBody>
+          <a:bodyPr/>
+          <a:lstStyle/>
+          <a:p>
+            <a:r>
+              <a:rPr lang="en-US" dirty="0"/>
+              <a:t>This slide is for me, the teacher: it gives the timing of the lesson and what to do if the projector is not available.</a:t>
+            </a:r>
+            <a:endParaRPr lang="en-US" dirty="0"/>
+          </a:p>
+        </p:txBody>
+      </p:sp>
+      <p:sp>
+        <p:nvSpPr>
+          <p:cNvPr id="4" name="Slide Number Placeholder 3"/>
+          <p:cNvSpPr>
+            <a:spLocks noGrp="1"/>
+          </p:cNvSpPr>
+          <p:nvPr>
+            <p:ph type="sldNum" sz="quarter" idx="10"/>
+          </p:nvPr>
+        </p:nvSpPr>
+        <p:spPr/>
+        <p:txBody>
+          <a:bodyPr/>
+          <a:lstStyle/>
+          <a:p>
+            <a:fld id="{F7021451-1387-4CA6-816F-3879F97B5CBC}" type="slidenum">
+              <a:rPr lang="en-US"/>
+              <a:t>59</a:t>
             </a:fld>
             <a:endParaRPr lang="en-US"/>
           </a:p>
@@ -4908,6 +5443,94 @@
 </p:notes>
 </file>
 
+<file path=ppt/notesSlides/notesSlide60.xml><?xml version="1.0" encoding="utf-8"?>
+<p:notes xmlns:a="http://schemas.openxmlformats.org/drawingml/2006/main" xmlns:r="http://schemas.openxmlformats.org/officeDocument/2006/relationships" xmlns:p="http://schemas.openxmlformats.org/presentationml/2006/main">
+  <p:cSld>
+    <p:spTree>
+      <p:nvGrpSpPr>
+        <p:cNvPr id="1" name=""/>
+        <p:cNvGrpSpPr/>
+        <p:nvPr/>
+      </p:nvGrpSpPr>
+      <p:grpSpPr>
+        <a:xfrm>
+          <a:off x="0" y="0"/>
+          <a:ext cx="0" cy="0"/>
+          <a:chOff x="0" y="0"/>
+          <a:chExt cx="0" cy="0"/>
+        </a:xfrm>
+      </p:grpSpPr>
+      <p:sp>
+        <p:nvSpPr>
+          <p:cNvPr id="2" name="Slide Image Placeholder 1"/>
+          <p:cNvSpPr>
+            <a:spLocks noGrp="1" noRot="1" noChangeAspect="1"/>
+          </p:cNvSpPr>
+          <p:nvPr>
+            <p:ph type="sldImg"/>
+          </p:nvPr>
+        </p:nvSpPr>
+        <p:spPr/>
+      </p:sp>
+      <p:sp>
+        <p:nvSpPr>
+          <p:cNvPr id="3" name="Notes Placeholder 2"/>
+          <p:cNvSpPr>
+            <a:spLocks noGrp="1"/>
+          </p:cNvSpPr>
+          <p:nvPr>
+            <p:ph type="body" idx="1"/>
+          </p:nvPr>
+        </p:nvSpPr>
+        <p:spPr/>
+        <p:txBody>
+          <a:bodyPr/>
+          <a:lstStyle/>
+          <a:p>
+            <a:r>
+              <a:rPr lang="en-US" dirty="0"/>
+              <a:t>These are the references and picture credits used to prepare this lesson.</a:t>
+            </a:r>
+            <a:endParaRPr lang="en-US" dirty="0"/>
+          </a:p>
+        </p:txBody>
+      </p:sp>
+      <p:sp>
+        <p:nvSpPr>
+          <p:cNvPr id="4" name="Slide Number Placeholder 3"/>
+          <p:cNvSpPr>
+            <a:spLocks noGrp="1"/>
+          </p:cNvSpPr>
+          <p:nvPr>
+            <p:ph type="sldNum" sz="quarter" idx="10"/>
+          </p:nvPr>
+        </p:nvSpPr>
+        <p:spPr/>
+        <p:txBody>
+          <a:bodyPr/>
+          <a:lstStyle/>
+          <a:p>
+            <a:fld id="{F7021451-1387-4CA6-816F-3879F97B5CBC}" type="slidenum">
+              <a:rPr lang="en-US"/>
+              <a:t>60</a:t>
+            </a:fld>
+            <a:endParaRPr lang="en-US"/>
+          </a:p>
+        </p:txBody>
+      </p:sp>
+    </p:spTree>
+    <p:extLst>
+      <p:ext uri="{BB962C8B-B14F-4D97-AF65-F5344CB8AC3E}">
+        <p14:creationId xmlns:p14="http://schemas.microsoft.com/office/powerpoint/2010/main" val="1024086991"/>
+      </p:ext>
+    </p:extLst>
+  </p:cSld>
+  <p:clrMapOvr>
+    <a:masterClrMapping/>
+  </p:clrMapOvr>
+</p:notes>
+</file>
+
 <file path=ppt/notesSlides/notesSlide7.xml><?xml version="1.0" encoding="utf-8"?>
 <p:notes xmlns:a="http://schemas.openxmlformats.org/drawingml/2006/main" xmlns:r="http://schemas.openxmlformats.org/officeDocument/2006/relationships" xmlns:p="http://schemas.openxmlformats.org/presentationml/2006/main">
   <p:cSld>
@@ -5042,7 +5665,7 @@
           <a:p>
             <a:r>
               <a:rPr lang="en-US" dirty="0"/>
-              <a:t>By the end of this lesson, you should be able to do three things. Number 1: calculate CBR, CDR and natural increase. Number 2: calculate doubling time and make a simple projection. Number 3: calculate net migration and interpret results.</a:t>
+              <a:t>By the end of this lesson, you should be able to do four things. Number 1: distinguish fecundity from fertility. Number 2: calculate the crude birth rate and the crude death rate. Number 3: calculate the rate of natural increase and the growth rate. Number 4: calculate the doubling time with the rule of 70.</a:t>
             </a:r>
             <a:endParaRPr lang="en-US" dirty="0"/>
           </a:p>
@@ -5130,7 +5753,7 @@
           <a:p>
             <a:r>
               <a:rPr lang="en-US" dirty="0"/>
-              <a:t>Let us first remember what you already know. Change = births − deaths + net migration. Rates are often given per 1,000 people. Keep this in mind, because we shall build on it today.</a:t>
+              <a:t>Let us first remember what you already know. Population change = (births − deaths) + (immigrants − emigrants). The crude birth rate is given per 1,000 people. Cameroon grows by about 2.6 % a year. Keep this in mind, because we shall build on it today.</a:t>
             </a:r>
             <a:endParaRPr lang="en-US" dirty="0"/>
           </a:p>
@@ -6510,7 +7133,7 @@
         <p:spPr>
           <a:xfrm>
             <a:off x="0" y="658368"/>
-            <a:ext cx="5120640" cy="5833872"/>
+            <a:ext cx="3840480" cy="5833872"/>
           </a:xfrm>
           <a:prstGeom prst="rect">
             <a:avLst/>
@@ -6525,8 +7148,8 @@
         </p:nvSpPr>
         <p:spPr>
           <a:xfrm>
-            <a:off x="5349240" y="1005840"/>
-            <a:ext cx="6522415" cy="731520"/>
+            <a:off x="4069080" y="1005840"/>
+            <a:ext cx="7802575" cy="731520"/>
           </a:xfrm>
           <a:prstGeom prst="rect">
             <a:avLst/>
@@ -6566,8 +7189,8 @@
         </p:nvSpPr>
         <p:spPr>
           <a:xfrm>
-            <a:off x="5349240" y="1783080"/>
-            <a:ext cx="6522415" cy="4663440"/>
+            <a:off x="4069080" y="1783080"/>
+            <a:ext cx="7802575" cy="4663440"/>
           </a:xfrm>
           <a:prstGeom prst="rect">
             <a:avLst/>
@@ -6594,7 +7217,27 @@
                 <a:ea typeface="Times New Roman" pitchFamily="34" charset="-122"/>
                 <a:cs typeface="Times New Roman" pitchFamily="34" charset="-120"/>
               </a:rPr>
-              <a:t>A region has 1,000,000 people. In one year there were 36,000 births and 9,000 deaths. The planning office asks the class to calculate the growth rate and when the population will double.</a:t>
+              <a:t>The town council of a city of 400,000 people recorded 16,000 births and 4,000 deaths last year.</a:t>
+            </a:r>
+            <a:endParaRPr lang="en-US" sz="4000" dirty="0"/>
+          </a:p>
+          <a:p>
+            <a:pPr algn="l" indent="0" marL="0">
+              <a:spcAft>
+                <a:spcPts val="800"/>
+              </a:spcAft>
+              <a:buNone/>
+            </a:pPr>
+            <a:r>
+              <a:rPr lang="en-US" sz="4000" dirty="0">
+                <a:solidFill>
+                  <a:srgbClr val="111111"/>
+                </a:solidFill>
+                <a:latin typeface="Times New Roman" pitchFamily="34" charset="0"/>
+                <a:ea typeface="Times New Roman" pitchFamily="34" charset="-122"/>
+                <a:cs typeface="Times New Roman" pitchFamily="34" charset="-120"/>
+              </a:rPr>
+              <a:t>The Mayor wants to know how many schools and health centres will be needed in ten or twenty years.</a:t>
             </a:r>
             <a:endParaRPr lang="en-US" sz="4000" dirty="0"/>
           </a:p>
@@ -6729,7 +7372,7 @@
         <p:spPr>
           <a:xfrm>
             <a:off x="0" y="658368"/>
-            <a:ext cx="5120640" cy="5833872"/>
+            <a:ext cx="3840480" cy="5833872"/>
           </a:xfrm>
           <a:prstGeom prst="rect">
             <a:avLst/>
@@ -6744,8 +7387,8 @@
         </p:nvSpPr>
         <p:spPr>
           <a:xfrm>
-            <a:off x="5349240" y="1005840"/>
-            <a:ext cx="6522415" cy="731520"/>
+            <a:off x="4069080" y="1005840"/>
+            <a:ext cx="7802575" cy="731520"/>
           </a:xfrm>
           <a:prstGeom prst="rect">
             <a:avLst/>
@@ -6771,7 +7414,7 @@
                 <a:ea typeface="Times New Roman" pitchFamily="34" charset="-122"/>
                 <a:cs typeface="Times New Roman" pitchFamily="34" charset="-120"/>
               </a:rPr>
-              <a:t>Situation: Question 1</a:t>
+              <a:t>Situation in Real Life (continued)</a:t>
             </a:r>
             <a:endParaRPr lang="en-US" sz="3600" dirty="0"/>
           </a:p>
@@ -6785,8 +7428,8 @@
         </p:nvSpPr>
         <p:spPr>
           <a:xfrm>
-            <a:off x="5349240" y="1783080"/>
-            <a:ext cx="6522415" cy="4663440"/>
+            <a:off x="4069080" y="1783080"/>
+            <a:ext cx="7802575" cy="4663440"/>
           </a:xfrm>
           <a:prstGeom prst="rect">
             <a:avLst/>
@@ -6813,7 +7456,27 @@
                 <a:ea typeface="Times New Roman" pitchFamily="34" charset="-122"/>
                 <a:cs typeface="Times New Roman" pitchFamily="34" charset="-120"/>
               </a:rPr>
-              <a:t>What is the problem in the situation?</a:t>
+              <a:t>His assistant has the figures but does not know what to do with them.</a:t>
+            </a:r>
+            <a:endParaRPr lang="en-US" sz="4000" dirty="0"/>
+          </a:p>
+          <a:p>
+            <a:pPr algn="l" indent="0" marL="0">
+              <a:spcAft>
+                <a:spcPts val="800"/>
+              </a:spcAft>
+              <a:buNone/>
+            </a:pPr>
+            <a:r>
+              <a:rPr lang="en-US" sz="4000" dirty="0">
+                <a:solidFill>
+                  <a:srgbClr val="111111"/>
+                </a:solidFill>
+                <a:latin typeface="Times New Roman" pitchFamily="34" charset="0"/>
+                <a:ea typeface="Times New Roman" pitchFamily="34" charset="-122"/>
+                <a:cs typeface="Times New Roman" pitchFamily="34" charset="-120"/>
+              </a:rPr>
+              <a:t>She asks: "How do we calculate the birth rate, the death rate, the growth rate and the time the population will take to double?"</a:t>
             </a:r>
             <a:endParaRPr lang="en-US" sz="4000" dirty="0"/>
           </a:p>
@@ -6990,7 +7653,7 @@
                 <a:ea typeface="Times New Roman" pitchFamily="34" charset="-122"/>
                 <a:cs typeface="Times New Roman" pitchFamily="34" charset="-120"/>
               </a:rPr>
-              <a:t>Answer</a:t>
+              <a:t>Situation: Question 1</a:t>
             </a:r>
             <a:endParaRPr lang="en-US" sz="3600" dirty="0"/>
           </a:p>
@@ -7032,7 +7695,7 @@
                 <a:ea typeface="Times New Roman" pitchFamily="34" charset="-122"/>
                 <a:cs typeface="Times New Roman" pitchFamily="34" charset="-120"/>
               </a:rPr>
-              <a:t>The class must calculate demographic indices.</a:t>
+              <a:t>What is the problem in the situation?</a:t>
             </a:r>
             <a:endParaRPr lang="en-US" sz="4000" dirty="0"/>
           </a:p>
@@ -7209,7 +7872,7 @@
                 <a:ea typeface="Times New Roman" pitchFamily="34" charset="-122"/>
                 <a:cs typeface="Times New Roman" pitchFamily="34" charset="-120"/>
               </a:rPr>
-              <a:t>Situation: Question 2</a:t>
+              <a:t>Answer</a:t>
             </a:r>
             <a:endParaRPr lang="en-US" sz="3600" dirty="0"/>
           </a:p>
@@ -7251,7 +7914,7 @@
                 <a:ea typeface="Times New Roman" pitchFamily="34" charset="-122"/>
                 <a:cs typeface="Times New Roman" pitchFamily="34" charset="-120"/>
               </a:rPr>
-              <a:t>What is the first index to calculate?</a:t>
+              <a:t>The assistant does not know how to calculate demographic indices.</a:t>
             </a:r>
             <a:endParaRPr lang="en-US" sz="4000" dirty="0"/>
           </a:p>
@@ -7428,7 +8091,7 @@
                 <a:ea typeface="Times New Roman" pitchFamily="34" charset="-122"/>
                 <a:cs typeface="Times New Roman" pitchFamily="34" charset="-120"/>
               </a:rPr>
-              <a:t>Answer</a:t>
+              <a:t>Situation: Question 2</a:t>
             </a:r>
             <a:endParaRPr lang="en-US" sz="3600" dirty="0"/>
           </a:p>
@@ -7470,7 +8133,7 @@
                 <a:ea typeface="Times New Roman" pitchFamily="34" charset="-122"/>
                 <a:cs typeface="Times New Roman" pitchFamily="34" charset="-120"/>
               </a:rPr>
-              <a:t>The crude birth rate.</a:t>
+              <a:t>Which data does she have?</a:t>
             </a:r>
             <a:endParaRPr lang="en-US" sz="4000" dirty="0"/>
           </a:p>
@@ -7647,7 +8310,7 @@
                 <a:ea typeface="Times New Roman" pitchFamily="34" charset="-122"/>
                 <a:cs typeface="Times New Roman" pitchFamily="34" charset="-120"/>
               </a:rPr>
-              <a:t>Situation: Question 3</a:t>
+              <a:t>Answer</a:t>
             </a:r>
             <a:endParaRPr lang="en-US" sz="3600" dirty="0"/>
           </a:p>
@@ -7689,7 +8352,7 @@
                 <a:ea typeface="Times New Roman" pitchFamily="34" charset="-122"/>
                 <a:cs typeface="Times New Roman" pitchFamily="34" charset="-120"/>
               </a:rPr>
-              <a:t>How can we find the doubling time?</a:t>
+              <a:t>The population (400,000), the births (16,000) and the deaths (4,000).</a:t>
             </a:r>
             <a:endParaRPr lang="en-US" sz="4000" dirty="0"/>
           </a:p>
@@ -7866,7 +8529,7 @@
                 <a:ea typeface="Times New Roman" pitchFamily="34" charset="-122"/>
                 <a:cs typeface="Times New Roman" pitchFamily="34" charset="-120"/>
               </a:rPr>
-              <a:t>Possible Answer</a:t>
+              <a:t>Situation: Question 3</a:t>
             </a:r>
             <a:endParaRPr lang="en-US" sz="3600" dirty="0"/>
           </a:p>
@@ -7908,7 +8571,7 @@
                 <a:ea typeface="Times New Roman" pitchFamily="34" charset="-122"/>
                 <a:cs typeface="Times New Roman" pitchFamily="34" charset="-120"/>
               </a:rPr>
-              <a:t>70 ÷ growth rate (%).</a:t>
+              <a:t>Why does the Mayor need the doubling time?</a:t>
             </a:r>
             <a:endParaRPr lang="en-US" sz="4000" dirty="0"/>
           </a:p>
@@ -8020,7 +8683,7 @@
                 <a:ea typeface="Calibri" pitchFamily="34" charset="-122"/>
                 <a:cs typeface="Calibri" pitchFamily="34" charset="-120"/>
               </a:rPr>
-              <a:t>ACTION TO TAKE</a:t>
+              <a:t>REAL-LIFE SITUATION</a:t>
             </a:r>
             <a:endParaRPr lang="en-US" sz="1400" dirty="0"/>
           </a:p>
@@ -8085,7 +8748,7 @@
                 <a:ea typeface="Times New Roman" pitchFamily="34" charset="-122"/>
                 <a:cs typeface="Times New Roman" pitchFamily="34" charset="-120"/>
               </a:rPr>
-              <a:t>Action to Take</a:t>
+              <a:t>Possible Answer</a:t>
             </a:r>
             <a:endParaRPr lang="en-US" sz="3600" dirty="0"/>
           </a:p>
@@ -8127,7 +8790,7 @@
                 <a:ea typeface="Times New Roman" pitchFamily="34" charset="-122"/>
                 <a:cs typeface="Times New Roman" pitchFamily="34" charset="-120"/>
               </a:rPr>
-              <a:t>Calculate demographic indices to describe population change.</a:t>
+              <a:t>To plan schools, health centres and housing for the future population.</a:t>
             </a:r>
             <a:endParaRPr lang="en-US" sz="4000" dirty="0"/>
           </a:p>
@@ -8239,7 +8902,7 @@
                 <a:ea typeface="Calibri" pitchFamily="34" charset="-122"/>
                 <a:cs typeface="Calibri" pitchFamily="34" charset="-120"/>
               </a:rPr>
-              <a:t>JUSTIFICATION</a:t>
+              <a:t>ACTION TO TAKE</a:t>
             </a:r>
             <a:endParaRPr lang="en-US" sz="1400" dirty="0"/>
           </a:p>
@@ -8304,7 +8967,7 @@
                 <a:ea typeface="Times New Roman" pitchFamily="34" charset="-122"/>
                 <a:cs typeface="Times New Roman" pitchFamily="34" charset="-120"/>
               </a:rPr>
-              <a:t>Justification of the Lesson</a:t>
+              <a:t>Action to Take</a:t>
             </a:r>
             <a:endParaRPr lang="en-US" sz="3600" dirty="0"/>
           </a:p>
@@ -8346,7 +9009,7 @@
                 <a:ea typeface="Times New Roman" pitchFamily="34" charset="-122"/>
                 <a:cs typeface="Times New Roman" pitchFamily="34" charset="-120"/>
               </a:rPr>
-              <a:t>This practical work helps us to use numbers to understand population change.</a:t>
+              <a:t>Show the formula, the working and the unit (‰, % or years) in every calculation.</a:t>
             </a:r>
             <a:endParaRPr lang="en-US" sz="4000" dirty="0"/>
           </a:p>
@@ -8458,54 +9121,15 @@
                 <a:ea typeface="Calibri" pitchFamily="34" charset="-122"/>
                 <a:cs typeface="Calibri" pitchFamily="34" charset="-120"/>
               </a:rPr>
-              <a:t>1. FORMULAS</a:t>
+              <a:t>JUSTIFICATION</a:t>
             </a:r>
             <a:endParaRPr lang="en-US" sz="1400" dirty="0"/>
-          </a:p>
-        </p:txBody>
-      </p:sp>
-      <p:sp>
-        <p:nvSpPr>
-          <p:cNvPr id="3" name="Text 1"/>
-          <p:cNvSpPr/>
-          <p:nvPr/>
-        </p:nvSpPr>
-        <p:spPr>
-          <a:xfrm>
-            <a:off x="457200" y="1005840"/>
-            <a:ext cx="11277295" cy="731520"/>
-          </a:xfrm>
-          <a:prstGeom prst="rect">
-            <a:avLst/>
-          </a:prstGeom>
-          <a:noFill/>
-          <a:ln/>
-        </p:spPr>
-        <p:txBody>
-          <a:bodyPr wrap="square" lIns="0" tIns="0" rIns="0" bIns="0" rtlCol="0" anchor="ctr"/>
-          <a:lstStyle/>
-          <a:p>
-            <a:pPr algn="ctr" indent="0" marL="0">
-              <a:buNone/>
-            </a:pPr>
-            <a:r>
-              <a:rPr lang="en-US" sz="3600" b="1" dirty="0">
-                <a:solidFill>
-                  <a:srgbClr val="990011"/>
-                </a:solidFill>
-                <a:latin typeface="Times New Roman" pitchFamily="34" charset="0"/>
-                <a:ea typeface="Times New Roman" pitchFamily="34" charset="-122"/>
-                <a:cs typeface="Times New Roman" pitchFamily="34" charset="-120"/>
-              </a:rPr>
-              <a:t>Activity 1</a:t>
-            </a:r>
-            <a:endParaRPr lang="en-US" sz="3600" dirty="0"/>
           </a:p>
         </p:txBody>
       </p:sp>
       <p:pic>
         <p:nvPicPr>
-          <p:cNvPr id="4" name="Image 0" descr="/home/claude/f4/img/v2/indices_big.png">    </p:cNvPr>
+          <p:cNvPr id="3" name="Image 0" descr="/home/claude/f4/img/minesec_sheet.png">    </p:cNvPr>
           <p:cNvPicPr>
             <a:picLocks noChangeAspect="1"/>
           </p:cNvPicPr>
@@ -8519,8 +9143,8 @@
         </p:blipFill>
         <p:spPr>
           <a:xfrm>
-            <a:off x="629930" y="1783080"/>
-            <a:ext cx="10931835" cy="4270248"/>
+            <a:off x="0" y="658368"/>
+            <a:ext cx="5120640" cy="5833872"/>
           </a:xfrm>
           <a:prstGeom prst="rect">
             <a:avLst/>
@@ -8529,14 +9153,14 @@
       </p:pic>
       <p:sp>
         <p:nvSpPr>
-          <p:cNvPr id="5" name="Text 2"/>
+          <p:cNvPr id="4" name="Text 1"/>
           <p:cNvSpPr/>
           <p:nvPr/>
         </p:nvSpPr>
         <p:spPr>
           <a:xfrm>
-            <a:off x="457200" y="6089904"/>
-            <a:ext cx="11277295" cy="347472"/>
+            <a:off x="5349240" y="1005840"/>
+            <a:ext cx="6522415" cy="731520"/>
           </a:xfrm>
           <a:prstGeom prst="rect">
             <a:avLst/>
@@ -8545,24 +9169,68 @@
           <a:ln/>
         </p:spPr>
         <p:txBody>
-          <a:bodyPr wrap="square" lIns="0" tIns="0" rIns="0" bIns="0" rtlCol="0" anchor="ctr"/>
+          <a:bodyPr wrap="square" lIns="0" tIns="0" rIns="0" bIns="0" rtlCol="0" anchor="ctr">
+            <a:normAutofit/>
+          </a:bodyPr>
           <a:lstStyle/>
           <a:p>
             <a:pPr algn="ctr" indent="0" marL="0">
               <a:buNone/>
             </a:pPr>
             <a:r>
-              <a:rPr lang="en-US" sz="1800" i="1" dirty="0">
-                <a:solidFill>
-                  <a:srgbClr val="555555"/>
+              <a:rPr lang="en-US" sz="3600" b="1" dirty="0">
+                <a:solidFill>
+                  <a:srgbClr val="990011"/>
                 </a:solidFill>
                 <a:latin typeface="Times New Roman" pitchFamily="34" charset="0"/>
                 <a:ea typeface="Times New Roman" pitchFamily="34" charset="-122"/>
                 <a:cs typeface="Times New Roman" pitchFamily="34" charset="-120"/>
               </a:rPr>
-              <a:t>The main demographic indices.</a:t>
-            </a:r>
-            <a:endParaRPr lang="en-US" sz="1800" dirty="0"/>
+              <a:t>Justification of the Lesson</a:t>
+            </a:r>
+            <a:endParaRPr lang="en-US" sz="3600" dirty="0"/>
+          </a:p>
+        </p:txBody>
+      </p:sp>
+      <p:sp>
+        <p:nvSpPr>
+          <p:cNvPr id="5" name="Text 2"/>
+          <p:cNvSpPr/>
+          <p:nvPr/>
+        </p:nvSpPr>
+        <p:spPr>
+          <a:xfrm>
+            <a:off x="5349240" y="1783080"/>
+            <a:ext cx="6522415" cy="4663440"/>
+          </a:xfrm>
+          <a:prstGeom prst="rect">
+            <a:avLst/>
+          </a:prstGeom>
+          <a:noFill/>
+          <a:ln/>
+        </p:spPr>
+        <p:txBody>
+          <a:bodyPr wrap="square" lIns="0" tIns="0" rIns="0" bIns="0" rtlCol="0" anchor="t"/>
+          <a:lstStyle/>
+          <a:p>
+            <a:pPr algn="l" indent="0" marL="0">
+              <a:spcAft>
+                <a:spcPts val="800"/>
+              </a:spcAft>
+              <a:buNone/>
+            </a:pPr>
+            <a:r>
+              <a:rPr lang="en-US" sz="4000" dirty="0">
+                <a:solidFill>
+                  <a:srgbClr val="111111"/>
+                </a:solidFill>
+                <a:latin typeface="Times New Roman" pitchFamily="34" charset="0"/>
+                <a:ea typeface="Times New Roman" pitchFamily="34" charset="-122"/>
+                <a:cs typeface="Times New Roman" pitchFamily="34" charset="-120"/>
+              </a:rPr>
+              <a:t>This practical work gives us the numerical tools used by planners and in examinations to measure population change.</a:t>
+            </a:r>
+            <a:endParaRPr lang="en-US" sz="4000" dirty="0"/>
           </a:p>
         </p:txBody>
       </p:sp>
@@ -9267,15 +9935,54 @@
                 <a:ea typeface="Calibri" pitchFamily="34" charset="-122"/>
                 <a:cs typeface="Calibri" pitchFamily="34" charset="-120"/>
               </a:rPr>
-              <a:t>1. FORMULAS</a:t>
+              <a:t>1. FERTILITY</a:t>
             </a:r>
             <a:endParaRPr lang="en-US" sz="1400" dirty="0"/>
+          </a:p>
+        </p:txBody>
+      </p:sp>
+      <p:sp>
+        <p:nvSpPr>
+          <p:cNvPr id="3" name="Text 1"/>
+          <p:cNvSpPr/>
+          <p:nvPr/>
+        </p:nvSpPr>
+        <p:spPr>
+          <a:xfrm>
+            <a:off x="457200" y="1005840"/>
+            <a:ext cx="11277295" cy="731520"/>
+          </a:xfrm>
+          <a:prstGeom prst="rect">
+            <a:avLst/>
+          </a:prstGeom>
+          <a:noFill/>
+          <a:ln/>
+        </p:spPr>
+        <p:txBody>
+          <a:bodyPr wrap="square" lIns="0" tIns="0" rIns="0" bIns="0" rtlCol="0" anchor="ctr"/>
+          <a:lstStyle/>
+          <a:p>
+            <a:pPr algn="ctr" indent="0" marL="0">
+              <a:buNone/>
+            </a:pPr>
+            <a:r>
+              <a:rPr lang="en-US" sz="3600" b="1" dirty="0">
+                <a:solidFill>
+                  <a:srgbClr val="990011"/>
+                </a:solidFill>
+                <a:latin typeface="Times New Roman" pitchFamily="34" charset="0"/>
+                <a:ea typeface="Times New Roman" pitchFamily="34" charset="-122"/>
+                <a:cs typeface="Times New Roman" pitchFamily="34" charset="-120"/>
+              </a:rPr>
+              <a:t>Activity 1</a:t>
+            </a:r>
+            <a:endParaRPr lang="en-US" sz="3600" dirty="0"/>
           </a:p>
         </p:txBody>
       </p:sp>
       <p:pic>
         <p:nvPicPr>
-          <p:cNvPr id="3" name="Image 0" descr="/home/claude/f4/img/minesec_sheet.png">    </p:cNvPr>
+          <p:cNvPr id="4" name="Image 0" descr="/home/claude/f4/img/v2/indices_big.png">    </p:cNvPr>
           <p:cNvPicPr>
             <a:picLocks noChangeAspect="1"/>
           </p:cNvPicPr>
@@ -9289,8 +9996,8 @@
         </p:blipFill>
         <p:spPr>
           <a:xfrm>
-            <a:off x="0" y="658368"/>
-            <a:ext cx="5120640" cy="5833872"/>
+            <a:off x="629930" y="1783080"/>
+            <a:ext cx="10931835" cy="4270248"/>
           </a:xfrm>
           <a:prstGeom prst="rect">
             <a:avLst/>
@@ -9299,14 +10006,14 @@
       </p:pic>
       <p:sp>
         <p:nvSpPr>
-          <p:cNvPr id="4" name="Text 1"/>
+          <p:cNvPr id="5" name="Text 2"/>
           <p:cNvSpPr/>
           <p:nvPr/>
         </p:nvSpPr>
         <p:spPr>
           <a:xfrm>
-            <a:off x="5349240" y="1005840"/>
-            <a:ext cx="6522415" cy="731520"/>
+            <a:off x="457200" y="6089904"/>
+            <a:ext cx="11277295" cy="347472"/>
           </a:xfrm>
           <a:prstGeom prst="rect">
             <a:avLst/>
@@ -9315,68 +10022,24 @@
           <a:ln/>
         </p:spPr>
         <p:txBody>
-          <a:bodyPr wrap="square" lIns="0" tIns="0" rIns="0" bIns="0" rtlCol="0" anchor="ctr">
-            <a:normAutofit/>
-          </a:bodyPr>
+          <a:bodyPr wrap="square" lIns="0" tIns="0" rIns="0" bIns="0" rtlCol="0" anchor="ctr"/>
           <a:lstStyle/>
           <a:p>
             <a:pPr algn="ctr" indent="0" marL="0">
               <a:buNone/>
             </a:pPr>
             <a:r>
-              <a:rPr lang="en-US" sz="3600" b="1" dirty="0">
-                <a:solidFill>
-                  <a:srgbClr val="990011"/>
+              <a:rPr lang="en-US" sz="1800" i="1" dirty="0">
+                <a:solidFill>
+                  <a:srgbClr val="555555"/>
                 </a:solidFill>
                 <a:latin typeface="Times New Roman" pitchFamily="34" charset="0"/>
                 <a:ea typeface="Times New Roman" pitchFamily="34" charset="-122"/>
                 <a:cs typeface="Times New Roman" pitchFamily="34" charset="-120"/>
               </a:rPr>
-              <a:t>Activity 1: Question</a:t>
-            </a:r>
-            <a:endParaRPr lang="en-US" sz="3600" dirty="0"/>
-          </a:p>
-        </p:txBody>
-      </p:sp>
-      <p:sp>
-        <p:nvSpPr>
-          <p:cNvPr id="5" name="Text 2"/>
-          <p:cNvSpPr/>
-          <p:nvPr/>
-        </p:nvSpPr>
-        <p:spPr>
-          <a:xfrm>
-            <a:off x="5349240" y="1783080"/>
-            <a:ext cx="6522415" cy="4663440"/>
-          </a:xfrm>
-          <a:prstGeom prst="rect">
-            <a:avLst/>
-          </a:prstGeom>
-          <a:noFill/>
-          <a:ln/>
-        </p:spPr>
-        <p:txBody>
-          <a:bodyPr wrap="square" lIns="0" tIns="0" rIns="0" bIns="0" rtlCol="0" anchor="t"/>
-          <a:lstStyle/>
-          <a:p>
-            <a:pPr algn="l" indent="0" marL="0">
-              <a:spcAft>
-                <a:spcPts val="800"/>
-              </a:spcAft>
-              <a:buNone/>
-            </a:pPr>
-            <a:r>
-              <a:rPr lang="en-US" sz="4000" dirty="0">
-                <a:solidFill>
-                  <a:srgbClr val="111111"/>
-                </a:solidFill>
-                <a:latin typeface="Times New Roman" pitchFamily="34" charset="0"/>
-                <a:ea typeface="Times New Roman" pitchFamily="34" charset="-122"/>
-                <a:cs typeface="Times New Roman" pitchFamily="34" charset="-120"/>
-              </a:rPr>
-              <a:t>Why are birth and death rates given per 1,000?</a:t>
-            </a:r>
-            <a:endParaRPr lang="en-US" sz="4000" dirty="0"/>
+              <a:t>The main formulas.</a:t>
+            </a:r>
+            <a:endParaRPr lang="en-US" sz="1800" dirty="0"/>
           </a:p>
         </p:txBody>
       </p:sp>
@@ -9486,7 +10149,7 @@
                 <a:ea typeface="Calibri" pitchFamily="34" charset="-122"/>
                 <a:cs typeface="Calibri" pitchFamily="34" charset="-120"/>
               </a:rPr>
-              <a:t>1. FORMULAS</a:t>
+              <a:t>1. FERTILITY</a:t>
             </a:r>
             <a:endParaRPr lang="en-US" sz="1400" dirty="0"/>
           </a:p>
@@ -9551,7 +10214,7 @@
                 <a:ea typeface="Times New Roman" pitchFamily="34" charset="-122"/>
                 <a:cs typeface="Times New Roman" pitchFamily="34" charset="-120"/>
               </a:rPr>
-              <a:t>Activity 1: Answer</a:t>
+              <a:t>Activity 1: Question</a:t>
             </a:r>
             <a:endParaRPr lang="en-US" sz="3600" dirty="0"/>
           </a:p>
@@ -9593,7 +10256,7 @@
                 <a:ea typeface="Times New Roman" pitchFamily="34" charset="-122"/>
                 <a:cs typeface="Times New Roman" pitchFamily="34" charset="-120"/>
               </a:rPr>
-              <a:t>To compare places with different population sizes.</a:t>
+              <a:t>Our class of 50 is a village where 3 babies are born in a year. What is its CBR?</a:t>
             </a:r>
             <a:endParaRPr lang="en-US" sz="4000" dirty="0"/>
           </a:p>
@@ -9705,54 +10368,15 @@
                 <a:ea typeface="Calibri" pitchFamily="34" charset="-122"/>
                 <a:cs typeface="Calibri" pitchFamily="34" charset="-120"/>
               </a:rPr>
-              <a:t>2. CALCULATIONS</a:t>
+              <a:t>1. FERTILITY</a:t>
             </a:r>
             <a:endParaRPr lang="en-US" sz="1400" dirty="0"/>
-          </a:p>
-        </p:txBody>
-      </p:sp>
-      <p:sp>
-        <p:nvSpPr>
-          <p:cNvPr id="3" name="Text 1"/>
-          <p:cNvSpPr/>
-          <p:nvPr/>
-        </p:nvSpPr>
-        <p:spPr>
-          <a:xfrm>
-            <a:off x="457200" y="1005840"/>
-            <a:ext cx="11277295" cy="731520"/>
-          </a:xfrm>
-          <a:prstGeom prst="rect">
-            <a:avLst/>
-          </a:prstGeom>
-          <a:noFill/>
-          <a:ln/>
-        </p:spPr>
-        <p:txBody>
-          <a:bodyPr wrap="square" lIns="0" tIns="0" rIns="0" bIns="0" rtlCol="0" anchor="ctr"/>
-          <a:lstStyle/>
-          <a:p>
-            <a:pPr algn="ctr" indent="0" marL="0">
-              <a:buNone/>
-            </a:pPr>
-            <a:r>
-              <a:rPr lang="en-US" sz="3600" b="1" dirty="0">
-                <a:solidFill>
-                  <a:srgbClr val="990011"/>
-                </a:solidFill>
-                <a:latin typeface="Times New Roman" pitchFamily="34" charset="0"/>
-                <a:ea typeface="Times New Roman" pitchFamily="34" charset="-122"/>
-                <a:cs typeface="Times New Roman" pitchFamily="34" charset="-120"/>
-              </a:rPr>
-              <a:t>Activity 2</a:t>
-            </a:r>
-            <a:endParaRPr lang="en-US" sz="3600" dirty="0"/>
           </a:p>
         </p:txBody>
       </p:sp>
       <p:pic>
         <p:nvPicPr>
-          <p:cNvPr id="4" name="Image 0" descr="/home/claude/f4/img/v2/pw_indices_big.png">    </p:cNvPr>
+          <p:cNvPr id="3" name="Image 0" descr="/home/claude/f4/img/minesec_sheet.png">    </p:cNvPr>
           <p:cNvPicPr>
             <a:picLocks noChangeAspect="1"/>
           </p:cNvPicPr>
@@ -9766,8 +10390,8 @@
         </p:blipFill>
         <p:spPr>
           <a:xfrm>
-            <a:off x="629930" y="1783080"/>
-            <a:ext cx="10931835" cy="4270248"/>
+            <a:off x="0" y="658368"/>
+            <a:ext cx="5120640" cy="5833872"/>
           </a:xfrm>
           <a:prstGeom prst="rect">
             <a:avLst/>
@@ -9776,14 +10400,14 @@
       </p:pic>
       <p:sp>
         <p:nvSpPr>
-          <p:cNvPr id="5" name="Text 2"/>
+          <p:cNvPr id="4" name="Text 1"/>
           <p:cNvSpPr/>
           <p:nvPr/>
         </p:nvSpPr>
         <p:spPr>
           <a:xfrm>
-            <a:off x="457200" y="6089904"/>
-            <a:ext cx="11277295" cy="347472"/>
+            <a:off x="5349240" y="1005840"/>
+            <a:ext cx="6522415" cy="731520"/>
           </a:xfrm>
           <a:prstGeom prst="rect">
             <a:avLst/>
@@ -9792,24 +10416,68 @@
           <a:ln/>
         </p:spPr>
         <p:txBody>
-          <a:bodyPr wrap="square" lIns="0" tIns="0" rIns="0" bIns="0" rtlCol="0" anchor="ctr"/>
+          <a:bodyPr wrap="square" lIns="0" tIns="0" rIns="0" bIns="0" rtlCol="0" anchor="ctr">
+            <a:normAutofit/>
+          </a:bodyPr>
           <a:lstStyle/>
           <a:p>
             <a:pPr algn="ctr" indent="0" marL="0">
               <a:buNone/>
             </a:pPr>
             <a:r>
-              <a:rPr lang="en-US" sz="1800" i="1" dirty="0">
-                <a:solidFill>
-                  <a:srgbClr val="555555"/>
+              <a:rPr lang="en-US" sz="3600" b="1" dirty="0">
+                <a:solidFill>
+                  <a:srgbClr val="990011"/>
                 </a:solidFill>
                 <a:latin typeface="Times New Roman" pitchFamily="34" charset="0"/>
                 <a:ea typeface="Times New Roman" pitchFamily="34" charset="-122"/>
                 <a:cs typeface="Times New Roman" pitchFamily="34" charset="-120"/>
               </a:rPr>
-              <a:t>Worked example.</a:t>
-            </a:r>
-            <a:endParaRPr lang="en-US" sz="1800" dirty="0"/>
+              <a:t>Activity 1: Answer</a:t>
+            </a:r>
+            <a:endParaRPr lang="en-US" sz="3600" dirty="0"/>
+          </a:p>
+        </p:txBody>
+      </p:sp>
+      <p:sp>
+        <p:nvSpPr>
+          <p:cNvPr id="5" name="Text 2"/>
+          <p:cNvSpPr/>
+          <p:nvPr/>
+        </p:nvSpPr>
+        <p:spPr>
+          <a:xfrm>
+            <a:off x="5349240" y="1783080"/>
+            <a:ext cx="6522415" cy="4663440"/>
+          </a:xfrm>
+          <a:prstGeom prst="rect">
+            <a:avLst/>
+          </a:prstGeom>
+          <a:noFill/>
+          <a:ln/>
+        </p:spPr>
+        <p:txBody>
+          <a:bodyPr wrap="square" lIns="0" tIns="0" rIns="0" bIns="0" rtlCol="0" anchor="t"/>
+          <a:lstStyle/>
+          <a:p>
+            <a:pPr algn="l" indent="0" marL="0">
+              <a:spcAft>
+                <a:spcPts val="800"/>
+              </a:spcAft>
+              <a:buNone/>
+            </a:pPr>
+            <a:r>
+              <a:rPr lang="en-US" sz="4000" dirty="0">
+                <a:solidFill>
+                  <a:srgbClr val="111111"/>
+                </a:solidFill>
+                <a:latin typeface="Times New Roman" pitchFamily="34" charset="0"/>
+                <a:ea typeface="Times New Roman" pitchFamily="34" charset="-122"/>
+                <a:cs typeface="Times New Roman" pitchFamily="34" charset="-120"/>
+              </a:rPr>
+              <a:t>3 ÷ 50 × 1,000 = 60 per 1,000.</a:t>
+            </a:r>
+            <a:endParaRPr lang="en-US" sz="4000" dirty="0"/>
           </a:p>
         </p:txBody>
       </p:sp>
@@ -9919,15 +10587,54 @@
                 <a:ea typeface="Calibri" pitchFamily="34" charset="-122"/>
                 <a:cs typeface="Calibri" pitchFamily="34" charset="-120"/>
               </a:rPr>
-              <a:t>2. CALCULATIONS</a:t>
+              <a:t>2. MORTALITY</a:t>
             </a:r>
             <a:endParaRPr lang="en-US" sz="1400" dirty="0"/>
+          </a:p>
+        </p:txBody>
+      </p:sp>
+      <p:sp>
+        <p:nvSpPr>
+          <p:cNvPr id="3" name="Text 1"/>
+          <p:cNvSpPr/>
+          <p:nvPr/>
+        </p:nvSpPr>
+        <p:spPr>
+          <a:xfrm>
+            <a:off x="457200" y="1005840"/>
+            <a:ext cx="11277295" cy="731520"/>
+          </a:xfrm>
+          <a:prstGeom prst="rect">
+            <a:avLst/>
+          </a:prstGeom>
+          <a:noFill/>
+          <a:ln/>
+        </p:spPr>
+        <p:txBody>
+          <a:bodyPr wrap="square" lIns="0" tIns="0" rIns="0" bIns="0" rtlCol="0" anchor="ctr"/>
+          <a:lstStyle/>
+          <a:p>
+            <a:pPr algn="ctr" indent="0" marL="0">
+              <a:buNone/>
+            </a:pPr>
+            <a:r>
+              <a:rPr lang="en-US" sz="3600" b="1" dirty="0">
+                <a:solidFill>
+                  <a:srgbClr val="990011"/>
+                </a:solidFill>
+                <a:latin typeface="Times New Roman" pitchFamily="34" charset="0"/>
+                <a:ea typeface="Times New Roman" pitchFamily="34" charset="-122"/>
+                <a:cs typeface="Times New Roman" pitchFamily="34" charset="-120"/>
+              </a:rPr>
+              <a:t>Activity 2</a:t>
+            </a:r>
+            <a:endParaRPr lang="en-US" sz="3600" dirty="0"/>
           </a:p>
         </p:txBody>
       </p:sp>
       <p:pic>
         <p:nvPicPr>
-          <p:cNvPr id="3" name="Image 0" descr="/home/claude/f4/img/minesec_sheet.png">    </p:cNvPr>
+          <p:cNvPr id="4" name="Image 0" descr="/home/claude/f4/img/v2/pop2_garoua_calc.png">    </p:cNvPr>
           <p:cNvPicPr>
             <a:picLocks noChangeAspect="1"/>
           </p:cNvPicPr>
@@ -9941,8 +10648,8 @@
         </p:blipFill>
         <p:spPr>
           <a:xfrm>
-            <a:off x="0" y="658368"/>
-            <a:ext cx="5120640" cy="5833872"/>
+            <a:off x="629930" y="1783080"/>
+            <a:ext cx="10931835" cy="4270248"/>
           </a:xfrm>
           <a:prstGeom prst="rect">
             <a:avLst/>
@@ -9951,14 +10658,14 @@
       </p:pic>
       <p:sp>
         <p:nvSpPr>
-          <p:cNvPr id="4" name="Text 1"/>
+          <p:cNvPr id="5" name="Text 2"/>
           <p:cNvSpPr/>
           <p:nvPr/>
         </p:nvSpPr>
         <p:spPr>
           <a:xfrm>
-            <a:off x="5349240" y="1005840"/>
-            <a:ext cx="6522415" cy="731520"/>
+            <a:off x="457200" y="6089904"/>
+            <a:ext cx="11277295" cy="347472"/>
           </a:xfrm>
           <a:prstGeom prst="rect">
             <a:avLst/>
@@ -9967,68 +10674,24 @@
           <a:ln/>
         </p:spPr>
         <p:txBody>
-          <a:bodyPr wrap="square" lIns="0" tIns="0" rIns="0" bIns="0" rtlCol="0" anchor="ctr">
-            <a:normAutofit/>
-          </a:bodyPr>
+          <a:bodyPr wrap="square" lIns="0" tIns="0" rIns="0" bIns="0" rtlCol="0" anchor="ctr"/>
           <a:lstStyle/>
           <a:p>
             <a:pPr algn="ctr" indent="0" marL="0">
               <a:buNone/>
             </a:pPr>
             <a:r>
-              <a:rPr lang="en-US" sz="3600" b="1" dirty="0">
-                <a:solidFill>
-                  <a:srgbClr val="990011"/>
+              <a:rPr lang="en-US" sz="1800" i="1" dirty="0">
+                <a:solidFill>
+                  <a:srgbClr val="555555"/>
                 </a:solidFill>
                 <a:latin typeface="Times New Roman" pitchFamily="34" charset="0"/>
                 <a:ea typeface="Times New Roman" pitchFamily="34" charset="-122"/>
                 <a:cs typeface="Times New Roman" pitchFamily="34" charset="-120"/>
               </a:rPr>
-              <a:t>Activity 2: Question</a:t>
-            </a:r>
-            <a:endParaRPr lang="en-US" sz="3600" dirty="0"/>
-          </a:p>
-        </p:txBody>
-      </p:sp>
-      <p:sp>
-        <p:nvSpPr>
-          <p:cNvPr id="5" name="Text 2"/>
-          <p:cNvSpPr/>
-          <p:nvPr/>
-        </p:nvSpPr>
-        <p:spPr>
-          <a:xfrm>
-            <a:off x="5349240" y="1783080"/>
-            <a:ext cx="6522415" cy="4663440"/>
-          </a:xfrm>
-          <a:prstGeom prst="rect">
-            <a:avLst/>
-          </a:prstGeom>
-          <a:noFill/>
-          <a:ln/>
-        </p:spPr>
-        <p:txBody>
-          <a:bodyPr wrap="square" lIns="0" tIns="0" rIns="0" bIns="0" rtlCol="0" anchor="t"/>
-          <a:lstStyle/>
-          <a:p>
-            <a:pPr algn="l" indent="0" marL="0">
-              <a:spcAft>
-                <a:spcPts val="800"/>
-              </a:spcAft>
-              <a:buNone/>
-            </a:pPr>
-            <a:r>
-              <a:rPr lang="en-US" sz="4000" dirty="0">
-                <a:solidFill>
-                  <a:srgbClr val="111111"/>
-                </a:solidFill>
-                <a:latin typeface="Times New Roman" pitchFamily="34" charset="0"/>
-                <a:ea typeface="Times New Roman" pitchFamily="34" charset="-122"/>
-                <a:cs typeface="Times New Roman" pitchFamily="34" charset="-120"/>
-              </a:rPr>
-              <a:t>Calculate the natural increase in percent.</a:t>
-            </a:r>
-            <a:endParaRPr lang="en-US" sz="4000" dirty="0"/>
+              <a:t>A worked example.</a:t>
+            </a:r>
+            <a:endParaRPr lang="en-US" sz="1800" dirty="0"/>
           </a:p>
         </p:txBody>
       </p:sp>
@@ -10138,7 +10801,7 @@
                 <a:ea typeface="Calibri" pitchFamily="34" charset="-122"/>
                 <a:cs typeface="Calibri" pitchFamily="34" charset="-120"/>
               </a:rPr>
-              <a:t>2. CALCULATIONS</a:t>
+              <a:t>2. MORTALITY</a:t>
             </a:r>
             <a:endParaRPr lang="en-US" sz="1400" dirty="0"/>
           </a:p>
@@ -10203,7 +10866,7 @@
                 <a:ea typeface="Times New Roman" pitchFamily="34" charset="-122"/>
                 <a:cs typeface="Times New Roman" pitchFamily="34" charset="-120"/>
               </a:rPr>
-              <a:t>Activity 2: Answer</a:t>
+              <a:t>Activity 2: Question</a:t>
             </a:r>
             <a:endParaRPr lang="en-US" sz="3600" dirty="0"/>
           </a:p>
@@ -10245,7 +10908,7 @@
                 <a:ea typeface="Times New Roman" pitchFamily="34" charset="-122"/>
                 <a:cs typeface="Times New Roman" pitchFamily="34" charset="-120"/>
               </a:rPr>
-              <a:t>(36 − 9) ÷ 10 = 2.7 %.</a:t>
+              <a:t>What is the CDR of the town (4,000 deaths, 400,000 people)?</a:t>
             </a:r>
             <a:endParaRPr lang="en-US" sz="4000" dirty="0"/>
           </a:p>
@@ -10357,54 +11020,15 @@
                 <a:ea typeface="Calibri" pitchFamily="34" charset="-122"/>
                 <a:cs typeface="Calibri" pitchFamily="34" charset="-120"/>
               </a:rPr>
-              <a:t>3. POPULATION PROJECTIONS AND DOUBLING TIME</a:t>
+              <a:t>2. MORTALITY</a:t>
             </a:r>
             <a:endParaRPr lang="en-US" sz="1400" dirty="0"/>
-          </a:p>
-        </p:txBody>
-      </p:sp>
-      <p:sp>
-        <p:nvSpPr>
-          <p:cNvPr id="3" name="Text 1"/>
-          <p:cNvSpPr/>
-          <p:nvPr/>
-        </p:nvSpPr>
-        <p:spPr>
-          <a:xfrm>
-            <a:off x="457200" y="1005840"/>
-            <a:ext cx="11277295" cy="731520"/>
-          </a:xfrm>
-          <a:prstGeom prst="rect">
-            <a:avLst/>
-          </a:prstGeom>
-          <a:noFill/>
-          <a:ln/>
-        </p:spPr>
-        <p:txBody>
-          <a:bodyPr wrap="square" lIns="0" tIns="0" rIns="0" bIns="0" rtlCol="0" anchor="ctr"/>
-          <a:lstStyle/>
-          <a:p>
-            <a:pPr algn="ctr" indent="0" marL="0">
-              <a:buNone/>
-            </a:pPr>
-            <a:r>
-              <a:rPr lang="en-US" sz="3600" b="1" dirty="0">
-                <a:solidFill>
-                  <a:srgbClr val="990011"/>
-                </a:solidFill>
-                <a:latin typeface="Times New Roman" pitchFamily="34" charset="0"/>
-                <a:ea typeface="Times New Roman" pitchFamily="34" charset="-122"/>
-                <a:cs typeface="Times New Roman" pitchFamily="34" charset="-120"/>
-              </a:rPr>
-              <a:t>Activity 3</a:t>
-            </a:r>
-            <a:endParaRPr lang="en-US" sz="3600" dirty="0"/>
           </a:p>
         </p:txBody>
       </p:sp>
       <p:pic>
         <p:nvPicPr>
-          <p:cNvPr id="4" name="Image 0" descr="/home/claude/f4/img/v2/projection_big.png">    </p:cNvPr>
+          <p:cNvPr id="3" name="Image 0" descr="/home/claude/f4/img/minesec_sheet.png">    </p:cNvPr>
           <p:cNvPicPr>
             <a:picLocks noChangeAspect="1"/>
           </p:cNvPicPr>
@@ -10418,8 +11042,8 @@
         </p:blipFill>
         <p:spPr>
           <a:xfrm>
-            <a:off x="1215564" y="1783080"/>
-            <a:ext cx="9760567" cy="4270248"/>
+            <a:off x="0" y="658368"/>
+            <a:ext cx="5120640" cy="5833872"/>
           </a:xfrm>
           <a:prstGeom prst="rect">
             <a:avLst/>
@@ -10428,14 +11052,14 @@
       </p:pic>
       <p:sp>
         <p:nvSpPr>
-          <p:cNvPr id="5" name="Text 2"/>
+          <p:cNvPr id="4" name="Text 1"/>
           <p:cNvSpPr/>
           <p:nvPr/>
         </p:nvSpPr>
         <p:spPr>
           <a:xfrm>
-            <a:off x="457200" y="6089904"/>
-            <a:ext cx="11277295" cy="347472"/>
+            <a:off x="5349240" y="1005840"/>
+            <a:ext cx="6522415" cy="731520"/>
           </a:xfrm>
           <a:prstGeom prst="rect">
             <a:avLst/>
@@ -10444,24 +11068,68 @@
           <a:ln/>
         </p:spPr>
         <p:txBody>
-          <a:bodyPr wrap="square" lIns="0" tIns="0" rIns="0" bIns="0" rtlCol="0" anchor="ctr"/>
+          <a:bodyPr wrap="square" lIns="0" tIns="0" rIns="0" bIns="0" rtlCol="0" anchor="ctr">
+            <a:normAutofit/>
+          </a:bodyPr>
           <a:lstStyle/>
           <a:p>
             <a:pPr algn="ctr" indent="0" marL="0">
               <a:buNone/>
             </a:pPr>
             <a:r>
-              <a:rPr lang="en-US" sz="1800" i="1" dirty="0">
-                <a:solidFill>
-                  <a:srgbClr val="555555"/>
+              <a:rPr lang="en-US" sz="3600" b="1" dirty="0">
+                <a:solidFill>
+                  <a:srgbClr val="990011"/>
                 </a:solidFill>
                 <a:latin typeface="Times New Roman" pitchFamily="34" charset="0"/>
                 <a:ea typeface="Times New Roman" pitchFamily="34" charset="-122"/>
                 <a:cs typeface="Times New Roman" pitchFamily="34" charset="-120"/>
               </a:rPr>
-              <a:t>A projection at 2.7 % per year.</a:t>
-            </a:r>
-            <a:endParaRPr lang="en-US" sz="1800" dirty="0"/>
+              <a:t>Activity 2: Answer</a:t>
+            </a:r>
+            <a:endParaRPr lang="en-US" sz="3600" dirty="0"/>
+          </a:p>
+        </p:txBody>
+      </p:sp>
+      <p:sp>
+        <p:nvSpPr>
+          <p:cNvPr id="5" name="Text 2"/>
+          <p:cNvSpPr/>
+          <p:nvPr/>
+        </p:nvSpPr>
+        <p:spPr>
+          <a:xfrm>
+            <a:off x="5349240" y="1783080"/>
+            <a:ext cx="6522415" cy="4663440"/>
+          </a:xfrm>
+          <a:prstGeom prst="rect">
+            <a:avLst/>
+          </a:prstGeom>
+          <a:noFill/>
+          <a:ln/>
+        </p:spPr>
+        <p:txBody>
+          <a:bodyPr wrap="square" lIns="0" tIns="0" rIns="0" bIns="0" rtlCol="0" anchor="t"/>
+          <a:lstStyle/>
+          <a:p>
+            <a:pPr algn="l" indent="0" marL="0">
+              <a:spcAft>
+                <a:spcPts val="800"/>
+              </a:spcAft>
+              <a:buNone/>
+            </a:pPr>
+            <a:r>
+              <a:rPr lang="en-US" sz="4000" dirty="0">
+                <a:solidFill>
+                  <a:srgbClr val="111111"/>
+                </a:solidFill>
+                <a:latin typeface="Times New Roman" pitchFamily="34" charset="0"/>
+                <a:ea typeface="Times New Roman" pitchFamily="34" charset="-122"/>
+                <a:cs typeface="Times New Roman" pitchFamily="34" charset="-120"/>
+              </a:rPr>
+              <a:t>4,000 ÷ 400,000 × 1,000 = 10 per 1,000.</a:t>
+            </a:r>
+            <a:endParaRPr lang="en-US" sz="4000" dirty="0"/>
           </a:p>
         </p:txBody>
       </p:sp>
@@ -10571,15 +11239,54 @@
                 <a:ea typeface="Calibri" pitchFamily="34" charset="-122"/>
                 <a:cs typeface="Calibri" pitchFamily="34" charset="-120"/>
               </a:rPr>
-              <a:t>3. POPULATION PROJECTIONS AND DOUBLING TIME</a:t>
+              <a:t>3. NATURAL INCREASE</a:t>
             </a:r>
             <a:endParaRPr lang="en-US" sz="1400" dirty="0"/>
+          </a:p>
+        </p:txBody>
+      </p:sp>
+      <p:sp>
+        <p:nvSpPr>
+          <p:cNvPr id="3" name="Text 1"/>
+          <p:cNvSpPr/>
+          <p:nvPr/>
+        </p:nvSpPr>
+        <p:spPr>
+          <a:xfrm>
+            <a:off x="457200" y="1005840"/>
+            <a:ext cx="11277295" cy="731520"/>
+          </a:xfrm>
+          <a:prstGeom prst="rect">
+            <a:avLst/>
+          </a:prstGeom>
+          <a:noFill/>
+          <a:ln/>
+        </p:spPr>
+        <p:txBody>
+          <a:bodyPr wrap="square" lIns="0" tIns="0" rIns="0" bIns="0" rtlCol="0" anchor="ctr"/>
+          <a:lstStyle/>
+          <a:p>
+            <a:pPr algn="ctr" indent="0" marL="0">
+              <a:buNone/>
+            </a:pPr>
+            <a:r>
+              <a:rPr lang="en-US" sz="3600" b="1" dirty="0">
+                <a:solidFill>
+                  <a:srgbClr val="990011"/>
+                </a:solidFill>
+                <a:latin typeface="Times New Roman" pitchFamily="34" charset="0"/>
+                <a:ea typeface="Times New Roman" pitchFamily="34" charset="-122"/>
+                <a:cs typeface="Times New Roman" pitchFamily="34" charset="-120"/>
+              </a:rPr>
+              <a:t>Activity 3</a:t>
+            </a:r>
+            <a:endParaRPr lang="en-US" sz="3600" dirty="0"/>
           </a:p>
         </p:txBody>
       </p:sp>
       <p:pic>
         <p:nvPicPr>
-          <p:cNvPr id="3" name="Image 0" descr="/home/claude/f4/img/minesec_sheet.png">    </p:cNvPr>
+          <p:cNvPr id="4" name="Image 0" descr="/home/claude/f4/img/v2/pw_indices_big.png">    </p:cNvPr>
           <p:cNvPicPr>
             <a:picLocks noChangeAspect="1"/>
           </p:cNvPicPr>
@@ -10593,8 +11300,8 @@
         </p:blipFill>
         <p:spPr>
           <a:xfrm>
-            <a:off x="0" y="658368"/>
-            <a:ext cx="5120640" cy="5833872"/>
+            <a:off x="629930" y="1783080"/>
+            <a:ext cx="10931835" cy="4270248"/>
           </a:xfrm>
           <a:prstGeom prst="rect">
             <a:avLst/>
@@ -10603,14 +11310,14 @@
       </p:pic>
       <p:sp>
         <p:nvSpPr>
-          <p:cNvPr id="4" name="Text 1"/>
+          <p:cNvPr id="5" name="Text 2"/>
           <p:cNvSpPr/>
           <p:nvPr/>
         </p:nvSpPr>
         <p:spPr>
           <a:xfrm>
-            <a:off x="5349240" y="1005840"/>
-            <a:ext cx="6522415" cy="731520"/>
+            <a:off x="457200" y="6089904"/>
+            <a:ext cx="11277295" cy="347472"/>
           </a:xfrm>
           <a:prstGeom prst="rect">
             <a:avLst/>
@@ -10619,68 +11326,24 @@
           <a:ln/>
         </p:spPr>
         <p:txBody>
-          <a:bodyPr wrap="square" lIns="0" tIns="0" rIns="0" bIns="0" rtlCol="0" anchor="ctr">
-            <a:normAutofit/>
-          </a:bodyPr>
+          <a:bodyPr wrap="square" lIns="0" tIns="0" rIns="0" bIns="0" rtlCol="0" anchor="ctr"/>
           <a:lstStyle/>
           <a:p>
             <a:pPr algn="ctr" indent="0" marL="0">
               <a:buNone/>
             </a:pPr>
             <a:r>
-              <a:rPr lang="en-US" sz="3600" b="1" dirty="0">
-                <a:solidFill>
-                  <a:srgbClr val="990011"/>
+              <a:rPr lang="en-US" sz="1800" i="1" dirty="0">
+                <a:solidFill>
+                  <a:srgbClr val="555555"/>
                 </a:solidFill>
                 <a:latin typeface="Times New Roman" pitchFamily="34" charset="0"/>
                 <a:ea typeface="Times New Roman" pitchFamily="34" charset="-122"/>
                 <a:cs typeface="Times New Roman" pitchFamily="34" charset="-120"/>
               </a:rPr>
-              <a:t>Activity 3: Question</a:t>
-            </a:r>
-            <a:endParaRPr lang="en-US" sz="3600" dirty="0"/>
-          </a:p>
-        </p:txBody>
-      </p:sp>
-      <p:sp>
-        <p:nvSpPr>
-          <p:cNvPr id="5" name="Text 2"/>
-          <p:cNvSpPr/>
-          <p:nvPr/>
-        </p:nvSpPr>
-        <p:spPr>
-          <a:xfrm>
-            <a:off x="5349240" y="1783080"/>
-            <a:ext cx="6522415" cy="4663440"/>
-          </a:xfrm>
-          <a:prstGeom prst="rect">
-            <a:avLst/>
-          </a:prstGeom>
-          <a:noFill/>
-          <a:ln/>
-        </p:spPr>
-        <p:txBody>
-          <a:bodyPr wrap="square" lIns="0" tIns="0" rIns="0" bIns="0" rtlCol="0" anchor="t"/>
-          <a:lstStyle/>
-          <a:p>
-            <a:pPr algn="l" indent="0" marL="0">
-              <a:spcAft>
-                <a:spcPts val="800"/>
-              </a:spcAft>
-              <a:buNone/>
-            </a:pPr>
-            <a:r>
-              <a:rPr lang="en-US" sz="4000" dirty="0">
-                <a:solidFill>
-                  <a:srgbClr val="111111"/>
-                </a:solidFill>
-                <a:latin typeface="Times New Roman" pitchFamily="34" charset="0"/>
-                <a:ea typeface="Times New Roman" pitchFamily="34" charset="-122"/>
-                <a:cs typeface="Times New Roman" pitchFamily="34" charset="-120"/>
-              </a:rPr>
-              <a:t>In how many years will the population double?</a:t>
-            </a:r>
-            <a:endParaRPr lang="en-US" sz="4000" dirty="0"/>
+              <a:t>Data of a country.</a:t>
+            </a:r>
+            <a:endParaRPr lang="en-US" sz="1800" dirty="0"/>
           </a:p>
         </p:txBody>
       </p:sp>
@@ -10790,7 +11453,7 @@
                 <a:ea typeface="Calibri" pitchFamily="34" charset="-122"/>
                 <a:cs typeface="Calibri" pitchFamily="34" charset="-120"/>
               </a:rPr>
-              <a:t>3. POPULATION PROJECTIONS AND DOUBLING TIME</a:t>
+              <a:t>3. NATURAL INCREASE</a:t>
             </a:r>
             <a:endParaRPr lang="en-US" sz="1400" dirty="0"/>
           </a:p>
@@ -10855,7 +11518,7 @@
                 <a:ea typeface="Times New Roman" pitchFamily="34" charset="-122"/>
                 <a:cs typeface="Times New Roman" pitchFamily="34" charset="-120"/>
               </a:rPr>
-              <a:t>Activity 3: Answer</a:t>
+              <a:t>Activity 3: Question</a:t>
             </a:r>
             <a:endParaRPr lang="en-US" sz="3600" dirty="0"/>
           </a:p>
@@ -10897,7 +11560,7 @@
                 <a:ea typeface="Times New Roman" pitchFamily="34" charset="-122"/>
                 <a:cs typeface="Times New Roman" pitchFamily="34" charset="-120"/>
               </a:rPr>
-              <a:t>70 ÷ 2.7 ≈ 26 years.</a:t>
+              <a:t>With a CBR of 40 ‰ and a CDR of 10 ‰, what is the RNI?</a:t>
             </a:r>
             <a:endParaRPr lang="en-US" sz="4000" dirty="0"/>
           </a:p>
@@ -11009,54 +11672,15 @@
                 <a:ea typeface="Calibri" pitchFamily="34" charset="-122"/>
                 <a:cs typeface="Calibri" pitchFamily="34" charset="-120"/>
               </a:rPr>
-              <a:t>4. NET MIGRATION</a:t>
+              <a:t>3. NATURAL INCREASE</a:t>
             </a:r>
             <a:endParaRPr lang="en-US" sz="1400" dirty="0"/>
-          </a:p>
-        </p:txBody>
-      </p:sp>
-      <p:sp>
-        <p:nvSpPr>
-          <p:cNvPr id="3" name="Text 1"/>
-          <p:cNvSpPr/>
-          <p:nvPr/>
-        </p:nvSpPr>
-        <p:spPr>
-          <a:xfrm>
-            <a:off x="457200" y="1005840"/>
-            <a:ext cx="11277295" cy="731520"/>
-          </a:xfrm>
-          <a:prstGeom prst="rect">
-            <a:avLst/>
-          </a:prstGeom>
-          <a:noFill/>
-          <a:ln/>
-        </p:spPr>
-        <p:txBody>
-          <a:bodyPr wrap="square" lIns="0" tIns="0" rIns="0" bIns="0" rtlCol="0" anchor="ctr"/>
-          <a:lstStyle/>
-          <a:p>
-            <a:pPr algn="ctr" indent="0" marL="0">
-              <a:buNone/>
-            </a:pPr>
-            <a:r>
-              <a:rPr lang="en-US" sz="3600" b="1" dirty="0">
-                <a:solidFill>
-                  <a:srgbClr val="990011"/>
-                </a:solidFill>
-                <a:latin typeface="Times New Roman" pitchFamily="34" charset="0"/>
-                <a:ea typeface="Times New Roman" pitchFamily="34" charset="-122"/>
-                <a:cs typeface="Times New Roman" pitchFamily="34" charset="-120"/>
-              </a:rPr>
-              <a:t>Activity 4</a:t>
-            </a:r>
-            <a:endParaRPr lang="en-US" sz="3600" dirty="0"/>
           </a:p>
         </p:txBody>
       </p:sp>
       <p:pic>
         <p:nvPicPr>
-          <p:cNvPr id="4" name="Image 0" descr="/home/claude/f4/img/v2/usa_busstation.jpg">    </p:cNvPr>
+          <p:cNvPr id="3" name="Image 0" descr="/home/claude/f4/img/minesec_sheet.png">    </p:cNvPr>
           <p:cNvPicPr>
             <a:picLocks noChangeAspect="1"/>
           </p:cNvPicPr>
@@ -11070,8 +11694,8 @@
         </p:blipFill>
         <p:spPr>
           <a:xfrm>
-            <a:off x="2246610" y="1783080"/>
-            <a:ext cx="7698475" cy="4270248"/>
+            <a:off x="0" y="658368"/>
+            <a:ext cx="5120640" cy="5833872"/>
           </a:xfrm>
           <a:prstGeom prst="rect">
             <a:avLst/>
@@ -11080,14 +11704,14 @@
       </p:pic>
       <p:sp>
         <p:nvSpPr>
-          <p:cNvPr id="5" name="Text 2"/>
+          <p:cNvPr id="4" name="Text 1"/>
           <p:cNvSpPr/>
           <p:nvPr/>
         </p:nvSpPr>
         <p:spPr>
           <a:xfrm>
-            <a:off x="457200" y="6089904"/>
-            <a:ext cx="11277295" cy="347472"/>
+            <a:off x="5349240" y="1005840"/>
+            <a:ext cx="6522415" cy="731520"/>
           </a:xfrm>
           <a:prstGeom prst="rect">
             <a:avLst/>
@@ -11096,24 +11720,68 @@
           <a:ln/>
         </p:spPr>
         <p:txBody>
-          <a:bodyPr wrap="square" lIns="0" tIns="0" rIns="0" bIns="0" rtlCol="0" anchor="ctr"/>
+          <a:bodyPr wrap="square" lIns="0" tIns="0" rIns="0" bIns="0" rtlCol="0" anchor="ctr">
+            <a:normAutofit/>
+          </a:bodyPr>
           <a:lstStyle/>
           <a:p>
             <a:pPr algn="ctr" indent="0" marL="0">
               <a:buNone/>
             </a:pPr>
             <a:r>
-              <a:rPr lang="en-US" sz="1800" i="1" dirty="0">
-                <a:solidFill>
-                  <a:srgbClr val="555555"/>
+              <a:rPr lang="en-US" sz="3600" b="1" dirty="0">
+                <a:solidFill>
+                  <a:srgbClr val="990011"/>
                 </a:solidFill>
                 <a:latin typeface="Times New Roman" pitchFamily="34" charset="0"/>
                 <a:ea typeface="Times New Roman" pitchFamily="34" charset="-122"/>
                 <a:cs typeface="Times New Roman" pitchFamily="34" charset="-120"/>
               </a:rPr>
-              <a:t>Travellers at a bus station.</a:t>
-            </a:r>
-            <a:endParaRPr lang="en-US" sz="1800" dirty="0"/>
+              <a:t>Activity 3: Answer</a:t>
+            </a:r>
+            <a:endParaRPr lang="en-US" sz="3600" dirty="0"/>
+          </a:p>
+        </p:txBody>
+      </p:sp>
+      <p:sp>
+        <p:nvSpPr>
+          <p:cNvPr id="5" name="Text 2"/>
+          <p:cNvSpPr/>
+          <p:nvPr/>
+        </p:nvSpPr>
+        <p:spPr>
+          <a:xfrm>
+            <a:off x="5349240" y="1783080"/>
+            <a:ext cx="6522415" cy="4663440"/>
+          </a:xfrm>
+          <a:prstGeom prst="rect">
+            <a:avLst/>
+          </a:prstGeom>
+          <a:noFill/>
+          <a:ln/>
+        </p:spPr>
+        <p:txBody>
+          <a:bodyPr wrap="square" lIns="0" tIns="0" rIns="0" bIns="0" rtlCol="0" anchor="t"/>
+          <a:lstStyle/>
+          <a:p>
+            <a:pPr algn="l" indent="0" marL="0">
+              <a:spcAft>
+                <a:spcPts val="800"/>
+              </a:spcAft>
+              <a:buNone/>
+            </a:pPr>
+            <a:r>
+              <a:rPr lang="en-US" sz="4000" dirty="0">
+                <a:solidFill>
+                  <a:srgbClr val="111111"/>
+                </a:solidFill>
+                <a:latin typeface="Times New Roman" pitchFamily="34" charset="0"/>
+                <a:ea typeface="Times New Roman" pitchFamily="34" charset="-122"/>
+                <a:cs typeface="Times New Roman" pitchFamily="34" charset="-120"/>
+              </a:rPr>
+              <a:t>(40 − 10) ÷ 10 = 3 %.</a:t>
+            </a:r>
+            <a:endParaRPr lang="en-US" sz="4000" dirty="0"/>
           </a:p>
         </p:txBody>
       </p:sp>
@@ -11223,15 +11891,54 @@
                 <a:ea typeface="Calibri" pitchFamily="34" charset="-122"/>
                 <a:cs typeface="Calibri" pitchFamily="34" charset="-120"/>
               </a:rPr>
-              <a:t>4. NET MIGRATION</a:t>
+              <a:t>4. DOUBLING TIME</a:t>
             </a:r>
             <a:endParaRPr lang="en-US" sz="1400" dirty="0"/>
+          </a:p>
+        </p:txBody>
+      </p:sp>
+      <p:sp>
+        <p:nvSpPr>
+          <p:cNvPr id="3" name="Text 1"/>
+          <p:cNvSpPr/>
+          <p:nvPr/>
+        </p:nvSpPr>
+        <p:spPr>
+          <a:xfrm>
+            <a:off x="457200" y="1005840"/>
+            <a:ext cx="11277295" cy="731520"/>
+          </a:xfrm>
+          <a:prstGeom prst="rect">
+            <a:avLst/>
+          </a:prstGeom>
+          <a:noFill/>
+          <a:ln/>
+        </p:spPr>
+        <p:txBody>
+          <a:bodyPr wrap="square" lIns="0" tIns="0" rIns="0" bIns="0" rtlCol="0" anchor="ctr"/>
+          <a:lstStyle/>
+          <a:p>
+            <a:pPr algn="ctr" indent="0" marL="0">
+              <a:buNone/>
+            </a:pPr>
+            <a:r>
+              <a:rPr lang="en-US" sz="3600" b="1" dirty="0">
+                <a:solidFill>
+                  <a:srgbClr val="990011"/>
+                </a:solidFill>
+                <a:latin typeface="Times New Roman" pitchFamily="34" charset="0"/>
+                <a:ea typeface="Times New Roman" pitchFamily="34" charset="-122"/>
+                <a:cs typeface="Times New Roman" pitchFamily="34" charset="-120"/>
+              </a:rPr>
+              <a:t>Activity 4</a:t>
+            </a:r>
+            <a:endParaRPr lang="en-US" sz="3600" dirty="0"/>
           </a:p>
         </p:txBody>
       </p:sp>
       <p:pic>
         <p:nvPicPr>
-          <p:cNvPr id="3" name="Image 0" descr="/home/claude/f4/img/minesec_sheet.png">    </p:cNvPr>
+          <p:cNvPr id="4" name="Image 0" descr="/home/claude/f4/img/v2/projection_big.png">    </p:cNvPr>
           <p:cNvPicPr>
             <a:picLocks noChangeAspect="1"/>
           </p:cNvPicPr>
@@ -11245,8 +11952,8 @@
         </p:blipFill>
         <p:spPr>
           <a:xfrm>
-            <a:off x="0" y="658368"/>
-            <a:ext cx="5120640" cy="5833872"/>
+            <a:off x="1215564" y="1783080"/>
+            <a:ext cx="9760567" cy="4270248"/>
           </a:xfrm>
           <a:prstGeom prst="rect">
             <a:avLst/>
@@ -11255,14 +11962,14 @@
       </p:pic>
       <p:sp>
         <p:nvSpPr>
-          <p:cNvPr id="4" name="Text 1"/>
+          <p:cNvPr id="5" name="Text 2"/>
           <p:cNvSpPr/>
           <p:nvPr/>
         </p:nvSpPr>
         <p:spPr>
           <a:xfrm>
-            <a:off x="5349240" y="1005840"/>
-            <a:ext cx="6522415" cy="731520"/>
+            <a:off x="457200" y="6089904"/>
+            <a:ext cx="11277295" cy="347472"/>
           </a:xfrm>
           <a:prstGeom prst="rect">
             <a:avLst/>
@@ -11271,68 +11978,24 @@
           <a:ln/>
         </p:spPr>
         <p:txBody>
-          <a:bodyPr wrap="square" lIns="0" tIns="0" rIns="0" bIns="0" rtlCol="0" anchor="ctr">
-            <a:normAutofit/>
-          </a:bodyPr>
+          <a:bodyPr wrap="square" lIns="0" tIns="0" rIns="0" bIns="0" rtlCol="0" anchor="ctr"/>
           <a:lstStyle/>
           <a:p>
             <a:pPr algn="ctr" indent="0" marL="0">
               <a:buNone/>
             </a:pPr>
             <a:r>
-              <a:rPr lang="en-US" sz="3600" b="1" dirty="0">
-                <a:solidFill>
-                  <a:srgbClr val="990011"/>
+              <a:rPr lang="en-US" sz="1800" i="1" dirty="0">
+                <a:solidFill>
+                  <a:srgbClr val="555555"/>
                 </a:solidFill>
                 <a:latin typeface="Times New Roman" pitchFamily="34" charset="0"/>
                 <a:ea typeface="Times New Roman" pitchFamily="34" charset="-122"/>
                 <a:cs typeface="Times New Roman" pitchFamily="34" charset="-120"/>
               </a:rPr>
-              <a:t>Activity 4: Question</a:t>
-            </a:r>
-            <a:endParaRPr lang="en-US" sz="3600" dirty="0"/>
-          </a:p>
-        </p:txBody>
-      </p:sp>
-      <p:sp>
-        <p:nvSpPr>
-          <p:cNvPr id="5" name="Text 2"/>
-          <p:cNvSpPr/>
-          <p:nvPr/>
-        </p:nvSpPr>
-        <p:spPr>
-          <a:xfrm>
-            <a:off x="5349240" y="1783080"/>
-            <a:ext cx="6522415" cy="4663440"/>
-          </a:xfrm>
-          <a:prstGeom prst="rect">
-            <a:avLst/>
-          </a:prstGeom>
-          <a:noFill/>
-          <a:ln/>
-        </p:spPr>
-        <p:txBody>
-          <a:bodyPr wrap="square" lIns="0" tIns="0" rIns="0" bIns="0" rtlCol="0" anchor="t"/>
-          <a:lstStyle/>
-          <a:p>
-            <a:pPr algn="l" indent="0" marL="0">
-              <a:spcAft>
-                <a:spcPts val="800"/>
-              </a:spcAft>
-              <a:buNone/>
-            </a:pPr>
-            <a:r>
-              <a:rPr lang="en-US" sz="4000" dirty="0">
-                <a:solidFill>
-                  <a:srgbClr val="111111"/>
-                </a:solidFill>
-                <a:latin typeface="Times New Roman" pitchFamily="34" charset="0"/>
-                <a:ea typeface="Times New Roman" pitchFamily="34" charset="-122"/>
-                <a:cs typeface="Times New Roman" pitchFamily="34" charset="-120"/>
-              </a:rPr>
-              <a:t>A town receives 5,000 migrants and loses 2,000. What is its net migration?</a:t>
-            </a:r>
-            <a:endParaRPr lang="en-US" sz="4000" dirty="0"/>
+              <a:t>A population doubling.</a:t>
+            </a:r>
+            <a:endParaRPr lang="en-US" sz="1800" dirty="0"/>
           </a:p>
         </p:txBody>
       </p:sp>
@@ -12013,7 +12676,7 @@
                           <a:ea typeface="Calibri" pitchFamily="34" charset="-122"/>
                           <a:cs typeface="Calibri" pitchFamily="34" charset="-120"/>
                         </a:rPr>
-                        <a:t>Crude birth rate, crude death rate, fertility rate, fecundity, growth rate, doubling time, projection, net migration.</a:t>
+                        <a:t>Fecundity, fertility, crude birth rate, crude death rate, rate of natural increase, net migration rate, growth rate, doubling time, rule of 70.</a:t>
                       </a:r>
                       <a:endParaRPr lang="en-US" sz="1700" dirty="0">
                         <a:latin typeface="Calibri" charset="0"/>
@@ -12151,7 +12814,7 @@
                           <a:ea typeface="Calibri" pitchFamily="34" charset="-122"/>
                           <a:cs typeface="Calibri" pitchFamily="34" charset="-120"/>
                         </a:rPr>
-                        <a:t>Calculate fertility, birth rate, mortality, growth rate, doubling time, projections and net migration.</a:t>
+                        <a:t>Measures of fertility (fecundity and fertility, CBR); measures of mortality (CDR); rate of natural increase and net migration rate; doubling time; practical exercises.</a:t>
                       </a:r>
                       <a:endParaRPr lang="en-US" sz="1700" dirty="0">
                         <a:latin typeface="Calibri" charset="0"/>
@@ -12289,7 +12952,7 @@
                           <a:ea typeface="Calibri" pitchFamily="34" charset="-122"/>
                           <a:cs typeface="Calibri" pitchFamily="34" charset="-120"/>
                         </a:rPr>
-                        <a:t>Learners are able to calculate and interpret the main demographic indices.</a:t>
+                        <a:t>Learners are able to calculate and interpret the main demographic indices and use them to project population.</a:t>
                       </a:r>
                       <a:endParaRPr lang="en-US" sz="1700" dirty="0">
                         <a:latin typeface="Calibri" charset="0"/>
@@ -12451,7 +13114,7 @@
                 <a:ea typeface="Calibri" pitchFamily="34" charset="-122"/>
                 <a:cs typeface="Calibri" pitchFamily="34" charset="-120"/>
               </a:rPr>
-              <a:t>4. NET MIGRATION</a:t>
+              <a:t>4. DOUBLING TIME</a:t>
             </a:r>
             <a:endParaRPr lang="en-US" sz="1400" dirty="0"/>
           </a:p>
@@ -12516,7 +13179,7 @@
                 <a:ea typeface="Times New Roman" pitchFamily="34" charset="-122"/>
                 <a:cs typeface="Times New Roman" pitchFamily="34" charset="-120"/>
               </a:rPr>
-              <a:t>Activity 4: Answer</a:t>
+              <a:t>Activity 4: Question</a:t>
             </a:r>
             <a:endParaRPr lang="en-US" sz="3600" dirty="0"/>
           </a:p>
@@ -12558,7 +13221,7 @@
                 <a:ea typeface="Times New Roman" pitchFamily="34" charset="-122"/>
                 <a:cs typeface="Times New Roman" pitchFamily="34" charset="-120"/>
               </a:rPr>
-              <a:t>+3,000.</a:t>
+              <a:t>How long will a population growing at 3 % take to double?</a:t>
             </a:r>
             <a:endParaRPr lang="en-US" sz="4000" dirty="0"/>
           </a:p>
@@ -12670,54 +13333,15 @@
                 <a:ea typeface="Calibri" pitchFamily="34" charset="-122"/>
                 <a:cs typeface="Calibri" pitchFamily="34" charset="-120"/>
               </a:rPr>
-              <a:t>5. INTERPRETATION</a:t>
+              <a:t>4. DOUBLING TIME</a:t>
             </a:r>
             <a:endParaRPr lang="en-US" sz="1400" dirty="0"/>
-          </a:p>
-        </p:txBody>
-      </p:sp>
-      <p:sp>
-        <p:nvSpPr>
-          <p:cNvPr id="3" name="Text 1"/>
-          <p:cNvSpPr/>
-          <p:nvPr/>
-        </p:nvSpPr>
-        <p:spPr>
-          <a:xfrm>
-            <a:off x="457200" y="1005840"/>
-            <a:ext cx="11277295" cy="731520"/>
-          </a:xfrm>
-          <a:prstGeom prst="rect">
-            <a:avLst/>
-          </a:prstGeom>
-          <a:noFill/>
-          <a:ln/>
-        </p:spPr>
-        <p:txBody>
-          <a:bodyPr wrap="square" lIns="0" tIns="0" rIns="0" bIns="0" rtlCol="0" anchor="ctr"/>
-          <a:lstStyle/>
-          <a:p>
-            <a:pPr algn="ctr" indent="0" marL="0">
-              <a:buNone/>
-            </a:pPr>
-            <a:r>
-              <a:rPr lang="en-US" sz="3600" b="1" dirty="0">
-                <a:solidFill>
-                  <a:srgbClr val="990011"/>
-                </a:solidFill>
-                <a:latin typeface="Times New Roman" pitchFamily="34" charset="0"/>
-                <a:ea typeface="Times New Roman" pitchFamily="34" charset="-122"/>
-                <a:cs typeface="Times New Roman" pitchFamily="34" charset="-120"/>
-              </a:rPr>
-              <a:t>Activity 5</a:t>
-            </a:r>
-            <a:endParaRPr lang="en-US" sz="3600" dirty="0"/>
           </a:p>
         </p:txBody>
       </p:sp>
       <p:pic>
         <p:nvPicPr>
-          <p:cNvPr id="4" name="Image 0" descr="/home/claude/f4/img/v2/dtm_countries_big.png">    </p:cNvPr>
+          <p:cNvPr id="3" name="Image 0" descr="/home/claude/f4/img/minesec_sheet.png">    </p:cNvPr>
           <p:cNvPicPr>
             <a:picLocks noChangeAspect="1"/>
           </p:cNvPicPr>
@@ -12731,8 +13355,8 @@
         </p:blipFill>
         <p:spPr>
           <a:xfrm>
-            <a:off x="629930" y="1783080"/>
-            <a:ext cx="10931835" cy="4270248"/>
+            <a:off x="0" y="658368"/>
+            <a:ext cx="5120640" cy="5833872"/>
           </a:xfrm>
           <a:prstGeom prst="rect">
             <a:avLst/>
@@ -12741,14 +13365,14 @@
       </p:pic>
       <p:sp>
         <p:nvSpPr>
-          <p:cNvPr id="5" name="Text 2"/>
+          <p:cNvPr id="4" name="Text 1"/>
           <p:cNvSpPr/>
           <p:nvPr/>
         </p:nvSpPr>
         <p:spPr>
           <a:xfrm>
-            <a:off x="457200" y="6089904"/>
-            <a:ext cx="11277295" cy="347472"/>
+            <a:off x="5349240" y="1005840"/>
+            <a:ext cx="6522415" cy="731520"/>
           </a:xfrm>
           <a:prstGeom prst="rect">
             <a:avLst/>
@@ -12757,24 +13381,68 @@
           <a:ln/>
         </p:spPr>
         <p:txBody>
-          <a:bodyPr wrap="square" lIns="0" tIns="0" rIns="0" bIns="0" rtlCol="0" anchor="ctr"/>
+          <a:bodyPr wrap="square" lIns="0" tIns="0" rIns="0" bIns="0" rtlCol="0" anchor="ctr">
+            <a:normAutofit/>
+          </a:bodyPr>
           <a:lstStyle/>
           <a:p>
             <a:pPr algn="ctr" indent="0" marL="0">
               <a:buNone/>
             </a:pPr>
             <a:r>
-              <a:rPr lang="en-US" sz="1800" i="1" dirty="0">
-                <a:solidFill>
-                  <a:srgbClr val="555555"/>
+              <a:rPr lang="en-US" sz="3600" b="1" dirty="0">
+                <a:solidFill>
+                  <a:srgbClr val="990011"/>
                 </a:solidFill>
                 <a:latin typeface="Times New Roman" pitchFamily="34" charset="0"/>
                 <a:ea typeface="Times New Roman" pitchFamily="34" charset="-122"/>
                 <a:cs typeface="Times New Roman" pitchFamily="34" charset="-120"/>
               </a:rPr>
-              <a:t>Countries at different stages.</a:t>
-            </a:r>
-            <a:endParaRPr lang="en-US" sz="1800" dirty="0"/>
+              <a:t>Activity 4: Answer</a:t>
+            </a:r>
+            <a:endParaRPr lang="en-US" sz="3600" dirty="0"/>
+          </a:p>
+        </p:txBody>
+      </p:sp>
+      <p:sp>
+        <p:nvSpPr>
+          <p:cNvPr id="5" name="Text 2"/>
+          <p:cNvSpPr/>
+          <p:nvPr/>
+        </p:nvSpPr>
+        <p:spPr>
+          <a:xfrm>
+            <a:off x="5349240" y="1783080"/>
+            <a:ext cx="6522415" cy="4663440"/>
+          </a:xfrm>
+          <a:prstGeom prst="rect">
+            <a:avLst/>
+          </a:prstGeom>
+          <a:noFill/>
+          <a:ln/>
+        </p:spPr>
+        <p:txBody>
+          <a:bodyPr wrap="square" lIns="0" tIns="0" rIns="0" bIns="0" rtlCol="0" anchor="t"/>
+          <a:lstStyle/>
+          <a:p>
+            <a:pPr algn="l" indent="0" marL="0">
+              <a:spcAft>
+                <a:spcPts val="800"/>
+              </a:spcAft>
+              <a:buNone/>
+            </a:pPr>
+            <a:r>
+              <a:rPr lang="en-US" sz="4000" dirty="0">
+                <a:solidFill>
+                  <a:srgbClr val="111111"/>
+                </a:solidFill>
+                <a:latin typeface="Times New Roman" pitchFamily="34" charset="0"/>
+                <a:ea typeface="Times New Roman" pitchFamily="34" charset="-122"/>
+                <a:cs typeface="Times New Roman" pitchFamily="34" charset="-120"/>
+              </a:rPr>
+              <a:t>70 ÷ 3 ≈ 23 years.</a:t>
+            </a:r>
+            <a:endParaRPr lang="en-US" sz="4000" dirty="0"/>
           </a:p>
         </p:txBody>
       </p:sp>
@@ -12884,15 +13552,54 @@
                 <a:ea typeface="Calibri" pitchFamily="34" charset="-122"/>
                 <a:cs typeface="Calibri" pitchFamily="34" charset="-120"/>
               </a:rPr>
-              <a:t>5. INTERPRETATION</a:t>
+              <a:t>5. EXERCISES</a:t>
             </a:r>
             <a:endParaRPr lang="en-US" sz="1400" dirty="0"/>
+          </a:p>
+        </p:txBody>
+      </p:sp>
+      <p:sp>
+        <p:nvSpPr>
+          <p:cNvPr id="3" name="Text 1"/>
+          <p:cNvSpPr/>
+          <p:nvPr/>
+        </p:nvSpPr>
+        <p:spPr>
+          <a:xfrm>
+            <a:off x="457200" y="1005840"/>
+            <a:ext cx="11277295" cy="731520"/>
+          </a:xfrm>
+          <a:prstGeom prst="rect">
+            <a:avLst/>
+          </a:prstGeom>
+          <a:noFill/>
+          <a:ln/>
+        </p:spPr>
+        <p:txBody>
+          <a:bodyPr wrap="square" lIns="0" tIns="0" rIns="0" bIns="0" rtlCol="0" anchor="ctr"/>
+          <a:lstStyle/>
+          <a:p>
+            <a:pPr algn="ctr" indent="0" marL="0">
+              <a:buNone/>
+            </a:pPr>
+            <a:r>
+              <a:rPr lang="en-US" sz="3600" b="1" dirty="0">
+                <a:solidFill>
+                  <a:srgbClr val="990011"/>
+                </a:solidFill>
+                <a:latin typeface="Times New Roman" pitchFamily="34" charset="0"/>
+                <a:ea typeface="Times New Roman" pitchFamily="34" charset="-122"/>
+                <a:cs typeface="Times New Roman" pitchFamily="34" charset="-120"/>
+              </a:rPr>
+              <a:t>Activity 5</a:t>
+            </a:r>
+            <a:endParaRPr lang="en-US" sz="3600" dirty="0"/>
           </a:p>
         </p:txBody>
       </p:sp>
       <p:pic>
         <p:nvPicPr>
-          <p:cNvPr id="3" name="Image 0" descr="/home/claude/f4/img/minesec_sheet.png">    </p:cNvPr>
+          <p:cNvPr id="4" name="Image 0" descr="/home/claude/f4/img/v2/pop2_exercises.png">    </p:cNvPr>
           <p:cNvPicPr>
             <a:picLocks noChangeAspect="1"/>
           </p:cNvPicPr>
@@ -12906,8 +13613,8 @@
         </p:blipFill>
         <p:spPr>
           <a:xfrm>
-            <a:off x="0" y="658368"/>
-            <a:ext cx="5120640" cy="5833872"/>
+            <a:off x="629930" y="1783080"/>
+            <a:ext cx="10931835" cy="4270248"/>
           </a:xfrm>
           <a:prstGeom prst="rect">
             <a:avLst/>
@@ -12916,14 +13623,14 @@
       </p:pic>
       <p:sp>
         <p:nvSpPr>
-          <p:cNvPr id="4" name="Text 1"/>
+          <p:cNvPr id="5" name="Text 2"/>
           <p:cNvSpPr/>
           <p:nvPr/>
         </p:nvSpPr>
         <p:spPr>
           <a:xfrm>
-            <a:off x="5349240" y="1005840"/>
-            <a:ext cx="6522415" cy="731520"/>
+            <a:off x="457200" y="6089904"/>
+            <a:ext cx="11277295" cy="347472"/>
           </a:xfrm>
           <a:prstGeom prst="rect">
             <a:avLst/>
@@ -12932,68 +13639,24 @@
           <a:ln/>
         </p:spPr>
         <p:txBody>
-          <a:bodyPr wrap="square" lIns="0" tIns="0" rIns="0" bIns="0" rtlCol="0" anchor="ctr">
-            <a:normAutofit/>
-          </a:bodyPr>
+          <a:bodyPr wrap="square" lIns="0" tIns="0" rIns="0" bIns="0" rtlCol="0" anchor="ctr"/>
           <a:lstStyle/>
           <a:p>
             <a:pPr algn="ctr" indent="0" marL="0">
               <a:buNone/>
             </a:pPr>
             <a:r>
-              <a:rPr lang="en-US" sz="3600" b="1" dirty="0">
-                <a:solidFill>
-                  <a:srgbClr val="990011"/>
+              <a:rPr lang="en-US" sz="1800" i="1" dirty="0">
+                <a:solidFill>
+                  <a:srgbClr val="555555"/>
                 </a:solidFill>
                 <a:latin typeface="Times New Roman" pitchFamily="34" charset="0"/>
                 <a:ea typeface="Times New Roman" pitchFamily="34" charset="-122"/>
                 <a:cs typeface="Times New Roman" pitchFamily="34" charset="-120"/>
               </a:rPr>
-              <a:t>Activity 5: Question</a:t>
-            </a:r>
-            <a:endParaRPr lang="en-US" sz="3600" dirty="0"/>
-          </a:p>
-        </p:txBody>
-      </p:sp>
-      <p:sp>
-        <p:nvSpPr>
-          <p:cNvPr id="5" name="Text 2"/>
-          <p:cNvSpPr/>
-          <p:nvPr/>
-        </p:nvSpPr>
-        <p:spPr>
-          <a:xfrm>
-            <a:off x="5349240" y="1783080"/>
-            <a:ext cx="6522415" cy="4663440"/>
-          </a:xfrm>
-          <a:prstGeom prst="rect">
-            <a:avLst/>
-          </a:prstGeom>
-          <a:noFill/>
-          <a:ln/>
-        </p:spPr>
-        <p:txBody>
-          <a:bodyPr wrap="square" lIns="0" tIns="0" rIns="0" bIns="0" rtlCol="0" anchor="t"/>
-          <a:lstStyle/>
-          <a:p>
-            <a:pPr algn="l" indent="0" marL="0">
-              <a:spcAft>
-                <a:spcPts val="800"/>
-              </a:spcAft>
-              <a:buNone/>
-            </a:pPr>
-            <a:r>
-              <a:rPr lang="en-US" sz="4000" dirty="0">
-                <a:solidFill>
-                  <a:srgbClr val="111111"/>
-                </a:solidFill>
-                <a:latin typeface="Times New Roman" pitchFamily="34" charset="0"/>
-                <a:ea typeface="Times New Roman" pitchFamily="34" charset="-122"/>
-                <a:cs typeface="Times New Roman" pitchFamily="34" charset="-120"/>
-              </a:rPr>
-              <a:t>A country has CBR 12 and CDR 10. Is it growing fast or slowly?</a:t>
-            </a:r>
-            <a:endParaRPr lang="en-US" sz="4000" dirty="0"/>
+              <a:t>Solutions of the exercises.</a:t>
+            </a:r>
+            <a:endParaRPr lang="en-US" sz="1800" dirty="0"/>
           </a:p>
         </p:txBody>
       </p:sp>
@@ -13103,7 +13766,7 @@
                 <a:ea typeface="Calibri" pitchFamily="34" charset="-122"/>
                 <a:cs typeface="Calibri" pitchFamily="34" charset="-120"/>
               </a:rPr>
-              <a:t>5. INTERPRETATION</a:t>
+              <a:t>5. EXERCISES</a:t>
             </a:r>
             <a:endParaRPr lang="en-US" sz="1400" dirty="0"/>
           </a:p>
@@ -13168,7 +13831,7 @@
                 <a:ea typeface="Times New Roman" pitchFamily="34" charset="-122"/>
                 <a:cs typeface="Times New Roman" pitchFamily="34" charset="-120"/>
               </a:rPr>
-              <a:t>Activity 5: Answer</a:t>
+              <a:t>Activity 5: Question</a:t>
             </a:r>
             <a:endParaRPr lang="en-US" sz="3600" dirty="0"/>
           </a:p>
@@ -13210,7 +13873,7 @@
                 <a:ea typeface="Times New Roman" pitchFamily="34" charset="-122"/>
                 <a:cs typeface="Times New Roman" pitchFamily="34" charset="-120"/>
               </a:rPr>
-              <a:t>Slowly (0.2 % per year), like a stage 4 country.</a:t>
+              <a:t>A town of 50,000 has 850 births. What is its CBR?</a:t>
             </a:r>
             <a:endParaRPr lang="en-US" sz="4000" dirty="0"/>
           </a:p>
@@ -13322,7 +13985,7 @@
                 <a:ea typeface="Calibri" pitchFamily="34" charset="-122"/>
                 <a:cs typeface="Calibri" pitchFamily="34" charset="-120"/>
               </a:rPr>
-              <a:t>BOARD SUMMARY</a:t>
+              <a:t>5. EXERCISES</a:t>
             </a:r>
             <a:endParaRPr lang="en-US" sz="1400" dirty="0"/>
           </a:p>
@@ -13387,7 +14050,7 @@
                 <a:ea typeface="Times New Roman" pitchFamily="34" charset="-122"/>
                 <a:cs typeface="Times New Roman" pitchFamily="34" charset="-120"/>
               </a:rPr>
-              <a:t>Board Summary</a:t>
+              <a:t>Activity 5: Answer</a:t>
             </a:r>
             <a:endParaRPr lang="en-US" sz="3600" dirty="0"/>
           </a:p>
@@ -13421,7 +14084,7 @@
               <a:buNone/>
             </a:pPr>
             <a:r>
-              <a:rPr lang="en-US" sz="4000" b="1" dirty="0">
+              <a:rPr lang="en-US" sz="4000" dirty="0">
                 <a:solidFill>
                   <a:srgbClr val="111111"/>
                 </a:solidFill>
@@ -13429,47 +14092,7 @@
                 <a:ea typeface="Times New Roman" pitchFamily="34" charset="-122"/>
                 <a:cs typeface="Times New Roman" pitchFamily="34" charset="-120"/>
               </a:rPr>
-              <a:t>Topic: Population Change over Time (Population Growth)</a:t>
-            </a:r>
-            <a:endParaRPr lang="en-US" sz="4000" dirty="0"/>
-          </a:p>
-          <a:p>
-            <a:pPr algn="l" indent="0" marL="0">
-              <a:spcAft>
-                <a:spcPts val="800"/>
-              </a:spcAft>
-              <a:buNone/>
-            </a:pPr>
-            <a:r>
-              <a:rPr lang="en-US" sz="4000" b="1" dirty="0">
-                <a:solidFill>
-                  <a:srgbClr val="111111"/>
-                </a:solidFill>
-                <a:latin typeface="Times New Roman" pitchFamily="34" charset="0"/>
-                <a:ea typeface="Times New Roman" pitchFamily="34" charset="-122"/>
-                <a:cs typeface="Times New Roman" pitchFamily="34" charset="-120"/>
-              </a:rPr>
-              <a:t>Sub-topic: Population Growth</a:t>
-            </a:r>
-            <a:endParaRPr lang="en-US" sz="4000" dirty="0"/>
-          </a:p>
-          <a:p>
-            <a:pPr algn="l" indent="0" marL="0">
-              <a:spcAft>
-                <a:spcPts val="800"/>
-              </a:spcAft>
-              <a:buNone/>
-            </a:pPr>
-            <a:r>
-              <a:rPr lang="en-US" sz="4000" b="1" dirty="0">
-                <a:solidFill>
-                  <a:srgbClr val="990011"/>
-                </a:solidFill>
-                <a:latin typeface="Times New Roman" pitchFamily="34" charset="0"/>
-                <a:ea typeface="Times New Roman" pitchFamily="34" charset="-122"/>
-                <a:cs typeface="Times New Roman" pitchFamily="34" charset="-120"/>
-              </a:rPr>
-              <a:t>Practical Work 4: Calculating Demographic Indices</a:t>
+              <a:t>850 ÷ 50,000 × 1,000 = 17 per 1,000.</a:t>
             </a:r>
             <a:endParaRPr lang="en-US" sz="4000" dirty="0"/>
           </a:p>
@@ -13604,7 +14227,7 @@
         <p:spPr>
           <a:xfrm>
             <a:off x="0" y="658368"/>
-            <a:ext cx="3840480" cy="5833872"/>
+            <a:ext cx="5120640" cy="5833872"/>
           </a:xfrm>
           <a:prstGeom prst="rect">
             <a:avLst/>
@@ -13619,8 +14242,8 @@
         </p:nvSpPr>
         <p:spPr>
           <a:xfrm>
-            <a:off x="4069080" y="1005840"/>
-            <a:ext cx="7802575" cy="731520"/>
+            <a:off x="5349240" y="1005840"/>
+            <a:ext cx="6522415" cy="731520"/>
           </a:xfrm>
           <a:prstGeom prst="rect">
             <a:avLst/>
@@ -13646,7 +14269,7 @@
                 <a:ea typeface="Times New Roman" pitchFamily="34" charset="-122"/>
                 <a:cs typeface="Times New Roman" pitchFamily="34" charset="-120"/>
               </a:rPr>
-              <a:t>DEFINITIONS</a:t>
+              <a:t>Board Summary</a:t>
             </a:r>
             <a:endParaRPr lang="en-US" sz="3600" dirty="0"/>
           </a:p>
@@ -13660,8 +14283,8 @@
         </p:nvSpPr>
         <p:spPr>
           <a:xfrm>
-            <a:off x="4069080" y="1783080"/>
-            <a:ext cx="7802575" cy="4663440"/>
+            <a:off x="5349240" y="1783080"/>
+            <a:ext cx="6522415" cy="4663440"/>
           </a:xfrm>
           <a:prstGeom prst="rect">
             <a:avLst/>
@@ -13680,7 +14303,7 @@
               <a:buNone/>
             </a:pPr>
             <a:r>
-              <a:rPr lang="en-US" sz="4000" i="1" dirty="0">
+              <a:rPr lang="en-US" sz="3200" b="1" dirty="0">
                 <a:solidFill>
                   <a:srgbClr val="111111"/>
                 </a:solidFill>
@@ -13688,9 +14311,9 @@
                 <a:ea typeface="Times New Roman" pitchFamily="34" charset="-122"/>
                 <a:cs typeface="Times New Roman" pitchFamily="34" charset="-120"/>
               </a:rPr>
-              <a:t>The key terms of this lesson are defined as follows:</a:t>
-            </a:r>
-            <a:endParaRPr lang="en-US" sz="4000" dirty="0"/>
+              <a:t>Topic: Population Change over Time (Population Growth)</a:t>
+            </a:r>
+            <a:endParaRPr lang="en-US" sz="3200" dirty="0"/>
           </a:p>
           <a:p>
             <a:pPr algn="l" indent="0" marL="0">
@@ -13700,7 +14323,7 @@
               <a:buNone/>
             </a:pPr>
             <a:r>
-              <a:rPr lang="en-US" sz="4000" b="1" dirty="0">
+              <a:rPr lang="en-US" sz="3200" b="1" dirty="0">
                 <a:solidFill>
                   <a:srgbClr val="111111"/>
                 </a:solidFill>
@@ -13708,8 +14331,11 @@
                 <a:ea typeface="Times New Roman" pitchFamily="34" charset="-122"/>
                 <a:cs typeface="Times New Roman" pitchFamily="34" charset="-120"/>
               </a:rPr>
-              <a:t>Fertility: </a:t>
-            </a:r>
+              <a:t>Sub-topic: Population Growth</a:t>
+            </a:r>
+            <a:endParaRPr lang="en-US" sz="3200" dirty="0"/>
+          </a:p>
+          <a:p>
             <a:pPr algn="l" indent="0" marL="0">
               <a:spcAft>
                 <a:spcPts val="800"/>
@@ -13717,54 +14343,17 @@
               <a:buNone/>
             </a:pPr>
             <a:r>
-              <a:rPr lang="en-US" sz="4000" dirty="0">
-                <a:solidFill>
-                  <a:srgbClr val="111111"/>
+              <a:rPr lang="en-US" sz="3200" b="1" dirty="0">
+                <a:solidFill>
+                  <a:srgbClr val="990011"/>
                 </a:solidFill>
                 <a:latin typeface="Times New Roman" pitchFamily="34" charset="0"/>
                 <a:ea typeface="Times New Roman" pitchFamily="34" charset="-122"/>
                 <a:cs typeface="Times New Roman" pitchFamily="34" charset="-120"/>
               </a:rPr>
-              <a:t>It is the actual number of children born to women.</a:t>
-            </a:r>
-            <a:endParaRPr lang="en-US" sz="4000" dirty="0"/>
-          </a:p>
-          <a:p>
-            <a:pPr algn="l" indent="0" marL="0">
-              <a:spcAft>
-                <a:spcPts val="800"/>
-              </a:spcAft>
-              <a:buNone/>
-            </a:pPr>
-            <a:r>
-              <a:rPr lang="en-US" sz="4000" b="1" dirty="0">
-                <a:solidFill>
-                  <a:srgbClr val="111111"/>
-                </a:solidFill>
-                <a:latin typeface="Times New Roman" pitchFamily="34" charset="0"/>
-                <a:ea typeface="Times New Roman" pitchFamily="34" charset="-122"/>
-                <a:cs typeface="Times New Roman" pitchFamily="34" charset="-120"/>
-              </a:rPr>
-              <a:t>Fecundity: </a:t>
-            </a:r>
-            <a:pPr algn="l" indent="0" marL="0">
-              <a:spcAft>
-                <a:spcPts val="800"/>
-              </a:spcAft>
-              <a:buNone/>
-            </a:pPr>
-            <a:r>
-              <a:rPr lang="en-US" sz="4000" dirty="0">
-                <a:solidFill>
-                  <a:srgbClr val="111111"/>
-                </a:solidFill>
-                <a:latin typeface="Times New Roman" pitchFamily="34" charset="0"/>
-                <a:ea typeface="Times New Roman" pitchFamily="34" charset="-122"/>
-                <a:cs typeface="Times New Roman" pitchFamily="34" charset="-120"/>
-              </a:rPr>
-              <a:t>It is the biological ability of a woman to have children.</a:t>
-            </a:r>
-            <a:endParaRPr lang="en-US" sz="4000" dirty="0"/>
+              <a:t>Practical Work 4: Calculating Demographic Indices</a:t>
+            </a:r>
+            <a:endParaRPr lang="en-US" sz="3200" dirty="0"/>
           </a:p>
         </p:txBody>
       </p:sp>
@@ -13897,7 +14486,7 @@
         <p:spPr>
           <a:xfrm>
             <a:off x="0" y="658368"/>
-            <a:ext cx="5120640" cy="5833872"/>
+            <a:ext cx="3840480" cy="5833872"/>
           </a:xfrm>
           <a:prstGeom prst="rect">
             <a:avLst/>
@@ -13912,8 +14501,8 @@
         </p:nvSpPr>
         <p:spPr>
           <a:xfrm>
-            <a:off x="5349240" y="1005840"/>
-            <a:ext cx="6522415" cy="731520"/>
+            <a:off x="4069080" y="1005840"/>
+            <a:ext cx="7802575" cy="731520"/>
           </a:xfrm>
           <a:prstGeom prst="rect">
             <a:avLst/>
@@ -13939,7 +14528,7 @@
                 <a:ea typeface="Times New Roman" pitchFamily="34" charset="-122"/>
                 <a:cs typeface="Times New Roman" pitchFamily="34" charset="-120"/>
               </a:rPr>
-              <a:t>1. Formulas of Demographic Indices</a:t>
+              <a:t>DEFINITIONS</a:t>
             </a:r>
             <a:endParaRPr lang="en-US" sz="3600" dirty="0"/>
           </a:p>
@@ -13953,8 +14542,8 @@
         </p:nvSpPr>
         <p:spPr>
           <a:xfrm>
-            <a:off x="5349240" y="1783080"/>
-            <a:ext cx="6522415" cy="4663440"/>
+            <a:off x="4069080" y="1783080"/>
+            <a:ext cx="7802575" cy="4663440"/>
           </a:xfrm>
           <a:prstGeom prst="rect">
             <a:avLst/>
@@ -13981,7 +14570,7 @@
                 <a:ea typeface="Times New Roman" pitchFamily="34" charset="-122"/>
                 <a:cs typeface="Times New Roman" pitchFamily="34" charset="-120"/>
               </a:rPr>
-              <a:t>The main indices are calculated as follows:</a:t>
+              <a:t>The key terms of this lesson are defined as follows:</a:t>
             </a:r>
             <a:endParaRPr lang="en-US" sz="4000" dirty="0"/>
           </a:p>
@@ -14001,7 +14590,7 @@
                 <a:ea typeface="Times New Roman" pitchFamily="34" charset="-122"/>
                 <a:cs typeface="Times New Roman" pitchFamily="34" charset="-120"/>
               </a:rPr>
-              <a:t>Crude birth rate (CBR): </a:t>
+              <a:t>Fecundity: </a:t>
             </a:r>
             <a:pPr algn="l" indent="0" marL="0">
               <a:spcAft>
@@ -14018,7 +14607,44 @@
                 <a:ea typeface="Times New Roman" pitchFamily="34" charset="-122"/>
                 <a:cs typeface="Times New Roman" pitchFamily="34" charset="-120"/>
               </a:rPr>
-              <a:t>CBR = births in a year ÷ total population × 1,000. It is given per 1,000 people to compare countries.</a:t>
+              <a:t>It is the biological ability of a woman or a couple to have children.</a:t>
+            </a:r>
+            <a:endParaRPr lang="en-US" sz="4000" dirty="0"/>
+          </a:p>
+          <a:p>
+            <a:pPr algn="l" indent="0" marL="0">
+              <a:spcAft>
+                <a:spcPts val="800"/>
+              </a:spcAft>
+              <a:buNone/>
+            </a:pPr>
+            <a:r>
+              <a:rPr lang="en-US" sz="4000" b="1" dirty="0">
+                <a:solidFill>
+                  <a:srgbClr val="111111"/>
+                </a:solidFill>
+                <a:latin typeface="Times New Roman" pitchFamily="34" charset="0"/>
+                <a:ea typeface="Times New Roman" pitchFamily="34" charset="-122"/>
+                <a:cs typeface="Times New Roman" pitchFamily="34" charset="-120"/>
+              </a:rPr>
+              <a:t>Fertility: </a:t>
+            </a:r>
+            <a:pPr algn="l" indent="0" marL="0">
+              <a:spcAft>
+                <a:spcPts val="800"/>
+              </a:spcAft>
+              <a:buNone/>
+            </a:pPr>
+            <a:r>
+              <a:rPr lang="en-US" sz="4000" dirty="0">
+                <a:solidFill>
+                  <a:srgbClr val="111111"/>
+                </a:solidFill>
+                <a:latin typeface="Times New Roman" pitchFamily="34" charset="0"/>
+                <a:ea typeface="Times New Roman" pitchFamily="34" charset="-122"/>
+                <a:cs typeface="Times New Roman" pitchFamily="34" charset="-120"/>
+              </a:rPr>
+              <a:t>It is the actual number of live births in a population.</a:t>
             </a:r>
             <a:endParaRPr lang="en-US" sz="4000" dirty="0"/>
           </a:p>
@@ -14153,7 +14779,7 @@
         <p:spPr>
           <a:xfrm>
             <a:off x="0" y="658368"/>
-            <a:ext cx="2468880" cy="5833872"/>
+            <a:ext cx="1463040" cy="5833872"/>
           </a:xfrm>
           <a:prstGeom prst="rect">
             <a:avLst/>
@@ -14168,8 +14794,8 @@
         </p:nvSpPr>
         <p:spPr>
           <a:xfrm>
-            <a:off x="2697480" y="1005840"/>
-            <a:ext cx="9174175" cy="731520"/>
+            <a:off x="1691640" y="1005840"/>
+            <a:ext cx="10180015" cy="731520"/>
           </a:xfrm>
           <a:prstGeom prst="rect">
             <a:avLst/>
@@ -14195,7 +14821,7 @@
                 <a:ea typeface="Times New Roman" pitchFamily="34" charset="-122"/>
                 <a:cs typeface="Times New Roman" pitchFamily="34" charset="-120"/>
               </a:rPr>
-              <a:t>1. Formulas of Demographic Indices (continued)</a:t>
+              <a:t>DEFINITIONS (continued)</a:t>
             </a:r>
             <a:endParaRPr lang="en-US" sz="3600" dirty="0"/>
           </a:p>
@@ -14209,8 +14835,8 @@
         </p:nvSpPr>
         <p:spPr>
           <a:xfrm>
-            <a:off x="2697480" y="1783080"/>
-            <a:ext cx="9174175" cy="4663440"/>
+            <a:off x="1691640" y="1783080"/>
+            <a:ext cx="10180015" cy="4663440"/>
           </a:xfrm>
           <a:prstGeom prst="rect">
             <a:avLst/>
@@ -14237,7 +14863,7 @@
                 <a:ea typeface="Times New Roman" pitchFamily="34" charset="-122"/>
                 <a:cs typeface="Times New Roman" pitchFamily="34" charset="-120"/>
               </a:rPr>
-              <a:t>Crude death rate (CDR): </a:t>
+              <a:t>Crude birth rate (CBR): </a:t>
             </a:r>
             <a:pPr algn="l" indent="0" marL="0">
               <a:spcAft>
@@ -14254,7 +14880,7 @@
                 <a:ea typeface="Times New Roman" pitchFamily="34" charset="-122"/>
                 <a:cs typeface="Times New Roman" pitchFamily="34" charset="-120"/>
               </a:rPr>
-              <a:t>CDR = deaths in a year ÷ total population × 1,000. Infant mortality rate = deaths under 1 year ÷ live births × 1,000.</a:t>
+              <a:t>It is the number of live births per 1,000 people in a year.</a:t>
             </a:r>
             <a:endParaRPr lang="en-US" sz="4000" dirty="0"/>
           </a:p>
@@ -14274,7 +14900,7 @@
                 <a:ea typeface="Times New Roman" pitchFamily="34" charset="-122"/>
                 <a:cs typeface="Times New Roman" pitchFamily="34" charset="-120"/>
               </a:rPr>
-              <a:t>Growth rate: </a:t>
+              <a:t>Crude death rate (CDR): </a:t>
             </a:r>
             <a:pPr algn="l" indent="0" marL="0">
               <a:spcAft>
@@ -14291,7 +14917,44 @@
                 <a:ea typeface="Times New Roman" pitchFamily="34" charset="-122"/>
                 <a:cs typeface="Times New Roman" pitchFamily="34" charset="-120"/>
               </a:rPr>
-              <a:t>Natural increase (%) = (CBR − CDR) ÷ 10. For example, (35 − 9) ÷ 10 = 2.6 %.</a:t>
+              <a:t>It is the number of deaths per 1,000 people in a year.</a:t>
+            </a:r>
+            <a:endParaRPr lang="en-US" sz="4000" dirty="0"/>
+          </a:p>
+          <a:p>
+            <a:pPr algn="l" indent="0" marL="0">
+              <a:spcAft>
+                <a:spcPts val="800"/>
+              </a:spcAft>
+              <a:buNone/>
+            </a:pPr>
+            <a:r>
+              <a:rPr lang="en-US" sz="4000" b="1" dirty="0">
+                <a:solidFill>
+                  <a:srgbClr val="111111"/>
+                </a:solidFill>
+                <a:latin typeface="Times New Roman" pitchFamily="34" charset="0"/>
+                <a:ea typeface="Times New Roman" pitchFamily="34" charset="-122"/>
+                <a:cs typeface="Times New Roman" pitchFamily="34" charset="-120"/>
+              </a:rPr>
+              <a:t>Doubling time: </a:t>
+            </a:r>
+            <a:pPr algn="l" indent="0" marL="0">
+              <a:spcAft>
+                <a:spcPts val="800"/>
+              </a:spcAft>
+              <a:buNone/>
+            </a:pPr>
+            <a:r>
+              <a:rPr lang="en-US" sz="4000" dirty="0">
+                <a:solidFill>
+                  <a:srgbClr val="111111"/>
+                </a:solidFill>
+                <a:latin typeface="Times New Roman" pitchFamily="34" charset="0"/>
+                <a:ea typeface="Times New Roman" pitchFamily="34" charset="-122"/>
+                <a:cs typeface="Times New Roman" pitchFamily="34" charset="-120"/>
+              </a:rPr>
+              <a:t>It is the number of years a population needs to double at a constant growth rate.</a:t>
             </a:r>
             <a:endParaRPr lang="en-US" sz="4000" dirty="0"/>
           </a:p>
@@ -14409,48 +15072,9 @@
           </a:p>
         </p:txBody>
       </p:sp>
-      <p:sp>
-        <p:nvSpPr>
-          <p:cNvPr id="3" name="Text 1"/>
-          <p:cNvSpPr/>
-          <p:nvPr/>
-        </p:nvSpPr>
-        <p:spPr>
-          <a:xfrm>
-            <a:off x="457200" y="1005840"/>
-            <a:ext cx="11277295" cy="731520"/>
-          </a:xfrm>
-          <a:prstGeom prst="rect">
-            <a:avLst/>
-          </a:prstGeom>
-          <a:noFill/>
-          <a:ln/>
-        </p:spPr>
-        <p:txBody>
-          <a:bodyPr wrap="square" lIns="0" tIns="0" rIns="0" bIns="0" rtlCol="0" anchor="ctr"/>
-          <a:lstStyle/>
-          <a:p>
-            <a:pPr algn="ctr" indent="0" marL="0">
-              <a:buNone/>
-            </a:pPr>
-            <a:r>
-              <a:rPr lang="en-US" sz="3600" b="1" dirty="0">
-                <a:solidFill>
-                  <a:srgbClr val="990011"/>
-                </a:solidFill>
-                <a:latin typeface="Times New Roman" pitchFamily="34" charset="0"/>
-                <a:ea typeface="Times New Roman" pitchFamily="34" charset="-122"/>
-                <a:cs typeface="Times New Roman" pitchFamily="34" charset="-120"/>
-              </a:rPr>
-              <a:t>1. Formulas of Demographic Indices</a:t>
-            </a:r>
-            <a:endParaRPr lang="en-US" sz="3600" dirty="0"/>
-          </a:p>
-        </p:txBody>
-      </p:sp>
       <p:pic>
         <p:nvPicPr>
-          <p:cNvPr id="4" name="Image 0" descr="/home/claude/f4/img/v2/indices_big.png">    </p:cNvPr>
+          <p:cNvPr id="3" name="Image 0" descr="/home/claude/f4/img/minesec_sheet.png">    </p:cNvPr>
           <p:cNvPicPr>
             <a:picLocks noChangeAspect="1"/>
           </p:cNvPicPr>
@@ -14464,8 +15088,8 @@
         </p:blipFill>
         <p:spPr>
           <a:xfrm>
-            <a:off x="629930" y="1783080"/>
-            <a:ext cx="10931835" cy="4270248"/>
+            <a:off x="0" y="658368"/>
+            <a:ext cx="5120640" cy="5833872"/>
           </a:xfrm>
           <a:prstGeom prst="rect">
             <a:avLst/>
@@ -14474,14 +15098,14 @@
       </p:pic>
       <p:sp>
         <p:nvSpPr>
-          <p:cNvPr id="5" name="Text 2"/>
+          <p:cNvPr id="4" name="Text 1"/>
           <p:cNvSpPr/>
           <p:nvPr/>
         </p:nvSpPr>
         <p:spPr>
           <a:xfrm>
-            <a:off x="457200" y="6089904"/>
-            <a:ext cx="11277295" cy="347472"/>
+            <a:off x="5349240" y="1005840"/>
+            <a:ext cx="6522415" cy="731520"/>
           </a:xfrm>
           <a:prstGeom prst="rect">
             <a:avLst/>
@@ -14490,24 +15114,105 @@
           <a:ln/>
         </p:spPr>
         <p:txBody>
-          <a:bodyPr wrap="square" lIns="0" tIns="0" rIns="0" bIns="0" rtlCol="0" anchor="ctr"/>
+          <a:bodyPr wrap="square" lIns="0" tIns="0" rIns="0" bIns="0" rtlCol="0" anchor="ctr">
+            <a:normAutofit/>
+          </a:bodyPr>
           <a:lstStyle/>
           <a:p>
             <a:pPr algn="ctr" indent="0" marL="0">
               <a:buNone/>
             </a:pPr>
             <a:r>
-              <a:rPr lang="en-US" sz="1800" i="1" dirty="0">
-                <a:solidFill>
-                  <a:srgbClr val="555555"/>
+              <a:rPr lang="en-US" sz="3600" b="1" dirty="0">
+                <a:solidFill>
+                  <a:srgbClr val="990011"/>
                 </a:solidFill>
                 <a:latin typeface="Times New Roman" pitchFamily="34" charset="0"/>
                 <a:ea typeface="Times New Roman" pitchFamily="34" charset="-122"/>
                 <a:cs typeface="Times New Roman" pitchFamily="34" charset="-120"/>
               </a:rPr>
-              <a:t>Illustration: formulas of demographic indices</a:t>
-            </a:r>
-            <a:endParaRPr lang="en-US" sz="1800" dirty="0"/>
+              <a:t>1. Measures of Fertility and Mortality</a:t>
+            </a:r>
+            <a:endParaRPr lang="en-US" sz="3600" dirty="0"/>
+          </a:p>
+        </p:txBody>
+      </p:sp>
+      <p:sp>
+        <p:nvSpPr>
+          <p:cNvPr id="5" name="Text 2"/>
+          <p:cNvSpPr/>
+          <p:nvPr/>
+        </p:nvSpPr>
+        <p:spPr>
+          <a:xfrm>
+            <a:off x="5349240" y="1783080"/>
+            <a:ext cx="6522415" cy="4663440"/>
+          </a:xfrm>
+          <a:prstGeom prst="rect">
+            <a:avLst/>
+          </a:prstGeom>
+          <a:noFill/>
+          <a:ln/>
+        </p:spPr>
+        <p:txBody>
+          <a:bodyPr wrap="square" lIns="0" tIns="0" rIns="0" bIns="0" rtlCol="0" anchor="t"/>
+          <a:lstStyle/>
+          <a:p>
+            <a:pPr algn="l" indent="0" marL="0">
+              <a:spcAft>
+                <a:spcPts val="800"/>
+              </a:spcAft>
+              <a:buNone/>
+            </a:pPr>
+            <a:r>
+              <a:rPr lang="en-US" sz="4000" i="1" dirty="0">
+                <a:solidFill>
+                  <a:srgbClr val="111111"/>
+                </a:solidFill>
+                <a:latin typeface="Times New Roman" pitchFamily="34" charset="0"/>
+                <a:ea typeface="Times New Roman" pitchFamily="34" charset="-122"/>
+                <a:cs typeface="Times New Roman" pitchFamily="34" charset="-120"/>
+              </a:rPr>
+              <a:t>Fertility and mortality are measured as follows:</a:t>
+            </a:r>
+            <a:endParaRPr lang="en-US" sz="4000" dirty="0"/>
+          </a:p>
+          <a:p>
+            <a:pPr algn="l" indent="0" marL="0">
+              <a:spcAft>
+                <a:spcPts val="800"/>
+              </a:spcAft>
+              <a:buNone/>
+            </a:pPr>
+            <a:r>
+              <a:rPr lang="en-US" sz="4000" b="1" dirty="0">
+                <a:solidFill>
+                  <a:srgbClr val="111111"/>
+                </a:solidFill>
+                <a:latin typeface="Times New Roman" pitchFamily="34" charset="0"/>
+                <a:ea typeface="Times New Roman" pitchFamily="34" charset="-122"/>
+                <a:cs typeface="Times New Roman" pitchFamily="34" charset="-120"/>
+              </a:rPr>
+              <a:t>Fecundity and fertility: </a:t>
+            </a:r>
+            <a:pPr algn="l" indent="0" marL="0">
+              <a:spcAft>
+                <a:spcPts val="800"/>
+              </a:spcAft>
+              <a:buNone/>
+            </a:pPr>
+            <a:r>
+              <a:rPr lang="en-US" sz="4000" dirty="0">
+                <a:solidFill>
+                  <a:srgbClr val="111111"/>
+                </a:solidFill>
+                <a:latin typeface="Times New Roman" pitchFamily="34" charset="0"/>
+                <a:ea typeface="Times New Roman" pitchFamily="34" charset="-122"/>
+                <a:cs typeface="Times New Roman" pitchFamily="34" charset="-120"/>
+              </a:rPr>
+              <a:t>A woman can be fecund (able to have children) but not fertile (having no live births).</a:t>
+            </a:r>
+            <a:endParaRPr lang="en-US" sz="4000" dirty="0"/>
           </a:p>
         </p:txBody>
       </p:sp>
@@ -14623,9 +15328,109 @@
           </a:p>
         </p:txBody>
       </p:sp>
+      <p:sp>
+        <p:nvSpPr>
+          <p:cNvPr id="3" name="Text 1"/>
+          <p:cNvSpPr/>
+          <p:nvPr/>
+        </p:nvSpPr>
+        <p:spPr>
+          <a:xfrm>
+            <a:off x="365760" y="1005840"/>
+            <a:ext cx="11460175" cy="731520"/>
+          </a:xfrm>
+          <a:prstGeom prst="rect">
+            <a:avLst/>
+          </a:prstGeom>
+          <a:noFill/>
+          <a:ln/>
+        </p:spPr>
+        <p:txBody>
+          <a:bodyPr wrap="square" lIns="0" tIns="0" rIns="0" bIns="0" rtlCol="0" anchor="ctr">
+            <a:normAutofit/>
+          </a:bodyPr>
+          <a:lstStyle/>
+          <a:p>
+            <a:pPr algn="ctr" indent="0" marL="0">
+              <a:buNone/>
+            </a:pPr>
+            <a:r>
+              <a:rPr lang="en-US" sz="3600" b="1" dirty="0">
+                <a:solidFill>
+                  <a:srgbClr val="990011"/>
+                </a:solidFill>
+                <a:latin typeface="Times New Roman" pitchFamily="34" charset="0"/>
+                <a:ea typeface="Times New Roman" pitchFamily="34" charset="-122"/>
+                <a:cs typeface="Times New Roman" pitchFamily="34" charset="-120"/>
+              </a:rPr>
+              <a:t>1. Measures of Fertility and Mortality</a:t>
+            </a:r>
+            <a:endParaRPr lang="en-US" sz="3600" dirty="0"/>
+          </a:p>
+        </p:txBody>
+      </p:sp>
+      <p:sp>
+        <p:nvSpPr>
+          <p:cNvPr id="4" name="Text 2"/>
+          <p:cNvSpPr/>
+          <p:nvPr/>
+        </p:nvSpPr>
+        <p:spPr>
+          <a:xfrm>
+            <a:off x="365760" y="1783080"/>
+            <a:ext cx="4846320" cy="4617720"/>
+          </a:xfrm>
+          <a:prstGeom prst="rect">
+            <a:avLst/>
+          </a:prstGeom>
+          <a:noFill/>
+          <a:ln/>
+        </p:spPr>
+        <p:txBody>
+          <a:bodyPr wrap="square" lIns="0" tIns="0" rIns="0" bIns="0" rtlCol="0" anchor="t"/>
+          <a:lstStyle/>
+          <a:p>
+            <a:pPr algn="l" indent="0" marL="0">
+              <a:spcAft>
+                <a:spcPts val="800"/>
+              </a:spcAft>
+              <a:buNone/>
+            </a:pPr>
+            <a:r>
+              <a:rPr lang="en-US" sz="3600" b="1" dirty="0">
+                <a:solidFill>
+                  <a:srgbClr val="111111"/>
+                </a:solidFill>
+                <a:latin typeface="Times New Roman" pitchFamily="34" charset="0"/>
+                <a:ea typeface="Times New Roman" pitchFamily="34" charset="-122"/>
+                <a:cs typeface="Times New Roman" pitchFamily="34" charset="-120"/>
+              </a:rPr>
+              <a:t>CBR formula: </a:t>
+            </a:r>
+            <a:pPr algn="l" indent="0" marL="0">
+              <a:spcAft>
+                <a:spcPts val="800"/>
+              </a:spcAft>
+              <a:buNone/>
+            </a:pPr>
+            <a:r>
+              <a:rPr lang="en-US" sz="3600" dirty="0">
+                <a:solidFill>
+                  <a:srgbClr val="111111"/>
+                </a:solidFill>
+                <a:latin typeface="Times New Roman" pitchFamily="34" charset="0"/>
+                <a:ea typeface="Times New Roman" pitchFamily="34" charset="-122"/>
+                <a:cs typeface="Times New Roman" pitchFamily="34" charset="-120"/>
+              </a:rPr>
+              <a:t>CBR = births ÷ total population × 1,000.</a:t>
+            </a:r>
+            <a:endParaRPr lang="en-US" sz="3600" dirty="0"/>
+          </a:p>
+        </p:txBody>
+      </p:sp>
       <p:pic>
         <p:nvPicPr>
-          <p:cNvPr id="3" name="Image 0" descr="/home/claude/f4/img/minesec_sheet.png">    </p:cNvPr>
+          <p:cNvPr id="5" name="Image 0" descr="/home/claude/f4/img/v2/indices_big.png">    </p:cNvPr>
           <p:cNvPicPr>
             <a:picLocks noChangeAspect="1"/>
           </p:cNvPicPr>
@@ -14639,8 +15444,8 @@
         </p:blipFill>
         <p:spPr>
           <a:xfrm>
-            <a:off x="0" y="658368"/>
-            <a:ext cx="5120640" cy="5833872"/>
+            <a:off x="5349240" y="2617506"/>
+            <a:ext cx="6659575" cy="2601397"/>
           </a:xfrm>
           <a:prstGeom prst="rect">
             <a:avLst/>
@@ -14649,14 +15454,14 @@
       </p:pic>
       <p:sp>
         <p:nvSpPr>
-          <p:cNvPr id="4" name="Text 1"/>
+          <p:cNvPr id="6" name="Text 3"/>
           <p:cNvSpPr/>
           <p:nvPr/>
         </p:nvSpPr>
         <p:spPr>
           <a:xfrm>
-            <a:off x="5349240" y="1005840"/>
-            <a:ext cx="6522415" cy="731520"/>
+            <a:off x="5349240" y="6089904"/>
+            <a:ext cx="6659575" cy="347472"/>
           </a:xfrm>
           <a:prstGeom prst="rect">
             <a:avLst/>
@@ -14665,105 +15470,24 @@
           <a:ln/>
         </p:spPr>
         <p:txBody>
-          <a:bodyPr wrap="square" lIns="0" tIns="0" rIns="0" bIns="0" rtlCol="0" anchor="ctr">
-            <a:normAutofit/>
-          </a:bodyPr>
+          <a:bodyPr wrap="square" lIns="0" tIns="0" rIns="0" bIns="0" rtlCol="0" anchor="ctr"/>
           <a:lstStyle/>
           <a:p>
             <a:pPr algn="ctr" indent="0" marL="0">
               <a:buNone/>
             </a:pPr>
             <a:r>
-              <a:rPr lang="en-US" sz="3600" b="1" dirty="0">
-                <a:solidFill>
-                  <a:srgbClr val="990011"/>
+              <a:rPr lang="en-US" sz="1600" i="1" dirty="0">
+                <a:solidFill>
+                  <a:srgbClr val="555555"/>
                 </a:solidFill>
                 <a:latin typeface="Times New Roman" pitchFamily="34" charset="0"/>
                 <a:ea typeface="Times New Roman" pitchFamily="34" charset="-122"/>
                 <a:cs typeface="Times New Roman" pitchFamily="34" charset="-120"/>
               </a:rPr>
-              <a:t>2. Projections, Doubling Time and Migration</a:t>
-            </a:r>
-            <a:endParaRPr lang="en-US" sz="3600" dirty="0"/>
-          </a:p>
-        </p:txBody>
-      </p:sp>
-      <p:sp>
-        <p:nvSpPr>
-          <p:cNvPr id="5" name="Text 2"/>
-          <p:cNvSpPr/>
-          <p:nvPr/>
-        </p:nvSpPr>
-        <p:spPr>
-          <a:xfrm>
-            <a:off x="5349240" y="1783080"/>
-            <a:ext cx="6522415" cy="4663440"/>
-          </a:xfrm>
-          <a:prstGeom prst="rect">
-            <a:avLst/>
-          </a:prstGeom>
-          <a:noFill/>
-          <a:ln/>
-        </p:spPr>
-        <p:txBody>
-          <a:bodyPr wrap="square" lIns="0" tIns="0" rIns="0" bIns="0" rtlCol="0" anchor="t"/>
-          <a:lstStyle/>
-          <a:p>
-            <a:pPr algn="l" indent="0" marL="0">
-              <a:spcAft>
-                <a:spcPts val="800"/>
-              </a:spcAft>
-              <a:buNone/>
-            </a:pPr>
-            <a:r>
-              <a:rPr lang="en-US" sz="4000" i="1" dirty="0">
-                <a:solidFill>
-                  <a:srgbClr val="111111"/>
-                </a:solidFill>
-                <a:latin typeface="Times New Roman" pitchFamily="34" charset="0"/>
-                <a:ea typeface="Times New Roman" pitchFamily="34" charset="-122"/>
-                <a:cs typeface="Times New Roman" pitchFamily="34" charset="-120"/>
-              </a:rPr>
-              <a:t>Other calculations include:</a:t>
-            </a:r>
-            <a:endParaRPr lang="en-US" sz="4000" dirty="0"/>
-          </a:p>
-          <a:p>
-            <a:pPr algn="l" indent="0" marL="0">
-              <a:spcAft>
-                <a:spcPts val="800"/>
-              </a:spcAft>
-              <a:buNone/>
-            </a:pPr>
-            <a:r>
-              <a:rPr lang="en-US" sz="4000" b="1" dirty="0">
-                <a:solidFill>
-                  <a:srgbClr val="111111"/>
-                </a:solidFill>
-                <a:latin typeface="Times New Roman" pitchFamily="34" charset="0"/>
-                <a:ea typeface="Times New Roman" pitchFamily="34" charset="-122"/>
-                <a:cs typeface="Times New Roman" pitchFamily="34" charset="-120"/>
-              </a:rPr>
-              <a:t>Doubling time: </a:t>
-            </a:r>
-            <a:pPr algn="l" indent="0" marL="0">
-              <a:spcAft>
-                <a:spcPts val="800"/>
-              </a:spcAft>
-              <a:buNone/>
-            </a:pPr>
-            <a:r>
-              <a:rPr lang="en-US" sz="4000" dirty="0">
-                <a:solidFill>
-                  <a:srgbClr val="111111"/>
-                </a:solidFill>
-                <a:latin typeface="Times New Roman" pitchFamily="34" charset="0"/>
-                <a:ea typeface="Times New Roman" pitchFamily="34" charset="-122"/>
-                <a:cs typeface="Times New Roman" pitchFamily="34" charset="-120"/>
-              </a:rPr>
-              <a:t>Doubling time ≈ 70 ÷ growth rate (%). At 2.6 %, a population doubles in about 27 years.</a:t>
-            </a:r>
-            <a:endParaRPr lang="en-US" sz="4000" dirty="0"/>
+              <a:t>Illustration: the main formulas</a:t>
+            </a:r>
+            <a:endParaRPr lang="en-US" sz="1600" dirty="0"/>
           </a:p>
         </p:txBody>
       </p:sp>
@@ -15000,7 +15724,7 @@
                 <a:ea typeface="Times New Roman" pitchFamily="34" charset="-122"/>
                 <a:cs typeface="Times New Roman" pitchFamily="34" charset="-120"/>
               </a:rPr>
-              <a:t>Draw the population change system for your village or town.</a:t>
+              <a:t>Define the crude birth rate.</a:t>
             </a:r>
             <a:endParaRPr lang="en-US" sz="4000" dirty="0"/>
           </a:p>
@@ -15118,9 +15842,109 @@
           </a:p>
         </p:txBody>
       </p:sp>
+      <p:sp>
+        <p:nvSpPr>
+          <p:cNvPr id="3" name="Text 1"/>
+          <p:cNvSpPr/>
+          <p:nvPr/>
+        </p:nvSpPr>
+        <p:spPr>
+          <a:xfrm>
+            <a:off x="365760" y="1005840"/>
+            <a:ext cx="11460175" cy="731520"/>
+          </a:xfrm>
+          <a:prstGeom prst="rect">
+            <a:avLst/>
+          </a:prstGeom>
+          <a:noFill/>
+          <a:ln/>
+        </p:spPr>
+        <p:txBody>
+          <a:bodyPr wrap="square" lIns="0" tIns="0" rIns="0" bIns="0" rtlCol="0" anchor="ctr">
+            <a:normAutofit/>
+          </a:bodyPr>
+          <a:lstStyle/>
+          <a:p>
+            <a:pPr algn="ctr" indent="0" marL="0">
+              <a:buNone/>
+            </a:pPr>
+            <a:r>
+              <a:rPr lang="en-US" sz="3600" b="1" dirty="0">
+                <a:solidFill>
+                  <a:srgbClr val="990011"/>
+                </a:solidFill>
+                <a:latin typeface="Times New Roman" pitchFamily="34" charset="0"/>
+                <a:ea typeface="Times New Roman" pitchFamily="34" charset="-122"/>
+                <a:cs typeface="Times New Roman" pitchFamily="34" charset="-120"/>
+              </a:rPr>
+              <a:t>1. Measures of Fertility and Mortality</a:t>
+            </a:r>
+            <a:endParaRPr lang="en-US" sz="3600" dirty="0"/>
+          </a:p>
+        </p:txBody>
+      </p:sp>
+      <p:sp>
+        <p:nvSpPr>
+          <p:cNvPr id="4" name="Text 2"/>
+          <p:cNvSpPr/>
+          <p:nvPr/>
+        </p:nvSpPr>
+        <p:spPr>
+          <a:xfrm>
+            <a:off x="365760" y="1783080"/>
+            <a:ext cx="4846320" cy="4617720"/>
+          </a:xfrm>
+          <a:prstGeom prst="rect">
+            <a:avLst/>
+          </a:prstGeom>
+          <a:noFill/>
+          <a:ln/>
+        </p:spPr>
+        <p:txBody>
+          <a:bodyPr wrap="square" lIns="0" tIns="0" rIns="0" bIns="0" rtlCol="0" anchor="t"/>
+          <a:lstStyle/>
+          <a:p>
+            <a:pPr algn="l" indent="0" marL="0">
+              <a:spcAft>
+                <a:spcPts val="800"/>
+              </a:spcAft>
+              <a:buNone/>
+            </a:pPr>
+            <a:r>
+              <a:rPr lang="en-US" sz="3600" b="1" dirty="0">
+                <a:solidFill>
+                  <a:srgbClr val="111111"/>
+                </a:solidFill>
+                <a:latin typeface="Times New Roman" pitchFamily="34" charset="0"/>
+                <a:ea typeface="Times New Roman" pitchFamily="34" charset="-122"/>
+                <a:cs typeface="Times New Roman" pitchFamily="34" charset="-120"/>
+              </a:rPr>
+              <a:t>CBR example: </a:t>
+            </a:r>
+            <a:pPr algn="l" indent="0" marL="0">
+              <a:spcAft>
+                <a:spcPts val="800"/>
+              </a:spcAft>
+              <a:buNone/>
+            </a:pPr>
+            <a:r>
+              <a:rPr lang="en-US" sz="3600" dirty="0">
+                <a:solidFill>
+                  <a:srgbClr val="111111"/>
+                </a:solidFill>
+                <a:latin typeface="Times New Roman" pitchFamily="34" charset="0"/>
+                <a:ea typeface="Times New Roman" pitchFamily="34" charset="-122"/>
+                <a:cs typeface="Times New Roman" pitchFamily="34" charset="-120"/>
+              </a:rPr>
+              <a:t>16,000 births in a town of 400,000: 16,000 ÷ 400,000 × 1,000 = 40 per 1,000.</a:t>
+            </a:r>
+            <a:endParaRPr lang="en-US" sz="3600" dirty="0"/>
+          </a:p>
+        </p:txBody>
+      </p:sp>
       <p:pic>
         <p:nvPicPr>
-          <p:cNvPr id="3" name="Image 0" descr="/home/claude/f4/img/minesec_sheet.png">    </p:cNvPr>
+          <p:cNvPr id="5" name="Image 0" descr="/home/claude/f4/img/v2/pop2_garoua_calc.png">    </p:cNvPr>
           <p:cNvPicPr>
             <a:picLocks noChangeAspect="1"/>
           </p:cNvPicPr>
@@ -15134,8 +15958,8 @@
         </p:blipFill>
         <p:spPr>
           <a:xfrm>
-            <a:off x="0" y="658368"/>
-            <a:ext cx="1463040" cy="5833872"/>
+            <a:off x="5349240" y="2617506"/>
+            <a:ext cx="6659575" cy="2601397"/>
           </a:xfrm>
           <a:prstGeom prst="rect">
             <a:avLst/>
@@ -15144,14 +15968,14 @@
       </p:pic>
       <p:sp>
         <p:nvSpPr>
-          <p:cNvPr id="4" name="Text 1"/>
+          <p:cNvPr id="6" name="Text 3"/>
           <p:cNvSpPr/>
           <p:nvPr/>
         </p:nvSpPr>
         <p:spPr>
           <a:xfrm>
-            <a:off x="1691640" y="1005840"/>
-            <a:ext cx="10180015" cy="731520"/>
+            <a:off x="5349240" y="6089904"/>
+            <a:ext cx="6659575" cy="347472"/>
           </a:xfrm>
           <a:prstGeom prst="rect">
             <a:avLst/>
@@ -15160,122 +15984,24 @@
           <a:ln/>
         </p:spPr>
         <p:txBody>
-          <a:bodyPr wrap="square" lIns="0" tIns="0" rIns="0" bIns="0" rtlCol="0" anchor="ctr">
-            <a:normAutofit/>
-          </a:bodyPr>
+          <a:bodyPr wrap="square" lIns="0" tIns="0" rIns="0" bIns="0" rtlCol="0" anchor="ctr"/>
           <a:lstStyle/>
           <a:p>
             <a:pPr algn="ctr" indent="0" marL="0">
               <a:buNone/>
             </a:pPr>
             <a:r>
-              <a:rPr lang="en-US" sz="3600" b="1" dirty="0">
-                <a:solidFill>
-                  <a:srgbClr val="990011"/>
+              <a:rPr lang="en-US" sz="1600" i="1" dirty="0">
+                <a:solidFill>
+                  <a:srgbClr val="555555"/>
                 </a:solidFill>
                 <a:latin typeface="Times New Roman" pitchFamily="34" charset="0"/>
                 <a:ea typeface="Times New Roman" pitchFamily="34" charset="-122"/>
                 <a:cs typeface="Times New Roman" pitchFamily="34" charset="-120"/>
               </a:rPr>
-              <a:t>2. Projections, Doubling Time and Migration (continued)</a:t>
-            </a:r>
-            <a:endParaRPr lang="en-US" sz="3600" dirty="0"/>
-          </a:p>
-        </p:txBody>
-      </p:sp>
-      <p:sp>
-        <p:nvSpPr>
-          <p:cNvPr id="5" name="Text 2"/>
-          <p:cNvSpPr/>
-          <p:nvPr/>
-        </p:nvSpPr>
-        <p:spPr>
-          <a:xfrm>
-            <a:off x="1691640" y="1783080"/>
-            <a:ext cx="10180015" cy="4663440"/>
-          </a:xfrm>
-          <a:prstGeom prst="rect">
-            <a:avLst/>
-          </a:prstGeom>
-          <a:noFill/>
-          <a:ln/>
-        </p:spPr>
-        <p:txBody>
-          <a:bodyPr wrap="square" lIns="0" tIns="0" rIns="0" bIns="0" rtlCol="0" anchor="t"/>
-          <a:lstStyle/>
-          <a:p>
-            <a:pPr algn="l" indent="0" marL="0">
-              <a:spcAft>
-                <a:spcPts val="800"/>
-              </a:spcAft>
-              <a:buNone/>
-            </a:pPr>
-            <a:r>
-              <a:rPr lang="en-US" sz="4000" b="1" dirty="0">
-                <a:solidFill>
-                  <a:srgbClr val="111111"/>
-                </a:solidFill>
-                <a:latin typeface="Times New Roman" pitchFamily="34" charset="0"/>
-                <a:ea typeface="Times New Roman" pitchFamily="34" charset="-122"/>
-                <a:cs typeface="Times New Roman" pitchFamily="34" charset="-120"/>
-              </a:rPr>
-              <a:t>Population projection: </a:t>
-            </a:r>
-            <a:pPr algn="l" indent="0" marL="0">
-              <a:spcAft>
-                <a:spcPts val="800"/>
-              </a:spcAft>
-              <a:buNone/>
-            </a:pPr>
-            <a:r>
-              <a:rPr lang="en-US" sz="4000" dirty="0">
-                <a:solidFill>
-                  <a:srgbClr val="111111"/>
-                </a:solidFill>
-                <a:latin typeface="Times New Roman" pitchFamily="34" charset="0"/>
-                <a:ea typeface="Times New Roman" pitchFamily="34" charset="-122"/>
-                <a:cs typeface="Times New Roman" pitchFamily="34" charset="-120"/>
-              </a:rPr>
-              <a:t>Future population = present population × (1 + r)ⁿ, where r is the growth rate and n the number of years. It helps to plan services.</a:t>
-            </a:r>
-            <a:endParaRPr lang="en-US" sz="4000" dirty="0"/>
-          </a:p>
-          <a:p>
-            <a:pPr algn="l" indent="0" marL="0">
-              <a:spcAft>
-                <a:spcPts val="800"/>
-              </a:spcAft>
-              <a:buNone/>
-            </a:pPr>
-            <a:r>
-              <a:rPr lang="en-US" sz="4000" b="1" dirty="0">
-                <a:solidFill>
-                  <a:srgbClr val="111111"/>
-                </a:solidFill>
-                <a:latin typeface="Times New Roman" pitchFamily="34" charset="0"/>
-                <a:ea typeface="Times New Roman" pitchFamily="34" charset="-122"/>
-                <a:cs typeface="Times New Roman" pitchFamily="34" charset="-120"/>
-              </a:rPr>
-              <a:t>Net migration: </a:t>
-            </a:r>
-            <a:pPr algn="l" indent="0" marL="0">
-              <a:spcAft>
-                <a:spcPts val="800"/>
-              </a:spcAft>
-              <a:buNone/>
-            </a:pPr>
-            <a:r>
-              <a:rPr lang="en-US" sz="4000" dirty="0">
-                <a:solidFill>
-                  <a:srgbClr val="111111"/>
-                </a:solidFill>
-                <a:latin typeface="Times New Roman" pitchFamily="34" charset="0"/>
-                <a:ea typeface="Times New Roman" pitchFamily="34" charset="-122"/>
-                <a:cs typeface="Times New Roman" pitchFamily="34" charset="-120"/>
-              </a:rPr>
-              <a:t>Net migration = immigrants − emigrants. A town receiving 5,000 and losing 2,000 has a net gain of 3,000.</a:t>
-            </a:r>
-            <a:endParaRPr lang="en-US" sz="4000" dirty="0"/>
+              <a:t>Illustration: a worked example</a:t>
+            </a:r>
+            <a:endParaRPr lang="en-US" sz="1600" dirty="0"/>
           </a:p>
         </p:txBody>
       </p:sp>
@@ -15391,48 +16117,9 @@
           </a:p>
         </p:txBody>
       </p:sp>
-      <p:sp>
-        <p:nvSpPr>
-          <p:cNvPr id="3" name="Text 1"/>
-          <p:cNvSpPr/>
-          <p:nvPr/>
-        </p:nvSpPr>
-        <p:spPr>
-          <a:xfrm>
-            <a:off x="457200" y="1005840"/>
-            <a:ext cx="11277295" cy="731520"/>
-          </a:xfrm>
-          <a:prstGeom prst="rect">
-            <a:avLst/>
-          </a:prstGeom>
-          <a:noFill/>
-          <a:ln/>
-        </p:spPr>
-        <p:txBody>
-          <a:bodyPr wrap="square" lIns="0" tIns="0" rIns="0" bIns="0" rtlCol="0" anchor="ctr"/>
-          <a:lstStyle/>
-          <a:p>
-            <a:pPr algn="ctr" indent="0" marL="0">
-              <a:buNone/>
-            </a:pPr>
-            <a:r>
-              <a:rPr lang="en-US" sz="3600" b="1" dirty="0">
-                <a:solidFill>
-                  <a:srgbClr val="990011"/>
-                </a:solidFill>
-                <a:latin typeface="Times New Roman" pitchFamily="34" charset="0"/>
-                <a:ea typeface="Times New Roman" pitchFamily="34" charset="-122"/>
-                <a:cs typeface="Times New Roman" pitchFamily="34" charset="-120"/>
-              </a:rPr>
-              <a:t>2. Projections, Doubling Time and Migration</a:t>
-            </a:r>
-            <a:endParaRPr lang="en-US" sz="3600" dirty="0"/>
-          </a:p>
-        </p:txBody>
-      </p:sp>
       <p:pic>
         <p:nvPicPr>
-          <p:cNvPr id="4" name="Image 0" descr="/home/claude/f4/img/v2/projection_big.png">    </p:cNvPr>
+          <p:cNvPr id="3" name="Image 0" descr="/home/claude/f4/img/minesec_sheet.png">    </p:cNvPr>
           <p:cNvPicPr>
             <a:picLocks noChangeAspect="1"/>
           </p:cNvPicPr>
@@ -15446,8 +16133,8 @@
         </p:blipFill>
         <p:spPr>
           <a:xfrm>
-            <a:off x="1215564" y="1783080"/>
-            <a:ext cx="9760567" cy="4270248"/>
+            <a:off x="0" y="658368"/>
+            <a:ext cx="5120640" cy="5833872"/>
           </a:xfrm>
           <a:prstGeom prst="rect">
             <a:avLst/>
@@ -15456,14 +16143,14 @@
       </p:pic>
       <p:sp>
         <p:nvSpPr>
-          <p:cNvPr id="5" name="Text 2"/>
+          <p:cNvPr id="4" name="Text 1"/>
           <p:cNvSpPr/>
           <p:nvPr/>
         </p:nvSpPr>
         <p:spPr>
           <a:xfrm>
-            <a:off x="457200" y="6089904"/>
-            <a:ext cx="11277295" cy="347472"/>
+            <a:off x="5349240" y="1005840"/>
+            <a:ext cx="6522415" cy="731520"/>
           </a:xfrm>
           <a:prstGeom prst="rect">
             <a:avLst/>
@@ -15472,24 +16159,122 @@
           <a:ln/>
         </p:spPr>
         <p:txBody>
-          <a:bodyPr wrap="square" lIns="0" tIns="0" rIns="0" bIns="0" rtlCol="0" anchor="ctr"/>
+          <a:bodyPr wrap="square" lIns="0" tIns="0" rIns="0" bIns="0" rtlCol="0" anchor="ctr">
+            <a:normAutofit/>
+          </a:bodyPr>
           <a:lstStyle/>
           <a:p>
             <a:pPr algn="ctr" indent="0" marL="0">
               <a:buNone/>
             </a:pPr>
             <a:r>
-              <a:rPr lang="en-US" sz="1800" i="1" dirty="0">
-                <a:solidFill>
-                  <a:srgbClr val="555555"/>
+              <a:rPr lang="en-US" sz="3600" b="1" dirty="0">
+                <a:solidFill>
+                  <a:srgbClr val="990011"/>
                 </a:solidFill>
                 <a:latin typeface="Times New Roman" pitchFamily="34" charset="0"/>
                 <a:ea typeface="Times New Roman" pitchFamily="34" charset="-122"/>
                 <a:cs typeface="Times New Roman" pitchFamily="34" charset="-120"/>
               </a:rPr>
-              <a:t>Illustration: population projection and doubling time</a:t>
-            </a:r>
-            <a:endParaRPr lang="en-US" sz="1800" dirty="0"/>
+              <a:t>1. Measures of Fertility and Mortality</a:t>
+            </a:r>
+            <a:endParaRPr lang="en-US" sz="3600" dirty="0"/>
+          </a:p>
+        </p:txBody>
+      </p:sp>
+      <p:sp>
+        <p:nvSpPr>
+          <p:cNvPr id="5" name="Text 2"/>
+          <p:cNvSpPr/>
+          <p:nvPr/>
+        </p:nvSpPr>
+        <p:spPr>
+          <a:xfrm>
+            <a:off x="5349240" y="1783080"/>
+            <a:ext cx="6522415" cy="4663440"/>
+          </a:xfrm>
+          <a:prstGeom prst="rect">
+            <a:avLst/>
+          </a:prstGeom>
+          <a:noFill/>
+          <a:ln/>
+        </p:spPr>
+        <p:txBody>
+          <a:bodyPr wrap="square" lIns="0" tIns="0" rIns="0" bIns="0" rtlCol="0" anchor="t"/>
+          <a:lstStyle/>
+          <a:p>
+            <a:pPr algn="l" indent="0" marL="0">
+              <a:spcAft>
+                <a:spcPts val="800"/>
+              </a:spcAft>
+              <a:buNone/>
+            </a:pPr>
+            <a:r>
+              <a:rPr lang="en-US" sz="4000" b="1" dirty="0">
+                <a:solidFill>
+                  <a:srgbClr val="111111"/>
+                </a:solidFill>
+                <a:latin typeface="Times New Roman" pitchFamily="34" charset="0"/>
+                <a:ea typeface="Times New Roman" pitchFamily="34" charset="-122"/>
+                <a:cs typeface="Times New Roman" pitchFamily="34" charset="-120"/>
+              </a:rPr>
+              <a:t>CDR formula: </a:t>
+            </a:r>
+            <a:pPr algn="l" indent="0" marL="0">
+              <a:spcAft>
+                <a:spcPts val="800"/>
+              </a:spcAft>
+              <a:buNone/>
+            </a:pPr>
+            <a:r>
+              <a:rPr lang="en-US" sz="4000" dirty="0">
+                <a:solidFill>
+                  <a:srgbClr val="111111"/>
+                </a:solidFill>
+                <a:latin typeface="Times New Roman" pitchFamily="34" charset="0"/>
+                <a:ea typeface="Times New Roman" pitchFamily="34" charset="-122"/>
+                <a:cs typeface="Times New Roman" pitchFamily="34" charset="-120"/>
+              </a:rPr>
+              <a:t>CDR = deaths ÷ total population × 1,000.</a:t>
+            </a:r>
+            <a:endParaRPr lang="en-US" sz="4000" dirty="0"/>
+          </a:p>
+          <a:p>
+            <a:pPr algn="l" indent="0" marL="0">
+              <a:spcAft>
+                <a:spcPts val="800"/>
+              </a:spcAft>
+              <a:buNone/>
+            </a:pPr>
+            <a:r>
+              <a:rPr lang="en-US" sz="4000" b="1" dirty="0">
+                <a:solidFill>
+                  <a:srgbClr val="111111"/>
+                </a:solidFill>
+                <a:latin typeface="Times New Roman" pitchFamily="34" charset="0"/>
+                <a:ea typeface="Times New Roman" pitchFamily="34" charset="-122"/>
+                <a:cs typeface="Times New Roman" pitchFamily="34" charset="-120"/>
+              </a:rPr>
+              <a:t>CDR example: </a:t>
+            </a:r>
+            <a:pPr algn="l" indent="0" marL="0">
+              <a:spcAft>
+                <a:spcPts val="800"/>
+              </a:spcAft>
+              <a:buNone/>
+            </a:pPr>
+            <a:r>
+              <a:rPr lang="en-US" sz="4000" dirty="0">
+                <a:solidFill>
+                  <a:srgbClr val="111111"/>
+                </a:solidFill>
+                <a:latin typeface="Times New Roman" pitchFamily="34" charset="0"/>
+                <a:ea typeface="Times New Roman" pitchFamily="34" charset="-122"/>
+                <a:cs typeface="Times New Roman" pitchFamily="34" charset="-120"/>
+              </a:rPr>
+              <a:t>4,000 deaths in the same town: 4,000 ÷ 400,000 × 1,000 = 10 per 1,000.</a:t>
+            </a:r>
+            <a:endParaRPr lang="en-US" sz="4000" dirty="0"/>
           </a:p>
         </p:txBody>
       </p:sp>
@@ -15599,7 +16384,7 @@
                 <a:ea typeface="Calibri" pitchFamily="34" charset="-122"/>
                 <a:cs typeface="Calibri" pitchFamily="34" charset="-120"/>
               </a:rPr>
-              <a:t>FORMATIVE EVALUATION</a:t>
+              <a:t>BOARD SUMMARY</a:t>
             </a:r>
             <a:endParaRPr lang="en-US" sz="1400" dirty="0"/>
           </a:p>
@@ -15622,7 +16407,7 @@
         <p:spPr>
           <a:xfrm>
             <a:off x="0" y="658368"/>
-            <a:ext cx="5120640" cy="5833872"/>
+            <a:ext cx="3840480" cy="5833872"/>
           </a:xfrm>
           <a:prstGeom prst="rect">
             <a:avLst/>
@@ -15637,8 +16422,8 @@
         </p:nvSpPr>
         <p:spPr>
           <a:xfrm>
-            <a:off x="5349240" y="1005840"/>
-            <a:ext cx="6522415" cy="731520"/>
+            <a:off x="4069080" y="1005840"/>
+            <a:ext cx="7802575" cy="731520"/>
           </a:xfrm>
           <a:prstGeom prst="rect">
             <a:avLst/>
@@ -15664,7 +16449,7 @@
                 <a:ea typeface="Times New Roman" pitchFamily="34" charset="-122"/>
                 <a:cs typeface="Times New Roman" pitchFamily="34" charset="-120"/>
               </a:rPr>
-              <a:t>Evaluation 1</a:t>
+              <a:t>2. Calculating Population Change</a:t>
             </a:r>
             <a:endParaRPr lang="en-US" sz="3600" dirty="0"/>
           </a:p>
@@ -15678,8 +16463,8 @@
         </p:nvSpPr>
         <p:spPr>
           <a:xfrm>
-            <a:off x="5349240" y="1783080"/>
-            <a:ext cx="6522415" cy="4663440"/>
+            <a:off x="4069080" y="1783080"/>
+            <a:ext cx="7802575" cy="4663440"/>
           </a:xfrm>
           <a:prstGeom prst="rect">
             <a:avLst/>
@@ -15698,7 +16483,7 @@
               <a:buNone/>
             </a:pPr>
             <a:r>
-              <a:rPr lang="en-US" sz="4000" dirty="0">
+              <a:rPr lang="en-US" sz="4000" i="1" dirty="0">
                 <a:solidFill>
                   <a:srgbClr val="111111"/>
                 </a:solidFill>
@@ -15706,7 +16491,81 @@
                 <a:ea typeface="Times New Roman" pitchFamily="34" charset="-122"/>
                 <a:cs typeface="Times New Roman" pitchFamily="34" charset="-120"/>
               </a:rPr>
-              <a:t>A town of 50,000 has 1,500 births. Find the CBR.</a:t>
+              <a:t>Population change is calculated as follows:</a:t>
+            </a:r>
+            <a:endParaRPr lang="en-US" sz="4000" dirty="0"/>
+          </a:p>
+          <a:p>
+            <a:pPr algn="l" indent="0" marL="0">
+              <a:spcAft>
+                <a:spcPts val="800"/>
+              </a:spcAft>
+              <a:buNone/>
+            </a:pPr>
+            <a:r>
+              <a:rPr lang="en-US" sz="4000" b="1" dirty="0">
+                <a:solidFill>
+                  <a:srgbClr val="111111"/>
+                </a:solidFill>
+                <a:latin typeface="Times New Roman" pitchFamily="34" charset="0"/>
+                <a:ea typeface="Times New Roman" pitchFamily="34" charset="-122"/>
+                <a:cs typeface="Times New Roman" pitchFamily="34" charset="-120"/>
+              </a:rPr>
+              <a:t>Rate of natural increase (RNI): </a:t>
+            </a:r>
+            <a:pPr algn="l" indent="0" marL="0">
+              <a:spcAft>
+                <a:spcPts val="800"/>
+              </a:spcAft>
+              <a:buNone/>
+            </a:pPr>
+            <a:r>
+              <a:rPr lang="en-US" sz="4000" dirty="0">
+                <a:solidFill>
+                  <a:srgbClr val="111111"/>
+                </a:solidFill>
+                <a:latin typeface="Times New Roman" pitchFamily="34" charset="0"/>
+                <a:ea typeface="Times New Roman" pitchFamily="34" charset="-122"/>
+                <a:cs typeface="Times New Roman" pitchFamily="34" charset="-120"/>
+              </a:rPr>
+              <a:t>RNI (%) = (CBR − CDR) ÷ 10; it excludes migration.</a:t>
+            </a:r>
+            <a:endParaRPr lang="en-US" sz="4000" dirty="0"/>
+          </a:p>
+          <a:p>
+            <a:pPr algn="l" indent="0" marL="0">
+              <a:spcAft>
+                <a:spcPts val="800"/>
+              </a:spcAft>
+              <a:buNone/>
+            </a:pPr>
+            <a:r>
+              <a:rPr lang="en-US" sz="4000" b="1" dirty="0">
+                <a:solidFill>
+                  <a:srgbClr val="111111"/>
+                </a:solidFill>
+                <a:latin typeface="Times New Roman" pitchFamily="34" charset="0"/>
+                <a:ea typeface="Times New Roman" pitchFamily="34" charset="-122"/>
+                <a:cs typeface="Times New Roman" pitchFamily="34" charset="-120"/>
+              </a:rPr>
+              <a:t>RNI example: </a:t>
+            </a:r>
+            <a:pPr algn="l" indent="0" marL="0">
+              <a:spcAft>
+                <a:spcPts val="800"/>
+              </a:spcAft>
+              <a:buNone/>
+            </a:pPr>
+            <a:r>
+              <a:rPr lang="en-US" sz="4000" dirty="0">
+                <a:solidFill>
+                  <a:srgbClr val="111111"/>
+                </a:solidFill>
+                <a:latin typeface="Times New Roman" pitchFamily="34" charset="0"/>
+                <a:ea typeface="Times New Roman" pitchFamily="34" charset="-122"/>
+                <a:cs typeface="Times New Roman" pitchFamily="34" charset="-120"/>
+              </a:rPr>
+              <a:t>With a CBR of 40 and a CDR of 10: (40 − 10) ÷ 10 = 3 %.</a:t>
             </a:r>
             <a:endParaRPr lang="en-US" sz="4000" dirty="0"/>
           </a:p>
@@ -15818,7 +16677,7 @@
                 <a:ea typeface="Calibri" pitchFamily="34" charset="-122"/>
                 <a:cs typeface="Calibri" pitchFamily="34" charset="-120"/>
               </a:rPr>
-              <a:t>FORMATIVE EVALUATION</a:t>
+              <a:t>BOARD SUMMARY</a:t>
             </a:r>
             <a:endParaRPr lang="en-US" sz="1400" dirty="0"/>
           </a:p>
@@ -15883,7 +16742,7 @@
                 <a:ea typeface="Times New Roman" pitchFamily="34" charset="-122"/>
                 <a:cs typeface="Times New Roman" pitchFamily="34" charset="-120"/>
               </a:rPr>
-              <a:t>Expected Answer</a:t>
+              <a:t>2. Calculating Population Change (continued)</a:t>
             </a:r>
             <a:endParaRPr lang="en-US" sz="3600" dirty="0"/>
           </a:p>
@@ -15917,7 +16776,7 @@
               <a:buNone/>
             </a:pPr>
             <a:r>
-              <a:rPr lang="en-US" sz="4000" dirty="0">
+              <a:rPr lang="en-US" sz="4000" b="1" dirty="0">
                 <a:solidFill>
                   <a:srgbClr val="111111"/>
                 </a:solidFill>
@@ -15925,7 +16784,61 @@
                 <a:ea typeface="Times New Roman" pitchFamily="34" charset="-122"/>
                 <a:cs typeface="Times New Roman" pitchFamily="34" charset="-120"/>
               </a:rPr>
-              <a:t>1,500 ÷ 50,000 × 1,000 = 30 ‰.</a:t>
+              <a:t>Net migration rate: </a:t>
+            </a:r>
+            <a:pPr algn="l" indent="0" marL="0">
+              <a:spcAft>
+                <a:spcPts val="800"/>
+              </a:spcAft>
+              <a:buNone/>
+            </a:pPr>
+            <a:r>
+              <a:rPr lang="en-US" sz="4000" dirty="0">
+                <a:solidFill>
+                  <a:srgbClr val="111111"/>
+                </a:solidFill>
+                <a:latin typeface="Times New Roman" pitchFamily="34" charset="0"/>
+                <a:ea typeface="Times New Roman" pitchFamily="34" charset="-122"/>
+                <a:cs typeface="Times New Roman" pitchFamily="34" charset="-120"/>
+              </a:rPr>
+              <a:t>(Immigrants − emigrants) ÷ total population × 1,000.</a:t>
+            </a:r>
+            <a:endParaRPr lang="en-US" sz="4000" dirty="0"/>
+          </a:p>
+          <a:p>
+            <a:pPr algn="l" indent="0" marL="0">
+              <a:spcAft>
+                <a:spcPts val="800"/>
+              </a:spcAft>
+              <a:buNone/>
+            </a:pPr>
+            <a:r>
+              <a:rPr lang="en-US" sz="4000" b="1" dirty="0">
+                <a:solidFill>
+                  <a:srgbClr val="111111"/>
+                </a:solidFill>
+                <a:latin typeface="Times New Roman" pitchFamily="34" charset="0"/>
+                <a:ea typeface="Times New Roman" pitchFamily="34" charset="-122"/>
+                <a:cs typeface="Times New Roman" pitchFamily="34" charset="-120"/>
+              </a:rPr>
+              <a:t>Growth rate: </a:t>
+            </a:r>
+            <a:pPr algn="l" indent="0" marL="0">
+              <a:spcAft>
+                <a:spcPts val="800"/>
+              </a:spcAft>
+              <a:buNone/>
+            </a:pPr>
+            <a:r>
+              <a:rPr lang="en-US" sz="4000" dirty="0">
+                <a:solidFill>
+                  <a:srgbClr val="111111"/>
+                </a:solidFill>
+                <a:latin typeface="Times New Roman" pitchFamily="34" charset="0"/>
+                <a:ea typeface="Times New Roman" pitchFamily="34" charset="-122"/>
+                <a:cs typeface="Times New Roman" pitchFamily="34" charset="-120"/>
+              </a:rPr>
+              <a:t>[(births − deaths) + (immigrants − emigrants)] ÷ population × 100.</a:t>
             </a:r>
             <a:endParaRPr lang="en-US" sz="4000" dirty="0"/>
           </a:p>
@@ -16037,15 +16950,135 @@
                 <a:ea typeface="Calibri" pitchFamily="34" charset="-122"/>
                 <a:cs typeface="Calibri" pitchFamily="34" charset="-120"/>
               </a:rPr>
-              <a:t>FORMATIVE EVALUATION</a:t>
+              <a:t>BOARD SUMMARY</a:t>
             </a:r>
             <a:endParaRPr lang="en-US" sz="1400" dirty="0"/>
+          </a:p>
+        </p:txBody>
+      </p:sp>
+      <p:sp>
+        <p:nvSpPr>
+          <p:cNvPr id="3" name="Text 1"/>
+          <p:cNvSpPr/>
+          <p:nvPr/>
+        </p:nvSpPr>
+        <p:spPr>
+          <a:xfrm>
+            <a:off x="365760" y="1005840"/>
+            <a:ext cx="11460175" cy="731520"/>
+          </a:xfrm>
+          <a:prstGeom prst="rect">
+            <a:avLst/>
+          </a:prstGeom>
+          <a:noFill/>
+          <a:ln/>
+        </p:spPr>
+        <p:txBody>
+          <a:bodyPr wrap="square" lIns="0" tIns="0" rIns="0" bIns="0" rtlCol="0" anchor="ctr">
+            <a:normAutofit/>
+          </a:bodyPr>
+          <a:lstStyle/>
+          <a:p>
+            <a:pPr algn="ctr" indent="0" marL="0">
+              <a:buNone/>
+            </a:pPr>
+            <a:r>
+              <a:rPr lang="en-US" sz="3600" b="1" dirty="0">
+                <a:solidFill>
+                  <a:srgbClr val="990011"/>
+                </a:solidFill>
+                <a:latin typeface="Times New Roman" pitchFamily="34" charset="0"/>
+                <a:ea typeface="Times New Roman" pitchFamily="34" charset="-122"/>
+                <a:cs typeface="Times New Roman" pitchFamily="34" charset="-120"/>
+              </a:rPr>
+              <a:t>3. Projecting Future Population</a:t>
+            </a:r>
+            <a:endParaRPr lang="en-US" sz="3600" dirty="0"/>
+          </a:p>
+        </p:txBody>
+      </p:sp>
+      <p:sp>
+        <p:nvSpPr>
+          <p:cNvPr id="4" name="Text 2"/>
+          <p:cNvSpPr/>
+          <p:nvPr/>
+        </p:nvSpPr>
+        <p:spPr>
+          <a:xfrm>
+            <a:off x="365760" y="1783080"/>
+            <a:ext cx="4846320" cy="4617720"/>
+          </a:xfrm>
+          <a:prstGeom prst="rect">
+            <a:avLst/>
+          </a:prstGeom>
+          <a:noFill/>
+          <a:ln/>
+        </p:spPr>
+        <p:txBody>
+          <a:bodyPr wrap="square" lIns="0" tIns="0" rIns="0" bIns="0" rtlCol="0" anchor="t"/>
+          <a:lstStyle/>
+          <a:p>
+            <a:pPr algn="l" indent="0" marL="0">
+              <a:spcAft>
+                <a:spcPts val="800"/>
+              </a:spcAft>
+              <a:buNone/>
+            </a:pPr>
+            <a:r>
+              <a:rPr lang="en-US" sz="3600" i="1" dirty="0">
+                <a:solidFill>
+                  <a:srgbClr val="111111"/>
+                </a:solidFill>
+                <a:latin typeface="Times New Roman" pitchFamily="34" charset="0"/>
+                <a:ea typeface="Times New Roman" pitchFamily="34" charset="-122"/>
+                <a:cs typeface="Times New Roman" pitchFamily="34" charset="-120"/>
+              </a:rPr>
+              <a:t>The future population is projected as follows:</a:t>
+            </a:r>
+            <a:endParaRPr lang="en-US" sz="3600" dirty="0"/>
+          </a:p>
+          <a:p>
+            <a:pPr algn="l" indent="0" marL="0">
+              <a:spcAft>
+                <a:spcPts val="800"/>
+              </a:spcAft>
+              <a:buNone/>
+            </a:pPr>
+            <a:r>
+              <a:rPr lang="en-US" sz="3600" b="1" dirty="0">
+                <a:solidFill>
+                  <a:srgbClr val="111111"/>
+                </a:solidFill>
+                <a:latin typeface="Times New Roman" pitchFamily="34" charset="0"/>
+                <a:ea typeface="Times New Roman" pitchFamily="34" charset="-122"/>
+                <a:cs typeface="Times New Roman" pitchFamily="34" charset="-120"/>
+              </a:rPr>
+              <a:t>Rule of 70: </a:t>
+            </a:r>
+            <a:pPr algn="l" indent="0" marL="0">
+              <a:spcAft>
+                <a:spcPts val="800"/>
+              </a:spcAft>
+              <a:buNone/>
+            </a:pPr>
+            <a:r>
+              <a:rPr lang="en-US" sz="3600" dirty="0">
+                <a:solidFill>
+                  <a:srgbClr val="111111"/>
+                </a:solidFill>
+                <a:latin typeface="Times New Roman" pitchFamily="34" charset="0"/>
+                <a:ea typeface="Times New Roman" pitchFamily="34" charset="-122"/>
+                <a:cs typeface="Times New Roman" pitchFamily="34" charset="-120"/>
+              </a:rPr>
+              <a:t>Doubling time (years) ≈ 70 ÷ growth rate (%).</a:t>
+            </a:r>
+            <a:endParaRPr lang="en-US" sz="3600" dirty="0"/>
           </a:p>
         </p:txBody>
       </p:sp>
       <p:pic>
         <p:nvPicPr>
-          <p:cNvPr id="3" name="Image 0" descr="/home/claude/f4/img/minesec_sheet.png">    </p:cNvPr>
+          <p:cNvPr id="5" name="Image 0" descr="/home/claude/f4/img/v2/projection_big.png">    </p:cNvPr>
           <p:cNvPicPr>
             <a:picLocks noChangeAspect="1"/>
           </p:cNvPicPr>
@@ -16059,8 +17092,8 @@
         </p:blipFill>
         <p:spPr>
           <a:xfrm>
-            <a:off x="0" y="658368"/>
-            <a:ext cx="5120640" cy="5833872"/>
+            <a:off x="5349240" y="2461422"/>
+            <a:ext cx="6659575" cy="2913564"/>
           </a:xfrm>
           <a:prstGeom prst="rect">
             <a:avLst/>
@@ -16069,14 +17102,14 @@
       </p:pic>
       <p:sp>
         <p:nvSpPr>
-          <p:cNvPr id="4" name="Text 1"/>
+          <p:cNvPr id="6" name="Text 3"/>
           <p:cNvSpPr/>
           <p:nvPr/>
         </p:nvSpPr>
         <p:spPr>
           <a:xfrm>
-            <a:off x="5349240" y="1005840"/>
-            <a:ext cx="6522415" cy="731520"/>
+            <a:off x="5349240" y="6089904"/>
+            <a:ext cx="6659575" cy="347472"/>
           </a:xfrm>
           <a:prstGeom prst="rect">
             <a:avLst/>
@@ -16085,68 +17118,24 @@
           <a:ln/>
         </p:spPr>
         <p:txBody>
-          <a:bodyPr wrap="square" lIns="0" tIns="0" rIns="0" bIns="0" rtlCol="0" anchor="ctr">
-            <a:normAutofit/>
-          </a:bodyPr>
+          <a:bodyPr wrap="square" lIns="0" tIns="0" rIns="0" bIns="0" rtlCol="0" anchor="ctr"/>
           <a:lstStyle/>
           <a:p>
             <a:pPr algn="ctr" indent="0" marL="0">
               <a:buNone/>
             </a:pPr>
             <a:r>
-              <a:rPr lang="en-US" sz="3600" b="1" dirty="0">
-                <a:solidFill>
-                  <a:srgbClr val="990011"/>
+              <a:rPr lang="en-US" sz="1600" i="1" dirty="0">
+                <a:solidFill>
+                  <a:srgbClr val="555555"/>
                 </a:solidFill>
                 <a:latin typeface="Times New Roman" pitchFamily="34" charset="0"/>
                 <a:ea typeface="Times New Roman" pitchFamily="34" charset="-122"/>
                 <a:cs typeface="Times New Roman" pitchFamily="34" charset="-120"/>
               </a:rPr>
-              <a:t>Evaluation 2</a:t>
-            </a:r>
-            <a:endParaRPr lang="en-US" sz="3600" dirty="0"/>
-          </a:p>
-        </p:txBody>
-      </p:sp>
-      <p:sp>
-        <p:nvSpPr>
-          <p:cNvPr id="5" name="Text 2"/>
-          <p:cNvSpPr/>
-          <p:nvPr/>
-        </p:nvSpPr>
-        <p:spPr>
-          <a:xfrm>
-            <a:off x="5349240" y="1783080"/>
-            <a:ext cx="6522415" cy="4663440"/>
-          </a:xfrm>
-          <a:prstGeom prst="rect">
-            <a:avLst/>
-          </a:prstGeom>
-          <a:noFill/>
-          <a:ln/>
-        </p:spPr>
-        <p:txBody>
-          <a:bodyPr wrap="square" lIns="0" tIns="0" rIns="0" bIns="0" rtlCol="0" anchor="t"/>
-          <a:lstStyle/>
-          <a:p>
-            <a:pPr algn="l" indent="0" marL="0">
-              <a:spcAft>
-                <a:spcPts val="800"/>
-              </a:spcAft>
-              <a:buNone/>
-            </a:pPr>
-            <a:r>
-              <a:rPr lang="en-US" sz="4000" dirty="0">
-                <a:solidFill>
-                  <a:srgbClr val="111111"/>
-                </a:solidFill>
-                <a:latin typeface="Times New Roman" pitchFamily="34" charset="0"/>
-                <a:ea typeface="Times New Roman" pitchFamily="34" charset="-122"/>
-                <a:cs typeface="Times New Roman" pitchFamily="34" charset="-120"/>
-              </a:rPr>
-              <a:t>A population grows at 3.5 %. Find its doubling time.</a:t>
-            </a:r>
-            <a:endParaRPr lang="en-US" sz="4000" dirty="0"/>
+              <a:t>Illustration: a population doubling</a:t>
+            </a:r>
+            <a:endParaRPr lang="en-US" sz="1600" dirty="0"/>
           </a:p>
         </p:txBody>
       </p:sp>
@@ -16256,7 +17245,7 @@
                 <a:ea typeface="Calibri" pitchFamily="34" charset="-122"/>
                 <a:cs typeface="Calibri" pitchFamily="34" charset="-120"/>
               </a:rPr>
-              <a:t>FORMATIVE EVALUATION</a:t>
+              <a:t>BOARD SUMMARY</a:t>
             </a:r>
             <a:endParaRPr lang="en-US" sz="1400" dirty="0"/>
           </a:p>
@@ -16279,7 +17268,7 @@
         <p:spPr>
           <a:xfrm>
             <a:off x="0" y="658368"/>
-            <a:ext cx="5120640" cy="5833872"/>
+            <a:ext cx="3840480" cy="5833872"/>
           </a:xfrm>
           <a:prstGeom prst="rect">
             <a:avLst/>
@@ -16294,8 +17283,8 @@
         </p:nvSpPr>
         <p:spPr>
           <a:xfrm>
-            <a:off x="5349240" y="1005840"/>
-            <a:ext cx="6522415" cy="731520"/>
+            <a:off x="4069080" y="1005840"/>
+            <a:ext cx="7802575" cy="731520"/>
           </a:xfrm>
           <a:prstGeom prst="rect">
             <a:avLst/>
@@ -16321,7 +17310,7 @@
                 <a:ea typeface="Times New Roman" pitchFamily="34" charset="-122"/>
                 <a:cs typeface="Times New Roman" pitchFamily="34" charset="-120"/>
               </a:rPr>
-              <a:t>Expected Answer</a:t>
+              <a:t>3. Projecting Future Population</a:t>
             </a:r>
             <a:endParaRPr lang="en-US" sz="3600" dirty="0"/>
           </a:p>
@@ -16335,8 +17324,8 @@
         </p:nvSpPr>
         <p:spPr>
           <a:xfrm>
-            <a:off x="5349240" y="1783080"/>
-            <a:ext cx="6522415" cy="4663440"/>
+            <a:off x="4069080" y="1783080"/>
+            <a:ext cx="7802575" cy="4663440"/>
           </a:xfrm>
           <a:prstGeom prst="rect">
             <a:avLst/>
@@ -16355,7 +17344,7 @@
               <a:buNone/>
             </a:pPr>
             <a:r>
-              <a:rPr lang="en-US" sz="4000" dirty="0">
+              <a:rPr lang="en-US" sz="4000" b="1" dirty="0">
                 <a:solidFill>
                   <a:srgbClr val="111111"/>
                 </a:solidFill>
@@ -16363,7 +17352,61 @@
                 <a:ea typeface="Times New Roman" pitchFamily="34" charset="-122"/>
                 <a:cs typeface="Times New Roman" pitchFamily="34" charset="-120"/>
               </a:rPr>
-              <a:t>70 ÷ 3.5 = 20 years.</a:t>
+              <a:t>Example: </a:t>
+            </a:r>
+            <a:pPr algn="l" indent="0" marL="0">
+              <a:spcAft>
+                <a:spcPts val="800"/>
+              </a:spcAft>
+              <a:buNone/>
+            </a:pPr>
+            <a:r>
+              <a:rPr lang="en-US" sz="4000" dirty="0">
+                <a:solidFill>
+                  <a:srgbClr val="111111"/>
+                </a:solidFill>
+                <a:latin typeface="Times New Roman" pitchFamily="34" charset="0"/>
+                <a:ea typeface="Times New Roman" pitchFamily="34" charset="-122"/>
+                <a:cs typeface="Times New Roman" pitchFamily="34" charset="-120"/>
+              </a:rPr>
+              <a:t>A town growing at 3 % a year doubles in about 70 ÷ 3 ≈ 23 years.</a:t>
+            </a:r>
+            <a:endParaRPr lang="en-US" sz="4000" dirty="0"/>
+          </a:p>
+          <a:p>
+            <a:pPr algn="l" indent="0" marL="0">
+              <a:spcAft>
+                <a:spcPts val="800"/>
+              </a:spcAft>
+              <a:buNone/>
+            </a:pPr>
+            <a:r>
+              <a:rPr lang="en-US" sz="4000" b="1" dirty="0">
+                <a:solidFill>
+                  <a:srgbClr val="111111"/>
+                </a:solidFill>
+                <a:latin typeface="Times New Roman" pitchFamily="34" charset="0"/>
+                <a:ea typeface="Times New Roman" pitchFamily="34" charset="-122"/>
+                <a:cs typeface="Times New Roman" pitchFamily="34" charset="-120"/>
+              </a:rPr>
+              <a:t>Use for planning: </a:t>
+            </a:r>
+            <a:pPr algn="l" indent="0" marL="0">
+              <a:spcAft>
+                <a:spcPts val="800"/>
+              </a:spcAft>
+              <a:buNone/>
+            </a:pPr>
+            <a:r>
+              <a:rPr lang="en-US" sz="4000" dirty="0">
+                <a:solidFill>
+                  <a:srgbClr val="111111"/>
+                </a:solidFill>
+                <a:latin typeface="Times New Roman" pitchFamily="34" charset="0"/>
+                <a:ea typeface="Times New Roman" pitchFamily="34" charset="-122"/>
+                <a:cs typeface="Times New Roman" pitchFamily="34" charset="-120"/>
+              </a:rPr>
+              <a:t>If Garoua doubles in about 23 years, it will need twice as many classrooms, health centres and water points.</a:t>
             </a:r>
             <a:endParaRPr lang="en-US" sz="4000" dirty="0"/>
           </a:p>
@@ -16475,15 +17518,135 @@
                 <a:ea typeface="Calibri" pitchFamily="34" charset="-122"/>
                 <a:cs typeface="Calibri" pitchFamily="34" charset="-120"/>
               </a:rPr>
-              <a:t>REMEDIATION</a:t>
+              <a:t>BOARD SUMMARY</a:t>
             </a:r>
             <a:endParaRPr lang="en-US" sz="1400" dirty="0"/>
+          </a:p>
+        </p:txBody>
+      </p:sp>
+      <p:sp>
+        <p:nvSpPr>
+          <p:cNvPr id="3" name="Text 1"/>
+          <p:cNvSpPr/>
+          <p:nvPr/>
+        </p:nvSpPr>
+        <p:spPr>
+          <a:xfrm>
+            <a:off x="365760" y="1005840"/>
+            <a:ext cx="11460175" cy="731520"/>
+          </a:xfrm>
+          <a:prstGeom prst="rect">
+            <a:avLst/>
+          </a:prstGeom>
+          <a:noFill/>
+          <a:ln/>
+        </p:spPr>
+        <p:txBody>
+          <a:bodyPr wrap="square" lIns="0" tIns="0" rIns="0" bIns="0" rtlCol="0" anchor="ctr">
+            <a:normAutofit/>
+          </a:bodyPr>
+          <a:lstStyle/>
+          <a:p>
+            <a:pPr algn="ctr" indent="0" marL="0">
+              <a:buNone/>
+            </a:pPr>
+            <a:r>
+              <a:rPr lang="en-US" sz="3600" b="1" dirty="0">
+                <a:solidFill>
+                  <a:srgbClr val="990011"/>
+                </a:solidFill>
+                <a:latin typeface="Times New Roman" pitchFamily="34" charset="0"/>
+                <a:ea typeface="Times New Roman" pitchFamily="34" charset="-122"/>
+                <a:cs typeface="Times New Roman" pitchFamily="34" charset="-120"/>
+              </a:rPr>
+              <a:t>4. Practical Exercises with Solutions</a:t>
+            </a:r>
+            <a:endParaRPr lang="en-US" sz="3600" dirty="0"/>
+          </a:p>
+        </p:txBody>
+      </p:sp>
+      <p:sp>
+        <p:nvSpPr>
+          <p:cNvPr id="4" name="Text 2"/>
+          <p:cNvSpPr/>
+          <p:nvPr/>
+        </p:nvSpPr>
+        <p:spPr>
+          <a:xfrm>
+            <a:off x="365760" y="1783080"/>
+            <a:ext cx="4846320" cy="4617720"/>
+          </a:xfrm>
+          <a:prstGeom prst="rect">
+            <a:avLst/>
+          </a:prstGeom>
+          <a:noFill/>
+          <a:ln/>
+        </p:spPr>
+        <p:txBody>
+          <a:bodyPr wrap="square" lIns="0" tIns="0" rIns="0" bIns="0" rtlCol="0" anchor="t"/>
+          <a:lstStyle/>
+          <a:p>
+            <a:pPr algn="l" indent="0" marL="0">
+              <a:spcAft>
+                <a:spcPts val="800"/>
+              </a:spcAft>
+              <a:buNone/>
+            </a:pPr>
+            <a:r>
+              <a:rPr lang="en-US" sz="3600" i="1" dirty="0">
+                <a:solidFill>
+                  <a:srgbClr val="111111"/>
+                </a:solidFill>
+                <a:latin typeface="Times New Roman" pitchFamily="34" charset="0"/>
+                <a:ea typeface="Times New Roman" pitchFamily="34" charset="-122"/>
+                <a:cs typeface="Times New Roman" pitchFamily="34" charset="-120"/>
+              </a:rPr>
+              <a:t>The solutions of the practical exercises are the following:</a:t>
+            </a:r>
+            <a:endParaRPr lang="en-US" sz="3600" dirty="0"/>
+          </a:p>
+          <a:p>
+            <a:pPr algn="l" indent="0" marL="0">
+              <a:spcAft>
+                <a:spcPts val="800"/>
+              </a:spcAft>
+              <a:buNone/>
+            </a:pPr>
+            <a:r>
+              <a:rPr lang="en-US" sz="3600" b="1" dirty="0">
+                <a:solidFill>
+                  <a:srgbClr val="111111"/>
+                </a:solidFill>
+                <a:latin typeface="Times New Roman" pitchFamily="34" charset="0"/>
+                <a:ea typeface="Times New Roman" pitchFamily="34" charset="-122"/>
+                <a:cs typeface="Times New Roman" pitchFamily="34" charset="-120"/>
+              </a:rPr>
+              <a:t>Exercise 1 (CBR): </a:t>
+            </a:r>
+            <a:pPr algn="l" indent="0" marL="0">
+              <a:spcAft>
+                <a:spcPts val="800"/>
+              </a:spcAft>
+              <a:buNone/>
+            </a:pPr>
+            <a:r>
+              <a:rPr lang="en-US" sz="3600" dirty="0">
+                <a:solidFill>
+                  <a:srgbClr val="111111"/>
+                </a:solidFill>
+                <a:latin typeface="Times New Roman" pitchFamily="34" charset="0"/>
+                <a:ea typeface="Times New Roman" pitchFamily="34" charset="-122"/>
+                <a:cs typeface="Times New Roman" pitchFamily="34" charset="-120"/>
+              </a:rPr>
+              <a:t>850 births in a town of 50,000: 850 ÷ 50,000 × 1,000 = 17 per 1,000.</a:t>
+            </a:r>
+            <a:endParaRPr lang="en-US" sz="3600" dirty="0"/>
           </a:p>
         </p:txBody>
       </p:sp>
       <p:pic>
         <p:nvPicPr>
-          <p:cNvPr id="3" name="Image 0" descr="/home/claude/f4/img/minesec_sheet.png">    </p:cNvPr>
+          <p:cNvPr id="5" name="Image 0" descr="/home/claude/f4/img/v2/pop2_exercises.png">    </p:cNvPr>
           <p:cNvPicPr>
             <a:picLocks noChangeAspect="1"/>
           </p:cNvPicPr>
@@ -16497,8 +17660,8 @@
         </p:blipFill>
         <p:spPr>
           <a:xfrm>
-            <a:off x="0" y="658368"/>
-            <a:ext cx="2468880" cy="5833872"/>
+            <a:off x="5349240" y="2617506"/>
+            <a:ext cx="6659575" cy="2601397"/>
           </a:xfrm>
           <a:prstGeom prst="rect">
             <a:avLst/>
@@ -16507,14 +17670,14 @@
       </p:pic>
       <p:sp>
         <p:nvSpPr>
-          <p:cNvPr id="4" name="Text 1"/>
+          <p:cNvPr id="6" name="Text 3"/>
           <p:cNvSpPr/>
           <p:nvPr/>
         </p:nvSpPr>
         <p:spPr>
           <a:xfrm>
-            <a:off x="2697480" y="1005840"/>
-            <a:ext cx="9174175" cy="731520"/>
+            <a:off x="5349240" y="6089904"/>
+            <a:ext cx="6659575" cy="347472"/>
           </a:xfrm>
           <a:prstGeom prst="rect">
             <a:avLst/>
@@ -16523,134 +17686,24 @@
           <a:ln/>
         </p:spPr>
         <p:txBody>
-          <a:bodyPr wrap="square" lIns="0" tIns="0" rIns="0" bIns="0" rtlCol="0" anchor="ctr">
-            <a:normAutofit/>
-          </a:bodyPr>
+          <a:bodyPr wrap="square" lIns="0" tIns="0" rIns="0" bIns="0" rtlCol="0" anchor="ctr"/>
           <a:lstStyle/>
           <a:p>
             <a:pPr algn="ctr" indent="0" marL="0">
               <a:buNone/>
             </a:pPr>
             <a:r>
-              <a:rPr lang="en-US" sz="3600" b="1" dirty="0">
-                <a:solidFill>
-                  <a:srgbClr val="990011"/>
+              <a:rPr lang="en-US" sz="1600" i="1" dirty="0">
+                <a:solidFill>
+                  <a:srgbClr val="555555"/>
                 </a:solidFill>
                 <a:latin typeface="Times New Roman" pitchFamily="34" charset="0"/>
                 <a:ea typeface="Times New Roman" pitchFamily="34" charset="-122"/>
                 <a:cs typeface="Times New Roman" pitchFamily="34" charset="-120"/>
               </a:rPr>
-              <a:t>Remediation</a:t>
-            </a:r>
-            <a:endParaRPr lang="en-US" sz="3600" dirty="0"/>
-          </a:p>
-        </p:txBody>
-      </p:sp>
-      <p:sp>
-        <p:nvSpPr>
-          <p:cNvPr id="5" name="Text 2"/>
-          <p:cNvSpPr/>
-          <p:nvPr/>
-        </p:nvSpPr>
-        <p:spPr>
-          <a:xfrm>
-            <a:off x="2697480" y="1783080"/>
-            <a:ext cx="9174175" cy="4663440"/>
-          </a:xfrm>
-          <a:prstGeom prst="rect">
-            <a:avLst/>
-          </a:prstGeom>
-          <a:noFill/>
-          <a:ln/>
-        </p:spPr>
-        <p:txBody>
-          <a:bodyPr wrap="square" lIns="0" tIns="0" rIns="0" bIns="0" rtlCol="0" anchor="t"/>
-          <a:lstStyle/>
-          <a:p>
-            <a:pPr algn="l" indent="0" marL="0">
-              <a:spcAft>
-                <a:spcPts val="800"/>
-              </a:spcAft>
-              <a:buNone/>
-            </a:pPr>
-            <a:r>
-              <a:rPr lang="en-US" sz="4000" b="1" dirty="0">
-                <a:solidFill>
-                  <a:srgbClr val="111111"/>
-                </a:solidFill>
-                <a:latin typeface="Times New Roman" pitchFamily="34" charset="0"/>
-                <a:ea typeface="Times New Roman" pitchFamily="34" charset="-122"/>
-                <a:cs typeface="Times New Roman" pitchFamily="34" charset="-120"/>
-              </a:rPr>
-              <a:t>Fill in the blanks:</a:t>
-            </a:r>
-            <a:endParaRPr lang="en-US" sz="4000" dirty="0"/>
-          </a:p>
-          <a:p>
-            <a:pPr algn="l" marL="342900" indent="-342900">
-              <a:spcAft>
-                <a:spcPts val="800"/>
-              </a:spcAft>
-              <a:buSzPct val="100000"/>
-              <a:buFont typeface="+mj-lt"/>
-              <a:buAutoNum type="arabicPeriod" startAt="1"/>
-            </a:pPr>
-            <a:r>
-              <a:rPr lang="en-US" sz="4000" dirty="0">
-                <a:solidFill>
-                  <a:srgbClr val="111111"/>
-                </a:solidFill>
-                <a:latin typeface="Times New Roman" pitchFamily="34" charset="0"/>
-                <a:ea typeface="Times New Roman" pitchFamily="34" charset="-122"/>
-                <a:cs typeface="Times New Roman" pitchFamily="34" charset="-120"/>
-              </a:rPr>
-              <a:t>Birth rate is given per ______ people.</a:t>
-            </a:r>
-            <a:endParaRPr lang="en-US" sz="4000" dirty="0"/>
-          </a:p>
-          <a:p>
-            <a:pPr algn="l" marL="342900" indent="-342900">
-              <a:spcAft>
-                <a:spcPts val="800"/>
-              </a:spcAft>
-              <a:buSzPct val="100000"/>
-              <a:buFont typeface="+mj-lt"/>
-              <a:buAutoNum type="arabicPeriod" startAt="1"/>
-            </a:pPr>
-            <a:r>
-              <a:rPr lang="en-US" sz="4000" dirty="0">
-                <a:solidFill>
-                  <a:srgbClr val="111111"/>
-                </a:solidFill>
-                <a:latin typeface="Times New Roman" pitchFamily="34" charset="0"/>
-                <a:ea typeface="Times New Roman" pitchFamily="34" charset="-122"/>
-                <a:cs typeface="Times New Roman" pitchFamily="34" charset="-120"/>
-              </a:rPr>
-              <a:t>Doubling time ≈ ______ ÷ growth rate.</a:t>
-            </a:r>
-            <a:endParaRPr lang="en-US" sz="4000" dirty="0"/>
-          </a:p>
-          <a:p>
-            <a:pPr algn="l" marL="342900" indent="-342900">
-              <a:spcAft>
-                <a:spcPts val="800"/>
-              </a:spcAft>
-              <a:buSzPct val="100000"/>
-              <a:buFont typeface="+mj-lt"/>
-              <a:buAutoNum type="arabicPeriod" startAt="1"/>
-            </a:pPr>
-            <a:r>
-              <a:rPr lang="en-US" sz="4000" dirty="0">
-                <a:solidFill>
-                  <a:srgbClr val="111111"/>
-                </a:solidFill>
-                <a:latin typeface="Times New Roman" pitchFamily="34" charset="0"/>
-                <a:ea typeface="Times New Roman" pitchFamily="34" charset="-122"/>
-                <a:cs typeface="Times New Roman" pitchFamily="34" charset="-120"/>
-              </a:rPr>
-              <a:t>Natural increase = (CBR − CDR) ÷ ______.</a:t>
-            </a:r>
-            <a:endParaRPr lang="en-US" sz="4000" dirty="0"/>
+              <a:t>Illustration: solutions</a:t>
+            </a:r>
+            <a:endParaRPr lang="en-US" sz="1600" dirty="0"/>
           </a:p>
         </p:txBody>
       </p:sp>
@@ -16760,7 +17813,7 @@
                 <a:ea typeface="Calibri" pitchFamily="34" charset="-122"/>
                 <a:cs typeface="Calibri" pitchFamily="34" charset="-120"/>
               </a:rPr>
-              <a:t>HOMEWORK</a:t>
+              <a:t>BOARD SUMMARY</a:t>
             </a:r>
             <a:endParaRPr lang="en-US" sz="1400" dirty="0"/>
           </a:p>
@@ -16783,7 +17836,7 @@
         <p:spPr>
           <a:xfrm>
             <a:off x="0" y="658368"/>
-            <a:ext cx="5120640" cy="5833872"/>
+            <a:ext cx="1463040" cy="5833872"/>
           </a:xfrm>
           <a:prstGeom prst="rect">
             <a:avLst/>
@@ -16798,8 +17851,8 @@
         </p:nvSpPr>
         <p:spPr>
           <a:xfrm>
-            <a:off x="5349240" y="1005840"/>
-            <a:ext cx="6522415" cy="731520"/>
+            <a:off x="1691640" y="1005840"/>
+            <a:ext cx="10180015" cy="731520"/>
           </a:xfrm>
           <a:prstGeom prst="rect">
             <a:avLst/>
@@ -16825,7 +17878,7 @@
                 <a:ea typeface="Times New Roman" pitchFamily="34" charset="-122"/>
                 <a:cs typeface="Times New Roman" pitchFamily="34" charset="-120"/>
               </a:rPr>
-              <a:t>Homework</a:t>
+              <a:t>4. Practical Exercises with Solutions</a:t>
             </a:r>
             <a:endParaRPr lang="en-US" sz="3600" dirty="0"/>
           </a:p>
@@ -16839,8 +17892,8 @@
         </p:nvSpPr>
         <p:spPr>
           <a:xfrm>
-            <a:off x="5349240" y="1783080"/>
-            <a:ext cx="6522415" cy="4663440"/>
+            <a:off x="1691640" y="1783080"/>
+            <a:ext cx="10180015" cy="4663440"/>
           </a:xfrm>
           <a:prstGeom prst="rect">
             <a:avLst/>
@@ -16859,7 +17912,7 @@
               <a:buNone/>
             </a:pPr>
             <a:r>
-              <a:rPr lang="en-US" sz="4000" dirty="0">
+              <a:rPr lang="en-US" sz="4000" b="1" dirty="0">
                 <a:solidFill>
                   <a:srgbClr val="111111"/>
                 </a:solidFill>
@@ -16867,7 +17920,61 @@
                 <a:ea typeface="Times New Roman" pitchFamily="34" charset="-122"/>
                 <a:cs typeface="Times New Roman" pitchFamily="34" charset="-120"/>
               </a:rPr>
-              <a:t>Find Cameroon's birth and death rates and calculate its natural increase and doubling time.</a:t>
+              <a:t>Exercise 2 (CDR): </a:t>
+            </a:r>
+            <a:pPr algn="l" indent="0" marL="0">
+              <a:spcAft>
+                <a:spcPts val="800"/>
+              </a:spcAft>
+              <a:buNone/>
+            </a:pPr>
+            <a:r>
+              <a:rPr lang="en-US" sz="4000" dirty="0">
+                <a:solidFill>
+                  <a:srgbClr val="111111"/>
+                </a:solidFill>
+                <a:latin typeface="Times New Roman" pitchFamily="34" charset="0"/>
+                <a:ea typeface="Times New Roman" pitchFamily="34" charset="-122"/>
+                <a:cs typeface="Times New Roman" pitchFamily="34" charset="-120"/>
+              </a:rPr>
+              <a:t>1,200 deaths in a region of 150,000: 1,200 ÷ 150,000 × 1,000 = 8 per 1,000.</a:t>
+            </a:r>
+            <a:endParaRPr lang="en-US" sz="4000" dirty="0"/>
+          </a:p>
+          <a:p>
+            <a:pPr algn="l" indent="0" marL="0">
+              <a:spcAft>
+                <a:spcPts val="800"/>
+              </a:spcAft>
+              <a:buNone/>
+            </a:pPr>
+            <a:r>
+              <a:rPr lang="en-US" sz="4000" b="1" dirty="0">
+                <a:solidFill>
+                  <a:srgbClr val="111111"/>
+                </a:solidFill>
+                <a:latin typeface="Times New Roman" pitchFamily="34" charset="0"/>
+                <a:ea typeface="Times New Roman" pitchFamily="34" charset="-122"/>
+                <a:cs typeface="Times New Roman" pitchFamily="34" charset="-120"/>
+              </a:rPr>
+              <a:t>Exercise 3 (growth rate): </a:t>
+            </a:r>
+            <a:pPr algn="l" indent="0" marL="0">
+              <a:spcAft>
+                <a:spcPts val="800"/>
+              </a:spcAft>
+              <a:buNone/>
+            </a:pPr>
+            <a:r>
+              <a:rPr lang="en-US" sz="4000" dirty="0">
+                <a:solidFill>
+                  <a:srgbClr val="111111"/>
+                </a:solidFill>
+                <a:latin typeface="Times New Roman" pitchFamily="34" charset="0"/>
+                <a:ea typeface="Times New Roman" pitchFamily="34" charset="-122"/>
+                <a:cs typeface="Times New Roman" pitchFamily="34" charset="-120"/>
+              </a:rPr>
+              <a:t>120,000 births, 85,000 deaths, 30,000 immigrants and 25,000 emigrants in 3,000,000 people: (35,000 + 5,000) ÷ 3,000,000 × 100 ≈ 1.33 %.</a:t>
             </a:r>
             <a:endParaRPr lang="en-US" sz="4000" dirty="0"/>
           </a:p>
@@ -16979,7 +18086,7 @@
                 <a:ea typeface="Calibri" pitchFamily="34" charset="-122"/>
                 <a:cs typeface="Calibri" pitchFamily="34" charset="-120"/>
               </a:rPr>
-              <a:t>NEXT LESSON</a:t>
+              <a:t>BOARD SUMMARY</a:t>
             </a:r>
             <a:endParaRPr lang="en-US" sz="1400" dirty="0"/>
           </a:p>
@@ -17044,7 +18151,7 @@
                 <a:ea typeface="Times New Roman" pitchFamily="34" charset="-122"/>
                 <a:cs typeface="Times New Roman" pitchFamily="34" charset="-120"/>
               </a:rPr>
-              <a:t>Next Lesson</a:t>
+              <a:t>4. Practical Exercises with Solutions (continued)</a:t>
             </a:r>
             <a:endParaRPr lang="en-US" sz="3600" dirty="0"/>
           </a:p>
@@ -17068,10 +18175,10 @@
           <a:ln/>
         </p:spPr>
         <p:txBody>
-          <a:bodyPr wrap="square" lIns="0" tIns="0" rIns="0" bIns="0" rtlCol="0" anchor="ctr"/>
-          <a:lstStyle/>
-          <a:p>
-            <a:pPr algn="ctr" indent="0" marL="0">
+          <a:bodyPr wrap="square" lIns="0" tIns="0" rIns="0" bIns="0" rtlCol="0" anchor="t"/>
+          <a:lstStyle/>
+          <a:p>
+            <a:pPr algn="l" indent="0" marL="0">
               <a:spcAft>
                 <a:spcPts val="800"/>
               </a:spcAft>
@@ -17086,27 +18193,24 @@
                 <a:ea typeface="Times New Roman" pitchFamily="34" charset="-122"/>
                 <a:cs typeface="Times New Roman" pitchFamily="34" charset="-120"/>
               </a:rPr>
-              <a:t>Our next lesson will be on:</a:t>
-            </a:r>
-            <a:endParaRPr lang="en-US" sz="4000" dirty="0"/>
-          </a:p>
-          <a:p>
-            <a:pPr algn="ctr" indent="0" marL="0">
+              <a:t>Exercise 4 (doubling time): </a:t>
+            </a:r>
+            <a:pPr algn="l" indent="0" marL="0">
               <a:spcAft>
                 <a:spcPts val="800"/>
               </a:spcAft>
               <a:buNone/>
             </a:pPr>
             <a:r>
-              <a:rPr lang="en-US" sz="4000" b="1" dirty="0">
-                <a:solidFill>
-                  <a:srgbClr val="990011"/>
+              <a:rPr lang="en-US" sz="4000" dirty="0">
+                <a:solidFill>
+                  <a:srgbClr val="111111"/>
                 </a:solidFill>
                 <a:latin typeface="Times New Roman" pitchFamily="34" charset="0"/>
                 <a:ea typeface="Times New Roman" pitchFamily="34" charset="-122"/>
                 <a:cs typeface="Times New Roman" pitchFamily="34" charset="-120"/>
               </a:rPr>
-              <a:t>Lesson 10: Factors of Population Growth</a:t>
+              <a:t>A growth rate of 3 % gives 70 ÷ 3 ≈ 23 years.</a:t>
             </a:r>
             <a:endParaRPr lang="en-US" sz="4000" dirty="0"/>
           </a:p>
@@ -17218,22 +18322,46 @@
                 <a:ea typeface="Calibri" pitchFamily="34" charset="-122"/>
                 <a:cs typeface="Calibri" pitchFamily="34" charset="-120"/>
               </a:rPr>
-              <a:t>BILINGUAL GAME</a:t>
+              <a:t>FORMATIVE EVALUATION</a:t>
             </a:r>
             <a:endParaRPr lang="en-US" sz="1400" dirty="0"/>
           </a:p>
         </p:txBody>
       </p:sp>
-      <p:sp>
-        <p:nvSpPr>
-          <p:cNvPr id="3" name="Text 1"/>
+      <p:pic>
+        <p:nvPicPr>
+          <p:cNvPr id="3" name="Image 0" descr="/home/claude/f4/img/minesec_sheet.png">    </p:cNvPr>
+          <p:cNvPicPr>
+            <a:picLocks noChangeAspect="1"/>
+          </p:cNvPicPr>
+          <p:nvPr/>
+        </p:nvPicPr>
+        <p:blipFill>
+          <a:blip r:embed="rId1"/>
+          <a:stretch>
+            <a:fillRect/>
+          </a:stretch>
+        </p:blipFill>
+        <p:spPr>
+          <a:xfrm>
+            <a:off x="0" y="658368"/>
+            <a:ext cx="5120640" cy="5833872"/>
+          </a:xfrm>
+          <a:prstGeom prst="rect">
+            <a:avLst/>
+          </a:prstGeom>
+        </p:spPr>
+      </p:pic>
+      <p:sp>
+        <p:nvSpPr>
+          <p:cNvPr id="4" name="Text 1"/>
           <p:cNvSpPr/>
           <p:nvPr/>
         </p:nvSpPr>
         <p:spPr>
           <a:xfrm>
-            <a:off x="457200" y="1005840"/>
-            <a:ext cx="11277295" cy="731520"/>
+            <a:off x="5349240" y="1005840"/>
+            <a:ext cx="6522415" cy="731520"/>
           </a:xfrm>
           <a:prstGeom prst="rect">
             <a:avLst/>
@@ -17242,7 +18370,9 @@
           <a:ln/>
         </p:spPr>
         <p:txBody>
-          <a:bodyPr wrap="square" lIns="0" tIns="0" rIns="0" bIns="0" rtlCol="0" anchor="ctr"/>
+          <a:bodyPr wrap="square" lIns="0" tIns="0" rIns="0" bIns="0" rtlCol="0" anchor="ctr">
+            <a:normAutofit/>
+          </a:bodyPr>
           <a:lstStyle/>
           <a:p>
             <a:pPr algn="ctr" indent="0" marL="0">
@@ -17257,6 +18387,1818 @@
                 <a:ea typeface="Times New Roman" pitchFamily="34" charset="-122"/>
                 <a:cs typeface="Times New Roman" pitchFamily="34" charset="-120"/>
               </a:rPr>
+              <a:t>Evaluation 1</a:t>
+            </a:r>
+            <a:endParaRPr lang="en-US" sz="3600" dirty="0"/>
+          </a:p>
+        </p:txBody>
+      </p:sp>
+      <p:sp>
+        <p:nvSpPr>
+          <p:cNvPr id="5" name="Text 2"/>
+          <p:cNvSpPr/>
+          <p:nvPr/>
+        </p:nvSpPr>
+        <p:spPr>
+          <a:xfrm>
+            <a:off x="5349240" y="1783080"/>
+            <a:ext cx="6522415" cy="4663440"/>
+          </a:xfrm>
+          <a:prstGeom prst="rect">
+            <a:avLst/>
+          </a:prstGeom>
+          <a:noFill/>
+          <a:ln/>
+        </p:spPr>
+        <p:txBody>
+          <a:bodyPr wrap="square" lIns="0" tIns="0" rIns="0" bIns="0" rtlCol="0" anchor="t"/>
+          <a:lstStyle/>
+          <a:p>
+            <a:pPr algn="l" indent="0" marL="0">
+              <a:spcAft>
+                <a:spcPts val="800"/>
+              </a:spcAft>
+              <a:buNone/>
+            </a:pPr>
+            <a:r>
+              <a:rPr lang="en-US" sz="4000" dirty="0">
+                <a:solidFill>
+                  <a:srgbClr val="111111"/>
+                </a:solidFill>
+                <a:latin typeface="Times New Roman" pitchFamily="34" charset="0"/>
+                <a:ea typeface="Times New Roman" pitchFamily="34" charset="-122"/>
+                <a:cs typeface="Times New Roman" pitchFamily="34" charset="-120"/>
+              </a:rPr>
+              <a:t>A town of 25,000 people has 1,000 births and 200 deaths. Calculate its CBR, CDR and RNI.</a:t>
+            </a:r>
+            <a:endParaRPr lang="en-US" sz="4000" dirty="0"/>
+          </a:p>
+        </p:txBody>
+      </p:sp>
+      <p:sp>
+        <p:nvSpPr>
+          <p:cNvPr id="25" name="Slide Number Placeholder 0"/>
+          <p:cNvSpPr>
+            <a:spLocks noGrp="1"/>
+          </p:cNvSpPr>
+          <p:nvPr>
+            <p:ph type="sldNum" sz="quarter" idx="4294967295"/>
+          </p:nvPr>
+        </p:nvSpPr>
+        <p:spPr>
+          <a:xfrm>
+            <a:off x="27432" y="91440"/>
+            <a:ext cx="585216" cy="475488"/>
+          </a:xfrm>
+          <a:prstGeom prst="rect">
+            <a:avLst/>
+          </a:prstGeom>
+          <a:extLst>
+            <a:ext uri="{C572A759-6A51-4108-AA02-DFA0A04FC94B}">
+              <ma14:wrappingTextBoxFlag xmlns:ma14="http://schemas.microsoft.com/office/mac/drawingml/2011/main" val="0"/>
+            </a:ext>
+          </a:extLst>
+        </p:spPr>
+        <p:txBody>
+          <a:bodyPr/>
+          <a:lstStyle>
+            <a:lvl1pPr>
+              <a:defRPr sz="2000">
+                <a:solidFill>
+                  <a:srgbClr val="FFFFFF"/>
+                </a:solidFill>
+                <a:latin typeface="Calibri"/>
+                <a:ea typeface="Calibri"/>
+                <a:cs typeface="Calibri"/>
+              </a:defRPr>
+            </a:lvl1pPr>
+          </a:lstStyle>
+          <a:p>
+            <a:pPr algn="ctr"/>
+            <a:fld id="{F7021451-1387-4CA6-816F-3879F97B5CBC}" type="slidenum">
+              <a:rPr b="1" lang="en-US"/>
+              <a:t>49</a:t>
+            </a:fld>
+            <a:endParaRPr lang="en-US"/>
+          </a:p>
+        </p:txBody>
+      </p:sp>
+    </p:spTree>
+  </p:cSld>
+  <p:clrMapOvr>
+    <a:masterClrMapping/>
+  </p:clrMapOvr>
+</p:sld>
+</file>
+
+<file path=ppt/slides/slide5.xml><?xml version="1.0" encoding="utf-8"?>
+<p:sld xmlns:a="http://schemas.openxmlformats.org/drawingml/2006/main" xmlns:r="http://schemas.openxmlformats.org/officeDocument/2006/relationships" xmlns:p="http://schemas.openxmlformats.org/presentationml/2006/main">
+  <p:cSld name="Slide 5">
+    <p:spTree>
+      <p:nvGrpSpPr>
+        <p:cNvPr id="1" name=""/>
+        <p:cNvGrpSpPr/>
+        <p:nvPr/>
+      </p:nvGrpSpPr>
+      <p:grpSpPr>
+        <a:xfrm>
+          <a:off x="0" y="0"/>
+          <a:ext cx="0" cy="0"/>
+          <a:chOff x="0" y="0"/>
+          <a:chExt cx="0" cy="0"/>
+        </a:xfrm>
+      </p:grpSpPr>
+      <p:sp>
+        <p:nvSpPr>
+          <p:cNvPr id="2" name="Text 0"/>
+          <p:cNvSpPr/>
+          <p:nvPr/>
+        </p:nvSpPr>
+        <p:spPr>
+          <a:xfrm>
+            <a:off x="457200" y="713232"/>
+            <a:ext cx="11368735" cy="274320"/>
+          </a:xfrm>
+          <a:prstGeom prst="rect">
+            <a:avLst/>
+          </a:prstGeom>
+          <a:noFill/>
+          <a:ln/>
+        </p:spPr>
+        <p:txBody>
+          <a:bodyPr wrap="square" lIns="0" tIns="0" rIns="0" bIns="0" rtlCol="0" anchor="ctr"/>
+          <a:lstStyle/>
+          <a:p>
+            <a:pPr algn="r" indent="0" marL="0">
+              <a:buNone/>
+            </a:pPr>
+            <a:r>
+              <a:rPr lang="en-US" sz="1400" b="1" dirty="0">
+                <a:solidFill>
+                  <a:srgbClr val="1C3F6E"/>
+                </a:solidFill>
+                <a:latin typeface="Calibri" pitchFamily="34" charset="0"/>
+                <a:ea typeface="Calibri" pitchFamily="34" charset="-122"/>
+                <a:cs typeface="Calibri" pitchFamily="34" charset="-120"/>
+              </a:rPr>
+              <a:t>HOMEWORK CORRECTION</a:t>
+            </a:r>
+            <a:endParaRPr lang="en-US" sz="1400" dirty="0"/>
+          </a:p>
+        </p:txBody>
+      </p:sp>
+      <p:pic>
+        <p:nvPicPr>
+          <p:cNvPr id="3" name="Image 0" descr="/home/claude/f4/img/minesec_sheet.png">    </p:cNvPr>
+          <p:cNvPicPr>
+            <a:picLocks noChangeAspect="1"/>
+          </p:cNvPicPr>
+          <p:nvPr/>
+        </p:nvPicPr>
+        <p:blipFill>
+          <a:blip r:embed="rId1"/>
+          <a:stretch>
+            <a:fillRect/>
+          </a:stretch>
+        </p:blipFill>
+        <p:spPr>
+          <a:xfrm>
+            <a:off x="0" y="658368"/>
+            <a:ext cx="5120640" cy="5833872"/>
+          </a:xfrm>
+          <a:prstGeom prst="rect">
+            <a:avLst/>
+          </a:prstGeom>
+        </p:spPr>
+      </p:pic>
+      <p:sp>
+        <p:nvSpPr>
+          <p:cNvPr id="4" name="Text 1"/>
+          <p:cNvSpPr/>
+          <p:nvPr/>
+        </p:nvSpPr>
+        <p:spPr>
+          <a:xfrm>
+            <a:off x="5349240" y="1005840"/>
+            <a:ext cx="6522415" cy="731520"/>
+          </a:xfrm>
+          <a:prstGeom prst="rect">
+            <a:avLst/>
+          </a:prstGeom>
+          <a:noFill/>
+          <a:ln/>
+        </p:spPr>
+        <p:txBody>
+          <a:bodyPr wrap="square" lIns="0" tIns="0" rIns="0" bIns="0" rtlCol="0" anchor="ctr">
+            <a:normAutofit/>
+          </a:bodyPr>
+          <a:lstStyle/>
+          <a:p>
+            <a:pPr algn="ctr" indent="0" marL="0">
+              <a:buNone/>
+            </a:pPr>
+            <a:r>
+              <a:rPr lang="en-US" sz="3600" b="1" dirty="0">
+                <a:solidFill>
+                  <a:srgbClr val="990011"/>
+                </a:solidFill>
+                <a:latin typeface="Times New Roman" pitchFamily="34" charset="0"/>
+                <a:ea typeface="Times New Roman" pitchFamily="34" charset="-122"/>
+                <a:cs typeface="Times New Roman" pitchFamily="34" charset="-120"/>
+              </a:rPr>
+              <a:t>Correction: Possible Answer</a:t>
+            </a:r>
+            <a:endParaRPr lang="en-US" sz="3600" dirty="0"/>
+          </a:p>
+        </p:txBody>
+      </p:sp>
+      <p:sp>
+        <p:nvSpPr>
+          <p:cNvPr id="5" name="Text 2"/>
+          <p:cNvSpPr/>
+          <p:nvPr/>
+        </p:nvSpPr>
+        <p:spPr>
+          <a:xfrm>
+            <a:off x="5349240" y="1783080"/>
+            <a:ext cx="6522415" cy="4663440"/>
+          </a:xfrm>
+          <a:prstGeom prst="rect">
+            <a:avLst/>
+          </a:prstGeom>
+          <a:noFill/>
+          <a:ln/>
+        </p:spPr>
+        <p:txBody>
+          <a:bodyPr wrap="square" lIns="0" tIns="0" rIns="0" bIns="0" rtlCol="0" anchor="t"/>
+          <a:lstStyle/>
+          <a:p>
+            <a:pPr algn="l" indent="0" marL="0">
+              <a:spcAft>
+                <a:spcPts val="800"/>
+              </a:spcAft>
+              <a:buNone/>
+            </a:pPr>
+            <a:r>
+              <a:rPr lang="en-US" sz="4000" dirty="0">
+                <a:solidFill>
+                  <a:srgbClr val="111111"/>
+                </a:solidFill>
+                <a:latin typeface="Times New Roman" pitchFamily="34" charset="0"/>
+                <a:ea typeface="Times New Roman" pitchFamily="34" charset="-122"/>
+                <a:cs typeface="Times New Roman" pitchFamily="34" charset="-120"/>
+              </a:rPr>
+              <a:t>The crude birth rate is the number of live births per 1,000 people in a year.</a:t>
+            </a:r>
+            <a:endParaRPr lang="en-US" sz="4000" dirty="0"/>
+          </a:p>
+        </p:txBody>
+      </p:sp>
+      <p:sp>
+        <p:nvSpPr>
+          <p:cNvPr id="25" name="Slide Number Placeholder 0"/>
+          <p:cNvSpPr>
+            <a:spLocks noGrp="1"/>
+          </p:cNvSpPr>
+          <p:nvPr>
+            <p:ph type="sldNum" sz="quarter" idx="4294967295"/>
+          </p:nvPr>
+        </p:nvSpPr>
+        <p:spPr>
+          <a:xfrm>
+            <a:off x="27432" y="91440"/>
+            <a:ext cx="585216" cy="475488"/>
+          </a:xfrm>
+          <a:prstGeom prst="rect">
+            <a:avLst/>
+          </a:prstGeom>
+          <a:extLst>
+            <a:ext uri="{C572A759-6A51-4108-AA02-DFA0A04FC94B}">
+              <ma14:wrappingTextBoxFlag xmlns:ma14="http://schemas.microsoft.com/office/mac/drawingml/2011/main" val="0"/>
+            </a:ext>
+          </a:extLst>
+        </p:spPr>
+        <p:txBody>
+          <a:bodyPr/>
+          <a:lstStyle>
+            <a:lvl1pPr>
+              <a:defRPr sz="2000">
+                <a:solidFill>
+                  <a:srgbClr val="FFFFFF"/>
+                </a:solidFill>
+                <a:latin typeface="Calibri"/>
+                <a:ea typeface="Calibri"/>
+                <a:cs typeface="Calibri"/>
+              </a:defRPr>
+            </a:lvl1pPr>
+          </a:lstStyle>
+          <a:p>
+            <a:pPr algn="ctr"/>
+            <a:fld id="{F7021451-1387-4CA6-816F-3879F97B5CBC}" type="slidenum">
+              <a:rPr b="1" lang="en-US"/>
+              <a:t>5</a:t>
+            </a:fld>
+            <a:endParaRPr lang="en-US"/>
+          </a:p>
+        </p:txBody>
+      </p:sp>
+    </p:spTree>
+  </p:cSld>
+  <p:clrMapOvr>
+    <a:masterClrMapping/>
+  </p:clrMapOvr>
+</p:sld>
+</file>
+
+<file path=ppt/slides/slide50.xml><?xml version="1.0" encoding="utf-8"?>
+<p:sld xmlns:a="http://schemas.openxmlformats.org/drawingml/2006/main" xmlns:r="http://schemas.openxmlformats.org/officeDocument/2006/relationships" xmlns:p="http://schemas.openxmlformats.org/presentationml/2006/main">
+  <p:cSld name="Slide 50">
+    <p:spTree>
+      <p:nvGrpSpPr>
+        <p:cNvPr id="1" name=""/>
+        <p:cNvGrpSpPr/>
+        <p:nvPr/>
+      </p:nvGrpSpPr>
+      <p:grpSpPr>
+        <a:xfrm>
+          <a:off x="0" y="0"/>
+          <a:ext cx="0" cy="0"/>
+          <a:chOff x="0" y="0"/>
+          <a:chExt cx="0" cy="0"/>
+        </a:xfrm>
+      </p:grpSpPr>
+      <p:sp>
+        <p:nvSpPr>
+          <p:cNvPr id="2" name="Text 0"/>
+          <p:cNvSpPr/>
+          <p:nvPr/>
+        </p:nvSpPr>
+        <p:spPr>
+          <a:xfrm>
+            <a:off x="457200" y="713232"/>
+            <a:ext cx="11368735" cy="274320"/>
+          </a:xfrm>
+          <a:prstGeom prst="rect">
+            <a:avLst/>
+          </a:prstGeom>
+          <a:noFill/>
+          <a:ln/>
+        </p:spPr>
+        <p:txBody>
+          <a:bodyPr wrap="square" lIns="0" tIns="0" rIns="0" bIns="0" rtlCol="0" anchor="ctr"/>
+          <a:lstStyle/>
+          <a:p>
+            <a:pPr algn="r" indent="0" marL="0">
+              <a:buNone/>
+            </a:pPr>
+            <a:r>
+              <a:rPr lang="en-US" sz="1400" b="1" dirty="0">
+                <a:solidFill>
+                  <a:srgbClr val="1C3F6E"/>
+                </a:solidFill>
+                <a:latin typeface="Calibri" pitchFamily="34" charset="0"/>
+                <a:ea typeface="Calibri" pitchFamily="34" charset="-122"/>
+                <a:cs typeface="Calibri" pitchFamily="34" charset="-120"/>
+              </a:rPr>
+              <a:t>FORMATIVE EVALUATION</a:t>
+            </a:r>
+            <a:endParaRPr lang="en-US" sz="1400" dirty="0"/>
+          </a:p>
+        </p:txBody>
+      </p:sp>
+      <p:pic>
+        <p:nvPicPr>
+          <p:cNvPr id="3" name="Image 0" descr="/home/claude/f4/img/minesec_sheet.png">    </p:cNvPr>
+          <p:cNvPicPr>
+            <a:picLocks noChangeAspect="1"/>
+          </p:cNvPicPr>
+          <p:nvPr/>
+        </p:nvPicPr>
+        <p:blipFill>
+          <a:blip r:embed="rId1"/>
+          <a:stretch>
+            <a:fillRect/>
+          </a:stretch>
+        </p:blipFill>
+        <p:spPr>
+          <a:xfrm>
+            <a:off x="0" y="658368"/>
+            <a:ext cx="5120640" cy="5833872"/>
+          </a:xfrm>
+          <a:prstGeom prst="rect">
+            <a:avLst/>
+          </a:prstGeom>
+        </p:spPr>
+      </p:pic>
+      <p:sp>
+        <p:nvSpPr>
+          <p:cNvPr id="4" name="Text 1"/>
+          <p:cNvSpPr/>
+          <p:nvPr/>
+        </p:nvSpPr>
+        <p:spPr>
+          <a:xfrm>
+            <a:off x="5349240" y="1005840"/>
+            <a:ext cx="6522415" cy="731520"/>
+          </a:xfrm>
+          <a:prstGeom prst="rect">
+            <a:avLst/>
+          </a:prstGeom>
+          <a:noFill/>
+          <a:ln/>
+        </p:spPr>
+        <p:txBody>
+          <a:bodyPr wrap="square" lIns="0" tIns="0" rIns="0" bIns="0" rtlCol="0" anchor="ctr">
+            <a:normAutofit/>
+          </a:bodyPr>
+          <a:lstStyle/>
+          <a:p>
+            <a:pPr algn="ctr" indent="0" marL="0">
+              <a:buNone/>
+            </a:pPr>
+            <a:r>
+              <a:rPr lang="en-US" sz="3600" b="1" dirty="0">
+                <a:solidFill>
+                  <a:srgbClr val="990011"/>
+                </a:solidFill>
+                <a:latin typeface="Times New Roman" pitchFamily="34" charset="0"/>
+                <a:ea typeface="Times New Roman" pitchFamily="34" charset="-122"/>
+                <a:cs typeface="Times New Roman" pitchFamily="34" charset="-120"/>
+              </a:rPr>
+              <a:t>Expected Answer</a:t>
+            </a:r>
+            <a:endParaRPr lang="en-US" sz="3600" dirty="0"/>
+          </a:p>
+        </p:txBody>
+      </p:sp>
+      <p:sp>
+        <p:nvSpPr>
+          <p:cNvPr id="5" name="Text 2"/>
+          <p:cNvSpPr/>
+          <p:nvPr/>
+        </p:nvSpPr>
+        <p:spPr>
+          <a:xfrm>
+            <a:off x="5349240" y="1783080"/>
+            <a:ext cx="6522415" cy="4663440"/>
+          </a:xfrm>
+          <a:prstGeom prst="rect">
+            <a:avLst/>
+          </a:prstGeom>
+          <a:noFill/>
+          <a:ln/>
+        </p:spPr>
+        <p:txBody>
+          <a:bodyPr wrap="square" lIns="0" tIns="0" rIns="0" bIns="0" rtlCol="0" anchor="t"/>
+          <a:lstStyle/>
+          <a:p>
+            <a:pPr algn="l" indent="0" marL="0">
+              <a:spcAft>
+                <a:spcPts val="800"/>
+              </a:spcAft>
+              <a:buNone/>
+            </a:pPr>
+            <a:r>
+              <a:rPr lang="en-US" sz="4000" dirty="0">
+                <a:solidFill>
+                  <a:srgbClr val="111111"/>
+                </a:solidFill>
+                <a:latin typeface="Times New Roman" pitchFamily="34" charset="0"/>
+                <a:ea typeface="Times New Roman" pitchFamily="34" charset="-122"/>
+                <a:cs typeface="Times New Roman" pitchFamily="34" charset="-120"/>
+              </a:rPr>
+              <a:t>CBR = 40 ‰; CDR = 8 ‰; RNI = (40 − 8) ÷ 10 = 3.2 %.</a:t>
+            </a:r>
+            <a:endParaRPr lang="en-US" sz="4000" dirty="0"/>
+          </a:p>
+        </p:txBody>
+      </p:sp>
+      <p:sp>
+        <p:nvSpPr>
+          <p:cNvPr id="25" name="Slide Number Placeholder 0"/>
+          <p:cNvSpPr>
+            <a:spLocks noGrp="1"/>
+          </p:cNvSpPr>
+          <p:nvPr>
+            <p:ph type="sldNum" sz="quarter" idx="4294967295"/>
+          </p:nvPr>
+        </p:nvSpPr>
+        <p:spPr>
+          <a:xfrm>
+            <a:off x="27432" y="91440"/>
+            <a:ext cx="585216" cy="475488"/>
+          </a:xfrm>
+          <a:prstGeom prst="rect">
+            <a:avLst/>
+          </a:prstGeom>
+          <a:extLst>
+            <a:ext uri="{C572A759-6A51-4108-AA02-DFA0A04FC94B}">
+              <ma14:wrappingTextBoxFlag xmlns:ma14="http://schemas.microsoft.com/office/mac/drawingml/2011/main" val="0"/>
+            </a:ext>
+          </a:extLst>
+        </p:spPr>
+        <p:txBody>
+          <a:bodyPr/>
+          <a:lstStyle>
+            <a:lvl1pPr>
+              <a:defRPr sz="2000">
+                <a:solidFill>
+                  <a:srgbClr val="FFFFFF"/>
+                </a:solidFill>
+                <a:latin typeface="Calibri"/>
+                <a:ea typeface="Calibri"/>
+                <a:cs typeface="Calibri"/>
+              </a:defRPr>
+            </a:lvl1pPr>
+          </a:lstStyle>
+          <a:p>
+            <a:pPr algn="ctr"/>
+            <a:fld id="{F7021451-1387-4CA6-816F-3879F97B5CBC}" type="slidenum">
+              <a:rPr b="1" lang="en-US"/>
+              <a:t>50</a:t>
+            </a:fld>
+            <a:endParaRPr lang="en-US"/>
+          </a:p>
+        </p:txBody>
+      </p:sp>
+    </p:spTree>
+  </p:cSld>
+  <p:clrMapOvr>
+    <a:masterClrMapping/>
+  </p:clrMapOvr>
+</p:sld>
+</file>
+
+<file path=ppt/slides/slide51.xml><?xml version="1.0" encoding="utf-8"?>
+<p:sld xmlns:a="http://schemas.openxmlformats.org/drawingml/2006/main" xmlns:r="http://schemas.openxmlformats.org/officeDocument/2006/relationships" xmlns:p="http://schemas.openxmlformats.org/presentationml/2006/main">
+  <p:cSld name="Slide 51">
+    <p:spTree>
+      <p:nvGrpSpPr>
+        <p:cNvPr id="1" name=""/>
+        <p:cNvGrpSpPr/>
+        <p:nvPr/>
+      </p:nvGrpSpPr>
+      <p:grpSpPr>
+        <a:xfrm>
+          <a:off x="0" y="0"/>
+          <a:ext cx="0" cy="0"/>
+          <a:chOff x="0" y="0"/>
+          <a:chExt cx="0" cy="0"/>
+        </a:xfrm>
+      </p:grpSpPr>
+      <p:sp>
+        <p:nvSpPr>
+          <p:cNvPr id="2" name="Text 0"/>
+          <p:cNvSpPr/>
+          <p:nvPr/>
+        </p:nvSpPr>
+        <p:spPr>
+          <a:xfrm>
+            <a:off x="457200" y="713232"/>
+            <a:ext cx="11368735" cy="274320"/>
+          </a:xfrm>
+          <a:prstGeom prst="rect">
+            <a:avLst/>
+          </a:prstGeom>
+          <a:noFill/>
+          <a:ln/>
+        </p:spPr>
+        <p:txBody>
+          <a:bodyPr wrap="square" lIns="0" tIns="0" rIns="0" bIns="0" rtlCol="0" anchor="ctr"/>
+          <a:lstStyle/>
+          <a:p>
+            <a:pPr algn="r" indent="0" marL="0">
+              <a:buNone/>
+            </a:pPr>
+            <a:r>
+              <a:rPr lang="en-US" sz="1400" b="1" dirty="0">
+                <a:solidFill>
+                  <a:srgbClr val="1C3F6E"/>
+                </a:solidFill>
+                <a:latin typeface="Calibri" pitchFamily="34" charset="0"/>
+                <a:ea typeface="Calibri" pitchFamily="34" charset="-122"/>
+                <a:cs typeface="Calibri" pitchFamily="34" charset="-120"/>
+              </a:rPr>
+              <a:t>FORMATIVE EVALUATION</a:t>
+            </a:r>
+            <a:endParaRPr lang="en-US" sz="1400" dirty="0"/>
+          </a:p>
+        </p:txBody>
+      </p:sp>
+      <p:pic>
+        <p:nvPicPr>
+          <p:cNvPr id="3" name="Image 0" descr="/home/claude/f4/img/minesec_sheet.png">    </p:cNvPr>
+          <p:cNvPicPr>
+            <a:picLocks noChangeAspect="1"/>
+          </p:cNvPicPr>
+          <p:nvPr/>
+        </p:nvPicPr>
+        <p:blipFill>
+          <a:blip r:embed="rId1"/>
+          <a:stretch>
+            <a:fillRect/>
+          </a:stretch>
+        </p:blipFill>
+        <p:spPr>
+          <a:xfrm>
+            <a:off x="0" y="658368"/>
+            <a:ext cx="5120640" cy="5833872"/>
+          </a:xfrm>
+          <a:prstGeom prst="rect">
+            <a:avLst/>
+          </a:prstGeom>
+        </p:spPr>
+      </p:pic>
+      <p:sp>
+        <p:nvSpPr>
+          <p:cNvPr id="4" name="Text 1"/>
+          <p:cNvSpPr/>
+          <p:nvPr/>
+        </p:nvSpPr>
+        <p:spPr>
+          <a:xfrm>
+            <a:off x="5349240" y="1005840"/>
+            <a:ext cx="6522415" cy="731520"/>
+          </a:xfrm>
+          <a:prstGeom prst="rect">
+            <a:avLst/>
+          </a:prstGeom>
+          <a:noFill/>
+          <a:ln/>
+        </p:spPr>
+        <p:txBody>
+          <a:bodyPr wrap="square" lIns="0" tIns="0" rIns="0" bIns="0" rtlCol="0" anchor="ctr">
+            <a:normAutofit/>
+          </a:bodyPr>
+          <a:lstStyle/>
+          <a:p>
+            <a:pPr algn="ctr" indent="0" marL="0">
+              <a:buNone/>
+            </a:pPr>
+            <a:r>
+              <a:rPr lang="en-US" sz="3600" b="1" dirty="0">
+                <a:solidFill>
+                  <a:srgbClr val="990011"/>
+                </a:solidFill>
+                <a:latin typeface="Times New Roman" pitchFamily="34" charset="0"/>
+                <a:ea typeface="Times New Roman" pitchFamily="34" charset="-122"/>
+                <a:cs typeface="Times New Roman" pitchFamily="34" charset="-120"/>
+              </a:rPr>
+              <a:t>Evaluation 2</a:t>
+            </a:r>
+            <a:endParaRPr lang="en-US" sz="3600" dirty="0"/>
+          </a:p>
+        </p:txBody>
+      </p:sp>
+      <p:sp>
+        <p:nvSpPr>
+          <p:cNvPr id="5" name="Text 2"/>
+          <p:cNvSpPr/>
+          <p:nvPr/>
+        </p:nvSpPr>
+        <p:spPr>
+          <a:xfrm>
+            <a:off x="5349240" y="1783080"/>
+            <a:ext cx="6522415" cy="4663440"/>
+          </a:xfrm>
+          <a:prstGeom prst="rect">
+            <a:avLst/>
+          </a:prstGeom>
+          <a:noFill/>
+          <a:ln/>
+        </p:spPr>
+        <p:txBody>
+          <a:bodyPr wrap="square" lIns="0" tIns="0" rIns="0" bIns="0" rtlCol="0" anchor="t"/>
+          <a:lstStyle/>
+          <a:p>
+            <a:pPr algn="l" indent="0" marL="0">
+              <a:spcAft>
+                <a:spcPts val="800"/>
+              </a:spcAft>
+              <a:buNone/>
+            </a:pPr>
+            <a:r>
+              <a:rPr lang="en-US" sz="4000" dirty="0">
+                <a:solidFill>
+                  <a:srgbClr val="111111"/>
+                </a:solidFill>
+                <a:latin typeface="Times New Roman" pitchFamily="34" charset="0"/>
+                <a:ea typeface="Times New Roman" pitchFamily="34" charset="-122"/>
+                <a:cs typeface="Times New Roman" pitchFamily="34" charset="-120"/>
+              </a:rPr>
+              <a:t>Calculate the doubling time of a population growing at 2 % a year.</a:t>
+            </a:r>
+            <a:endParaRPr lang="en-US" sz="4000" dirty="0"/>
+          </a:p>
+        </p:txBody>
+      </p:sp>
+      <p:sp>
+        <p:nvSpPr>
+          <p:cNvPr id="25" name="Slide Number Placeholder 0"/>
+          <p:cNvSpPr>
+            <a:spLocks noGrp="1"/>
+          </p:cNvSpPr>
+          <p:nvPr>
+            <p:ph type="sldNum" sz="quarter" idx="4294967295"/>
+          </p:nvPr>
+        </p:nvSpPr>
+        <p:spPr>
+          <a:xfrm>
+            <a:off x="27432" y="91440"/>
+            <a:ext cx="585216" cy="475488"/>
+          </a:xfrm>
+          <a:prstGeom prst="rect">
+            <a:avLst/>
+          </a:prstGeom>
+          <a:extLst>
+            <a:ext uri="{C572A759-6A51-4108-AA02-DFA0A04FC94B}">
+              <ma14:wrappingTextBoxFlag xmlns:ma14="http://schemas.microsoft.com/office/mac/drawingml/2011/main" val="0"/>
+            </a:ext>
+          </a:extLst>
+        </p:spPr>
+        <p:txBody>
+          <a:bodyPr/>
+          <a:lstStyle>
+            <a:lvl1pPr>
+              <a:defRPr sz="2000">
+                <a:solidFill>
+                  <a:srgbClr val="FFFFFF"/>
+                </a:solidFill>
+                <a:latin typeface="Calibri"/>
+                <a:ea typeface="Calibri"/>
+                <a:cs typeface="Calibri"/>
+              </a:defRPr>
+            </a:lvl1pPr>
+          </a:lstStyle>
+          <a:p>
+            <a:pPr algn="ctr"/>
+            <a:fld id="{F7021451-1387-4CA6-816F-3879F97B5CBC}" type="slidenum">
+              <a:rPr b="1" lang="en-US"/>
+              <a:t>51</a:t>
+            </a:fld>
+            <a:endParaRPr lang="en-US"/>
+          </a:p>
+        </p:txBody>
+      </p:sp>
+    </p:spTree>
+  </p:cSld>
+  <p:clrMapOvr>
+    <a:masterClrMapping/>
+  </p:clrMapOvr>
+</p:sld>
+</file>
+
+<file path=ppt/slides/slide52.xml><?xml version="1.0" encoding="utf-8"?>
+<p:sld xmlns:a="http://schemas.openxmlformats.org/drawingml/2006/main" xmlns:r="http://schemas.openxmlformats.org/officeDocument/2006/relationships" xmlns:p="http://schemas.openxmlformats.org/presentationml/2006/main">
+  <p:cSld name="Slide 52">
+    <p:spTree>
+      <p:nvGrpSpPr>
+        <p:cNvPr id="1" name=""/>
+        <p:cNvGrpSpPr/>
+        <p:nvPr/>
+      </p:nvGrpSpPr>
+      <p:grpSpPr>
+        <a:xfrm>
+          <a:off x="0" y="0"/>
+          <a:ext cx="0" cy="0"/>
+          <a:chOff x="0" y="0"/>
+          <a:chExt cx="0" cy="0"/>
+        </a:xfrm>
+      </p:grpSpPr>
+      <p:sp>
+        <p:nvSpPr>
+          <p:cNvPr id="2" name="Text 0"/>
+          <p:cNvSpPr/>
+          <p:nvPr/>
+        </p:nvSpPr>
+        <p:spPr>
+          <a:xfrm>
+            <a:off x="457200" y="713232"/>
+            <a:ext cx="11368735" cy="274320"/>
+          </a:xfrm>
+          <a:prstGeom prst="rect">
+            <a:avLst/>
+          </a:prstGeom>
+          <a:noFill/>
+          <a:ln/>
+        </p:spPr>
+        <p:txBody>
+          <a:bodyPr wrap="square" lIns="0" tIns="0" rIns="0" bIns="0" rtlCol="0" anchor="ctr"/>
+          <a:lstStyle/>
+          <a:p>
+            <a:pPr algn="r" indent="0" marL="0">
+              <a:buNone/>
+            </a:pPr>
+            <a:r>
+              <a:rPr lang="en-US" sz="1400" b="1" dirty="0">
+                <a:solidFill>
+                  <a:srgbClr val="1C3F6E"/>
+                </a:solidFill>
+                <a:latin typeface="Calibri" pitchFamily="34" charset="0"/>
+                <a:ea typeface="Calibri" pitchFamily="34" charset="-122"/>
+                <a:cs typeface="Calibri" pitchFamily="34" charset="-120"/>
+              </a:rPr>
+              <a:t>FORMATIVE EVALUATION</a:t>
+            </a:r>
+            <a:endParaRPr lang="en-US" sz="1400" dirty="0"/>
+          </a:p>
+        </p:txBody>
+      </p:sp>
+      <p:pic>
+        <p:nvPicPr>
+          <p:cNvPr id="3" name="Image 0" descr="/home/claude/f4/img/minesec_sheet.png">    </p:cNvPr>
+          <p:cNvPicPr>
+            <a:picLocks noChangeAspect="1"/>
+          </p:cNvPicPr>
+          <p:nvPr/>
+        </p:nvPicPr>
+        <p:blipFill>
+          <a:blip r:embed="rId1"/>
+          <a:stretch>
+            <a:fillRect/>
+          </a:stretch>
+        </p:blipFill>
+        <p:spPr>
+          <a:xfrm>
+            <a:off x="0" y="658368"/>
+            <a:ext cx="5120640" cy="5833872"/>
+          </a:xfrm>
+          <a:prstGeom prst="rect">
+            <a:avLst/>
+          </a:prstGeom>
+        </p:spPr>
+      </p:pic>
+      <p:sp>
+        <p:nvSpPr>
+          <p:cNvPr id="4" name="Text 1"/>
+          <p:cNvSpPr/>
+          <p:nvPr/>
+        </p:nvSpPr>
+        <p:spPr>
+          <a:xfrm>
+            <a:off x="5349240" y="1005840"/>
+            <a:ext cx="6522415" cy="731520"/>
+          </a:xfrm>
+          <a:prstGeom prst="rect">
+            <a:avLst/>
+          </a:prstGeom>
+          <a:noFill/>
+          <a:ln/>
+        </p:spPr>
+        <p:txBody>
+          <a:bodyPr wrap="square" lIns="0" tIns="0" rIns="0" bIns="0" rtlCol="0" anchor="ctr">
+            <a:normAutofit/>
+          </a:bodyPr>
+          <a:lstStyle/>
+          <a:p>
+            <a:pPr algn="ctr" indent="0" marL="0">
+              <a:buNone/>
+            </a:pPr>
+            <a:r>
+              <a:rPr lang="en-US" sz="3600" b="1" dirty="0">
+                <a:solidFill>
+                  <a:srgbClr val="990011"/>
+                </a:solidFill>
+                <a:latin typeface="Times New Roman" pitchFamily="34" charset="0"/>
+                <a:ea typeface="Times New Roman" pitchFamily="34" charset="-122"/>
+                <a:cs typeface="Times New Roman" pitchFamily="34" charset="-120"/>
+              </a:rPr>
+              <a:t>Expected Answer</a:t>
+            </a:r>
+            <a:endParaRPr lang="en-US" sz="3600" dirty="0"/>
+          </a:p>
+        </p:txBody>
+      </p:sp>
+      <p:sp>
+        <p:nvSpPr>
+          <p:cNvPr id="5" name="Text 2"/>
+          <p:cNvSpPr/>
+          <p:nvPr/>
+        </p:nvSpPr>
+        <p:spPr>
+          <a:xfrm>
+            <a:off x="5349240" y="1783080"/>
+            <a:ext cx="6522415" cy="4663440"/>
+          </a:xfrm>
+          <a:prstGeom prst="rect">
+            <a:avLst/>
+          </a:prstGeom>
+          <a:noFill/>
+          <a:ln/>
+        </p:spPr>
+        <p:txBody>
+          <a:bodyPr wrap="square" lIns="0" tIns="0" rIns="0" bIns="0" rtlCol="0" anchor="t"/>
+          <a:lstStyle/>
+          <a:p>
+            <a:pPr algn="l" indent="0" marL="0">
+              <a:spcAft>
+                <a:spcPts val="800"/>
+              </a:spcAft>
+              <a:buNone/>
+            </a:pPr>
+            <a:r>
+              <a:rPr lang="en-US" sz="4000" dirty="0">
+                <a:solidFill>
+                  <a:srgbClr val="111111"/>
+                </a:solidFill>
+                <a:latin typeface="Times New Roman" pitchFamily="34" charset="0"/>
+                <a:ea typeface="Times New Roman" pitchFamily="34" charset="-122"/>
+                <a:cs typeface="Times New Roman" pitchFamily="34" charset="-120"/>
+              </a:rPr>
+              <a:t>70 ÷ 2 = 35 years.</a:t>
+            </a:r>
+            <a:endParaRPr lang="en-US" sz="4000" dirty="0"/>
+          </a:p>
+        </p:txBody>
+      </p:sp>
+      <p:sp>
+        <p:nvSpPr>
+          <p:cNvPr id="25" name="Slide Number Placeholder 0"/>
+          <p:cNvSpPr>
+            <a:spLocks noGrp="1"/>
+          </p:cNvSpPr>
+          <p:nvPr>
+            <p:ph type="sldNum" sz="quarter" idx="4294967295"/>
+          </p:nvPr>
+        </p:nvSpPr>
+        <p:spPr>
+          <a:xfrm>
+            <a:off x="27432" y="91440"/>
+            <a:ext cx="585216" cy="475488"/>
+          </a:xfrm>
+          <a:prstGeom prst="rect">
+            <a:avLst/>
+          </a:prstGeom>
+          <a:extLst>
+            <a:ext uri="{C572A759-6A51-4108-AA02-DFA0A04FC94B}">
+              <ma14:wrappingTextBoxFlag xmlns:ma14="http://schemas.microsoft.com/office/mac/drawingml/2011/main" val="0"/>
+            </a:ext>
+          </a:extLst>
+        </p:spPr>
+        <p:txBody>
+          <a:bodyPr/>
+          <a:lstStyle>
+            <a:lvl1pPr>
+              <a:defRPr sz="2000">
+                <a:solidFill>
+                  <a:srgbClr val="FFFFFF"/>
+                </a:solidFill>
+                <a:latin typeface="Calibri"/>
+                <a:ea typeface="Calibri"/>
+                <a:cs typeface="Calibri"/>
+              </a:defRPr>
+            </a:lvl1pPr>
+          </a:lstStyle>
+          <a:p>
+            <a:pPr algn="ctr"/>
+            <a:fld id="{F7021451-1387-4CA6-816F-3879F97B5CBC}" type="slidenum">
+              <a:rPr b="1" lang="en-US"/>
+              <a:t>52</a:t>
+            </a:fld>
+            <a:endParaRPr lang="en-US"/>
+          </a:p>
+        </p:txBody>
+      </p:sp>
+    </p:spTree>
+  </p:cSld>
+  <p:clrMapOvr>
+    <a:masterClrMapping/>
+  </p:clrMapOvr>
+</p:sld>
+</file>
+
+<file path=ppt/slides/slide53.xml><?xml version="1.0" encoding="utf-8"?>
+<p:sld xmlns:a="http://schemas.openxmlformats.org/drawingml/2006/main" xmlns:r="http://schemas.openxmlformats.org/officeDocument/2006/relationships" xmlns:p="http://schemas.openxmlformats.org/presentationml/2006/main">
+  <p:cSld name="Slide 53">
+    <p:spTree>
+      <p:nvGrpSpPr>
+        <p:cNvPr id="1" name=""/>
+        <p:cNvGrpSpPr/>
+        <p:nvPr/>
+      </p:nvGrpSpPr>
+      <p:grpSpPr>
+        <a:xfrm>
+          <a:off x="0" y="0"/>
+          <a:ext cx="0" cy="0"/>
+          <a:chOff x="0" y="0"/>
+          <a:chExt cx="0" cy="0"/>
+        </a:xfrm>
+      </p:grpSpPr>
+      <p:sp>
+        <p:nvSpPr>
+          <p:cNvPr id="2" name="Text 0"/>
+          <p:cNvSpPr/>
+          <p:nvPr/>
+        </p:nvSpPr>
+        <p:spPr>
+          <a:xfrm>
+            <a:off x="457200" y="713232"/>
+            <a:ext cx="11368735" cy="274320"/>
+          </a:xfrm>
+          <a:prstGeom prst="rect">
+            <a:avLst/>
+          </a:prstGeom>
+          <a:noFill/>
+          <a:ln/>
+        </p:spPr>
+        <p:txBody>
+          <a:bodyPr wrap="square" lIns="0" tIns="0" rIns="0" bIns="0" rtlCol="0" anchor="ctr"/>
+          <a:lstStyle/>
+          <a:p>
+            <a:pPr algn="r" indent="0" marL="0">
+              <a:buNone/>
+            </a:pPr>
+            <a:r>
+              <a:rPr lang="en-US" sz="1400" b="1" dirty="0">
+                <a:solidFill>
+                  <a:srgbClr val="1C3F6E"/>
+                </a:solidFill>
+                <a:latin typeface="Calibri" pitchFamily="34" charset="0"/>
+                <a:ea typeface="Calibri" pitchFamily="34" charset="-122"/>
+                <a:cs typeface="Calibri" pitchFamily="34" charset="-120"/>
+              </a:rPr>
+              <a:t>REMEDIATION</a:t>
+            </a:r>
+            <a:endParaRPr lang="en-US" sz="1400" dirty="0"/>
+          </a:p>
+        </p:txBody>
+      </p:sp>
+      <p:pic>
+        <p:nvPicPr>
+          <p:cNvPr id="3" name="Image 0" descr="/home/claude/f4/img/minesec_sheet.png">    </p:cNvPr>
+          <p:cNvPicPr>
+            <a:picLocks noChangeAspect="1"/>
+          </p:cNvPicPr>
+          <p:nvPr/>
+        </p:nvPicPr>
+        <p:blipFill>
+          <a:blip r:embed="rId1"/>
+          <a:stretch>
+            <a:fillRect/>
+          </a:stretch>
+        </p:blipFill>
+        <p:spPr>
+          <a:xfrm>
+            <a:off x="0" y="658368"/>
+            <a:ext cx="3840480" cy="5833872"/>
+          </a:xfrm>
+          <a:prstGeom prst="rect">
+            <a:avLst/>
+          </a:prstGeom>
+        </p:spPr>
+      </p:pic>
+      <p:sp>
+        <p:nvSpPr>
+          <p:cNvPr id="4" name="Text 1"/>
+          <p:cNvSpPr/>
+          <p:nvPr/>
+        </p:nvSpPr>
+        <p:spPr>
+          <a:xfrm>
+            <a:off x="4069080" y="1005840"/>
+            <a:ext cx="7802575" cy="731520"/>
+          </a:xfrm>
+          <a:prstGeom prst="rect">
+            <a:avLst/>
+          </a:prstGeom>
+          <a:noFill/>
+          <a:ln/>
+        </p:spPr>
+        <p:txBody>
+          <a:bodyPr wrap="square" lIns="0" tIns="0" rIns="0" bIns="0" rtlCol="0" anchor="ctr">
+            <a:normAutofit/>
+          </a:bodyPr>
+          <a:lstStyle/>
+          <a:p>
+            <a:pPr algn="ctr" indent="0" marL="0">
+              <a:buNone/>
+            </a:pPr>
+            <a:r>
+              <a:rPr lang="en-US" sz="3600" b="1" dirty="0">
+                <a:solidFill>
+                  <a:srgbClr val="990011"/>
+                </a:solidFill>
+                <a:latin typeface="Times New Roman" pitchFamily="34" charset="0"/>
+                <a:ea typeface="Times New Roman" pitchFamily="34" charset="-122"/>
+                <a:cs typeface="Times New Roman" pitchFamily="34" charset="-120"/>
+              </a:rPr>
+              <a:t>Remediation</a:t>
+            </a:r>
+            <a:endParaRPr lang="en-US" sz="3600" dirty="0"/>
+          </a:p>
+        </p:txBody>
+      </p:sp>
+      <p:sp>
+        <p:nvSpPr>
+          <p:cNvPr id="5" name="Text 2"/>
+          <p:cNvSpPr/>
+          <p:nvPr/>
+        </p:nvSpPr>
+        <p:spPr>
+          <a:xfrm>
+            <a:off x="4069080" y="1783080"/>
+            <a:ext cx="7802575" cy="4663440"/>
+          </a:xfrm>
+          <a:prstGeom prst="rect">
+            <a:avLst/>
+          </a:prstGeom>
+          <a:noFill/>
+          <a:ln/>
+        </p:spPr>
+        <p:txBody>
+          <a:bodyPr wrap="square" lIns="0" tIns="0" rIns="0" bIns="0" rtlCol="0" anchor="t"/>
+          <a:lstStyle/>
+          <a:p>
+            <a:pPr algn="l" indent="0" marL="0">
+              <a:spcAft>
+                <a:spcPts val="800"/>
+              </a:spcAft>
+              <a:buNone/>
+            </a:pPr>
+            <a:r>
+              <a:rPr lang="en-US" sz="4000" b="1" dirty="0">
+                <a:solidFill>
+                  <a:srgbClr val="111111"/>
+                </a:solidFill>
+                <a:latin typeface="Times New Roman" pitchFamily="34" charset="0"/>
+                <a:ea typeface="Times New Roman" pitchFamily="34" charset="-122"/>
+                <a:cs typeface="Times New Roman" pitchFamily="34" charset="-120"/>
+              </a:rPr>
+              <a:t>Fill in the blanks:</a:t>
+            </a:r>
+            <a:endParaRPr lang="en-US" sz="4000" dirty="0"/>
+          </a:p>
+          <a:p>
+            <a:pPr algn="l" marL="342900" indent="-342900">
+              <a:spcAft>
+                <a:spcPts val="800"/>
+              </a:spcAft>
+              <a:buSzPct val="100000"/>
+              <a:buFont typeface="+mj-lt"/>
+              <a:buAutoNum type="arabicPeriod" startAt="1"/>
+            </a:pPr>
+            <a:r>
+              <a:rPr lang="en-US" sz="4000" dirty="0">
+                <a:solidFill>
+                  <a:srgbClr val="111111"/>
+                </a:solidFill>
+                <a:latin typeface="Times New Roman" pitchFamily="34" charset="0"/>
+                <a:ea typeface="Times New Roman" pitchFamily="34" charset="-122"/>
+                <a:cs typeface="Times New Roman" pitchFamily="34" charset="-120"/>
+              </a:rPr>
+              <a:t>The CBR is expressed per ______ people.</a:t>
+            </a:r>
+            <a:endParaRPr lang="en-US" sz="4000" dirty="0"/>
+          </a:p>
+          <a:p>
+            <a:pPr algn="l" marL="342900" indent="-342900">
+              <a:spcAft>
+                <a:spcPts val="800"/>
+              </a:spcAft>
+              <a:buSzPct val="100000"/>
+              <a:buFont typeface="+mj-lt"/>
+              <a:buAutoNum type="arabicPeriod" startAt="1"/>
+            </a:pPr>
+            <a:r>
+              <a:rPr lang="en-US" sz="4000" dirty="0">
+                <a:solidFill>
+                  <a:srgbClr val="111111"/>
+                </a:solidFill>
+                <a:latin typeface="Times New Roman" pitchFamily="34" charset="0"/>
+                <a:ea typeface="Times New Roman" pitchFamily="34" charset="-122"/>
+                <a:cs typeface="Times New Roman" pitchFamily="34" charset="-120"/>
+              </a:rPr>
+              <a:t>RNI (%) = (CBR − CDR) ÷ ______.</a:t>
+            </a:r>
+            <a:endParaRPr lang="en-US" sz="4000" dirty="0"/>
+          </a:p>
+          <a:p>
+            <a:pPr algn="l" marL="342900" indent="-342900">
+              <a:spcAft>
+                <a:spcPts val="800"/>
+              </a:spcAft>
+              <a:buSzPct val="100000"/>
+              <a:buFont typeface="+mj-lt"/>
+              <a:buAutoNum type="arabicPeriod" startAt="1"/>
+            </a:pPr>
+            <a:r>
+              <a:rPr lang="en-US" sz="4000" dirty="0">
+                <a:solidFill>
+                  <a:srgbClr val="111111"/>
+                </a:solidFill>
+                <a:latin typeface="Times New Roman" pitchFamily="34" charset="0"/>
+                <a:ea typeface="Times New Roman" pitchFamily="34" charset="-122"/>
+                <a:cs typeface="Times New Roman" pitchFamily="34" charset="-120"/>
+              </a:rPr>
+              <a:t>Doubling time ≈ ______ ÷ growth rate.</a:t>
+            </a:r>
+            <a:endParaRPr lang="en-US" sz="4000" dirty="0"/>
+          </a:p>
+        </p:txBody>
+      </p:sp>
+      <p:sp>
+        <p:nvSpPr>
+          <p:cNvPr id="25" name="Slide Number Placeholder 0"/>
+          <p:cNvSpPr>
+            <a:spLocks noGrp="1"/>
+          </p:cNvSpPr>
+          <p:nvPr>
+            <p:ph type="sldNum" sz="quarter" idx="4294967295"/>
+          </p:nvPr>
+        </p:nvSpPr>
+        <p:spPr>
+          <a:xfrm>
+            <a:off x="27432" y="91440"/>
+            <a:ext cx="585216" cy="475488"/>
+          </a:xfrm>
+          <a:prstGeom prst="rect">
+            <a:avLst/>
+          </a:prstGeom>
+          <a:extLst>
+            <a:ext uri="{C572A759-6A51-4108-AA02-DFA0A04FC94B}">
+              <ma14:wrappingTextBoxFlag xmlns:ma14="http://schemas.microsoft.com/office/mac/drawingml/2011/main" val="0"/>
+            </a:ext>
+          </a:extLst>
+        </p:spPr>
+        <p:txBody>
+          <a:bodyPr/>
+          <a:lstStyle>
+            <a:lvl1pPr>
+              <a:defRPr sz="2000">
+                <a:solidFill>
+                  <a:srgbClr val="FFFFFF"/>
+                </a:solidFill>
+                <a:latin typeface="Calibri"/>
+                <a:ea typeface="Calibri"/>
+                <a:cs typeface="Calibri"/>
+              </a:defRPr>
+            </a:lvl1pPr>
+          </a:lstStyle>
+          <a:p>
+            <a:pPr algn="ctr"/>
+            <a:fld id="{F7021451-1387-4CA6-816F-3879F97B5CBC}" type="slidenum">
+              <a:rPr b="1" lang="en-US"/>
+              <a:t>53</a:t>
+            </a:fld>
+            <a:endParaRPr lang="en-US"/>
+          </a:p>
+        </p:txBody>
+      </p:sp>
+    </p:spTree>
+  </p:cSld>
+  <p:clrMapOvr>
+    <a:masterClrMapping/>
+  </p:clrMapOvr>
+</p:sld>
+</file>
+
+<file path=ppt/slides/slide54.xml><?xml version="1.0" encoding="utf-8"?>
+<p:sld xmlns:a="http://schemas.openxmlformats.org/drawingml/2006/main" xmlns:r="http://schemas.openxmlformats.org/officeDocument/2006/relationships" xmlns:p="http://schemas.openxmlformats.org/presentationml/2006/main">
+  <p:cSld name="Slide 54">
+    <p:spTree>
+      <p:nvGrpSpPr>
+        <p:cNvPr id="1" name=""/>
+        <p:cNvGrpSpPr/>
+        <p:nvPr/>
+      </p:nvGrpSpPr>
+      <p:grpSpPr>
+        <a:xfrm>
+          <a:off x="0" y="0"/>
+          <a:ext cx="0" cy="0"/>
+          <a:chOff x="0" y="0"/>
+          <a:chExt cx="0" cy="0"/>
+        </a:xfrm>
+      </p:grpSpPr>
+      <p:sp>
+        <p:nvSpPr>
+          <p:cNvPr id="2" name="Text 0"/>
+          <p:cNvSpPr/>
+          <p:nvPr/>
+        </p:nvSpPr>
+        <p:spPr>
+          <a:xfrm>
+            <a:off x="457200" y="713232"/>
+            <a:ext cx="11368735" cy="274320"/>
+          </a:xfrm>
+          <a:prstGeom prst="rect">
+            <a:avLst/>
+          </a:prstGeom>
+          <a:noFill/>
+          <a:ln/>
+        </p:spPr>
+        <p:txBody>
+          <a:bodyPr wrap="square" lIns="0" tIns="0" rIns="0" bIns="0" rtlCol="0" anchor="ctr"/>
+          <a:lstStyle/>
+          <a:p>
+            <a:pPr algn="r" indent="0" marL="0">
+              <a:buNone/>
+            </a:pPr>
+            <a:r>
+              <a:rPr lang="en-US" sz="1400" b="1" dirty="0">
+                <a:solidFill>
+                  <a:srgbClr val="1C3F6E"/>
+                </a:solidFill>
+                <a:latin typeface="Calibri" pitchFamily="34" charset="0"/>
+                <a:ea typeface="Calibri" pitchFamily="34" charset="-122"/>
+                <a:cs typeface="Calibri" pitchFamily="34" charset="-120"/>
+              </a:rPr>
+              <a:t>HOMEWORK</a:t>
+            </a:r>
+            <a:endParaRPr lang="en-US" sz="1400" dirty="0"/>
+          </a:p>
+        </p:txBody>
+      </p:sp>
+      <p:pic>
+        <p:nvPicPr>
+          <p:cNvPr id="3" name="Image 0" descr="/home/claude/f4/img/minesec_sheet.png">    </p:cNvPr>
+          <p:cNvPicPr>
+            <a:picLocks noChangeAspect="1"/>
+          </p:cNvPicPr>
+          <p:nvPr/>
+        </p:nvPicPr>
+        <p:blipFill>
+          <a:blip r:embed="rId1"/>
+          <a:stretch>
+            <a:fillRect/>
+          </a:stretch>
+        </p:blipFill>
+        <p:spPr>
+          <a:xfrm>
+            <a:off x="0" y="658368"/>
+            <a:ext cx="5120640" cy="5833872"/>
+          </a:xfrm>
+          <a:prstGeom prst="rect">
+            <a:avLst/>
+          </a:prstGeom>
+        </p:spPr>
+      </p:pic>
+      <p:sp>
+        <p:nvSpPr>
+          <p:cNvPr id="4" name="Text 1"/>
+          <p:cNvSpPr/>
+          <p:nvPr/>
+        </p:nvSpPr>
+        <p:spPr>
+          <a:xfrm>
+            <a:off x="5349240" y="1005840"/>
+            <a:ext cx="6522415" cy="731520"/>
+          </a:xfrm>
+          <a:prstGeom prst="rect">
+            <a:avLst/>
+          </a:prstGeom>
+          <a:noFill/>
+          <a:ln/>
+        </p:spPr>
+        <p:txBody>
+          <a:bodyPr wrap="square" lIns="0" tIns="0" rIns="0" bIns="0" rtlCol="0" anchor="ctr">
+            <a:normAutofit/>
+          </a:bodyPr>
+          <a:lstStyle/>
+          <a:p>
+            <a:pPr algn="ctr" indent="0" marL="0">
+              <a:buNone/>
+            </a:pPr>
+            <a:r>
+              <a:rPr lang="en-US" sz="3600" b="1" dirty="0">
+                <a:solidFill>
+                  <a:srgbClr val="990011"/>
+                </a:solidFill>
+                <a:latin typeface="Times New Roman" pitchFamily="34" charset="0"/>
+                <a:ea typeface="Times New Roman" pitchFamily="34" charset="-122"/>
+                <a:cs typeface="Times New Roman" pitchFamily="34" charset="-120"/>
+              </a:rPr>
+              <a:t>Homework</a:t>
+            </a:r>
+            <a:endParaRPr lang="en-US" sz="3600" dirty="0"/>
+          </a:p>
+        </p:txBody>
+      </p:sp>
+      <p:sp>
+        <p:nvSpPr>
+          <p:cNvPr id="5" name="Text 2"/>
+          <p:cNvSpPr/>
+          <p:nvPr/>
+        </p:nvSpPr>
+        <p:spPr>
+          <a:xfrm>
+            <a:off x="5349240" y="1783080"/>
+            <a:ext cx="6522415" cy="4663440"/>
+          </a:xfrm>
+          <a:prstGeom prst="rect">
+            <a:avLst/>
+          </a:prstGeom>
+          <a:noFill/>
+          <a:ln/>
+        </p:spPr>
+        <p:txBody>
+          <a:bodyPr wrap="square" lIns="0" tIns="0" rIns="0" bIns="0" rtlCol="0" anchor="t"/>
+          <a:lstStyle/>
+          <a:p>
+            <a:pPr algn="l" indent="0" marL="0">
+              <a:spcAft>
+                <a:spcPts val="800"/>
+              </a:spcAft>
+              <a:buNone/>
+            </a:pPr>
+            <a:r>
+              <a:rPr lang="en-US" sz="4000" dirty="0">
+                <a:solidFill>
+                  <a:srgbClr val="111111"/>
+                </a:solidFill>
+                <a:latin typeface="Times New Roman" pitchFamily="34" charset="0"/>
+                <a:ea typeface="Times New Roman" pitchFamily="34" charset="-122"/>
+                <a:cs typeface="Times New Roman" pitchFamily="34" charset="-120"/>
+              </a:rPr>
+              <a:t>Name two non-demographic factors of population growth.</a:t>
+            </a:r>
+            <a:endParaRPr lang="en-US" sz="4000" dirty="0"/>
+          </a:p>
+        </p:txBody>
+      </p:sp>
+      <p:sp>
+        <p:nvSpPr>
+          <p:cNvPr id="25" name="Slide Number Placeholder 0"/>
+          <p:cNvSpPr>
+            <a:spLocks noGrp="1"/>
+          </p:cNvSpPr>
+          <p:nvPr>
+            <p:ph type="sldNum" sz="quarter" idx="4294967295"/>
+          </p:nvPr>
+        </p:nvSpPr>
+        <p:spPr>
+          <a:xfrm>
+            <a:off x="27432" y="91440"/>
+            <a:ext cx="585216" cy="475488"/>
+          </a:xfrm>
+          <a:prstGeom prst="rect">
+            <a:avLst/>
+          </a:prstGeom>
+          <a:extLst>
+            <a:ext uri="{C572A759-6A51-4108-AA02-DFA0A04FC94B}">
+              <ma14:wrappingTextBoxFlag xmlns:ma14="http://schemas.microsoft.com/office/mac/drawingml/2011/main" val="0"/>
+            </a:ext>
+          </a:extLst>
+        </p:spPr>
+        <p:txBody>
+          <a:bodyPr/>
+          <a:lstStyle>
+            <a:lvl1pPr>
+              <a:defRPr sz="2000">
+                <a:solidFill>
+                  <a:srgbClr val="FFFFFF"/>
+                </a:solidFill>
+                <a:latin typeface="Calibri"/>
+                <a:ea typeface="Calibri"/>
+                <a:cs typeface="Calibri"/>
+              </a:defRPr>
+            </a:lvl1pPr>
+          </a:lstStyle>
+          <a:p>
+            <a:pPr algn="ctr"/>
+            <a:fld id="{F7021451-1387-4CA6-816F-3879F97B5CBC}" type="slidenum">
+              <a:rPr b="1" lang="en-US"/>
+              <a:t>54</a:t>
+            </a:fld>
+            <a:endParaRPr lang="en-US"/>
+          </a:p>
+        </p:txBody>
+      </p:sp>
+    </p:spTree>
+  </p:cSld>
+  <p:clrMapOvr>
+    <a:masterClrMapping/>
+  </p:clrMapOvr>
+</p:sld>
+</file>
+
+<file path=ppt/slides/slide55.xml><?xml version="1.0" encoding="utf-8"?>
+<p:sld xmlns:a="http://schemas.openxmlformats.org/drawingml/2006/main" xmlns:r="http://schemas.openxmlformats.org/officeDocument/2006/relationships" xmlns:p="http://schemas.openxmlformats.org/presentationml/2006/main">
+  <p:cSld name="Slide 55">
+    <p:spTree>
+      <p:nvGrpSpPr>
+        <p:cNvPr id="1" name=""/>
+        <p:cNvGrpSpPr/>
+        <p:nvPr/>
+      </p:nvGrpSpPr>
+      <p:grpSpPr>
+        <a:xfrm>
+          <a:off x="0" y="0"/>
+          <a:ext cx="0" cy="0"/>
+          <a:chOff x="0" y="0"/>
+          <a:chExt cx="0" cy="0"/>
+        </a:xfrm>
+      </p:grpSpPr>
+      <p:sp>
+        <p:nvSpPr>
+          <p:cNvPr id="2" name="Text 0"/>
+          <p:cNvSpPr/>
+          <p:nvPr/>
+        </p:nvSpPr>
+        <p:spPr>
+          <a:xfrm>
+            <a:off x="457200" y="713232"/>
+            <a:ext cx="11368735" cy="274320"/>
+          </a:xfrm>
+          <a:prstGeom prst="rect">
+            <a:avLst/>
+          </a:prstGeom>
+          <a:noFill/>
+          <a:ln/>
+        </p:spPr>
+        <p:txBody>
+          <a:bodyPr wrap="square" lIns="0" tIns="0" rIns="0" bIns="0" rtlCol="0" anchor="ctr"/>
+          <a:lstStyle/>
+          <a:p>
+            <a:pPr algn="r" indent="0" marL="0">
+              <a:buNone/>
+            </a:pPr>
+            <a:r>
+              <a:rPr lang="en-US" sz="1400" b="1" dirty="0">
+                <a:solidFill>
+                  <a:srgbClr val="1C3F6E"/>
+                </a:solidFill>
+                <a:latin typeface="Calibri" pitchFamily="34" charset="0"/>
+                <a:ea typeface="Calibri" pitchFamily="34" charset="-122"/>
+                <a:cs typeface="Calibri" pitchFamily="34" charset="-120"/>
+              </a:rPr>
+              <a:t>NEXT LESSON</a:t>
+            </a:r>
+            <a:endParaRPr lang="en-US" sz="1400" dirty="0"/>
+          </a:p>
+        </p:txBody>
+      </p:sp>
+      <p:pic>
+        <p:nvPicPr>
+          <p:cNvPr id="3" name="Image 0" descr="/home/claude/f4/img/minesec_sheet.png">    </p:cNvPr>
+          <p:cNvPicPr>
+            <a:picLocks noChangeAspect="1"/>
+          </p:cNvPicPr>
+          <p:nvPr/>
+        </p:nvPicPr>
+        <p:blipFill>
+          <a:blip r:embed="rId1"/>
+          <a:stretch>
+            <a:fillRect/>
+          </a:stretch>
+        </p:blipFill>
+        <p:spPr>
+          <a:xfrm>
+            <a:off x="0" y="658368"/>
+            <a:ext cx="5120640" cy="5833872"/>
+          </a:xfrm>
+          <a:prstGeom prst="rect">
+            <a:avLst/>
+          </a:prstGeom>
+        </p:spPr>
+      </p:pic>
+      <p:sp>
+        <p:nvSpPr>
+          <p:cNvPr id="4" name="Text 1"/>
+          <p:cNvSpPr/>
+          <p:nvPr/>
+        </p:nvSpPr>
+        <p:spPr>
+          <a:xfrm>
+            <a:off x="5349240" y="1005840"/>
+            <a:ext cx="6522415" cy="731520"/>
+          </a:xfrm>
+          <a:prstGeom prst="rect">
+            <a:avLst/>
+          </a:prstGeom>
+          <a:noFill/>
+          <a:ln/>
+        </p:spPr>
+        <p:txBody>
+          <a:bodyPr wrap="square" lIns="0" tIns="0" rIns="0" bIns="0" rtlCol="0" anchor="ctr">
+            <a:normAutofit/>
+          </a:bodyPr>
+          <a:lstStyle/>
+          <a:p>
+            <a:pPr algn="ctr" indent="0" marL="0">
+              <a:buNone/>
+            </a:pPr>
+            <a:r>
+              <a:rPr lang="en-US" sz="3600" b="1" dirty="0">
+                <a:solidFill>
+                  <a:srgbClr val="990011"/>
+                </a:solidFill>
+                <a:latin typeface="Times New Roman" pitchFamily="34" charset="0"/>
+                <a:ea typeface="Times New Roman" pitchFamily="34" charset="-122"/>
+                <a:cs typeface="Times New Roman" pitchFamily="34" charset="-120"/>
+              </a:rPr>
+              <a:t>Next Lesson</a:t>
+            </a:r>
+            <a:endParaRPr lang="en-US" sz="3600" dirty="0"/>
+          </a:p>
+        </p:txBody>
+      </p:sp>
+      <p:sp>
+        <p:nvSpPr>
+          <p:cNvPr id="5" name="Text 2"/>
+          <p:cNvSpPr/>
+          <p:nvPr/>
+        </p:nvSpPr>
+        <p:spPr>
+          <a:xfrm>
+            <a:off x="5349240" y="1783080"/>
+            <a:ext cx="6522415" cy="4663440"/>
+          </a:xfrm>
+          <a:prstGeom prst="rect">
+            <a:avLst/>
+          </a:prstGeom>
+          <a:noFill/>
+          <a:ln/>
+        </p:spPr>
+        <p:txBody>
+          <a:bodyPr wrap="square" lIns="0" tIns="0" rIns="0" bIns="0" rtlCol="0" anchor="ctr"/>
+          <a:lstStyle/>
+          <a:p>
+            <a:pPr algn="ctr" indent="0" marL="0">
+              <a:spcAft>
+                <a:spcPts val="800"/>
+              </a:spcAft>
+              <a:buNone/>
+            </a:pPr>
+            <a:r>
+              <a:rPr lang="en-US" sz="4000" b="1" dirty="0">
+                <a:solidFill>
+                  <a:srgbClr val="111111"/>
+                </a:solidFill>
+                <a:latin typeface="Times New Roman" pitchFamily="34" charset="0"/>
+                <a:ea typeface="Times New Roman" pitchFamily="34" charset="-122"/>
+                <a:cs typeface="Times New Roman" pitchFamily="34" charset="-120"/>
+              </a:rPr>
+              <a:t>Our next lesson will be on:</a:t>
+            </a:r>
+            <a:endParaRPr lang="en-US" sz="4000" dirty="0"/>
+          </a:p>
+          <a:p>
+            <a:pPr algn="ctr" indent="0" marL="0">
+              <a:spcAft>
+                <a:spcPts val="800"/>
+              </a:spcAft>
+              <a:buNone/>
+            </a:pPr>
+            <a:r>
+              <a:rPr lang="en-US" sz="4000" b="1" dirty="0">
+                <a:solidFill>
+                  <a:srgbClr val="990011"/>
+                </a:solidFill>
+                <a:latin typeface="Times New Roman" pitchFamily="34" charset="0"/>
+                <a:ea typeface="Times New Roman" pitchFamily="34" charset="-122"/>
+                <a:cs typeface="Times New Roman" pitchFamily="34" charset="-120"/>
+              </a:rPr>
+              <a:t>Lesson 10: Factors of Population Growth</a:t>
+            </a:r>
+            <a:endParaRPr lang="en-US" sz="4000" dirty="0"/>
+          </a:p>
+        </p:txBody>
+      </p:sp>
+      <p:sp>
+        <p:nvSpPr>
+          <p:cNvPr id="25" name="Slide Number Placeholder 0"/>
+          <p:cNvSpPr>
+            <a:spLocks noGrp="1"/>
+          </p:cNvSpPr>
+          <p:nvPr>
+            <p:ph type="sldNum" sz="quarter" idx="4294967295"/>
+          </p:nvPr>
+        </p:nvSpPr>
+        <p:spPr>
+          <a:xfrm>
+            <a:off x="27432" y="91440"/>
+            <a:ext cx="585216" cy="475488"/>
+          </a:xfrm>
+          <a:prstGeom prst="rect">
+            <a:avLst/>
+          </a:prstGeom>
+          <a:extLst>
+            <a:ext uri="{C572A759-6A51-4108-AA02-DFA0A04FC94B}">
+              <ma14:wrappingTextBoxFlag xmlns:ma14="http://schemas.microsoft.com/office/mac/drawingml/2011/main" val="0"/>
+            </a:ext>
+          </a:extLst>
+        </p:spPr>
+        <p:txBody>
+          <a:bodyPr/>
+          <a:lstStyle>
+            <a:lvl1pPr>
+              <a:defRPr sz="2000">
+                <a:solidFill>
+                  <a:srgbClr val="FFFFFF"/>
+                </a:solidFill>
+                <a:latin typeface="Calibri"/>
+                <a:ea typeface="Calibri"/>
+                <a:cs typeface="Calibri"/>
+              </a:defRPr>
+            </a:lvl1pPr>
+          </a:lstStyle>
+          <a:p>
+            <a:pPr algn="ctr"/>
+            <a:fld id="{F7021451-1387-4CA6-816F-3879F97B5CBC}" type="slidenum">
+              <a:rPr b="1" lang="en-US"/>
+              <a:t>55</a:t>
+            </a:fld>
+            <a:endParaRPr lang="en-US"/>
+          </a:p>
+        </p:txBody>
+      </p:sp>
+    </p:spTree>
+  </p:cSld>
+  <p:clrMapOvr>
+    <a:masterClrMapping/>
+  </p:clrMapOvr>
+</p:sld>
+</file>
+
+<file path=ppt/slides/slide56.xml><?xml version="1.0" encoding="utf-8"?>
+<p:sld xmlns:a="http://schemas.openxmlformats.org/drawingml/2006/main" xmlns:r="http://schemas.openxmlformats.org/officeDocument/2006/relationships" xmlns:p="http://schemas.openxmlformats.org/presentationml/2006/main">
+  <p:cSld name="Slide 56">
+    <p:spTree>
+      <p:nvGrpSpPr>
+        <p:cNvPr id="1" name=""/>
+        <p:cNvGrpSpPr/>
+        <p:nvPr/>
+      </p:nvGrpSpPr>
+      <p:grpSpPr>
+        <a:xfrm>
+          <a:off x="0" y="0"/>
+          <a:ext cx="0" cy="0"/>
+          <a:chOff x="0" y="0"/>
+          <a:chExt cx="0" cy="0"/>
+        </a:xfrm>
+      </p:grpSpPr>
+      <p:sp>
+        <p:nvSpPr>
+          <p:cNvPr id="2" name="Text 0"/>
+          <p:cNvSpPr/>
+          <p:nvPr/>
+        </p:nvSpPr>
+        <p:spPr>
+          <a:xfrm>
+            <a:off x="457200" y="713232"/>
+            <a:ext cx="11368735" cy="274320"/>
+          </a:xfrm>
+          <a:prstGeom prst="rect">
+            <a:avLst/>
+          </a:prstGeom>
+          <a:noFill/>
+          <a:ln/>
+        </p:spPr>
+        <p:txBody>
+          <a:bodyPr wrap="square" lIns="0" tIns="0" rIns="0" bIns="0" rtlCol="0" anchor="ctr"/>
+          <a:lstStyle/>
+          <a:p>
+            <a:pPr algn="r" indent="0" marL="0">
+              <a:buNone/>
+            </a:pPr>
+            <a:r>
+              <a:rPr lang="en-US" sz="1400" b="1" dirty="0">
+                <a:solidFill>
+                  <a:srgbClr val="1C3F6E"/>
+                </a:solidFill>
+                <a:latin typeface="Calibri" pitchFamily="34" charset="0"/>
+                <a:ea typeface="Calibri" pitchFamily="34" charset="-122"/>
+                <a:cs typeface="Calibri" pitchFamily="34" charset="-120"/>
+              </a:rPr>
+              <a:t>BILINGUAL GAME</a:t>
+            </a:r>
+            <a:endParaRPr lang="en-US" sz="1400" dirty="0"/>
+          </a:p>
+        </p:txBody>
+      </p:sp>
+      <p:sp>
+        <p:nvSpPr>
+          <p:cNvPr id="3" name="Text 1"/>
+          <p:cNvSpPr/>
+          <p:nvPr/>
+        </p:nvSpPr>
+        <p:spPr>
+          <a:xfrm>
+            <a:off x="457200" y="1005840"/>
+            <a:ext cx="11277295" cy="731520"/>
+          </a:xfrm>
+          <a:prstGeom prst="rect">
+            <a:avLst/>
+          </a:prstGeom>
+          <a:noFill/>
+          <a:ln/>
+        </p:spPr>
+        <p:txBody>
+          <a:bodyPr wrap="square" lIns="0" tIns="0" rIns="0" bIns="0" rtlCol="0" anchor="ctr"/>
+          <a:lstStyle/>
+          <a:p>
+            <a:pPr algn="ctr" indent="0" marL="0">
+              <a:buNone/>
+            </a:pPr>
+            <a:r>
+              <a:rPr lang="en-US" sz="3600" b="1" dirty="0">
+                <a:solidFill>
+                  <a:srgbClr val="990011"/>
+                </a:solidFill>
+                <a:latin typeface="Times New Roman" pitchFamily="34" charset="0"/>
+                <a:ea typeface="Times New Roman" pitchFamily="34" charset="-122"/>
+                <a:cs typeface="Times New Roman" pitchFamily="34" charset="-120"/>
+              </a:rPr>
               <a:t>Bilingual Game (Jeu Bilingue)</a:t>
             </a:r>
             <a:endParaRPr lang="en-US" sz="3600" dirty="0"/>
@@ -17265,7 +20207,7 @@
       </p:sp>
       <p:graphicFrame>
         <p:nvGraphicFramePr>
-          <p:cNvPr id="50" name="Table 0"/>
+          <p:cNvPr id="57" name="Table 0"/>
           <p:cNvGraphicFramePr>
             <a:graphicFrameLocks noGrp="1"/>
           </p:cNvGraphicFramePr>
@@ -17445,7 +20387,7 @@
                           <a:ea typeface="Calibri" pitchFamily="34" charset="-122"/>
                           <a:cs typeface="Calibri" pitchFamily="34" charset="-120"/>
                         </a:rPr>
-                        <a:t>Rate</a:t>
+                        <a:t>Birth rate</a:t>
                       </a:r>
                       <a:endParaRPr lang="en-US" sz="2200" dirty="0">
                         <a:latin typeface="Calibri" charset="0"/>
@@ -17513,7 +20455,7 @@
                           <a:ea typeface="Calibri" pitchFamily="34" charset="-122"/>
                           <a:cs typeface="Calibri" pitchFamily="34" charset="-120"/>
                         </a:rPr>
-                        <a:t>Le taux</a:t>
+                        <a:t>Le taux de natalité</a:t>
                       </a:r>
                       <a:endParaRPr lang="en-US" sz="2200" dirty="0">
                         <a:latin typeface="Calibri" charset="0"/>
@@ -17583,7 +20525,7 @@
                           <a:ea typeface="Calibri" pitchFamily="34" charset="-122"/>
                           <a:cs typeface="Calibri" pitchFamily="34" charset="-120"/>
                         </a:rPr>
-                        <a:t>Per thousand</a:t>
+                        <a:t>Death rate</a:t>
                       </a:r>
                       <a:endParaRPr lang="en-US" sz="2200" dirty="0">
                         <a:latin typeface="Calibri" charset="0"/>
@@ -17651,7 +20593,7 @@
                           <a:ea typeface="Calibri" pitchFamily="34" charset="-122"/>
                           <a:cs typeface="Calibri" pitchFamily="34" charset="-120"/>
                         </a:rPr>
-                        <a:t>Pour mille</a:t>
+                        <a:t>Le taux de mortalité</a:t>
                       </a:r>
                       <a:endParaRPr lang="en-US" sz="2200" dirty="0">
                         <a:latin typeface="Calibri" charset="0"/>
@@ -17721,7 +20663,7 @@
                           <a:ea typeface="Calibri" pitchFamily="34" charset="-122"/>
                           <a:cs typeface="Calibri" pitchFamily="34" charset="-120"/>
                         </a:rPr>
-                        <a:t>Doubling time</a:t>
+                        <a:t>Growth rate</a:t>
                       </a:r>
                       <a:endParaRPr lang="en-US" sz="2200" dirty="0">
                         <a:latin typeface="Calibri" charset="0"/>
@@ -17789,7 +20731,7 @@
                           <a:ea typeface="Calibri" pitchFamily="34" charset="-122"/>
                           <a:cs typeface="Calibri" pitchFamily="34" charset="-120"/>
                         </a:rPr>
-                        <a:t>Le temps de doublement</a:t>
+                        <a:t>Le taux de croissance</a:t>
                       </a:r>
                       <a:endParaRPr lang="en-US" sz="2200" dirty="0">
                         <a:latin typeface="Calibri" charset="0"/>
@@ -17859,7 +20801,7 @@
                           <a:ea typeface="Calibri" pitchFamily="34" charset="-122"/>
                           <a:cs typeface="Calibri" pitchFamily="34" charset="-120"/>
                         </a:rPr>
-                        <a:t>Projection</a:t>
+                        <a:t>Doubling time</a:t>
                       </a:r>
                       <a:endParaRPr lang="en-US" sz="2200" dirty="0">
                         <a:latin typeface="Calibri" charset="0"/>
@@ -17927,7 +20869,7 @@
                           <a:ea typeface="Calibri" pitchFamily="34" charset="-122"/>
                           <a:cs typeface="Calibri" pitchFamily="34" charset="-120"/>
                         </a:rPr>
-                        <a:t>La projection</a:t>
+                        <a:t>Le temps de doublement</a:t>
                       </a:r>
                       <a:endParaRPr lang="en-US" sz="2200" dirty="0">
                         <a:latin typeface="Calibri" charset="0"/>
@@ -17997,7 +20939,7 @@
                           <a:ea typeface="Calibri" pitchFamily="34" charset="-122"/>
                           <a:cs typeface="Calibri" pitchFamily="34" charset="-120"/>
                         </a:rPr>
-                        <a:t>Fertility rate</a:t>
+                        <a:t>Population projection</a:t>
                       </a:r>
                       <a:endParaRPr lang="en-US" sz="2200" dirty="0">
                         <a:latin typeface="Calibri" charset="0"/>
@@ -18065,7 +21007,7 @@
                           <a:ea typeface="Calibri" pitchFamily="34" charset="-122"/>
                           <a:cs typeface="Calibri" pitchFamily="34" charset="-120"/>
                         </a:rPr>
-                        <a:t>L'indice de fécondité</a:t>
+                        <a:t>La projection démographique</a:t>
                       </a:r>
                       <a:endParaRPr lang="en-US" sz="2200" dirty="0">
                         <a:latin typeface="Calibri" charset="0"/>
@@ -18135,7 +21077,7 @@
                           <a:ea typeface="Calibri" pitchFamily="34" charset="-122"/>
                           <a:cs typeface="Calibri" pitchFamily="34" charset="-120"/>
                         </a:rPr>
-                        <a:t>Calculate</a:t>
+                        <a:t>Fecundity</a:t>
                       </a:r>
                       <a:endParaRPr lang="en-US" sz="2200" dirty="0">
                         <a:latin typeface="Calibri" charset="0"/>
@@ -18203,7 +21145,7 @@
                           <a:ea typeface="Calibri" pitchFamily="34" charset="-122"/>
                           <a:cs typeface="Calibri" pitchFamily="34" charset="-120"/>
                         </a:rPr>
-                        <a:t>Calculer</a:t>
+                        <a:t>La fertilité biologique (fécondabilité)</a:t>
                       </a:r>
                       <a:endParaRPr lang="en-US" sz="2200" dirty="0">
                         <a:latin typeface="Calibri" charset="0"/>
@@ -18301,7 +21243,7 @@
             <a:pPr algn="ctr"/>
             <a:fld id="{F7021451-1387-4CA6-816F-3879F97B5CBC}" type="slidenum">
               <a:rPr b="1" lang="en-US"/>
-              <a:t>49</a:t>
+              <a:t>56</a:t>
             </a:fld>
             <a:endParaRPr lang="en-US"/>
           </a:p>
@@ -18315,9 +21257,9 @@
 </p:sld>
 </file>
 
-<file path=ppt/slides/slide5.xml><?xml version="1.0" encoding="utf-8"?>
+<file path=ppt/slides/slide57.xml><?xml version="1.0" encoding="utf-8"?>
 <p:sld xmlns:a="http://schemas.openxmlformats.org/drawingml/2006/main" xmlns:r="http://schemas.openxmlformats.org/officeDocument/2006/relationships" xmlns:p="http://schemas.openxmlformats.org/presentationml/2006/main">
-  <p:cSld name="Slide 5">
+  <p:cSld name="Slide 57">
     <p:spTree>
       <p:nvGrpSpPr>
         <p:cNvPr id="1" name=""/>
@@ -18365,46 +21307,22 @@
                 <a:ea typeface="Calibri" pitchFamily="34" charset="-122"/>
                 <a:cs typeface="Calibri" pitchFamily="34" charset="-120"/>
               </a:rPr>
-              <a:t>HOMEWORK CORRECTION</a:t>
+              <a:t>LOGBOOK</a:t>
             </a:r>
             <a:endParaRPr lang="en-US" sz="1400" dirty="0"/>
           </a:p>
         </p:txBody>
       </p:sp>
-      <p:pic>
-        <p:nvPicPr>
-          <p:cNvPr id="3" name="Image 0" descr="/home/claude/f4/img/minesec_sheet.png">    </p:cNvPr>
-          <p:cNvPicPr>
-            <a:picLocks noChangeAspect="1"/>
-          </p:cNvPicPr>
-          <p:nvPr/>
-        </p:nvPicPr>
-        <p:blipFill>
-          <a:blip r:embed="rId1"/>
-          <a:stretch>
-            <a:fillRect/>
-          </a:stretch>
-        </p:blipFill>
-        <p:spPr>
-          <a:xfrm>
-            <a:off x="0" y="658368"/>
-            <a:ext cx="5120640" cy="5833872"/>
-          </a:xfrm>
-          <a:prstGeom prst="rect">
-            <a:avLst/>
-          </a:prstGeom>
-        </p:spPr>
-      </p:pic>
-      <p:sp>
-        <p:nvSpPr>
-          <p:cNvPr id="4" name="Text 1"/>
+      <p:sp>
+        <p:nvSpPr>
+          <p:cNvPr id="3" name="Text 1"/>
           <p:cNvSpPr/>
           <p:nvPr/>
         </p:nvSpPr>
         <p:spPr>
           <a:xfrm>
-            <a:off x="5349240" y="1005840"/>
-            <a:ext cx="6522415" cy="731520"/>
+            <a:off x="457200" y="1005840"/>
+            <a:ext cx="11277295" cy="731520"/>
           </a:xfrm>
           <a:prstGeom prst="rect">
             <a:avLst/>
@@ -18413,9 +21331,7 @@
           <a:ln/>
         </p:spPr>
         <p:txBody>
-          <a:bodyPr wrap="square" lIns="0" tIns="0" rIns="0" bIns="0" rtlCol="0" anchor="ctr">
-            <a:normAutofit/>
-          </a:bodyPr>
+          <a:bodyPr wrap="square" lIns="0" tIns="0" rIns="0" bIns="0" rtlCol="0" anchor="ctr"/>
           <a:lstStyle/>
           <a:p>
             <a:pPr algn="ctr" indent="0" marL="0">
@@ -18430,199 +21346,6 @@
                 <a:ea typeface="Times New Roman" pitchFamily="34" charset="-122"/>
                 <a:cs typeface="Times New Roman" pitchFamily="34" charset="-120"/>
               </a:rPr>
-              <a:t>Correction: Possible Answer</a:t>
-            </a:r>
-            <a:endParaRPr lang="en-US" sz="3600" dirty="0"/>
-          </a:p>
-        </p:txBody>
-      </p:sp>
-      <p:sp>
-        <p:nvSpPr>
-          <p:cNvPr id="5" name="Text 2"/>
-          <p:cNvSpPr/>
-          <p:nvPr/>
-        </p:nvSpPr>
-        <p:spPr>
-          <a:xfrm>
-            <a:off x="5349240" y="1783080"/>
-            <a:ext cx="6522415" cy="4663440"/>
-          </a:xfrm>
-          <a:prstGeom prst="rect">
-            <a:avLst/>
-          </a:prstGeom>
-          <a:noFill/>
-          <a:ln/>
-        </p:spPr>
-        <p:txBody>
-          <a:bodyPr wrap="square" lIns="0" tIns="0" rIns="0" bIns="0" rtlCol="0" anchor="t"/>
-          <a:lstStyle/>
-          <a:p>
-            <a:pPr algn="l" indent="0" marL="0">
-              <a:spcAft>
-                <a:spcPts val="800"/>
-              </a:spcAft>
-              <a:buNone/>
-            </a:pPr>
-            <a:r>
-              <a:rPr lang="en-US" sz="4000" dirty="0">
-                <a:solidFill>
-                  <a:srgbClr val="111111"/>
-                </a:solidFill>
-                <a:latin typeface="Times New Roman" pitchFamily="34" charset="0"/>
-                <a:ea typeface="Times New Roman" pitchFamily="34" charset="-122"/>
-                <a:cs typeface="Times New Roman" pitchFamily="34" charset="-120"/>
-              </a:rPr>
-              <a:t>Village system: inputs – births and people coming back from town; outputs – deaths and young people leaving for towns; store – the village population.</a:t>
-            </a:r>
-            <a:endParaRPr lang="en-US" sz="4000" dirty="0"/>
-          </a:p>
-        </p:txBody>
-      </p:sp>
-      <p:sp>
-        <p:nvSpPr>
-          <p:cNvPr id="25" name="Slide Number Placeholder 0"/>
-          <p:cNvSpPr>
-            <a:spLocks noGrp="1"/>
-          </p:cNvSpPr>
-          <p:nvPr>
-            <p:ph type="sldNum" sz="quarter" idx="4294967295"/>
-          </p:nvPr>
-        </p:nvSpPr>
-        <p:spPr>
-          <a:xfrm>
-            <a:off x="27432" y="91440"/>
-            <a:ext cx="585216" cy="475488"/>
-          </a:xfrm>
-          <a:prstGeom prst="rect">
-            <a:avLst/>
-          </a:prstGeom>
-          <a:extLst>
-            <a:ext uri="{C572A759-6A51-4108-AA02-DFA0A04FC94B}">
-              <ma14:wrappingTextBoxFlag xmlns:ma14="http://schemas.microsoft.com/office/mac/drawingml/2011/main" val="0"/>
-            </a:ext>
-          </a:extLst>
-        </p:spPr>
-        <p:txBody>
-          <a:bodyPr/>
-          <a:lstStyle>
-            <a:lvl1pPr>
-              <a:defRPr sz="2000">
-                <a:solidFill>
-                  <a:srgbClr val="FFFFFF"/>
-                </a:solidFill>
-                <a:latin typeface="Calibri"/>
-                <a:ea typeface="Calibri"/>
-                <a:cs typeface="Calibri"/>
-              </a:defRPr>
-            </a:lvl1pPr>
-          </a:lstStyle>
-          <a:p>
-            <a:pPr algn="ctr"/>
-            <a:fld id="{F7021451-1387-4CA6-816F-3879F97B5CBC}" type="slidenum">
-              <a:rPr b="1" lang="en-US"/>
-              <a:t>5</a:t>
-            </a:fld>
-            <a:endParaRPr lang="en-US"/>
-          </a:p>
-        </p:txBody>
-      </p:sp>
-    </p:spTree>
-  </p:cSld>
-  <p:clrMapOvr>
-    <a:masterClrMapping/>
-  </p:clrMapOvr>
-</p:sld>
-</file>
-
-<file path=ppt/slides/slide50.xml><?xml version="1.0" encoding="utf-8"?>
-<p:sld xmlns:a="http://schemas.openxmlformats.org/drawingml/2006/main" xmlns:r="http://schemas.openxmlformats.org/officeDocument/2006/relationships" xmlns:p="http://schemas.openxmlformats.org/presentationml/2006/main">
-  <p:cSld name="Slide 50">
-    <p:spTree>
-      <p:nvGrpSpPr>
-        <p:cNvPr id="1" name=""/>
-        <p:cNvGrpSpPr/>
-        <p:nvPr/>
-      </p:nvGrpSpPr>
-      <p:grpSpPr>
-        <a:xfrm>
-          <a:off x="0" y="0"/>
-          <a:ext cx="0" cy="0"/>
-          <a:chOff x="0" y="0"/>
-          <a:chExt cx="0" cy="0"/>
-        </a:xfrm>
-      </p:grpSpPr>
-      <p:sp>
-        <p:nvSpPr>
-          <p:cNvPr id="2" name="Text 0"/>
-          <p:cNvSpPr/>
-          <p:nvPr/>
-        </p:nvSpPr>
-        <p:spPr>
-          <a:xfrm>
-            <a:off x="457200" y="713232"/>
-            <a:ext cx="11368735" cy="274320"/>
-          </a:xfrm>
-          <a:prstGeom prst="rect">
-            <a:avLst/>
-          </a:prstGeom>
-          <a:noFill/>
-          <a:ln/>
-        </p:spPr>
-        <p:txBody>
-          <a:bodyPr wrap="square" lIns="0" tIns="0" rIns="0" bIns="0" rtlCol="0" anchor="ctr"/>
-          <a:lstStyle/>
-          <a:p>
-            <a:pPr algn="r" indent="0" marL="0">
-              <a:buNone/>
-            </a:pPr>
-            <a:r>
-              <a:rPr lang="en-US" sz="1400" b="1" dirty="0">
-                <a:solidFill>
-                  <a:srgbClr val="1C3F6E"/>
-                </a:solidFill>
-                <a:latin typeface="Calibri" pitchFamily="34" charset="0"/>
-                <a:ea typeface="Calibri" pitchFamily="34" charset="-122"/>
-                <a:cs typeface="Calibri" pitchFamily="34" charset="-120"/>
-              </a:rPr>
-              <a:t>LOGBOOK</a:t>
-            </a:r>
-            <a:endParaRPr lang="en-US" sz="1400" dirty="0"/>
-          </a:p>
-        </p:txBody>
-      </p:sp>
-      <p:sp>
-        <p:nvSpPr>
-          <p:cNvPr id="3" name="Text 1"/>
-          <p:cNvSpPr/>
-          <p:nvPr/>
-        </p:nvSpPr>
-        <p:spPr>
-          <a:xfrm>
-            <a:off x="457200" y="1005840"/>
-            <a:ext cx="11277295" cy="731520"/>
-          </a:xfrm>
-          <a:prstGeom prst="rect">
-            <a:avLst/>
-          </a:prstGeom>
-          <a:noFill/>
-          <a:ln/>
-        </p:spPr>
-        <p:txBody>
-          <a:bodyPr wrap="square" lIns="0" tIns="0" rIns="0" bIns="0" rtlCol="0" anchor="ctr"/>
-          <a:lstStyle/>
-          <a:p>
-            <a:pPr algn="ctr" indent="0" marL="0">
-              <a:buNone/>
-            </a:pPr>
-            <a:r>
-              <a:rPr lang="en-US" sz="3600" b="1" dirty="0">
-                <a:solidFill>
-                  <a:srgbClr val="990011"/>
-                </a:solidFill>
-                <a:latin typeface="Times New Roman" pitchFamily="34" charset="0"/>
-                <a:ea typeface="Times New Roman" pitchFamily="34" charset="-122"/>
-                <a:cs typeface="Times New Roman" pitchFamily="34" charset="-120"/>
-              </a:rPr>
               <a:t>Official Logbook (1/2)</a:t>
             </a:r>
             <a:endParaRPr lang="en-US" sz="3600" dirty="0"/>
@@ -18631,7 +21354,7 @@
       </p:sp>
       <p:graphicFrame>
         <p:nvGraphicFramePr>
-          <p:cNvPr id="51" name="Table 0"/>
+          <p:cNvPr id="58" name="Table 0"/>
           <p:cNvGraphicFramePr>
             <a:graphicFrameLocks noGrp="1"/>
           </p:cNvGraphicFramePr>
@@ -19017,7 +21740,7 @@
                           <a:ea typeface="Calibri" pitchFamily="34" charset="-122"/>
                           <a:cs typeface="Calibri" pitchFamily="34" charset="-120"/>
                         </a:rPr>
-                        <a:t>Calculate CBR, CDR and natural increase. Calculate doubling time and make a simple projection. Calculate net migration and interpret results.</a:t>
+                        <a:t>Distinguish fecundity from fertility. Calculate the crude birth rate and the crude death rate. Calculate the rate of natural increase and the growth rate. Calculate the doubling time with the rule of 70.</a:t>
                       </a:r>
                       <a:endParaRPr lang="en-US" sz="1600" dirty="0">
                         <a:latin typeface="Calibri" charset="0"/>
@@ -19155,7 +21878,7 @@
                           <a:ea typeface="Calibri" pitchFamily="34" charset="-122"/>
                           <a:cs typeface="Calibri" pitchFamily="34" charset="-120"/>
                         </a:rPr>
-                        <a:t>Learners are able to calculate and interpret the main demographic indices.</a:t>
+                        <a:t>Learners are able to calculate and interpret the main demographic indices and use them to project population.</a:t>
                       </a:r>
                       <a:endParaRPr lang="en-US" sz="1600" dirty="0">
                         <a:latin typeface="Calibri" charset="0"/>
@@ -19253,7 +21976,7 @@
             <a:pPr algn="ctr"/>
             <a:fld id="{F7021451-1387-4CA6-816F-3879F97B5CBC}" type="slidenum">
               <a:rPr b="1" lang="en-US"/>
-              <a:t>50</a:t>
+              <a:t>57</a:t>
             </a:fld>
             <a:endParaRPr lang="en-US"/>
           </a:p>
@@ -19267,9 +21990,9 @@
 </p:sld>
 </file>
 
-<file path=ppt/slides/slide51.xml><?xml version="1.0" encoding="utf-8"?>
+<file path=ppt/slides/slide58.xml><?xml version="1.0" encoding="utf-8"?>
 <p:sld xmlns:a="http://schemas.openxmlformats.org/drawingml/2006/main" xmlns:r="http://schemas.openxmlformats.org/officeDocument/2006/relationships" xmlns:p="http://schemas.openxmlformats.org/presentationml/2006/main">
-  <p:cSld name="Slide 51">
+  <p:cSld name="Slide 58">
     <p:spTree>
       <p:nvGrpSpPr>
         <p:cNvPr id="1" name=""/>
@@ -19364,7 +22087,7 @@
       </p:sp>
       <p:graphicFrame>
         <p:nvGraphicFramePr>
-          <p:cNvPr id="52" name="Table 0"/>
+          <p:cNvPr id="59" name="Table 0"/>
           <p:cNvGraphicFramePr>
             <a:graphicFrameLocks noGrp="1"/>
           </p:cNvGraphicFramePr>
@@ -19474,7 +22197,7 @@
                           <a:ea typeface="Calibri" pitchFamily="34" charset="-122"/>
                           <a:cs typeface="Calibri" pitchFamily="34" charset="-120"/>
                         </a:rPr>
-                        <a:t>DEFINITIONS; Formulas of Demographic Indices; Projections, Doubling Time and Migration.</a:t>
+                        <a:t>DEFINITIONS; Measures of Fertility and Mortality; Calculating Population Change; Projecting Future Population; Practical Exercises with Solutions.</a:t>
                       </a:r>
                       <a:endParaRPr lang="en-US" sz="1600" dirty="0">
                         <a:latin typeface="Calibri" charset="0"/>
@@ -19750,7 +22473,7 @@
                           <a:ea typeface="Calibri" pitchFamily="34" charset="-122"/>
                           <a:cs typeface="Calibri" pitchFamily="34" charset="-120"/>
                         </a:rPr>
-                        <a:t>Find Cameroon's birth and death rates and calculate its natural increase and doubling time.</a:t>
+                        <a:t>Name two non-demographic factors of population growth.</a:t>
                       </a:r>
                       <a:endParaRPr lang="en-US" sz="1600" dirty="0">
                         <a:latin typeface="Calibri" charset="0"/>
@@ -20124,7 +22847,7 @@
             <a:pPr algn="ctr"/>
             <a:fld id="{F7021451-1387-4CA6-816F-3879F97B5CBC}" type="slidenum">
               <a:rPr b="1" lang="en-US"/>
-              <a:t>51</a:t>
+              <a:t>58</a:t>
             </a:fld>
             <a:endParaRPr lang="en-US"/>
           </a:p>
@@ -20138,9 +22861,9 @@
 </p:sld>
 </file>
 
-<file path=ppt/slides/slide52.xml><?xml version="1.0" encoding="utf-8"?>
+<file path=ppt/slides/slide59.xml><?xml version="1.0" encoding="utf-8"?>
 <p:sld xmlns:a="http://schemas.openxmlformats.org/drawingml/2006/main" xmlns:r="http://schemas.openxmlformats.org/officeDocument/2006/relationships" xmlns:p="http://schemas.openxmlformats.org/presentationml/2006/main">
-  <p:cSld name="Slide 52">
+  <p:cSld name="Slide 59">
     <p:spTree>
       <p:nvGrpSpPr>
         <p:cNvPr id="1" name=""/>
@@ -20317,7 +23040,7 @@
                 <a:ea typeface="Calibri" pitchFamily="34" charset="-122"/>
                 <a:cs typeface="Calibri" pitchFamily="34" charset="-120"/>
               </a:rPr>
-              <a:t>Without the projector (Activity 1): copy the formulas.</a:t>
+              <a:t>Without the projector (Activity 1): write the formula on the board.</a:t>
             </a:r>
             <a:endParaRPr lang="en-US" sz="2000" dirty="0"/>
           </a:p>
@@ -20338,7 +23061,7 @@
                 <a:ea typeface="Calibri" pitchFamily="34" charset="-122"/>
                 <a:cs typeface="Calibri" pitchFamily="34" charset="-120"/>
               </a:rPr>
-              <a:t>Without the projector (Activity 2): do each step on the board.</a:t>
+              <a:t>Without the projector (Activity 2): calculate on the board.</a:t>
             </a:r>
             <a:endParaRPr lang="en-US" sz="2000" dirty="0"/>
           </a:p>
@@ -20359,7 +23082,7 @@
                 <a:ea typeface="Calibri" pitchFamily="34" charset="-122"/>
                 <a:cs typeface="Calibri" pitchFamily="34" charset="-120"/>
               </a:rPr>
-              <a:t>Without the projector (Activity 3): explain the rule of 70.</a:t>
+              <a:t>Without the projector (Activity 3): calculate with the class.</a:t>
             </a:r>
             <a:endParaRPr lang="en-US" sz="2000" dirty="0"/>
           </a:p>
@@ -20380,7 +23103,7 @@
                 <a:ea typeface="Calibri" pitchFamily="34" charset="-122"/>
                 <a:cs typeface="Calibri" pitchFamily="34" charset="-120"/>
               </a:rPr>
-              <a:t>Without the projector (Activity 4): do the subtraction.</a:t>
+              <a:t>Without the projector (Activity 4): draw a rising curve.</a:t>
             </a:r>
             <a:endParaRPr lang="en-US" sz="2000" dirty="0"/>
           </a:p>
@@ -20401,7 +23124,7 @@
                 <a:ea typeface="Calibri" pitchFamily="34" charset="-122"/>
                 <a:cs typeface="Calibri" pitchFamily="34" charset="-120"/>
               </a:rPr>
-              <a:t>Without the projector (Activity 5): compare with the region.</a:t>
+              <a:t>Without the projector (Activity 5): let learners work in pairs.</a:t>
             </a:r>
             <a:endParaRPr lang="en-US" sz="2000" dirty="0"/>
           </a:p>
@@ -20449,269 +23172,7 @@
             <a:pPr algn="ctr"/>
             <a:fld id="{F7021451-1387-4CA6-816F-3879F97B5CBC}" type="slidenum">
               <a:rPr b="1" lang="en-US"/>
-              <a:t>52</a:t>
-            </a:fld>
-            <a:endParaRPr lang="en-US"/>
-          </a:p>
-        </p:txBody>
-      </p:sp>
-    </p:spTree>
-  </p:cSld>
-  <p:clrMapOvr>
-    <a:masterClrMapping/>
-  </p:clrMapOvr>
-</p:sld>
-</file>
-
-<file path=ppt/slides/slide53.xml><?xml version="1.0" encoding="utf-8"?>
-<p:sld xmlns:a="http://schemas.openxmlformats.org/drawingml/2006/main" xmlns:r="http://schemas.openxmlformats.org/officeDocument/2006/relationships" xmlns:p="http://schemas.openxmlformats.org/presentationml/2006/main">
-  <p:cSld name="Slide 53">
-    <p:spTree>
-      <p:nvGrpSpPr>
-        <p:cNvPr id="1" name=""/>
-        <p:cNvGrpSpPr/>
-        <p:nvPr/>
-      </p:nvGrpSpPr>
-      <p:grpSpPr>
-        <a:xfrm>
-          <a:off x="0" y="0"/>
-          <a:ext cx="0" cy="0"/>
-          <a:chOff x="0" y="0"/>
-          <a:chExt cx="0" cy="0"/>
-        </a:xfrm>
-      </p:grpSpPr>
-      <p:sp>
-        <p:nvSpPr>
-          <p:cNvPr id="2" name="Text 0"/>
-          <p:cNvSpPr/>
-          <p:nvPr/>
-        </p:nvSpPr>
-        <p:spPr>
-          <a:xfrm>
-            <a:off x="457200" y="713232"/>
-            <a:ext cx="11368735" cy="274320"/>
-          </a:xfrm>
-          <a:prstGeom prst="rect">
-            <a:avLst/>
-          </a:prstGeom>
-          <a:noFill/>
-          <a:ln/>
-        </p:spPr>
-        <p:txBody>
-          <a:bodyPr wrap="square" lIns="0" tIns="0" rIns="0" bIns="0" rtlCol="0" anchor="ctr"/>
-          <a:lstStyle/>
-          <a:p>
-            <a:pPr algn="r" indent="0" marL="0">
-              <a:buNone/>
-            </a:pPr>
-            <a:r>
-              <a:rPr lang="en-US" sz="1400" b="1" dirty="0">
-                <a:solidFill>
-                  <a:srgbClr val="1C3F6E"/>
-                </a:solidFill>
-                <a:latin typeface="Calibri" pitchFamily="34" charset="0"/>
-                <a:ea typeface="Calibri" pitchFamily="34" charset="-122"/>
-                <a:cs typeface="Calibri" pitchFamily="34" charset="-120"/>
-              </a:rPr>
-              <a:t>REFERENCES</a:t>
-            </a:r>
-            <a:endParaRPr lang="en-US" sz="1400" dirty="0"/>
-          </a:p>
-        </p:txBody>
-      </p:sp>
-      <p:pic>
-        <p:nvPicPr>
-          <p:cNvPr id="3" name="Image 0" descr="/home/claude/f4/img/minesec_sheet.png">    </p:cNvPr>
-          <p:cNvPicPr>
-            <a:picLocks noChangeAspect="1"/>
-          </p:cNvPicPr>
-          <p:nvPr/>
-        </p:nvPicPr>
-        <p:blipFill>
-          <a:blip r:embed="rId1"/>
-          <a:stretch>
-            <a:fillRect/>
-          </a:stretch>
-        </p:blipFill>
-        <p:spPr>
-          <a:xfrm>
-            <a:off x="0" y="658368"/>
-            <a:ext cx="5120640" cy="5833872"/>
-          </a:xfrm>
-          <a:prstGeom prst="rect">
-            <a:avLst/>
-          </a:prstGeom>
-        </p:spPr>
-      </p:pic>
-      <p:sp>
-        <p:nvSpPr>
-          <p:cNvPr id="4" name="Text 1"/>
-          <p:cNvSpPr/>
-          <p:nvPr/>
-        </p:nvSpPr>
-        <p:spPr>
-          <a:xfrm>
-            <a:off x="5349240" y="1005840"/>
-            <a:ext cx="6522415" cy="731520"/>
-          </a:xfrm>
-          <a:prstGeom prst="rect">
-            <a:avLst/>
-          </a:prstGeom>
-          <a:noFill/>
-          <a:ln/>
-        </p:spPr>
-        <p:txBody>
-          <a:bodyPr wrap="square" lIns="0" tIns="0" rIns="0" bIns="0" rtlCol="0" anchor="ctr">
-            <a:normAutofit/>
-          </a:bodyPr>
-          <a:lstStyle/>
-          <a:p>
-            <a:pPr algn="ctr" indent="0" marL="0">
-              <a:buNone/>
-            </a:pPr>
-            <a:r>
-              <a:rPr lang="en-US" sz="3600" b="1" dirty="0">
-                <a:solidFill>
-                  <a:srgbClr val="990011"/>
-                </a:solidFill>
-                <a:latin typeface="Times New Roman" pitchFamily="34" charset="0"/>
-                <a:ea typeface="Times New Roman" pitchFamily="34" charset="-122"/>
-                <a:cs typeface="Times New Roman" pitchFamily="34" charset="-120"/>
-              </a:rPr>
-              <a:t>References</a:t>
-            </a:r>
-            <a:endParaRPr lang="en-US" sz="3600" dirty="0"/>
-          </a:p>
-        </p:txBody>
-      </p:sp>
-      <p:sp>
-        <p:nvSpPr>
-          <p:cNvPr id="5" name="Text 2"/>
-          <p:cNvSpPr/>
-          <p:nvPr/>
-        </p:nvSpPr>
-        <p:spPr>
-          <a:xfrm>
-            <a:off x="5349240" y="1783080"/>
-            <a:ext cx="6522415" cy="4663440"/>
-          </a:xfrm>
-          <a:prstGeom prst="rect">
-            <a:avLst/>
-          </a:prstGeom>
-          <a:noFill/>
-          <a:ln/>
-        </p:spPr>
-        <p:txBody>
-          <a:bodyPr wrap="square" lIns="0" tIns="0" rIns="0" bIns="0" rtlCol="0" anchor="t"/>
-          <a:lstStyle/>
-          <a:p>
-            <a:pPr algn="l" marL="342900" indent="-342900">
-              <a:spcAft>
-                <a:spcPts val="800"/>
-              </a:spcAft>
-              <a:buSzPct val="100000"/>
-              <a:buChar char="•"/>
-            </a:pPr>
-            <a:r>
-              <a:rPr lang="en-US" sz="1800" dirty="0">
-                <a:solidFill>
-                  <a:srgbClr val="111111"/>
-                </a:solidFill>
-                <a:latin typeface="Calibri" pitchFamily="34" charset="0"/>
-                <a:ea typeface="Calibri" pitchFamily="34" charset="-122"/>
-                <a:cs typeface="Calibri" pitchFamily="34" charset="-120"/>
-              </a:rPr>
-              <a:t>National Geography Syllabus, MINESEC/IGE/IP-SS, 2019 — Module 4 (Population Geography).</a:t>
-            </a:r>
-            <a:endParaRPr lang="en-US" sz="1800" dirty="0"/>
-          </a:p>
-          <a:p>
-            <a:pPr algn="l" marL="342900" indent="-342900">
-              <a:spcAft>
-                <a:spcPts val="800"/>
-              </a:spcAft>
-              <a:buSzPct val="100000"/>
-              <a:buChar char="•"/>
-            </a:pPr>
-            <a:r>
-              <a:rPr lang="en-US" sz="1800" dirty="0">
-                <a:solidFill>
-                  <a:srgbClr val="111111"/>
-                </a:solidFill>
-                <a:latin typeface="Calibri" pitchFamily="34" charset="0"/>
-                <a:ea typeface="Calibri" pitchFamily="34" charset="-122"/>
-                <a:cs typeface="Calibri" pitchFamily="34" charset="-120"/>
-              </a:rPr>
-              <a:t>Photo, Activity 4: “Wadi Halfa Bus Station” by D-Stanley, CC BY 2.0, via Flickr (https://www.flickr.com/photos/79721788@N00/8651154444)</a:t>
-            </a:r>
-            <a:endParaRPr lang="en-US" sz="1800" dirty="0"/>
-          </a:p>
-          <a:p>
-            <a:pPr algn="l" marL="342900" indent="-342900">
-              <a:spcAft>
-                <a:spcPts val="800"/>
-              </a:spcAft>
-              <a:buSzPct val="100000"/>
-              <a:buChar char="•"/>
-            </a:pPr>
-            <a:r>
-              <a:rPr lang="en-US" sz="1800" dirty="0">
-                <a:solidFill>
-                  <a:srgbClr val="111111"/>
-                </a:solidFill>
-                <a:latin typeface="Calibri" pitchFamily="34" charset="0"/>
-                <a:ea typeface="Calibri" pitchFamily="34" charset="-122"/>
-                <a:cs typeface="Calibri" pitchFamily="34" charset="-120"/>
-              </a:rPr>
-              <a:t>Diagrams and animations: drawn for this lesson (Geography Department).</a:t>
-            </a:r>
-            <a:endParaRPr lang="en-US" sz="1800" dirty="0"/>
-          </a:p>
-        </p:txBody>
-      </p:sp>
-      <p:sp>
-        <p:nvSpPr>
-          <p:cNvPr id="25" name="Slide Number Placeholder 0"/>
-          <p:cNvSpPr>
-            <a:spLocks noGrp="1"/>
-          </p:cNvSpPr>
-          <p:nvPr>
-            <p:ph type="sldNum" sz="quarter" idx="4294967295"/>
-          </p:nvPr>
-        </p:nvSpPr>
-        <p:spPr>
-          <a:xfrm>
-            <a:off x="27432" y="91440"/>
-            <a:ext cx="585216" cy="475488"/>
-          </a:xfrm>
-          <a:prstGeom prst="rect">
-            <a:avLst/>
-          </a:prstGeom>
-          <a:extLst>
-            <a:ext uri="{C572A759-6A51-4108-AA02-DFA0A04FC94B}">
-              <ma14:wrappingTextBoxFlag xmlns:ma14="http://schemas.microsoft.com/office/mac/drawingml/2011/main" val="0"/>
-            </a:ext>
-          </a:extLst>
-        </p:spPr>
-        <p:txBody>
-          <a:bodyPr/>
-          <a:lstStyle>
-            <a:lvl1pPr>
-              <a:defRPr sz="2000">
-                <a:solidFill>
-                  <a:srgbClr val="FFFFFF"/>
-                </a:solidFill>
-                <a:latin typeface="Calibri"/>
-                <a:ea typeface="Calibri"/>
-                <a:cs typeface="Calibri"/>
-              </a:defRPr>
-            </a:lvl1pPr>
-          </a:lstStyle>
-          <a:p>
-            <a:pPr algn="ctr"/>
-            <a:fld id="{F7021451-1387-4CA6-816F-3879F97B5CBC}" type="slidenum">
-              <a:rPr b="1" lang="en-US"/>
-              <a:t>53</a:t>
+              <a:t>59</a:t>
             </a:fld>
             <a:endParaRPr lang="en-US"/>
           </a:p>
@@ -21056,6 +23517,289 @@
 </p:sld>
 </file>
 
+<file path=ppt/slides/slide60.xml><?xml version="1.0" encoding="utf-8"?>
+<p:sld xmlns:a="http://schemas.openxmlformats.org/drawingml/2006/main" xmlns:r="http://schemas.openxmlformats.org/officeDocument/2006/relationships" xmlns:p="http://schemas.openxmlformats.org/presentationml/2006/main">
+  <p:cSld name="Slide 60">
+    <p:spTree>
+      <p:nvGrpSpPr>
+        <p:cNvPr id="1" name=""/>
+        <p:cNvGrpSpPr/>
+        <p:nvPr/>
+      </p:nvGrpSpPr>
+      <p:grpSpPr>
+        <a:xfrm>
+          <a:off x="0" y="0"/>
+          <a:ext cx="0" cy="0"/>
+          <a:chOff x="0" y="0"/>
+          <a:chExt cx="0" cy="0"/>
+        </a:xfrm>
+      </p:grpSpPr>
+      <p:sp>
+        <p:nvSpPr>
+          <p:cNvPr id="2" name="Text 0"/>
+          <p:cNvSpPr/>
+          <p:nvPr/>
+        </p:nvSpPr>
+        <p:spPr>
+          <a:xfrm>
+            <a:off x="457200" y="713232"/>
+            <a:ext cx="11368735" cy="274320"/>
+          </a:xfrm>
+          <a:prstGeom prst="rect">
+            <a:avLst/>
+          </a:prstGeom>
+          <a:noFill/>
+          <a:ln/>
+        </p:spPr>
+        <p:txBody>
+          <a:bodyPr wrap="square" lIns="0" tIns="0" rIns="0" bIns="0" rtlCol="0" anchor="ctr"/>
+          <a:lstStyle/>
+          <a:p>
+            <a:pPr algn="r" indent="0" marL="0">
+              <a:buNone/>
+            </a:pPr>
+            <a:r>
+              <a:rPr lang="en-US" sz="1400" b="1" dirty="0">
+                <a:solidFill>
+                  <a:srgbClr val="1C3F6E"/>
+                </a:solidFill>
+                <a:latin typeface="Calibri" pitchFamily="34" charset="0"/>
+                <a:ea typeface="Calibri" pitchFamily="34" charset="-122"/>
+                <a:cs typeface="Calibri" pitchFamily="34" charset="-120"/>
+              </a:rPr>
+              <a:t>REFERENCES</a:t>
+            </a:r>
+            <a:endParaRPr lang="en-US" sz="1400" dirty="0"/>
+          </a:p>
+        </p:txBody>
+      </p:sp>
+      <p:pic>
+        <p:nvPicPr>
+          <p:cNvPr id="3" name="Image 0" descr="/home/claude/f4/img/minesec_sheet.png">    </p:cNvPr>
+          <p:cNvPicPr>
+            <a:picLocks noChangeAspect="1"/>
+          </p:cNvPicPr>
+          <p:nvPr/>
+        </p:nvPicPr>
+        <p:blipFill>
+          <a:blip r:embed="rId1"/>
+          <a:stretch>
+            <a:fillRect/>
+          </a:stretch>
+        </p:blipFill>
+        <p:spPr>
+          <a:xfrm>
+            <a:off x="0" y="658368"/>
+            <a:ext cx="5120640" cy="5833872"/>
+          </a:xfrm>
+          <a:prstGeom prst="rect">
+            <a:avLst/>
+          </a:prstGeom>
+        </p:spPr>
+      </p:pic>
+      <p:sp>
+        <p:nvSpPr>
+          <p:cNvPr id="4" name="Text 1"/>
+          <p:cNvSpPr/>
+          <p:nvPr/>
+        </p:nvSpPr>
+        <p:spPr>
+          <a:xfrm>
+            <a:off x="5349240" y="1005840"/>
+            <a:ext cx="6522415" cy="731520"/>
+          </a:xfrm>
+          <a:prstGeom prst="rect">
+            <a:avLst/>
+          </a:prstGeom>
+          <a:noFill/>
+          <a:ln/>
+        </p:spPr>
+        <p:txBody>
+          <a:bodyPr wrap="square" lIns="0" tIns="0" rIns="0" bIns="0" rtlCol="0" anchor="ctr">
+            <a:normAutofit/>
+          </a:bodyPr>
+          <a:lstStyle/>
+          <a:p>
+            <a:pPr algn="ctr" indent="0" marL="0">
+              <a:buNone/>
+            </a:pPr>
+            <a:r>
+              <a:rPr lang="en-US" sz="3600" b="1" dirty="0">
+                <a:solidFill>
+                  <a:srgbClr val="990011"/>
+                </a:solidFill>
+                <a:latin typeface="Times New Roman" pitchFamily="34" charset="0"/>
+                <a:ea typeface="Times New Roman" pitchFamily="34" charset="-122"/>
+                <a:cs typeface="Times New Roman" pitchFamily="34" charset="-120"/>
+              </a:rPr>
+              <a:t>References</a:t>
+            </a:r>
+            <a:endParaRPr lang="en-US" sz="3600" dirty="0"/>
+          </a:p>
+        </p:txBody>
+      </p:sp>
+      <p:sp>
+        <p:nvSpPr>
+          <p:cNvPr id="5" name="Text 2"/>
+          <p:cNvSpPr/>
+          <p:nvPr/>
+        </p:nvSpPr>
+        <p:spPr>
+          <a:xfrm>
+            <a:off x="5349240" y="1783080"/>
+            <a:ext cx="6522415" cy="4663440"/>
+          </a:xfrm>
+          <a:prstGeom prst="rect">
+            <a:avLst/>
+          </a:prstGeom>
+          <a:noFill/>
+          <a:ln/>
+        </p:spPr>
+        <p:txBody>
+          <a:bodyPr wrap="square" lIns="0" tIns="0" rIns="0" bIns="0" rtlCol="0" anchor="t"/>
+          <a:lstStyle/>
+          <a:p>
+            <a:pPr algn="l" marL="342900" indent="-342900">
+              <a:spcAft>
+                <a:spcPts val="800"/>
+              </a:spcAft>
+              <a:buSzPct val="100000"/>
+              <a:buChar char="•"/>
+            </a:pPr>
+            <a:r>
+              <a:rPr lang="en-US" sz="1800" dirty="0">
+                <a:solidFill>
+                  <a:srgbClr val="111111"/>
+                </a:solidFill>
+                <a:latin typeface="Calibri" pitchFamily="34" charset="0"/>
+                <a:ea typeface="Calibri" pitchFamily="34" charset="-122"/>
+                <a:cs typeface="Calibri" pitchFamily="34" charset="-120"/>
+              </a:rPr>
+              <a:t>Geography Syllabus for Sixth Forms (Lower and Upper Sixth), MINESEC, 2019 — Module 4 (Population Geography).</a:t>
+            </a:r>
+            <a:endParaRPr lang="en-US" sz="1800" dirty="0"/>
+          </a:p>
+          <a:p>
+            <a:pPr algn="l" marL="342900" indent="-342900">
+              <a:spcAft>
+                <a:spcPts val="800"/>
+              </a:spcAft>
+              <a:buSzPct val="100000"/>
+              <a:buChar char="•"/>
+            </a:pPr>
+            <a:r>
+              <a:rPr lang="en-US" sz="1800" dirty="0">
+                <a:solidFill>
+                  <a:srgbClr val="111111"/>
+                </a:solidFill>
+                <a:latin typeface="Calibri" pitchFamily="34" charset="0"/>
+                <a:ea typeface="Calibri" pitchFamily="34" charset="-122"/>
+                <a:cs typeface="Calibri" pitchFamily="34" charset="-120"/>
+              </a:rPr>
+              <a:t>Teacher's course notes: Mr KAMDEM E., Population Geography (USA), GBHS Garoua, 2026.</a:t>
+            </a:r>
+            <a:endParaRPr lang="en-US" sz="1800" dirty="0"/>
+          </a:p>
+          <a:p>
+            <a:pPr algn="l" marL="342900" indent="-342900">
+              <a:spcAft>
+                <a:spcPts val="800"/>
+              </a:spcAft>
+              <a:buSzPct val="100000"/>
+              <a:buChar char="•"/>
+            </a:pPr>
+            <a:r>
+              <a:rPr lang="en-US" sz="1800" dirty="0">
+                <a:solidFill>
+                  <a:srgbClr val="111111"/>
+                </a:solidFill>
+                <a:latin typeface="Calibri" pitchFamily="34" charset="0"/>
+                <a:ea typeface="Calibri" pitchFamily="34" charset="-122"/>
+                <a:cs typeface="Calibri" pitchFamily="34" charset="-120"/>
+              </a:rPr>
+              <a:t>United Nations, World Population Prospects 2024.</a:t>
+            </a:r>
+            <a:endParaRPr lang="en-US" sz="1800" dirty="0"/>
+          </a:p>
+          <a:p>
+            <a:pPr algn="l" marL="342900" indent="-342900">
+              <a:spcAft>
+                <a:spcPts val="800"/>
+              </a:spcAft>
+              <a:buSzPct val="100000"/>
+              <a:buChar char="•"/>
+            </a:pPr>
+            <a:r>
+              <a:rPr lang="en-US" sz="1800" dirty="0">
+                <a:solidFill>
+                  <a:srgbClr val="111111"/>
+                </a:solidFill>
+                <a:latin typeface="Calibri" pitchFamily="34" charset="0"/>
+                <a:ea typeface="Calibri" pitchFamily="34" charset="-122"/>
+                <a:cs typeface="Calibri" pitchFamily="34" charset="-120"/>
+              </a:rPr>
+              <a:t>Diagrams and animations: drawn for this lesson (Geography Department).</a:t>
+            </a:r>
+            <a:endParaRPr lang="en-US" sz="1800" dirty="0"/>
+          </a:p>
+        </p:txBody>
+      </p:sp>
+      <p:sp>
+        <p:nvSpPr>
+          <p:cNvPr id="25" name="Slide Number Placeholder 0"/>
+          <p:cNvSpPr>
+            <a:spLocks noGrp="1"/>
+          </p:cNvSpPr>
+          <p:nvPr>
+            <p:ph type="sldNum" sz="quarter" idx="4294967295"/>
+          </p:nvPr>
+        </p:nvSpPr>
+        <p:spPr>
+          <a:xfrm>
+            <a:off x="27432" y="91440"/>
+            <a:ext cx="585216" cy="475488"/>
+          </a:xfrm>
+          <a:prstGeom prst="rect">
+            <a:avLst/>
+          </a:prstGeom>
+          <a:extLst>
+            <a:ext uri="{C572A759-6A51-4108-AA02-DFA0A04FC94B}">
+              <ma14:wrappingTextBoxFlag xmlns:ma14="http://schemas.microsoft.com/office/mac/drawingml/2011/main" val="0"/>
+            </a:ext>
+          </a:extLst>
+        </p:spPr>
+        <p:txBody>
+          <a:bodyPr/>
+          <a:lstStyle>
+            <a:lvl1pPr>
+              <a:defRPr sz="2000">
+                <a:solidFill>
+                  <a:srgbClr val="FFFFFF"/>
+                </a:solidFill>
+                <a:latin typeface="Calibri"/>
+                <a:ea typeface="Calibri"/>
+                <a:cs typeface="Calibri"/>
+              </a:defRPr>
+            </a:lvl1pPr>
+          </a:lstStyle>
+          <a:p>
+            <a:pPr algn="ctr"/>
+            <a:fld id="{F7021451-1387-4CA6-816F-3879F97B5CBC}" type="slidenum">
+              <a:rPr b="1" lang="en-US"/>
+              <a:t>60</a:t>
+            </a:fld>
+            <a:endParaRPr lang="en-US"/>
+          </a:p>
+        </p:txBody>
+      </p:sp>
+    </p:spTree>
+  </p:cSld>
+  <p:clrMapOvr>
+    <a:masterClrMapping/>
+  </p:clrMapOvr>
+</p:sld>
+</file>
+
 <file path=ppt/slides/slide7.xml><?xml version="1.0" encoding="utf-8"?>
 <p:sld xmlns:a="http://schemas.openxmlformats.org/drawingml/2006/main" xmlns:r="http://schemas.openxmlformats.org/officeDocument/2006/relationships" xmlns:p="http://schemas.openxmlformats.org/presentationml/2006/main">
   <p:cSld name="Slide 7">
@@ -21235,7 +23979,7 @@
                 <a:ea typeface="Times New Roman" pitchFamily="34" charset="-122"/>
                 <a:cs typeface="Times New Roman" pitchFamily="34" charset="-120"/>
               </a:rPr>
-              <a:t>Calculate CBR, CDR and natural increase.</a:t>
+              <a:t>Distinguish fecundity from fertility.</a:t>
             </a:r>
             <a:endParaRPr lang="en-US" sz="4000" dirty="0"/>
           </a:p>
@@ -21257,7 +24001,7 @@
                 <a:ea typeface="Times New Roman" pitchFamily="34" charset="-122"/>
                 <a:cs typeface="Times New Roman" pitchFamily="34" charset="-120"/>
               </a:rPr>
-              <a:t>Calculate doubling time and make a simple projection.</a:t>
+              <a:t>Calculate the crude birth rate and the crude death rate.</a:t>
             </a:r>
             <a:endParaRPr lang="en-US" sz="4000" dirty="0"/>
           </a:p>
@@ -21478,7 +24222,29 @@
                 <a:ea typeface="Times New Roman" pitchFamily="34" charset="-122"/>
                 <a:cs typeface="Times New Roman" pitchFamily="34" charset="-120"/>
               </a:rPr>
-              <a:t>Calculate net migration and interpret results.</a:t>
+              <a:t>Calculate the rate of natural increase and the growth rate.</a:t>
+            </a:r>
+            <a:endParaRPr lang="en-US" sz="4000" dirty="0"/>
+          </a:p>
+          <a:p>
+            <a:pPr algn="l" marL="342900" indent="-342900">
+              <a:spcAft>
+                <a:spcPts val="800"/>
+              </a:spcAft>
+              <a:buSzPct val="100000"/>
+              <a:buFont typeface="+mj-lt"/>
+              <a:buAutoNum type="arabicPeriod" startAt="1"/>
+            </a:pPr>
+            <a:r>
+              <a:rPr lang="en-US" sz="4000" dirty="0">
+                <a:solidFill>
+                  <a:srgbClr val="111111"/>
+                </a:solidFill>
+                <a:latin typeface="Times New Roman" pitchFamily="34" charset="0"/>
+                <a:ea typeface="Times New Roman" pitchFamily="34" charset="-122"/>
+                <a:cs typeface="Times New Roman" pitchFamily="34" charset="-120"/>
+              </a:rPr>
+              <a:t>Calculate the doubling time with the rule of 70.</a:t>
             </a:r>
             <a:endParaRPr lang="en-US" sz="4000" dirty="0"/>
           </a:p>
@@ -21698,7 +24464,7 @@
                 <a:ea typeface="Times New Roman" pitchFamily="34" charset="-122"/>
                 <a:cs typeface="Times New Roman" pitchFamily="34" charset="-120"/>
               </a:rPr>
-              <a:t>Change = births − deaths + net migration.</a:t>
+              <a:t>Population change = (births − deaths) + (immigrants − emigrants).</a:t>
             </a:r>
             <a:endParaRPr lang="en-US" sz="4000" dirty="0"/>
           </a:p>
@@ -21719,7 +24485,28 @@
                 <a:ea typeface="Times New Roman" pitchFamily="34" charset="-122"/>
                 <a:cs typeface="Times New Roman" pitchFamily="34" charset="-120"/>
               </a:rPr>
-              <a:t>Rates are often given per 1,000 people.</a:t>
+              <a:t>The crude birth rate is given per 1,000 people.</a:t>
+            </a:r>
+            <a:endParaRPr lang="en-US" sz="4000" dirty="0"/>
+          </a:p>
+          <a:p>
+            <a:pPr algn="l" marL="342900" indent="-342900">
+              <a:spcAft>
+                <a:spcPts val="800"/>
+              </a:spcAft>
+              <a:buSzPct val="100000"/>
+              <a:buChar char="•"/>
+            </a:pPr>
+            <a:r>
+              <a:rPr lang="en-US" sz="4000" dirty="0">
+                <a:solidFill>
+                  <a:srgbClr val="111111"/>
+                </a:solidFill>
+                <a:latin typeface="Times New Roman" pitchFamily="34" charset="0"/>
+                <a:ea typeface="Times New Roman" pitchFamily="34" charset="-122"/>
+                <a:cs typeface="Times New Roman" pitchFamily="34" charset="-120"/>
+              </a:rPr>
+              <a:t>Cameroon grows by about 2.6 % a year.</a:t>
             </a:r>
             <a:endParaRPr lang="en-US" sz="4000" dirty="0"/>
           </a:p>

--- a/lecons/USA/Population Geography/13_USA_POP_PW04_Calculating_Demographic_Indices.pptx
+++ b/lecons/USA/Population Geography/13_USA_POP_PW04_Calculating_Demographic_Indices.pptx
@@ -65,9 +65,10 @@
     <p:sldId id="313" r:id="rId59"/>
     <p:sldId id="314" r:id="rId60"/>
     <p:sldId id="315" r:id="rId61"/>
+    <p:sldId id="316" r:id="rId62"/>
   </p:sldIdLst>
   <p:notesMasterIdLst>
-    <p:notesMasterId r:id="rId62"/>
+    <p:notesMasterId r:id="rId63"/>
   </p:notesMasterIdLst>
   <p:sldSz cx="12192000" cy="6858000"/>
   <p:notesSz cx="6858000" cy="12192000"/>
@@ -3289,7 +3290,7 @@
           <a:p>
             <a:r>
               <a:rPr lang="en-US" dirty="0"/>
-              <a:t>Let us copy Measures of Fertility and Mortality. Fertility and mortality are measured as follows. On this slide we have Fecundity and fertility. Write each point on a new line, with the key term first, and explain it in your own words when we revise.</a:t>
+              <a:t>Let us copy Measures of Fertility and Mortality. Fertility and mortality are measured as follows. Copy the point on Fecundity and fertility: write the key term first, then its explanation.</a:t>
             </a:r>
             <a:endParaRPr lang="en-US" dirty="0"/>
           </a:p>
@@ -3377,7 +3378,7 @@
           <a:p>
             <a:r>
               <a:rPr lang="en-US" dirty="0"/>
-              <a:t>Copy the point on CBR formula on the left, then draw the diagram on the right: the main formulas. Give it a title and label it clearly.</a:t>
+              <a:t>Copy the point on Crude birth rate on the left, then draw the diagram on the right: a worked example. Give it a title and label it clearly.</a:t>
             </a:r>
             <a:endParaRPr lang="en-US" dirty="0"/>
           </a:p>
@@ -3553,7 +3554,7 @@
           <a:p>
             <a:r>
               <a:rPr lang="en-US" dirty="0"/>
-              <a:t>Copy the point on CBR example on the left, then draw the diagram on the right: a worked example. Give it a title and label it clearly.</a:t>
+              <a:t>Copy the point on Crude death rate on the left, then draw the diagram on the right: demographic indices. Give it a title and label it clearly.</a:t>
             </a:r>
             <a:endParaRPr lang="en-US" dirty="0"/>
           </a:p>
@@ -3641,7 +3642,7 @@
           <a:p>
             <a:r>
               <a:rPr lang="en-US" dirty="0"/>
-              <a:t>We continue with Measures of Fertility and Mortality. On this slide we have CDR formula and CDR example. Write each point on a new line, with the key term first, and explain it in your own words when we revise.</a:t>
+              <a:t>Let us copy Calculating Population Change. Population change is calculated as follows. Copy the point on Rate of natural increase (RNI): write the key term first, then its explanation.</a:t>
             </a:r>
             <a:endParaRPr lang="en-US" dirty="0"/>
           </a:p>
@@ -3729,7 +3730,7 @@
           <a:p>
             <a:r>
               <a:rPr lang="en-US" dirty="0"/>
-              <a:t>Let us copy Calculating Population Change. Population change is calculated as follows. On this slide we have Rate of natural increase (RNI) and RNI example. Write each point on a new line, with the key term first, and explain it in your own words when we revise. When you finish, we go to the next slide.</a:t>
+              <a:t>We continue with Calculating Population Change. Copy the point on Net migration rate: write the key term first, then its explanation.</a:t>
             </a:r>
             <a:endParaRPr lang="en-US" dirty="0"/>
           </a:p>
@@ -3817,7 +3818,7 @@
           <a:p>
             <a:r>
               <a:rPr lang="en-US" dirty="0"/>
-              <a:t>We continue with Calculating Population Change. On this slide we have Net migration rate and Growth rate. Write each point on a new line, with the key term first, and explain it in your own words when we revise.</a:t>
+              <a:t>We continue with Calculating Population Change. Copy the point on Growth rate: write the key term first, then its explanation.</a:t>
             </a:r>
             <a:endParaRPr lang="en-US" dirty="0"/>
           </a:p>
@@ -3905,7 +3906,7 @@
           <a:p>
             <a:r>
               <a:rPr lang="en-US" dirty="0"/>
-              <a:t>Let us copy Projecting Future Population. The future population is projected as follows. Copy the point on Rule of 70 on the left, then draw the diagram on the right: a population doubling. Give it a title and label it clearly.</a:t>
+              <a:t>Let us copy Projecting Future Population. The future population is projected as follows. Copy the point on The rule of 70 on the left, then draw the diagram on the right: population projection. Give it a title and label it clearly.</a:t>
             </a:r>
             <a:endParaRPr lang="en-US" dirty="0"/>
           </a:p>
@@ -3993,7 +3994,7 @@
           <a:p>
             <a:r>
               <a:rPr lang="en-US" dirty="0"/>
-              <a:t>We continue with Projecting Future Population. On this slide we have Example and Use for planning. Write each point on a new line, with the key term first, and explain it in your own words when we revise.</a:t>
+              <a:t>We continue with Projecting Future Population. Copy the point on Use for planning: write the key term first, then its explanation.</a:t>
             </a:r>
             <a:endParaRPr lang="en-US" dirty="0"/>
           </a:p>
@@ -4081,7 +4082,7 @@
           <a:p>
             <a:r>
               <a:rPr lang="en-US" dirty="0"/>
-              <a:t>Let us copy Practical Exercises with Solutions. The solutions of the practical exercises are the following. Copy the point on Exercise 1 (CBR) on the left, then draw the diagram on the right: solutions. Give it a title and label it clearly.</a:t>
+              <a:t>Let us copy Practical Exercises with Solutions. The practical exercises are solved as follows. Copy the point on Exercise 1 (CBR) on the left, then draw the diagram on the right: exercises. Give it a title and label it clearly.</a:t>
             </a:r>
             <a:endParaRPr lang="en-US" dirty="0"/>
           </a:p>
@@ -4169,7 +4170,7 @@
           <a:p>
             <a:r>
               <a:rPr lang="en-US" dirty="0"/>
-              <a:t>We continue with Practical Exercises with Solutions. On this slide we have Exercise 2 (CDR) and Exercise 3 (growth rate). Write each point on a new line, with the key term first, and explain it in your own words when we revise. When you finish, we go to the next slide.</a:t>
+              <a:t>We continue with Practical Exercises with Solutions. Copy the point on Exercise 2 (CDR): write the key term first, then its explanation.</a:t>
             </a:r>
             <a:endParaRPr lang="en-US" dirty="0"/>
           </a:p>
@@ -4257,7 +4258,7 @@
           <a:p>
             <a:r>
               <a:rPr lang="en-US" dirty="0"/>
-              <a:t>We continue with Practical Exercises with Solutions. On this slide we have Exercise 4 (doubling time). Write each point on a new line, with the key term first, and explain it in your own words when we revise.</a:t>
+              <a:t>We continue with Practical Exercises with Solutions. Copy the point on Exercise 3 (growth rate): write the key term first, then its explanation.</a:t>
             </a:r>
             <a:endParaRPr lang="en-US" dirty="0"/>
           </a:p>
@@ -4345,7 +4346,7 @@
           <a:p>
             <a:r>
               <a:rPr lang="en-US" dirty="0"/>
-              <a:t>Now let us check what you have understood. Question 1: A town of 25,000 people has 1,000 births and 200 deaths. Calculate its CBR, CDR and RNI. Answer in your exercise book.</a:t>
+              <a:t>We continue with Practical Exercises with Solutions. Copy the point on Exercise 4 (doubling time): write the key term first, then its explanation.</a:t>
             </a:r>
             <a:endParaRPr lang="en-US" dirty="0"/>
           </a:p>
@@ -4521,7 +4522,7 @@
           <a:p>
             <a:r>
               <a:rPr lang="en-US" dirty="0"/>
-              <a:t>The expected answer is: cBR = 40 ‰; CDR = 8 ‰; RNI = (40 − 8) ÷ 10 = 3.2 %. If you got it right, well done.</a:t>
+              <a:t>Now let us check what you have understood. Question 1: A town of 25,000 people has 1,000 births and 200 deaths. Calculate its CBR, CDR and RNI. Answer in your exercise book.</a:t>
             </a:r>
             <a:endParaRPr lang="en-US" dirty="0"/>
           </a:p>
@@ -4609,7 +4610,7 @@
           <a:p>
             <a:r>
               <a:rPr lang="en-US" dirty="0"/>
-              <a:t>Now let us check what you have understood. Question 2: Calculate the doubling time of a population growing at 2 % a year. Answer in your exercise book.</a:t>
+              <a:t>The expected answer is: cBR = 40 ‰; CDR = 8 ‰; RNI = (40 − 8) ÷ 10 = 3.2 %. If you got it right, well done.</a:t>
             </a:r>
             <a:endParaRPr lang="en-US" dirty="0"/>
           </a:p>
@@ -4697,7 +4698,7 @@
           <a:p>
             <a:r>
               <a:rPr lang="en-US" dirty="0"/>
-              <a:t>The expected answer is: 70 ÷ 2 = 35 years. If you got it right, well done.</a:t>
+              <a:t>Now let us check what you have understood. Question 2: Calculate the doubling time of a population growing at 2 % a year. Answer in your exercise book.</a:t>
             </a:r>
             <a:endParaRPr lang="en-US" dirty="0"/>
           </a:p>
@@ -4785,7 +4786,7 @@
           <a:p>
             <a:r>
               <a:rPr lang="en-US" dirty="0"/>
-              <a:t>For those who need more practice, fill in the blanks in your exercise book. The answers are: number 1, 1,000; number 2, 10; number 3, 70.</a:t>
+              <a:t>The expected answer is: 70 ÷ 2 = 35 years. If you got it right, well done.</a:t>
             </a:r>
             <a:endParaRPr lang="en-US" dirty="0"/>
           </a:p>
@@ -4873,7 +4874,7 @@
           <a:p>
             <a:r>
               <a:rPr lang="en-US" dirty="0"/>
-              <a:t>For your homework: Name two non-demographic factors of population growth. We shall correct it at the beginning of our next lesson.</a:t>
+              <a:t>For those who need more practice, fill in the blanks in your exercise book. The answers are: number 1, 1,000; number 2, 10; number 3, 70.</a:t>
             </a:r>
             <a:endParaRPr lang="en-US" dirty="0"/>
           </a:p>
@@ -4961,7 +4962,7 @@
           <a:p>
             <a:r>
               <a:rPr lang="en-US" dirty="0"/>
-              <a:t>Our next lesson will be on Lesson 10: Factors of Population Growth. Thank you for your attention, and see you next time.</a:t>
+              <a:t>For your homework: Name two non-demographic factors of population growth. We shall correct it at the beginning of our next lesson.</a:t>
             </a:r>
             <a:endParaRPr lang="en-US" dirty="0"/>
           </a:p>
@@ -5049,7 +5050,7 @@
           <a:p>
             <a:r>
               <a:rPr lang="en-US" dirty="0"/>
-              <a:t>Let us play the bilingual game. I say a word in English, and you give me the French word. Then we do the reverse.</a:t>
+              <a:t>Our next lesson will be on Lesson 10: Factors of Population Growth. Thank you for your attention, and see you next time.</a:t>
             </a:r>
             <a:endParaRPr lang="en-US" dirty="0"/>
           </a:p>
@@ -5137,7 +5138,7 @@
           <a:p>
             <a:r>
               <a:rPr lang="en-US" dirty="0"/>
-              <a:t>I record this information in the official logbook of the class after the lesson.</a:t>
+              <a:t>Let us play the bilingual game. I say a word in English, and you give me the French word. Then we do the reverse.</a:t>
             </a:r>
             <a:endParaRPr lang="en-US" dirty="0"/>
           </a:p>
@@ -5225,7 +5226,7 @@
           <a:p>
             <a:r>
               <a:rPr lang="en-US" dirty="0"/>
-              <a:t>I complete the second page of the logbook: the matter taught, the evaluation, the homework and the attendance.</a:t>
+              <a:t>I record this information in the official logbook of the class after the lesson.</a:t>
             </a:r>
             <a:endParaRPr lang="en-US" dirty="0"/>
           </a:p>
@@ -5313,7 +5314,7 @@
           <a:p>
             <a:r>
               <a:rPr lang="en-US" dirty="0"/>
-              <a:t>This slide is for me, the teacher: it gives the timing of the lesson and what to do if the projector is not available.</a:t>
+              <a:t>I complete the second page of the logbook: the matter taught, the evaluation, the homework and the attendance.</a:t>
             </a:r>
             <a:endParaRPr lang="en-US" dirty="0"/>
           </a:p>
@@ -5489,7 +5490,7 @@
           <a:p>
             <a:r>
               <a:rPr lang="en-US" dirty="0"/>
-              <a:t>These are the references and picture credits used to prepare this lesson.</a:t>
+              <a:t>This slide is for me, the teacher: it gives the timing of the lesson and what to do if the projector is not available.</a:t>
             </a:r>
             <a:endParaRPr lang="en-US" dirty="0"/>
           </a:p>
@@ -5513,6 +5514,94 @@
             <a:fld id="{F7021451-1387-4CA6-816F-3879F97B5CBC}" type="slidenum">
               <a:rPr lang="en-US"/>
               <a:t>60</a:t>
+            </a:fld>
+            <a:endParaRPr lang="en-US"/>
+          </a:p>
+        </p:txBody>
+      </p:sp>
+    </p:spTree>
+    <p:extLst>
+      <p:ext uri="{BB962C8B-B14F-4D97-AF65-F5344CB8AC3E}">
+        <p14:creationId xmlns:p14="http://schemas.microsoft.com/office/powerpoint/2010/main" val="1024086991"/>
+      </p:ext>
+    </p:extLst>
+  </p:cSld>
+  <p:clrMapOvr>
+    <a:masterClrMapping/>
+  </p:clrMapOvr>
+</p:notes>
+</file>
+
+<file path=ppt/notesSlides/notesSlide61.xml><?xml version="1.0" encoding="utf-8"?>
+<p:notes xmlns:a="http://schemas.openxmlformats.org/drawingml/2006/main" xmlns:r="http://schemas.openxmlformats.org/officeDocument/2006/relationships" xmlns:p="http://schemas.openxmlformats.org/presentationml/2006/main">
+  <p:cSld>
+    <p:spTree>
+      <p:nvGrpSpPr>
+        <p:cNvPr id="1" name=""/>
+        <p:cNvGrpSpPr/>
+        <p:nvPr/>
+      </p:nvGrpSpPr>
+      <p:grpSpPr>
+        <a:xfrm>
+          <a:off x="0" y="0"/>
+          <a:ext cx="0" cy="0"/>
+          <a:chOff x="0" y="0"/>
+          <a:chExt cx="0" cy="0"/>
+        </a:xfrm>
+      </p:grpSpPr>
+      <p:sp>
+        <p:nvSpPr>
+          <p:cNvPr id="2" name="Slide Image Placeholder 1"/>
+          <p:cNvSpPr>
+            <a:spLocks noGrp="1" noRot="1" noChangeAspect="1"/>
+          </p:cNvSpPr>
+          <p:nvPr>
+            <p:ph type="sldImg"/>
+          </p:nvPr>
+        </p:nvSpPr>
+        <p:spPr/>
+      </p:sp>
+      <p:sp>
+        <p:nvSpPr>
+          <p:cNvPr id="3" name="Notes Placeholder 2"/>
+          <p:cNvSpPr>
+            <a:spLocks noGrp="1"/>
+          </p:cNvSpPr>
+          <p:nvPr>
+            <p:ph type="body" idx="1"/>
+          </p:nvPr>
+        </p:nvSpPr>
+        <p:spPr/>
+        <p:txBody>
+          <a:bodyPr/>
+          <a:lstStyle/>
+          <a:p>
+            <a:r>
+              <a:rPr lang="en-US" dirty="0"/>
+              <a:t>These are the references and picture credits used to prepare this lesson.</a:t>
+            </a:r>
+            <a:endParaRPr lang="en-US" dirty="0"/>
+          </a:p>
+        </p:txBody>
+      </p:sp>
+      <p:sp>
+        <p:nvSpPr>
+          <p:cNvPr id="4" name="Slide Number Placeholder 3"/>
+          <p:cNvSpPr>
+            <a:spLocks noGrp="1"/>
+          </p:cNvSpPr>
+          <p:nvPr>
+            <p:ph type="sldNum" sz="quarter" idx="10"/>
+          </p:nvPr>
+        </p:nvSpPr>
+        <p:spPr/>
+        <p:txBody>
+          <a:bodyPr/>
+          <a:lstStyle/>
+          <a:p>
+            <a:fld id="{F7021451-1387-4CA6-816F-3879F97B5CBC}" type="slidenum">
+              <a:rPr lang="en-US"/>
+              <a:t>61</a:t>
             </a:fld>
             <a:endParaRPr lang="en-US"/>
           </a:p>
@@ -15089,7 +15178,7 @@
         <p:spPr>
           <a:xfrm>
             <a:off x="0" y="658368"/>
-            <a:ext cx="5120640" cy="5833872"/>
+            <a:ext cx="2468880" cy="5833872"/>
           </a:xfrm>
           <a:prstGeom prst="rect">
             <a:avLst/>
@@ -15104,8 +15193,8 @@
         </p:nvSpPr>
         <p:spPr>
           <a:xfrm>
-            <a:off x="5349240" y="1005840"/>
-            <a:ext cx="6522415" cy="731520"/>
+            <a:off x="2697480" y="1005840"/>
+            <a:ext cx="9174175" cy="731520"/>
           </a:xfrm>
           <a:prstGeom prst="rect">
             <a:avLst/>
@@ -15145,8 +15234,8 @@
         </p:nvSpPr>
         <p:spPr>
           <a:xfrm>
-            <a:off x="5349240" y="1783080"/>
-            <a:ext cx="6522415" cy="4663440"/>
+            <a:off x="2697480" y="1783080"/>
+            <a:ext cx="9174175" cy="4663440"/>
           </a:xfrm>
           <a:prstGeom prst="rect">
             <a:avLst/>
@@ -15210,7 +15299,7 @@
                 <a:ea typeface="Times New Roman" pitchFamily="34" charset="-122"/>
                 <a:cs typeface="Times New Roman" pitchFamily="34" charset="-120"/>
               </a:rPr>
-              <a:t>A woman can be fecund (able to have children) but not fertile (having no live births).</a:t>
+              <a:t>Fecundity is the ability to have children, while fertility is the actual number of births. A woman can therefore be fecund but have no live births.</a:t>
             </a:r>
             <a:endParaRPr lang="en-US" sz="4000" dirty="0"/>
           </a:p>
@@ -15378,7 +15467,7 @@
         <p:spPr>
           <a:xfrm>
             <a:off x="365760" y="1783080"/>
-            <a:ext cx="4846320" cy="4617720"/>
+            <a:ext cx="6035040" cy="4617720"/>
           </a:xfrm>
           <a:prstGeom prst="rect">
             <a:avLst/>
@@ -15405,7 +15494,7 @@
                 <a:ea typeface="Times New Roman" pitchFamily="34" charset="-122"/>
                 <a:cs typeface="Times New Roman" pitchFamily="34" charset="-120"/>
               </a:rPr>
-              <a:t>CBR formula: </a:t>
+              <a:t>Crude birth rate: </a:t>
             </a:r>
             <a:pPr algn="l" indent="0" marL="0">
               <a:spcAft>
@@ -15422,7 +15511,7 @@
                 <a:ea typeface="Times New Roman" pitchFamily="34" charset="-122"/>
                 <a:cs typeface="Times New Roman" pitchFamily="34" charset="-120"/>
               </a:rPr>
-              <a:t>CBR = births ÷ total population × 1,000.</a:t>
+              <a:t>CBR = births ÷ total population × 1,000. For example, 16,000 births in a town of 400,000 people give 16,000 ÷ 400,000 × 1,000 = 40 per 1,000.</a:t>
             </a:r>
             <a:endParaRPr lang="en-US" sz="3600" dirty="0"/>
           </a:p>
@@ -15430,7 +15519,7 @@
       </p:sp>
       <p:pic>
         <p:nvPicPr>
-          <p:cNvPr id="5" name="Image 0" descr="/home/claude/f4/img/v2/indices_big.png">    </p:cNvPr>
+          <p:cNvPr id="5" name="Image 0" descr="/home/claude/f4/img/v2/pop2_garoua_calc.png">    </p:cNvPr>
           <p:cNvPicPr>
             <a:picLocks noChangeAspect="1"/>
           </p:cNvPicPr>
@@ -15444,8 +15533,8 @@
         </p:blipFill>
         <p:spPr>
           <a:xfrm>
-            <a:off x="5349240" y="2617506"/>
-            <a:ext cx="6659575" cy="2601397"/>
+            <a:off x="6537960" y="2849678"/>
+            <a:ext cx="5470855" cy="2137053"/>
           </a:xfrm>
           <a:prstGeom prst="rect">
             <a:avLst/>
@@ -15460,8 +15549,8 @@
         </p:nvSpPr>
         <p:spPr>
           <a:xfrm>
-            <a:off x="5349240" y="6089904"/>
-            <a:ext cx="6659575" cy="347472"/>
+            <a:off x="6537960" y="6089904"/>
+            <a:ext cx="5470855" cy="347472"/>
           </a:xfrm>
           <a:prstGeom prst="rect">
             <a:avLst/>
@@ -15485,7 +15574,7 @@
                 <a:ea typeface="Times New Roman" pitchFamily="34" charset="-122"/>
                 <a:cs typeface="Times New Roman" pitchFamily="34" charset="-120"/>
               </a:rPr>
-              <a:t>Illustration: the main formulas</a:t>
+              <a:t>Illustration: a worked example</a:t>
             </a:r>
             <a:endParaRPr lang="en-US" sz="1600" dirty="0"/>
           </a:p>
@@ -15892,7 +15981,7 @@
         <p:spPr>
           <a:xfrm>
             <a:off x="365760" y="1783080"/>
-            <a:ext cx="4846320" cy="4617720"/>
+            <a:ext cx="6035040" cy="4617720"/>
           </a:xfrm>
           <a:prstGeom prst="rect">
             <a:avLst/>
@@ -15919,7 +16008,7 @@
                 <a:ea typeface="Times New Roman" pitchFamily="34" charset="-122"/>
                 <a:cs typeface="Times New Roman" pitchFamily="34" charset="-120"/>
               </a:rPr>
-              <a:t>CBR example: </a:t>
+              <a:t>Crude death rate: </a:t>
             </a:r>
             <a:pPr algn="l" indent="0" marL="0">
               <a:spcAft>
@@ -15936,7 +16025,7 @@
                 <a:ea typeface="Times New Roman" pitchFamily="34" charset="-122"/>
                 <a:cs typeface="Times New Roman" pitchFamily="34" charset="-120"/>
               </a:rPr>
-              <a:t>16,000 births in a town of 400,000: 16,000 ÷ 400,000 × 1,000 = 40 per 1,000.</a:t>
+              <a:t>CDR = deaths ÷ total population × 1,000. For example, 4,000 deaths in the same town give 4,000 ÷ 400,000 × 1,000 = 10 per 1,000.</a:t>
             </a:r>
             <a:endParaRPr lang="en-US" sz="3600" dirty="0"/>
           </a:p>
@@ -15944,7 +16033,7 @@
       </p:sp>
       <p:pic>
         <p:nvPicPr>
-          <p:cNvPr id="5" name="Image 0" descr="/home/claude/f4/img/v2/pop2_garoua_calc.png">    </p:cNvPr>
+          <p:cNvPr id="5" name="Image 0" descr="/home/claude/f4/img/v2/indices_big.png">    </p:cNvPr>
           <p:cNvPicPr>
             <a:picLocks noChangeAspect="1"/>
           </p:cNvPicPr>
@@ -15958,8 +16047,8 @@
         </p:blipFill>
         <p:spPr>
           <a:xfrm>
-            <a:off x="5349240" y="2617506"/>
-            <a:ext cx="6659575" cy="2601397"/>
+            <a:off x="6537960" y="2849678"/>
+            <a:ext cx="5470855" cy="2137053"/>
           </a:xfrm>
           <a:prstGeom prst="rect">
             <a:avLst/>
@@ -15974,8 +16063,8 @@
         </p:nvSpPr>
         <p:spPr>
           <a:xfrm>
-            <a:off x="5349240" y="6089904"/>
-            <a:ext cx="6659575" cy="347472"/>
+            <a:off x="6537960" y="6089904"/>
+            <a:ext cx="5470855" cy="347472"/>
           </a:xfrm>
           <a:prstGeom prst="rect">
             <a:avLst/>
@@ -15999,7 +16088,7 @@
                 <a:ea typeface="Times New Roman" pitchFamily="34" charset="-122"/>
                 <a:cs typeface="Times New Roman" pitchFamily="34" charset="-120"/>
               </a:rPr>
-              <a:t>Illustration: a worked example</a:t>
+              <a:t>Illustration: demographic indices</a:t>
             </a:r>
             <a:endParaRPr lang="en-US" sz="1600" dirty="0"/>
           </a:p>
@@ -16134,7 +16223,7 @@
         <p:spPr>
           <a:xfrm>
             <a:off x="0" y="658368"/>
-            <a:ext cx="5120640" cy="5833872"/>
+            <a:ext cx="3840480" cy="5833872"/>
           </a:xfrm>
           <a:prstGeom prst="rect">
             <a:avLst/>
@@ -16149,8 +16238,8 @@
         </p:nvSpPr>
         <p:spPr>
           <a:xfrm>
-            <a:off x="5349240" y="1005840"/>
-            <a:ext cx="6522415" cy="731520"/>
+            <a:off x="4069080" y="1005840"/>
+            <a:ext cx="7802575" cy="731520"/>
           </a:xfrm>
           <a:prstGeom prst="rect">
             <a:avLst/>
@@ -16176,7 +16265,7 @@
                 <a:ea typeface="Times New Roman" pitchFamily="34" charset="-122"/>
                 <a:cs typeface="Times New Roman" pitchFamily="34" charset="-120"/>
               </a:rPr>
-              <a:t>1. Measures of Fertility and Mortality</a:t>
+              <a:t>2. Calculating Population Change</a:t>
             </a:r>
             <a:endParaRPr lang="en-US" sz="3600" dirty="0"/>
           </a:p>
@@ -16190,8 +16279,8 @@
         </p:nvSpPr>
         <p:spPr>
           <a:xfrm>
-            <a:off x="5349240" y="1783080"/>
-            <a:ext cx="6522415" cy="4663440"/>
+            <a:off x="4069080" y="1783080"/>
+            <a:ext cx="7802575" cy="4663440"/>
           </a:xfrm>
           <a:prstGeom prst="rect">
             <a:avLst/>
@@ -16210,7 +16299,7 @@
               <a:buNone/>
             </a:pPr>
             <a:r>
-              <a:rPr lang="en-US" sz="4000" b="1" dirty="0">
+              <a:rPr lang="en-US" sz="4000" i="1" dirty="0">
                 <a:solidFill>
                   <a:srgbClr val="111111"/>
                 </a:solidFill>
@@ -16218,8 +16307,11 @@
                 <a:ea typeface="Times New Roman" pitchFamily="34" charset="-122"/>
                 <a:cs typeface="Times New Roman" pitchFamily="34" charset="-120"/>
               </a:rPr>
-              <a:t>CDR formula: </a:t>
-            </a:r>
+              <a:t>Population change is calculated as follows:</a:t>
+            </a:r>
+            <a:endParaRPr lang="en-US" sz="4000" dirty="0"/>
+          </a:p>
+          <a:p>
             <a:pPr algn="l" indent="0" marL="0">
               <a:spcAft>
                 <a:spcPts val="800"/>
@@ -16227,7 +16319,7 @@
               <a:buNone/>
             </a:pPr>
             <a:r>
-              <a:rPr lang="en-US" sz="4000" dirty="0">
+              <a:rPr lang="en-US" sz="4000" b="1" dirty="0">
                 <a:solidFill>
                   <a:srgbClr val="111111"/>
                 </a:solidFill>
@@ -16235,11 +16327,8 @@
                 <a:ea typeface="Times New Roman" pitchFamily="34" charset="-122"/>
                 <a:cs typeface="Times New Roman" pitchFamily="34" charset="-120"/>
               </a:rPr>
-              <a:t>CDR = deaths ÷ total population × 1,000.</a:t>
-            </a:r>
-            <a:endParaRPr lang="en-US" sz="4000" dirty="0"/>
-          </a:p>
-          <a:p>
+              <a:t>Rate of natural increase (RNI): </a:t>
+            </a:r>
             <a:pPr algn="l" indent="0" marL="0">
               <a:spcAft>
                 <a:spcPts val="800"/>
@@ -16247,7 +16336,7 @@
               <a:buNone/>
             </a:pPr>
             <a:r>
-              <a:rPr lang="en-US" sz="4000" b="1" dirty="0">
+              <a:rPr lang="en-US" sz="4000" dirty="0">
                 <a:solidFill>
                   <a:srgbClr val="111111"/>
                 </a:solidFill>
@@ -16255,24 +16344,7 @@
                 <a:ea typeface="Times New Roman" pitchFamily="34" charset="-122"/>
                 <a:cs typeface="Times New Roman" pitchFamily="34" charset="-120"/>
               </a:rPr>
-              <a:t>CDR example: </a:t>
-            </a:r>
-            <a:pPr algn="l" indent="0" marL="0">
-              <a:spcAft>
-                <a:spcPts val="800"/>
-              </a:spcAft>
-              <a:buNone/>
-            </a:pPr>
-            <a:r>
-              <a:rPr lang="en-US" sz="4000" dirty="0">
-                <a:solidFill>
-                  <a:srgbClr val="111111"/>
-                </a:solidFill>
-                <a:latin typeface="Times New Roman" pitchFamily="34" charset="0"/>
-                <a:ea typeface="Times New Roman" pitchFamily="34" charset="-122"/>
-                <a:cs typeface="Times New Roman" pitchFamily="34" charset="-120"/>
-              </a:rPr>
-              <a:t>4,000 deaths in the same town: 4,000 ÷ 400,000 × 1,000 = 10 per 1,000.</a:t>
+              <a:t>RNI (%) = (CBR − CDR) ÷ 10, and it does not include migration. With a CBR of 40 and a CDR of 10, the RNI is (40 − 10) ÷ 10 = 3 %.</a:t>
             </a:r>
             <a:endParaRPr lang="en-US" sz="4000" dirty="0"/>
           </a:p>
@@ -16407,7 +16479,7 @@
         <p:spPr>
           <a:xfrm>
             <a:off x="0" y="658368"/>
-            <a:ext cx="3840480" cy="5833872"/>
+            <a:ext cx="5120640" cy="5833872"/>
           </a:xfrm>
           <a:prstGeom prst="rect">
             <a:avLst/>
@@ -16422,8 +16494,8 @@
         </p:nvSpPr>
         <p:spPr>
           <a:xfrm>
-            <a:off x="4069080" y="1005840"/>
-            <a:ext cx="7802575" cy="731520"/>
+            <a:off x="5349240" y="1005840"/>
+            <a:ext cx="6522415" cy="731520"/>
           </a:xfrm>
           <a:prstGeom prst="rect">
             <a:avLst/>
@@ -16463,8 +16535,8 @@
         </p:nvSpPr>
         <p:spPr>
           <a:xfrm>
-            <a:off x="4069080" y="1783080"/>
-            <a:ext cx="7802575" cy="4663440"/>
+            <a:off x="5349240" y="1783080"/>
+            <a:ext cx="6522415" cy="4663440"/>
           </a:xfrm>
           <a:prstGeom prst="rect">
             <a:avLst/>
@@ -16483,7 +16555,7 @@
               <a:buNone/>
             </a:pPr>
             <a:r>
-              <a:rPr lang="en-US" sz="4000" i="1" dirty="0">
+              <a:rPr lang="en-US" sz="4000" b="1" dirty="0">
                 <a:solidFill>
                   <a:srgbClr val="111111"/>
                 </a:solidFill>
@@ -16491,11 +16563,8 @@
                 <a:ea typeface="Times New Roman" pitchFamily="34" charset="-122"/>
                 <a:cs typeface="Times New Roman" pitchFamily="34" charset="-120"/>
               </a:rPr>
-              <a:t>Population change is calculated as follows:</a:t>
-            </a:r>
-            <a:endParaRPr lang="en-US" sz="4000" dirty="0"/>
-          </a:p>
-          <a:p>
+              <a:t>Net migration rate: </a:t>
+            </a:r>
             <a:pPr algn="l" indent="0" marL="0">
               <a:spcAft>
                 <a:spcPts val="800"/>
@@ -16503,7 +16572,7 @@
               <a:buNone/>
             </a:pPr>
             <a:r>
-              <a:rPr lang="en-US" sz="4000" b="1" dirty="0">
+              <a:rPr lang="en-US" sz="4000" dirty="0">
                 <a:solidFill>
                   <a:srgbClr val="111111"/>
                 </a:solidFill>
@@ -16511,61 +16580,7 @@
                 <a:ea typeface="Times New Roman" pitchFamily="34" charset="-122"/>
                 <a:cs typeface="Times New Roman" pitchFamily="34" charset="-120"/>
               </a:rPr>
-              <a:t>Rate of natural increase (RNI): </a:t>
-            </a:r>
-            <a:pPr algn="l" indent="0" marL="0">
-              <a:spcAft>
-                <a:spcPts val="800"/>
-              </a:spcAft>
-              <a:buNone/>
-            </a:pPr>
-            <a:r>
-              <a:rPr lang="en-US" sz="4000" dirty="0">
-                <a:solidFill>
-                  <a:srgbClr val="111111"/>
-                </a:solidFill>
-                <a:latin typeface="Times New Roman" pitchFamily="34" charset="0"/>
-                <a:ea typeface="Times New Roman" pitchFamily="34" charset="-122"/>
-                <a:cs typeface="Times New Roman" pitchFamily="34" charset="-120"/>
-              </a:rPr>
-              <a:t>RNI (%) = (CBR − CDR) ÷ 10; it excludes migration.</a:t>
-            </a:r>
-            <a:endParaRPr lang="en-US" sz="4000" dirty="0"/>
-          </a:p>
-          <a:p>
-            <a:pPr algn="l" indent="0" marL="0">
-              <a:spcAft>
-                <a:spcPts val="800"/>
-              </a:spcAft>
-              <a:buNone/>
-            </a:pPr>
-            <a:r>
-              <a:rPr lang="en-US" sz="4000" b="1" dirty="0">
-                <a:solidFill>
-                  <a:srgbClr val="111111"/>
-                </a:solidFill>
-                <a:latin typeface="Times New Roman" pitchFamily="34" charset="0"/>
-                <a:ea typeface="Times New Roman" pitchFamily="34" charset="-122"/>
-                <a:cs typeface="Times New Roman" pitchFamily="34" charset="-120"/>
-              </a:rPr>
-              <a:t>RNI example: </a:t>
-            </a:r>
-            <a:pPr algn="l" indent="0" marL="0">
-              <a:spcAft>
-                <a:spcPts val="800"/>
-              </a:spcAft>
-              <a:buNone/>
-            </a:pPr>
-            <a:r>
-              <a:rPr lang="en-US" sz="4000" dirty="0">
-                <a:solidFill>
-                  <a:srgbClr val="111111"/>
-                </a:solidFill>
-                <a:latin typeface="Times New Roman" pitchFamily="34" charset="0"/>
-                <a:ea typeface="Times New Roman" pitchFamily="34" charset="-122"/>
-                <a:cs typeface="Times New Roman" pitchFamily="34" charset="-120"/>
-              </a:rPr>
-              <a:t>With a CBR of 40 and a CDR of 10: (40 − 10) ÷ 10 = 3 %.</a:t>
+              <a:t>Net migration rate = (immigrants − emigrants) ÷ total population × 1,000. It is positive when more people arrive than leave.</a:t>
             </a:r>
             <a:endParaRPr lang="en-US" sz="4000" dirty="0"/>
           </a:p>
@@ -16742,7 +16757,7 @@
                 <a:ea typeface="Times New Roman" pitchFamily="34" charset="-122"/>
                 <a:cs typeface="Times New Roman" pitchFamily="34" charset="-120"/>
               </a:rPr>
-              <a:t>2. Calculating Population Change (continued)</a:t>
+              <a:t>2. Calculating Population Change</a:t>
             </a:r>
             <a:endParaRPr lang="en-US" sz="3600" dirty="0"/>
           </a:p>
@@ -16784,7 +16799,7 @@
                 <a:ea typeface="Times New Roman" pitchFamily="34" charset="-122"/>
                 <a:cs typeface="Times New Roman" pitchFamily="34" charset="-120"/>
               </a:rPr>
-              <a:t>Net migration rate: </a:t>
+              <a:t>Growth rate: </a:t>
             </a:r>
             <a:pPr algn="l" indent="0" marL="0">
               <a:spcAft>
@@ -16801,44 +16816,7 @@
                 <a:ea typeface="Times New Roman" pitchFamily="34" charset="-122"/>
                 <a:cs typeface="Times New Roman" pitchFamily="34" charset="-120"/>
               </a:rPr>
-              <a:t>(Immigrants − emigrants) ÷ total population × 1,000.</a:t>
-            </a:r>
-            <a:endParaRPr lang="en-US" sz="4000" dirty="0"/>
-          </a:p>
-          <a:p>
-            <a:pPr algn="l" indent="0" marL="0">
-              <a:spcAft>
-                <a:spcPts val="800"/>
-              </a:spcAft>
-              <a:buNone/>
-            </a:pPr>
-            <a:r>
-              <a:rPr lang="en-US" sz="4000" b="1" dirty="0">
-                <a:solidFill>
-                  <a:srgbClr val="111111"/>
-                </a:solidFill>
-                <a:latin typeface="Times New Roman" pitchFamily="34" charset="0"/>
-                <a:ea typeface="Times New Roman" pitchFamily="34" charset="-122"/>
-                <a:cs typeface="Times New Roman" pitchFamily="34" charset="-120"/>
-              </a:rPr>
-              <a:t>Growth rate: </a:t>
-            </a:r>
-            <a:pPr algn="l" indent="0" marL="0">
-              <a:spcAft>
-                <a:spcPts val="800"/>
-              </a:spcAft>
-              <a:buNone/>
-            </a:pPr>
-            <a:r>
-              <a:rPr lang="en-US" sz="4000" dirty="0">
-                <a:solidFill>
-                  <a:srgbClr val="111111"/>
-                </a:solidFill>
-                <a:latin typeface="Times New Roman" pitchFamily="34" charset="0"/>
-                <a:ea typeface="Times New Roman" pitchFamily="34" charset="-122"/>
-                <a:cs typeface="Times New Roman" pitchFamily="34" charset="-120"/>
-              </a:rPr>
-              <a:t>[(births − deaths) + (immigrants − emigrants)] ÷ population × 100.</a:t>
+              <a:t>Growth rate (%) = [(births − deaths) + (immigrants − emigrants)] ÷ population × 100. It combines natural increase and migration.</a:t>
             </a:r>
             <a:endParaRPr lang="en-US" sz="4000" dirty="0"/>
           </a:p>
@@ -17006,7 +16984,7 @@
         <p:spPr>
           <a:xfrm>
             <a:off x="365760" y="1783080"/>
-            <a:ext cx="4846320" cy="4617720"/>
+            <a:ext cx="6035040" cy="4617720"/>
           </a:xfrm>
           <a:prstGeom prst="rect">
             <a:avLst/>
@@ -17053,7 +17031,7 @@
                 <a:ea typeface="Times New Roman" pitchFamily="34" charset="-122"/>
                 <a:cs typeface="Times New Roman" pitchFamily="34" charset="-120"/>
               </a:rPr>
-              <a:t>Rule of 70: </a:t>
+              <a:t>The rule of 70: </a:t>
             </a:r>
             <a:pPr algn="l" indent="0" marL="0">
               <a:spcAft>
@@ -17070,7 +17048,7 @@
                 <a:ea typeface="Times New Roman" pitchFamily="34" charset="-122"/>
                 <a:cs typeface="Times New Roman" pitchFamily="34" charset="-120"/>
               </a:rPr>
-              <a:t>Doubling time (years) ≈ 70 ÷ growth rate (%).</a:t>
+              <a:t>Doubling time in years ≈ 70 ÷ growth rate in %. For example, a town growing at 3 % a year doubles in about 70 ÷ 3 ≈ 23 years.</a:t>
             </a:r>
             <a:endParaRPr lang="en-US" sz="3600" dirty="0"/>
           </a:p>
@@ -17092,8 +17070,8 @@
         </p:blipFill>
         <p:spPr>
           <a:xfrm>
-            <a:off x="5349240" y="2461422"/>
-            <a:ext cx="6659575" cy="2913564"/>
+            <a:off x="6537960" y="2721454"/>
+            <a:ext cx="5470855" cy="2393499"/>
           </a:xfrm>
           <a:prstGeom prst="rect">
             <a:avLst/>
@@ -17108,8 +17086,8 @@
         </p:nvSpPr>
         <p:spPr>
           <a:xfrm>
-            <a:off x="5349240" y="6089904"/>
-            <a:ext cx="6659575" cy="347472"/>
+            <a:off x="6537960" y="6089904"/>
+            <a:ext cx="5470855" cy="347472"/>
           </a:xfrm>
           <a:prstGeom prst="rect">
             <a:avLst/>
@@ -17133,7 +17111,7 @@
                 <a:ea typeface="Times New Roman" pitchFamily="34" charset="-122"/>
                 <a:cs typeface="Times New Roman" pitchFamily="34" charset="-120"/>
               </a:rPr>
-              <a:t>Illustration: a population doubling</a:t>
+              <a:t>Illustration: population projection</a:t>
             </a:r>
             <a:endParaRPr lang="en-US" sz="1600" dirty="0"/>
           </a:p>
@@ -17352,7 +17330,7 @@
                 <a:ea typeface="Times New Roman" pitchFamily="34" charset="-122"/>
                 <a:cs typeface="Times New Roman" pitchFamily="34" charset="-120"/>
               </a:rPr>
-              <a:t>Example: </a:t>
+              <a:t>Use for planning: </a:t>
             </a:r>
             <a:pPr algn="l" indent="0" marL="0">
               <a:spcAft>
@@ -17369,44 +17347,7 @@
                 <a:ea typeface="Times New Roman" pitchFamily="34" charset="-122"/>
                 <a:cs typeface="Times New Roman" pitchFamily="34" charset="-120"/>
               </a:rPr>
-              <a:t>A town growing at 3 % a year doubles in about 70 ÷ 3 ≈ 23 years.</a:t>
-            </a:r>
-            <a:endParaRPr lang="en-US" sz="4000" dirty="0"/>
-          </a:p>
-          <a:p>
-            <a:pPr algn="l" indent="0" marL="0">
-              <a:spcAft>
-                <a:spcPts val="800"/>
-              </a:spcAft>
-              <a:buNone/>
-            </a:pPr>
-            <a:r>
-              <a:rPr lang="en-US" sz="4000" b="1" dirty="0">
-                <a:solidFill>
-                  <a:srgbClr val="111111"/>
-                </a:solidFill>
-                <a:latin typeface="Times New Roman" pitchFamily="34" charset="0"/>
-                <a:ea typeface="Times New Roman" pitchFamily="34" charset="-122"/>
-                <a:cs typeface="Times New Roman" pitchFamily="34" charset="-120"/>
-              </a:rPr>
-              <a:t>Use for planning: </a:t>
-            </a:r>
-            <a:pPr algn="l" indent="0" marL="0">
-              <a:spcAft>
-                <a:spcPts val="800"/>
-              </a:spcAft>
-              <a:buNone/>
-            </a:pPr>
-            <a:r>
-              <a:rPr lang="en-US" sz="4000" dirty="0">
-                <a:solidFill>
-                  <a:srgbClr val="111111"/>
-                </a:solidFill>
-                <a:latin typeface="Times New Roman" pitchFamily="34" charset="0"/>
-                <a:ea typeface="Times New Roman" pitchFamily="34" charset="-122"/>
-                <a:cs typeface="Times New Roman" pitchFamily="34" charset="-120"/>
-              </a:rPr>
-              <a:t>If Garoua doubles in about 23 years, it will need twice as many classrooms, health centres and water points.</a:t>
+              <a:t>If Garoua doubles in about 23 years, it will need twice as many classrooms, health centres and water points. Projections allow the state to prepare these services in time.</a:t>
             </a:r>
             <a:endParaRPr lang="en-US" sz="4000" dirty="0"/>
           </a:p>
@@ -17574,7 +17515,7 @@
         <p:spPr>
           <a:xfrm>
             <a:off x="365760" y="1783080"/>
-            <a:ext cx="4846320" cy="4617720"/>
+            <a:ext cx="6035040" cy="4617720"/>
           </a:xfrm>
           <a:prstGeom prst="rect">
             <a:avLst/>
@@ -17601,7 +17542,7 @@
                 <a:ea typeface="Times New Roman" pitchFamily="34" charset="-122"/>
                 <a:cs typeface="Times New Roman" pitchFamily="34" charset="-120"/>
               </a:rPr>
-              <a:t>The solutions of the practical exercises are the following:</a:t>
+              <a:t>The practical exercises are solved as follows:</a:t>
             </a:r>
             <a:endParaRPr lang="en-US" sz="3600" dirty="0"/>
           </a:p>
@@ -17638,7 +17579,7 @@
                 <a:ea typeface="Times New Roman" pitchFamily="34" charset="-122"/>
                 <a:cs typeface="Times New Roman" pitchFamily="34" charset="-120"/>
               </a:rPr>
-              <a:t>850 births in a town of 50,000: 850 ÷ 50,000 × 1,000 = 17 per 1,000.</a:t>
+              <a:t>A town of 50,000 people has 850 births in a year. Its CBR is 850 ÷ 50,000 × 1,000 = 17 per 1,000.</a:t>
             </a:r>
             <a:endParaRPr lang="en-US" sz="3600" dirty="0"/>
           </a:p>
@@ -17660,8 +17601,8 @@
         </p:blipFill>
         <p:spPr>
           <a:xfrm>
-            <a:off x="5349240" y="2617506"/>
-            <a:ext cx="6659575" cy="2601397"/>
+            <a:off x="6537960" y="2849678"/>
+            <a:ext cx="5470855" cy="2137053"/>
           </a:xfrm>
           <a:prstGeom prst="rect">
             <a:avLst/>
@@ -17676,8 +17617,8 @@
         </p:nvSpPr>
         <p:spPr>
           <a:xfrm>
-            <a:off x="5349240" y="6089904"/>
-            <a:ext cx="6659575" cy="347472"/>
+            <a:off x="6537960" y="6089904"/>
+            <a:ext cx="5470855" cy="347472"/>
           </a:xfrm>
           <a:prstGeom prst="rect">
             <a:avLst/>
@@ -17701,7 +17642,7 @@
                 <a:ea typeface="Times New Roman" pitchFamily="34" charset="-122"/>
                 <a:cs typeface="Times New Roman" pitchFamily="34" charset="-120"/>
               </a:rPr>
-              <a:t>Illustration: solutions</a:t>
+              <a:t>Illustration: exercises</a:t>
             </a:r>
             <a:endParaRPr lang="en-US" sz="1600" dirty="0"/>
           </a:p>
@@ -17836,7 +17777,7 @@
         <p:spPr>
           <a:xfrm>
             <a:off x="0" y="658368"/>
-            <a:ext cx="1463040" cy="5833872"/>
+            <a:ext cx="5120640" cy="5833872"/>
           </a:xfrm>
           <a:prstGeom prst="rect">
             <a:avLst/>
@@ -17851,8 +17792,8 @@
         </p:nvSpPr>
         <p:spPr>
           <a:xfrm>
-            <a:off x="1691640" y="1005840"/>
-            <a:ext cx="10180015" cy="731520"/>
+            <a:off x="5349240" y="1005840"/>
+            <a:ext cx="6522415" cy="731520"/>
           </a:xfrm>
           <a:prstGeom prst="rect">
             <a:avLst/>
@@ -17892,8 +17833,8 @@
         </p:nvSpPr>
         <p:spPr>
           <a:xfrm>
-            <a:off x="1691640" y="1783080"/>
-            <a:ext cx="10180015" cy="4663440"/>
+            <a:off x="5349240" y="1783080"/>
+            <a:ext cx="6522415" cy="4663440"/>
           </a:xfrm>
           <a:prstGeom prst="rect">
             <a:avLst/>
@@ -17937,44 +17878,7 @@
                 <a:ea typeface="Times New Roman" pitchFamily="34" charset="-122"/>
                 <a:cs typeface="Times New Roman" pitchFamily="34" charset="-120"/>
               </a:rPr>
-              <a:t>1,200 deaths in a region of 150,000: 1,200 ÷ 150,000 × 1,000 = 8 per 1,000.</a:t>
-            </a:r>
-            <a:endParaRPr lang="en-US" sz="4000" dirty="0"/>
-          </a:p>
-          <a:p>
-            <a:pPr algn="l" indent="0" marL="0">
-              <a:spcAft>
-                <a:spcPts val="800"/>
-              </a:spcAft>
-              <a:buNone/>
-            </a:pPr>
-            <a:r>
-              <a:rPr lang="en-US" sz="4000" b="1" dirty="0">
-                <a:solidFill>
-                  <a:srgbClr val="111111"/>
-                </a:solidFill>
-                <a:latin typeface="Times New Roman" pitchFamily="34" charset="0"/>
-                <a:ea typeface="Times New Roman" pitchFamily="34" charset="-122"/>
-                <a:cs typeface="Times New Roman" pitchFamily="34" charset="-120"/>
-              </a:rPr>
-              <a:t>Exercise 3 (growth rate): </a:t>
-            </a:r>
-            <a:pPr algn="l" indent="0" marL="0">
-              <a:spcAft>
-                <a:spcPts val="800"/>
-              </a:spcAft>
-              <a:buNone/>
-            </a:pPr>
-            <a:r>
-              <a:rPr lang="en-US" sz="4000" dirty="0">
-                <a:solidFill>
-                  <a:srgbClr val="111111"/>
-                </a:solidFill>
-                <a:latin typeface="Times New Roman" pitchFamily="34" charset="0"/>
-                <a:ea typeface="Times New Roman" pitchFamily="34" charset="-122"/>
-                <a:cs typeface="Times New Roman" pitchFamily="34" charset="-120"/>
-              </a:rPr>
-              <a:t>120,000 births, 85,000 deaths, 30,000 immigrants and 25,000 emigrants in 3,000,000 people: (35,000 + 5,000) ÷ 3,000,000 × 100 ≈ 1.33 %.</a:t>
+              <a:t>A region of 150,000 people has 1,200 deaths in a year. Its CDR is 1,200 ÷ 150,000 × 1,000 = 8 per 1,000.</a:t>
             </a:r>
             <a:endParaRPr lang="en-US" sz="4000" dirty="0"/>
           </a:p>
@@ -18109,7 +18013,7 @@
         <p:spPr>
           <a:xfrm>
             <a:off x="0" y="658368"/>
-            <a:ext cx="5120640" cy="5833872"/>
+            <a:ext cx="3840480" cy="5833872"/>
           </a:xfrm>
           <a:prstGeom prst="rect">
             <a:avLst/>
@@ -18124,8 +18028,8 @@
         </p:nvSpPr>
         <p:spPr>
           <a:xfrm>
-            <a:off x="5349240" y="1005840"/>
-            <a:ext cx="6522415" cy="731520"/>
+            <a:off x="4069080" y="1005840"/>
+            <a:ext cx="7802575" cy="731520"/>
           </a:xfrm>
           <a:prstGeom prst="rect">
             <a:avLst/>
@@ -18151,7 +18055,7 @@
                 <a:ea typeface="Times New Roman" pitchFamily="34" charset="-122"/>
                 <a:cs typeface="Times New Roman" pitchFamily="34" charset="-120"/>
               </a:rPr>
-              <a:t>4. Practical Exercises with Solutions (continued)</a:t>
+              <a:t>4. Practical Exercises with Solutions</a:t>
             </a:r>
             <a:endParaRPr lang="en-US" sz="3600" dirty="0"/>
           </a:p>
@@ -18165,8 +18069,8 @@
         </p:nvSpPr>
         <p:spPr>
           <a:xfrm>
-            <a:off x="5349240" y="1783080"/>
-            <a:ext cx="6522415" cy="4663440"/>
+            <a:off x="4069080" y="1783080"/>
+            <a:ext cx="7802575" cy="4663440"/>
           </a:xfrm>
           <a:prstGeom prst="rect">
             <a:avLst/>
@@ -18193,7 +18097,7 @@
                 <a:ea typeface="Times New Roman" pitchFamily="34" charset="-122"/>
                 <a:cs typeface="Times New Roman" pitchFamily="34" charset="-120"/>
               </a:rPr>
-              <a:t>Exercise 4 (doubling time): </a:t>
+              <a:t>Exercise 3 (growth rate): </a:t>
             </a:r>
             <a:pPr algn="l" indent="0" marL="0">
               <a:spcAft>
@@ -18210,7 +18114,7 @@
                 <a:ea typeface="Times New Roman" pitchFamily="34" charset="-122"/>
                 <a:cs typeface="Times New Roman" pitchFamily="34" charset="-120"/>
               </a:rPr>
-              <a:t>A growth rate of 3 % gives 70 ÷ 3 ≈ 23 years.</a:t>
+              <a:t>A country of 3,000,000 people has 120,000 births, 85,000 deaths, 30,000 immigrants and 25,000 emigrants. Its growth rate is (35,000 + 5,000) ÷ 3,000,000 × 100 ≈ 1.33 %.</a:t>
             </a:r>
             <a:endParaRPr lang="en-US" sz="4000" dirty="0"/>
           </a:p>
@@ -18322,7 +18226,7 @@
                 <a:ea typeface="Calibri" pitchFamily="34" charset="-122"/>
                 <a:cs typeface="Calibri" pitchFamily="34" charset="-120"/>
               </a:rPr>
-              <a:t>FORMATIVE EVALUATION</a:t>
+              <a:t>BOARD SUMMARY</a:t>
             </a:r>
             <a:endParaRPr lang="en-US" sz="1400" dirty="0"/>
           </a:p>
@@ -18387,7 +18291,7 @@
                 <a:ea typeface="Times New Roman" pitchFamily="34" charset="-122"/>
                 <a:cs typeface="Times New Roman" pitchFamily="34" charset="-120"/>
               </a:rPr>
-              <a:t>Evaluation 1</a:t>
+              <a:t>4. Practical Exercises with Solutions</a:t>
             </a:r>
             <a:endParaRPr lang="en-US" sz="3600" dirty="0"/>
           </a:p>
@@ -18421,7 +18325,7 @@
               <a:buNone/>
             </a:pPr>
             <a:r>
-              <a:rPr lang="en-US" sz="4000" dirty="0">
+              <a:rPr lang="en-US" sz="4000" b="1" dirty="0">
                 <a:solidFill>
                   <a:srgbClr val="111111"/>
                 </a:solidFill>
@@ -18429,7 +18333,24 @@
                 <a:ea typeface="Times New Roman" pitchFamily="34" charset="-122"/>
                 <a:cs typeface="Times New Roman" pitchFamily="34" charset="-120"/>
               </a:rPr>
-              <a:t>A town of 25,000 people has 1,000 births and 200 deaths. Calculate its CBR, CDR and RNI.</a:t>
+              <a:t>Exercise 4 (doubling time): </a:t>
+            </a:r>
+            <a:pPr algn="l" indent="0" marL="0">
+              <a:spcAft>
+                <a:spcPts val="800"/>
+              </a:spcAft>
+              <a:buNone/>
+            </a:pPr>
+            <a:r>
+              <a:rPr lang="en-US" sz="4000" dirty="0">
+                <a:solidFill>
+                  <a:srgbClr val="111111"/>
+                </a:solidFill>
+                <a:latin typeface="Times New Roman" pitchFamily="34" charset="0"/>
+                <a:ea typeface="Times New Roman" pitchFamily="34" charset="-122"/>
+                <a:cs typeface="Times New Roman" pitchFamily="34" charset="-120"/>
+              </a:rPr>
+              <a:t>A population grows by 3 % a year. It will double in about 70 ÷ 3 ≈ 23 years.</a:t>
             </a:r>
             <a:endParaRPr lang="en-US" sz="4000" dirty="0"/>
           </a:p>
@@ -18825,7 +18746,7 @@
                 <a:ea typeface="Times New Roman" pitchFamily="34" charset="-122"/>
                 <a:cs typeface="Times New Roman" pitchFamily="34" charset="-120"/>
               </a:rPr>
-              <a:t>Expected Answer</a:t>
+              <a:t>Evaluation 1</a:t>
             </a:r>
             <a:endParaRPr lang="en-US" sz="3600" dirty="0"/>
           </a:p>
@@ -18867,7 +18788,7 @@
                 <a:ea typeface="Times New Roman" pitchFamily="34" charset="-122"/>
                 <a:cs typeface="Times New Roman" pitchFamily="34" charset="-120"/>
               </a:rPr>
-              <a:t>CBR = 40 ‰; CDR = 8 ‰; RNI = (40 − 8) ÷ 10 = 3.2 %.</a:t>
+              <a:t>A town of 25,000 people has 1,000 births and 200 deaths. Calculate its CBR, CDR and RNI.</a:t>
             </a:r>
             <a:endParaRPr lang="en-US" sz="4000" dirty="0"/>
           </a:p>
@@ -19044,7 +18965,7 @@
                 <a:ea typeface="Times New Roman" pitchFamily="34" charset="-122"/>
                 <a:cs typeface="Times New Roman" pitchFamily="34" charset="-120"/>
               </a:rPr>
-              <a:t>Evaluation 2</a:t>
+              <a:t>Expected Answer</a:t>
             </a:r>
             <a:endParaRPr lang="en-US" sz="3600" dirty="0"/>
           </a:p>
@@ -19086,7 +19007,7 @@
                 <a:ea typeface="Times New Roman" pitchFamily="34" charset="-122"/>
                 <a:cs typeface="Times New Roman" pitchFamily="34" charset="-120"/>
               </a:rPr>
-              <a:t>Calculate the doubling time of a population growing at 2 % a year.</a:t>
+              <a:t>CBR = 40 ‰; CDR = 8 ‰; RNI = (40 − 8) ÷ 10 = 3.2 %.</a:t>
             </a:r>
             <a:endParaRPr lang="en-US" sz="4000" dirty="0"/>
           </a:p>
@@ -19263,7 +19184,7 @@
                 <a:ea typeface="Times New Roman" pitchFamily="34" charset="-122"/>
                 <a:cs typeface="Times New Roman" pitchFamily="34" charset="-120"/>
               </a:rPr>
-              <a:t>Expected Answer</a:t>
+              <a:t>Evaluation 2</a:t>
             </a:r>
             <a:endParaRPr lang="en-US" sz="3600" dirty="0"/>
           </a:p>
@@ -19305,7 +19226,7 @@
                 <a:ea typeface="Times New Roman" pitchFamily="34" charset="-122"/>
                 <a:cs typeface="Times New Roman" pitchFamily="34" charset="-120"/>
               </a:rPr>
-              <a:t>70 ÷ 2 = 35 years.</a:t>
+              <a:t>Calculate the doubling time of a population growing at 2 % a year.</a:t>
             </a:r>
             <a:endParaRPr lang="en-US" sz="4000" dirty="0"/>
           </a:p>
@@ -19417,7 +19338,7 @@
                 <a:ea typeface="Calibri" pitchFamily="34" charset="-122"/>
                 <a:cs typeface="Calibri" pitchFamily="34" charset="-120"/>
               </a:rPr>
-              <a:t>REMEDIATION</a:t>
+              <a:t>FORMATIVE EVALUATION</a:t>
             </a:r>
             <a:endParaRPr lang="en-US" sz="1400" dirty="0"/>
           </a:p>
@@ -19440,7 +19361,7 @@
         <p:spPr>
           <a:xfrm>
             <a:off x="0" y="658368"/>
-            <a:ext cx="3840480" cy="5833872"/>
+            <a:ext cx="5120640" cy="5833872"/>
           </a:xfrm>
           <a:prstGeom prst="rect">
             <a:avLst/>
@@ -19455,8 +19376,8 @@
         </p:nvSpPr>
         <p:spPr>
           <a:xfrm>
-            <a:off x="4069080" y="1005840"/>
-            <a:ext cx="7802575" cy="731520"/>
+            <a:off x="5349240" y="1005840"/>
+            <a:ext cx="6522415" cy="731520"/>
           </a:xfrm>
           <a:prstGeom prst="rect">
             <a:avLst/>
@@ -19482,7 +19403,7 @@
                 <a:ea typeface="Times New Roman" pitchFamily="34" charset="-122"/>
                 <a:cs typeface="Times New Roman" pitchFamily="34" charset="-120"/>
               </a:rPr>
-              <a:t>Remediation</a:t>
+              <a:t>Expected Answer</a:t>
             </a:r>
             <a:endParaRPr lang="en-US" sz="3600" dirty="0"/>
           </a:p>
@@ -19496,8 +19417,8 @@
         </p:nvSpPr>
         <p:spPr>
           <a:xfrm>
-            <a:off x="4069080" y="1783080"/>
-            <a:ext cx="7802575" cy="4663440"/>
+            <a:off x="5349240" y="1783080"/>
+            <a:ext cx="6522415" cy="4663440"/>
           </a:xfrm>
           <a:prstGeom prst="rect">
             <a:avLst/>
@@ -19516,7 +19437,7 @@
               <a:buNone/>
             </a:pPr>
             <a:r>
-              <a:rPr lang="en-US" sz="4000" b="1" dirty="0">
+              <a:rPr lang="en-US" sz="4000" dirty="0">
                 <a:solidFill>
                   <a:srgbClr val="111111"/>
                 </a:solidFill>
@@ -19524,73 +19445,7 @@
                 <a:ea typeface="Times New Roman" pitchFamily="34" charset="-122"/>
                 <a:cs typeface="Times New Roman" pitchFamily="34" charset="-120"/>
               </a:rPr>
-              <a:t>Fill in the blanks:</a:t>
-            </a:r>
-            <a:endParaRPr lang="en-US" sz="4000" dirty="0"/>
-          </a:p>
-          <a:p>
-            <a:pPr algn="l" marL="342900" indent="-342900">
-              <a:spcAft>
-                <a:spcPts val="800"/>
-              </a:spcAft>
-              <a:buSzPct val="100000"/>
-              <a:buFont typeface="+mj-lt"/>
-              <a:buAutoNum type="arabicPeriod" startAt="1"/>
-            </a:pPr>
-            <a:r>
-              <a:rPr lang="en-US" sz="4000" dirty="0">
-                <a:solidFill>
-                  <a:srgbClr val="111111"/>
-                </a:solidFill>
-                <a:latin typeface="Times New Roman" pitchFamily="34" charset="0"/>
-                <a:ea typeface="Times New Roman" pitchFamily="34" charset="-122"/>
-                <a:cs typeface="Times New Roman" pitchFamily="34" charset="-120"/>
-              </a:rPr>
-              <a:t>The CBR is expressed per ______ people.</a:t>
-            </a:r>
-            <a:endParaRPr lang="en-US" sz="4000" dirty="0"/>
-          </a:p>
-          <a:p>
-            <a:pPr algn="l" marL="342900" indent="-342900">
-              <a:spcAft>
-                <a:spcPts val="800"/>
-              </a:spcAft>
-              <a:buSzPct val="100000"/>
-              <a:buFont typeface="+mj-lt"/>
-              <a:buAutoNum type="arabicPeriod" startAt="1"/>
-            </a:pPr>
-            <a:r>
-              <a:rPr lang="en-US" sz="4000" dirty="0">
-                <a:solidFill>
-                  <a:srgbClr val="111111"/>
-                </a:solidFill>
-                <a:latin typeface="Times New Roman" pitchFamily="34" charset="0"/>
-                <a:ea typeface="Times New Roman" pitchFamily="34" charset="-122"/>
-                <a:cs typeface="Times New Roman" pitchFamily="34" charset="-120"/>
-              </a:rPr>
-              <a:t>RNI (%) = (CBR − CDR) ÷ ______.</a:t>
-            </a:r>
-            <a:endParaRPr lang="en-US" sz="4000" dirty="0"/>
-          </a:p>
-          <a:p>
-            <a:pPr algn="l" marL="342900" indent="-342900">
-              <a:spcAft>
-                <a:spcPts val="800"/>
-              </a:spcAft>
-              <a:buSzPct val="100000"/>
-              <a:buFont typeface="+mj-lt"/>
-              <a:buAutoNum type="arabicPeriod" startAt="1"/>
-            </a:pPr>
-            <a:r>
-              <a:rPr lang="en-US" sz="4000" dirty="0">
-                <a:solidFill>
-                  <a:srgbClr val="111111"/>
-                </a:solidFill>
-                <a:latin typeface="Times New Roman" pitchFamily="34" charset="0"/>
-                <a:ea typeface="Times New Roman" pitchFamily="34" charset="-122"/>
-                <a:cs typeface="Times New Roman" pitchFamily="34" charset="-120"/>
-              </a:rPr>
-              <a:t>Doubling time ≈ ______ ÷ growth rate.</a:t>
+              <a:t>70 ÷ 2 = 35 years.</a:t>
             </a:r>
             <a:endParaRPr lang="en-US" sz="4000" dirty="0"/>
           </a:p>
@@ -19702,7 +19557,7 @@
                 <a:ea typeface="Calibri" pitchFamily="34" charset="-122"/>
                 <a:cs typeface="Calibri" pitchFamily="34" charset="-120"/>
               </a:rPr>
-              <a:t>HOMEWORK</a:t>
+              <a:t>REMEDIATION</a:t>
             </a:r>
             <a:endParaRPr lang="en-US" sz="1400" dirty="0"/>
           </a:p>
@@ -19725,7 +19580,7 @@
         <p:spPr>
           <a:xfrm>
             <a:off x="0" y="658368"/>
-            <a:ext cx="5120640" cy="5833872"/>
+            <a:ext cx="3840480" cy="5833872"/>
           </a:xfrm>
           <a:prstGeom prst="rect">
             <a:avLst/>
@@ -19740,8 +19595,8 @@
         </p:nvSpPr>
         <p:spPr>
           <a:xfrm>
-            <a:off x="5349240" y="1005840"/>
-            <a:ext cx="6522415" cy="731520"/>
+            <a:off x="4069080" y="1005840"/>
+            <a:ext cx="7802575" cy="731520"/>
           </a:xfrm>
           <a:prstGeom prst="rect">
             <a:avLst/>
@@ -19767,7 +19622,7 @@
                 <a:ea typeface="Times New Roman" pitchFamily="34" charset="-122"/>
                 <a:cs typeface="Times New Roman" pitchFamily="34" charset="-120"/>
               </a:rPr>
-              <a:t>Homework</a:t>
+              <a:t>Remediation</a:t>
             </a:r>
             <a:endParaRPr lang="en-US" sz="3600" dirty="0"/>
           </a:p>
@@ -19781,8 +19636,8 @@
         </p:nvSpPr>
         <p:spPr>
           <a:xfrm>
-            <a:off x="5349240" y="1783080"/>
-            <a:ext cx="6522415" cy="4663440"/>
+            <a:off x="4069080" y="1783080"/>
+            <a:ext cx="7802575" cy="4663440"/>
           </a:xfrm>
           <a:prstGeom prst="rect">
             <a:avLst/>
@@ -19801,7 +19656,7 @@
               <a:buNone/>
             </a:pPr>
             <a:r>
-              <a:rPr lang="en-US" sz="4000" dirty="0">
+              <a:rPr lang="en-US" sz="4000" b="1" dirty="0">
                 <a:solidFill>
                   <a:srgbClr val="111111"/>
                 </a:solidFill>
@@ -19809,7 +19664,73 @@
                 <a:ea typeface="Times New Roman" pitchFamily="34" charset="-122"/>
                 <a:cs typeface="Times New Roman" pitchFamily="34" charset="-120"/>
               </a:rPr>
-              <a:t>Name two non-demographic factors of population growth.</a:t>
+              <a:t>Fill in the blanks:</a:t>
+            </a:r>
+            <a:endParaRPr lang="en-US" sz="4000" dirty="0"/>
+          </a:p>
+          <a:p>
+            <a:pPr algn="l" marL="342900" indent="-342900">
+              <a:spcAft>
+                <a:spcPts val="800"/>
+              </a:spcAft>
+              <a:buSzPct val="100000"/>
+              <a:buFont typeface="+mj-lt"/>
+              <a:buAutoNum type="arabicPeriod" startAt="1"/>
+            </a:pPr>
+            <a:r>
+              <a:rPr lang="en-US" sz="4000" dirty="0">
+                <a:solidFill>
+                  <a:srgbClr val="111111"/>
+                </a:solidFill>
+                <a:latin typeface="Times New Roman" pitchFamily="34" charset="0"/>
+                <a:ea typeface="Times New Roman" pitchFamily="34" charset="-122"/>
+                <a:cs typeface="Times New Roman" pitchFamily="34" charset="-120"/>
+              </a:rPr>
+              <a:t>The CBR is expressed per ______ people.</a:t>
+            </a:r>
+            <a:endParaRPr lang="en-US" sz="4000" dirty="0"/>
+          </a:p>
+          <a:p>
+            <a:pPr algn="l" marL="342900" indent="-342900">
+              <a:spcAft>
+                <a:spcPts val="800"/>
+              </a:spcAft>
+              <a:buSzPct val="100000"/>
+              <a:buFont typeface="+mj-lt"/>
+              <a:buAutoNum type="arabicPeriod" startAt="1"/>
+            </a:pPr>
+            <a:r>
+              <a:rPr lang="en-US" sz="4000" dirty="0">
+                <a:solidFill>
+                  <a:srgbClr val="111111"/>
+                </a:solidFill>
+                <a:latin typeface="Times New Roman" pitchFamily="34" charset="0"/>
+                <a:ea typeface="Times New Roman" pitchFamily="34" charset="-122"/>
+                <a:cs typeface="Times New Roman" pitchFamily="34" charset="-120"/>
+              </a:rPr>
+              <a:t>RNI (%) = (CBR − CDR) ÷ ______.</a:t>
+            </a:r>
+            <a:endParaRPr lang="en-US" sz="4000" dirty="0"/>
+          </a:p>
+          <a:p>
+            <a:pPr algn="l" marL="342900" indent="-342900">
+              <a:spcAft>
+                <a:spcPts val="800"/>
+              </a:spcAft>
+              <a:buSzPct val="100000"/>
+              <a:buFont typeface="+mj-lt"/>
+              <a:buAutoNum type="arabicPeriod" startAt="1"/>
+            </a:pPr>
+            <a:r>
+              <a:rPr lang="en-US" sz="4000" dirty="0">
+                <a:solidFill>
+                  <a:srgbClr val="111111"/>
+                </a:solidFill>
+                <a:latin typeface="Times New Roman" pitchFamily="34" charset="0"/>
+                <a:ea typeface="Times New Roman" pitchFamily="34" charset="-122"/>
+                <a:cs typeface="Times New Roman" pitchFamily="34" charset="-120"/>
+              </a:rPr>
+              <a:t>Doubling time ≈ ______ ÷ growth rate.</a:t>
             </a:r>
             <a:endParaRPr lang="en-US" sz="4000" dirty="0"/>
           </a:p>
@@ -19921,7 +19842,7 @@
                 <a:ea typeface="Calibri" pitchFamily="34" charset="-122"/>
                 <a:cs typeface="Calibri" pitchFamily="34" charset="-120"/>
               </a:rPr>
-              <a:t>NEXT LESSON</a:t>
+              <a:t>HOMEWORK</a:t>
             </a:r>
             <a:endParaRPr lang="en-US" sz="1400" dirty="0"/>
           </a:p>
@@ -19986,7 +19907,7 @@
                 <a:ea typeface="Times New Roman" pitchFamily="34" charset="-122"/>
                 <a:cs typeface="Times New Roman" pitchFamily="34" charset="-120"/>
               </a:rPr>
-              <a:t>Next Lesson</a:t>
+              <a:t>Homework</a:t>
             </a:r>
             <a:endParaRPr lang="en-US" sz="3600" dirty="0"/>
           </a:p>
@@ -20010,17 +19931,17 @@
           <a:ln/>
         </p:spPr>
         <p:txBody>
-          <a:bodyPr wrap="square" lIns="0" tIns="0" rIns="0" bIns="0" rtlCol="0" anchor="ctr"/>
-          <a:lstStyle/>
-          <a:p>
-            <a:pPr algn="ctr" indent="0" marL="0">
+          <a:bodyPr wrap="square" lIns="0" tIns="0" rIns="0" bIns="0" rtlCol="0" anchor="t"/>
+          <a:lstStyle/>
+          <a:p>
+            <a:pPr algn="l" indent="0" marL="0">
               <a:spcAft>
                 <a:spcPts val="800"/>
               </a:spcAft>
               <a:buNone/>
             </a:pPr>
             <a:r>
-              <a:rPr lang="en-US" sz="4000" b="1" dirty="0">
+              <a:rPr lang="en-US" sz="4000" dirty="0">
                 <a:solidFill>
                   <a:srgbClr val="111111"/>
                 </a:solidFill>
@@ -20028,27 +19949,7 @@
                 <a:ea typeface="Times New Roman" pitchFamily="34" charset="-122"/>
                 <a:cs typeface="Times New Roman" pitchFamily="34" charset="-120"/>
               </a:rPr>
-              <a:t>Our next lesson will be on:</a:t>
-            </a:r>
-            <a:endParaRPr lang="en-US" sz="4000" dirty="0"/>
-          </a:p>
-          <a:p>
-            <a:pPr algn="ctr" indent="0" marL="0">
-              <a:spcAft>
-                <a:spcPts val="800"/>
-              </a:spcAft>
-              <a:buNone/>
-            </a:pPr>
-            <a:r>
-              <a:rPr lang="en-US" sz="4000" b="1" dirty="0">
-                <a:solidFill>
-                  <a:srgbClr val="990011"/>
-                </a:solidFill>
-                <a:latin typeface="Times New Roman" pitchFamily="34" charset="0"/>
-                <a:ea typeface="Times New Roman" pitchFamily="34" charset="-122"/>
-                <a:cs typeface="Times New Roman" pitchFamily="34" charset="-120"/>
-              </a:rPr>
-              <a:t>Lesson 10: Factors of Population Growth</a:t>
+              <a:t>Name two non-demographic factors of population growth.</a:t>
             </a:r>
             <a:endParaRPr lang="en-US" sz="4000" dirty="0"/>
           </a:p>
@@ -20160,6 +20061,245 @@
                 <a:ea typeface="Calibri" pitchFamily="34" charset="-122"/>
                 <a:cs typeface="Calibri" pitchFamily="34" charset="-120"/>
               </a:rPr>
+              <a:t>NEXT LESSON</a:t>
+            </a:r>
+            <a:endParaRPr lang="en-US" sz="1400" dirty="0"/>
+          </a:p>
+        </p:txBody>
+      </p:sp>
+      <p:pic>
+        <p:nvPicPr>
+          <p:cNvPr id="3" name="Image 0" descr="/home/claude/f4/img/minesec_sheet.png">    </p:cNvPr>
+          <p:cNvPicPr>
+            <a:picLocks noChangeAspect="1"/>
+          </p:cNvPicPr>
+          <p:nvPr/>
+        </p:nvPicPr>
+        <p:blipFill>
+          <a:blip r:embed="rId1"/>
+          <a:stretch>
+            <a:fillRect/>
+          </a:stretch>
+        </p:blipFill>
+        <p:spPr>
+          <a:xfrm>
+            <a:off x="0" y="658368"/>
+            <a:ext cx="5120640" cy="5833872"/>
+          </a:xfrm>
+          <a:prstGeom prst="rect">
+            <a:avLst/>
+          </a:prstGeom>
+        </p:spPr>
+      </p:pic>
+      <p:sp>
+        <p:nvSpPr>
+          <p:cNvPr id="4" name="Text 1"/>
+          <p:cNvSpPr/>
+          <p:nvPr/>
+        </p:nvSpPr>
+        <p:spPr>
+          <a:xfrm>
+            <a:off x="5349240" y="1005840"/>
+            <a:ext cx="6522415" cy="731520"/>
+          </a:xfrm>
+          <a:prstGeom prst="rect">
+            <a:avLst/>
+          </a:prstGeom>
+          <a:noFill/>
+          <a:ln/>
+        </p:spPr>
+        <p:txBody>
+          <a:bodyPr wrap="square" lIns="0" tIns="0" rIns="0" bIns="0" rtlCol="0" anchor="ctr">
+            <a:normAutofit/>
+          </a:bodyPr>
+          <a:lstStyle/>
+          <a:p>
+            <a:pPr algn="ctr" indent="0" marL="0">
+              <a:buNone/>
+            </a:pPr>
+            <a:r>
+              <a:rPr lang="en-US" sz="3600" b="1" dirty="0">
+                <a:solidFill>
+                  <a:srgbClr val="990011"/>
+                </a:solidFill>
+                <a:latin typeface="Times New Roman" pitchFamily="34" charset="0"/>
+                <a:ea typeface="Times New Roman" pitchFamily="34" charset="-122"/>
+                <a:cs typeface="Times New Roman" pitchFamily="34" charset="-120"/>
+              </a:rPr>
+              <a:t>Next Lesson</a:t>
+            </a:r>
+            <a:endParaRPr lang="en-US" sz="3600" dirty="0"/>
+          </a:p>
+        </p:txBody>
+      </p:sp>
+      <p:sp>
+        <p:nvSpPr>
+          <p:cNvPr id="5" name="Text 2"/>
+          <p:cNvSpPr/>
+          <p:nvPr/>
+        </p:nvSpPr>
+        <p:spPr>
+          <a:xfrm>
+            <a:off x="5349240" y="1783080"/>
+            <a:ext cx="6522415" cy="4663440"/>
+          </a:xfrm>
+          <a:prstGeom prst="rect">
+            <a:avLst/>
+          </a:prstGeom>
+          <a:noFill/>
+          <a:ln/>
+        </p:spPr>
+        <p:txBody>
+          <a:bodyPr wrap="square" lIns="0" tIns="0" rIns="0" bIns="0" rtlCol="0" anchor="ctr"/>
+          <a:lstStyle/>
+          <a:p>
+            <a:pPr algn="ctr" indent="0" marL="0">
+              <a:spcAft>
+                <a:spcPts val="800"/>
+              </a:spcAft>
+              <a:buNone/>
+            </a:pPr>
+            <a:r>
+              <a:rPr lang="en-US" sz="4000" b="1" dirty="0">
+                <a:solidFill>
+                  <a:srgbClr val="111111"/>
+                </a:solidFill>
+                <a:latin typeface="Times New Roman" pitchFamily="34" charset="0"/>
+                <a:ea typeface="Times New Roman" pitchFamily="34" charset="-122"/>
+                <a:cs typeface="Times New Roman" pitchFamily="34" charset="-120"/>
+              </a:rPr>
+              <a:t>Our next lesson will be on:</a:t>
+            </a:r>
+            <a:endParaRPr lang="en-US" sz="4000" dirty="0"/>
+          </a:p>
+          <a:p>
+            <a:pPr algn="ctr" indent="0" marL="0">
+              <a:spcAft>
+                <a:spcPts val="800"/>
+              </a:spcAft>
+              <a:buNone/>
+            </a:pPr>
+            <a:r>
+              <a:rPr lang="en-US" sz="4000" b="1" dirty="0">
+                <a:solidFill>
+                  <a:srgbClr val="990011"/>
+                </a:solidFill>
+                <a:latin typeface="Times New Roman" pitchFamily="34" charset="0"/>
+                <a:ea typeface="Times New Roman" pitchFamily="34" charset="-122"/>
+                <a:cs typeface="Times New Roman" pitchFamily="34" charset="-120"/>
+              </a:rPr>
+              <a:t>Lesson 10: Factors of Population Growth</a:t>
+            </a:r>
+            <a:endParaRPr lang="en-US" sz="4000" dirty="0"/>
+          </a:p>
+        </p:txBody>
+      </p:sp>
+      <p:sp>
+        <p:nvSpPr>
+          <p:cNvPr id="25" name="Slide Number Placeholder 0"/>
+          <p:cNvSpPr>
+            <a:spLocks noGrp="1"/>
+          </p:cNvSpPr>
+          <p:nvPr>
+            <p:ph type="sldNum" sz="quarter" idx="4294967295"/>
+          </p:nvPr>
+        </p:nvSpPr>
+        <p:spPr>
+          <a:xfrm>
+            <a:off x="27432" y="91440"/>
+            <a:ext cx="585216" cy="475488"/>
+          </a:xfrm>
+          <a:prstGeom prst="rect">
+            <a:avLst/>
+          </a:prstGeom>
+          <a:extLst>
+            <a:ext uri="{C572A759-6A51-4108-AA02-DFA0A04FC94B}">
+              <ma14:wrappingTextBoxFlag xmlns:ma14="http://schemas.microsoft.com/office/mac/drawingml/2011/main" val="0"/>
+            </a:ext>
+          </a:extLst>
+        </p:spPr>
+        <p:txBody>
+          <a:bodyPr/>
+          <a:lstStyle>
+            <a:lvl1pPr>
+              <a:defRPr sz="2000">
+                <a:solidFill>
+                  <a:srgbClr val="FFFFFF"/>
+                </a:solidFill>
+                <a:latin typeface="Calibri"/>
+                <a:ea typeface="Calibri"/>
+                <a:cs typeface="Calibri"/>
+              </a:defRPr>
+            </a:lvl1pPr>
+          </a:lstStyle>
+          <a:p>
+            <a:pPr algn="ctr"/>
+            <a:fld id="{F7021451-1387-4CA6-816F-3879F97B5CBC}" type="slidenum">
+              <a:rPr b="1" lang="en-US"/>
+              <a:t>56</a:t>
+            </a:fld>
+            <a:endParaRPr lang="en-US"/>
+          </a:p>
+        </p:txBody>
+      </p:sp>
+    </p:spTree>
+  </p:cSld>
+  <p:clrMapOvr>
+    <a:masterClrMapping/>
+  </p:clrMapOvr>
+</p:sld>
+</file>
+
+<file path=ppt/slides/slide57.xml><?xml version="1.0" encoding="utf-8"?>
+<p:sld xmlns:a="http://schemas.openxmlformats.org/drawingml/2006/main" xmlns:r="http://schemas.openxmlformats.org/officeDocument/2006/relationships" xmlns:p="http://schemas.openxmlformats.org/presentationml/2006/main">
+  <p:cSld name="Slide 57">
+    <p:spTree>
+      <p:nvGrpSpPr>
+        <p:cNvPr id="1" name=""/>
+        <p:cNvGrpSpPr/>
+        <p:nvPr/>
+      </p:nvGrpSpPr>
+      <p:grpSpPr>
+        <a:xfrm>
+          <a:off x="0" y="0"/>
+          <a:ext cx="0" cy="0"/>
+          <a:chOff x="0" y="0"/>
+          <a:chExt cx="0" cy="0"/>
+        </a:xfrm>
+      </p:grpSpPr>
+      <p:sp>
+        <p:nvSpPr>
+          <p:cNvPr id="2" name="Text 0"/>
+          <p:cNvSpPr/>
+          <p:nvPr/>
+        </p:nvSpPr>
+        <p:spPr>
+          <a:xfrm>
+            <a:off x="457200" y="713232"/>
+            <a:ext cx="11368735" cy="274320"/>
+          </a:xfrm>
+          <a:prstGeom prst="rect">
+            <a:avLst/>
+          </a:prstGeom>
+          <a:noFill/>
+          <a:ln/>
+        </p:spPr>
+        <p:txBody>
+          <a:bodyPr wrap="square" lIns="0" tIns="0" rIns="0" bIns="0" rtlCol="0" anchor="ctr"/>
+          <a:lstStyle/>
+          <a:p>
+            <a:pPr algn="r" indent="0" marL="0">
+              <a:buNone/>
+            </a:pPr>
+            <a:r>
+              <a:rPr lang="en-US" sz="1400" b="1" dirty="0">
+                <a:solidFill>
+                  <a:srgbClr val="1C3F6E"/>
+                </a:solidFill>
+                <a:latin typeface="Calibri" pitchFamily="34" charset="0"/>
+                <a:ea typeface="Calibri" pitchFamily="34" charset="-122"/>
+                <a:cs typeface="Calibri" pitchFamily="34" charset="-120"/>
+              </a:rPr>
               <a:t>BILINGUAL GAME</a:t>
             </a:r>
             <a:endParaRPr lang="en-US" sz="1400" dirty="0"/>
@@ -20207,7 +20347,7 @@
       </p:sp>
       <p:graphicFrame>
         <p:nvGraphicFramePr>
-          <p:cNvPr id="57" name="Table 0"/>
+          <p:cNvPr id="58" name="Table 0"/>
           <p:cNvGraphicFramePr>
             <a:graphicFrameLocks noGrp="1"/>
           </p:cNvGraphicFramePr>
@@ -21243,7 +21383,7 @@
             <a:pPr algn="ctr"/>
             <a:fld id="{F7021451-1387-4CA6-816F-3879F97B5CBC}" type="slidenum">
               <a:rPr b="1" lang="en-US"/>
-              <a:t>56</a:t>
+              <a:t>57</a:t>
             </a:fld>
             <a:endParaRPr lang="en-US"/>
           </a:p>
@@ -21257,9 +21397,9 @@
 </p:sld>
 </file>
 
-<file path=ppt/slides/slide57.xml><?xml version="1.0" encoding="utf-8"?>
+<file path=ppt/slides/slide58.xml><?xml version="1.0" encoding="utf-8"?>
 <p:sld xmlns:a="http://schemas.openxmlformats.org/drawingml/2006/main" xmlns:r="http://schemas.openxmlformats.org/officeDocument/2006/relationships" xmlns:p="http://schemas.openxmlformats.org/presentationml/2006/main">
-  <p:cSld name="Slide 57">
+  <p:cSld name="Slide 58">
     <p:spTree>
       <p:nvGrpSpPr>
         <p:cNvPr id="1" name=""/>
@@ -21354,7 +21494,7 @@
       </p:sp>
       <p:graphicFrame>
         <p:nvGraphicFramePr>
-          <p:cNvPr id="58" name="Table 0"/>
+          <p:cNvPr id="59" name="Table 0"/>
           <p:cNvGraphicFramePr>
             <a:graphicFrameLocks noGrp="1"/>
           </p:cNvGraphicFramePr>
@@ -21976,7 +22116,7 @@
             <a:pPr algn="ctr"/>
             <a:fld id="{F7021451-1387-4CA6-816F-3879F97B5CBC}" type="slidenum">
               <a:rPr b="1" lang="en-US"/>
-              <a:t>57</a:t>
+              <a:t>58</a:t>
             </a:fld>
             <a:endParaRPr lang="en-US"/>
           </a:p>
@@ -21990,9 +22130,9 @@
 </p:sld>
 </file>
 
-<file path=ppt/slides/slide58.xml><?xml version="1.0" encoding="utf-8"?>
+<file path=ppt/slides/slide59.xml><?xml version="1.0" encoding="utf-8"?>
 <p:sld xmlns:a="http://schemas.openxmlformats.org/drawingml/2006/main" xmlns:r="http://schemas.openxmlformats.org/officeDocument/2006/relationships" xmlns:p="http://schemas.openxmlformats.org/presentationml/2006/main">
-  <p:cSld name="Slide 58">
+  <p:cSld name="Slide 59">
     <p:spTree>
       <p:nvGrpSpPr>
         <p:cNvPr id="1" name=""/>
@@ -22087,7 +22227,7 @@
       </p:sp>
       <p:graphicFrame>
         <p:nvGraphicFramePr>
-          <p:cNvPr id="59" name="Table 0"/>
+          <p:cNvPr id="60" name="Table 0"/>
           <p:cNvGraphicFramePr>
             <a:graphicFrameLocks noGrp="1"/>
           </p:cNvGraphicFramePr>
@@ -22847,331 +22987,6 @@
             <a:pPr algn="ctr"/>
             <a:fld id="{F7021451-1387-4CA6-816F-3879F97B5CBC}" type="slidenum">
               <a:rPr b="1" lang="en-US"/>
-              <a:t>58</a:t>
-            </a:fld>
-            <a:endParaRPr lang="en-US"/>
-          </a:p>
-        </p:txBody>
-      </p:sp>
-    </p:spTree>
-  </p:cSld>
-  <p:clrMapOvr>
-    <a:masterClrMapping/>
-  </p:clrMapOvr>
-</p:sld>
-</file>
-
-<file path=ppt/slides/slide59.xml><?xml version="1.0" encoding="utf-8"?>
-<p:sld xmlns:a="http://schemas.openxmlformats.org/drawingml/2006/main" xmlns:r="http://schemas.openxmlformats.org/officeDocument/2006/relationships" xmlns:p="http://schemas.openxmlformats.org/presentationml/2006/main">
-  <p:cSld name="Slide 59">
-    <p:spTree>
-      <p:nvGrpSpPr>
-        <p:cNvPr id="1" name=""/>
-        <p:cNvGrpSpPr/>
-        <p:nvPr/>
-      </p:nvGrpSpPr>
-      <p:grpSpPr>
-        <a:xfrm>
-          <a:off x="0" y="0"/>
-          <a:ext cx="0" cy="0"/>
-          <a:chOff x="0" y="0"/>
-          <a:chExt cx="0" cy="0"/>
-        </a:xfrm>
-      </p:grpSpPr>
-      <p:sp>
-        <p:nvSpPr>
-          <p:cNvPr id="2" name="Text 0"/>
-          <p:cNvSpPr/>
-          <p:nvPr/>
-        </p:nvSpPr>
-        <p:spPr>
-          <a:xfrm>
-            <a:off x="457200" y="713232"/>
-            <a:ext cx="11368735" cy="274320"/>
-          </a:xfrm>
-          <a:prstGeom prst="rect">
-            <a:avLst/>
-          </a:prstGeom>
-          <a:noFill/>
-          <a:ln/>
-        </p:spPr>
-        <p:txBody>
-          <a:bodyPr wrap="square" lIns="0" tIns="0" rIns="0" bIns="0" rtlCol="0" anchor="ctr"/>
-          <a:lstStyle/>
-          <a:p>
-            <a:pPr algn="r" indent="0" marL="0">
-              <a:buNone/>
-            </a:pPr>
-            <a:r>
-              <a:rPr lang="en-US" sz="1400" b="1" dirty="0">
-                <a:solidFill>
-                  <a:srgbClr val="1C3F6E"/>
-                </a:solidFill>
-                <a:latin typeface="Calibri" pitchFamily="34" charset="0"/>
-                <a:ea typeface="Calibri" pitchFamily="34" charset="-122"/>
-                <a:cs typeface="Calibri" pitchFamily="34" charset="-120"/>
-              </a:rPr>
-              <a:t>TEACHER'S NOTE</a:t>
-            </a:r>
-            <a:endParaRPr lang="en-US" sz="1400" dirty="0"/>
-          </a:p>
-        </p:txBody>
-      </p:sp>
-      <p:pic>
-        <p:nvPicPr>
-          <p:cNvPr id="3" name="Image 0" descr="/home/claude/f4/img/minesec_sheet.png">    </p:cNvPr>
-          <p:cNvPicPr>
-            <a:picLocks noChangeAspect="1"/>
-          </p:cNvPicPr>
-          <p:nvPr/>
-        </p:nvPicPr>
-        <p:blipFill>
-          <a:blip r:embed="rId1"/>
-          <a:stretch>
-            <a:fillRect/>
-          </a:stretch>
-        </p:blipFill>
-        <p:spPr>
-          <a:xfrm>
-            <a:off x="0" y="658368"/>
-            <a:ext cx="3840480" cy="5833872"/>
-          </a:xfrm>
-          <a:prstGeom prst="rect">
-            <a:avLst/>
-          </a:prstGeom>
-        </p:spPr>
-      </p:pic>
-      <p:sp>
-        <p:nvSpPr>
-          <p:cNvPr id="4" name="Text 1"/>
-          <p:cNvSpPr/>
-          <p:nvPr/>
-        </p:nvSpPr>
-        <p:spPr>
-          <a:xfrm>
-            <a:off x="4069080" y="1005840"/>
-            <a:ext cx="7802575" cy="731520"/>
-          </a:xfrm>
-          <a:prstGeom prst="rect">
-            <a:avLst/>
-          </a:prstGeom>
-          <a:noFill/>
-          <a:ln/>
-        </p:spPr>
-        <p:txBody>
-          <a:bodyPr wrap="square" lIns="0" tIns="0" rIns="0" bIns="0" rtlCol="0" anchor="ctr">
-            <a:normAutofit/>
-          </a:bodyPr>
-          <a:lstStyle/>
-          <a:p>
-            <a:pPr algn="ctr" indent="0" marL="0">
-              <a:buNone/>
-            </a:pPr>
-            <a:r>
-              <a:rPr lang="en-US" sz="3600" b="1" dirty="0">
-                <a:solidFill>
-                  <a:srgbClr val="990011"/>
-                </a:solidFill>
-                <a:latin typeface="Times New Roman" pitchFamily="34" charset="0"/>
-                <a:ea typeface="Times New Roman" pitchFamily="34" charset="-122"/>
-                <a:cs typeface="Times New Roman" pitchFamily="34" charset="-120"/>
-              </a:rPr>
-              <a:t>Teacher's Note</a:t>
-            </a:r>
-            <a:endParaRPr lang="en-US" sz="3600" dirty="0"/>
-          </a:p>
-        </p:txBody>
-      </p:sp>
-      <p:sp>
-        <p:nvSpPr>
-          <p:cNvPr id="5" name="Text 2"/>
-          <p:cNvSpPr/>
-          <p:nvPr/>
-        </p:nvSpPr>
-        <p:spPr>
-          <a:xfrm>
-            <a:off x="4069080" y="1783080"/>
-            <a:ext cx="7802575" cy="4663440"/>
-          </a:xfrm>
-          <a:prstGeom prst="rect">
-            <a:avLst/>
-          </a:prstGeom>
-          <a:noFill/>
-          <a:ln/>
-        </p:spPr>
-        <p:txBody>
-          <a:bodyPr wrap="square" lIns="0" tIns="0" rIns="0" bIns="0" rtlCol="0" anchor="t"/>
-          <a:lstStyle/>
-          <a:p>
-            <a:pPr algn="l" marL="342900" indent="-342900">
-              <a:spcAft>
-                <a:spcPts val="800"/>
-              </a:spcAft>
-              <a:buSzPct val="100000"/>
-              <a:buChar char="•"/>
-            </a:pPr>
-            <a:r>
-              <a:rPr lang="en-US" sz="2000" dirty="0">
-                <a:solidFill>
-                  <a:srgbClr val="111111"/>
-                </a:solidFill>
-                <a:latin typeface="Calibri" pitchFamily="34" charset="0"/>
-                <a:ea typeface="Calibri" pitchFamily="34" charset="-122"/>
-                <a:cs typeface="Calibri" pitchFamily="34" charset="-120"/>
-              </a:rPr>
-              <a:t>Timing: Homework correction, plan, objectives 8 min | Recall, situation, action 10 min | 5 activities 30 min | Board summary (copying) 30 min | Evaluation, remediation 10 min | Homework, next lesson 5 min | Logbook 7 min</a:t>
-            </a:r>
-            <a:endParaRPr lang="en-US" sz="2000" dirty="0"/>
-          </a:p>
-          <a:p>
-            <a:pPr algn="l" marL="342900" indent="-342900">
-              <a:spcAft>
-                <a:spcPts val="800"/>
-              </a:spcAft>
-              <a:buSzPct val="100000"/>
-              <a:buChar char="•"/>
-            </a:pPr>
-            <a:r>
-              <a:rPr lang="en-US" sz="2000" dirty="0">
-                <a:solidFill>
-                  <a:srgbClr val="111111"/>
-                </a:solidFill>
-                <a:latin typeface="Calibri" pitchFamily="34" charset="0"/>
-                <a:ea typeface="Calibri" pitchFamily="34" charset="-122"/>
-                <a:cs typeface="Calibri" pitchFamily="34" charset="-120"/>
-              </a:rPr>
-              <a:t>Without the projector (Activity 1): write the formula on the board.</a:t>
-            </a:r>
-            <a:endParaRPr lang="en-US" sz="2000" dirty="0"/>
-          </a:p>
-          <a:p>
-            <a:pPr algn="l" marL="342900" indent="-342900">
-              <a:spcAft>
-                <a:spcPts val="800"/>
-              </a:spcAft>
-              <a:buSzPct val="100000"/>
-              <a:buChar char="•"/>
-            </a:pPr>
-            <a:r>
-              <a:rPr lang="en-US" sz="2000" dirty="0">
-                <a:solidFill>
-                  <a:srgbClr val="111111"/>
-                </a:solidFill>
-                <a:latin typeface="Calibri" pitchFamily="34" charset="0"/>
-                <a:ea typeface="Calibri" pitchFamily="34" charset="-122"/>
-                <a:cs typeface="Calibri" pitchFamily="34" charset="-120"/>
-              </a:rPr>
-              <a:t>Without the projector (Activity 2): calculate on the board.</a:t>
-            </a:r>
-            <a:endParaRPr lang="en-US" sz="2000" dirty="0"/>
-          </a:p>
-          <a:p>
-            <a:pPr algn="l" marL="342900" indent="-342900">
-              <a:spcAft>
-                <a:spcPts val="800"/>
-              </a:spcAft>
-              <a:buSzPct val="100000"/>
-              <a:buChar char="•"/>
-            </a:pPr>
-            <a:r>
-              <a:rPr lang="en-US" sz="2000" dirty="0">
-                <a:solidFill>
-                  <a:srgbClr val="111111"/>
-                </a:solidFill>
-                <a:latin typeface="Calibri" pitchFamily="34" charset="0"/>
-                <a:ea typeface="Calibri" pitchFamily="34" charset="-122"/>
-                <a:cs typeface="Calibri" pitchFamily="34" charset="-120"/>
-              </a:rPr>
-              <a:t>Without the projector (Activity 3): calculate with the class.</a:t>
-            </a:r>
-            <a:endParaRPr lang="en-US" sz="2000" dirty="0"/>
-          </a:p>
-          <a:p>
-            <a:pPr algn="l" marL="342900" indent="-342900">
-              <a:spcAft>
-                <a:spcPts val="800"/>
-              </a:spcAft>
-              <a:buSzPct val="100000"/>
-              <a:buChar char="•"/>
-            </a:pPr>
-            <a:r>
-              <a:rPr lang="en-US" sz="2000" dirty="0">
-                <a:solidFill>
-                  <a:srgbClr val="111111"/>
-                </a:solidFill>
-                <a:latin typeface="Calibri" pitchFamily="34" charset="0"/>
-                <a:ea typeface="Calibri" pitchFamily="34" charset="-122"/>
-                <a:cs typeface="Calibri" pitchFamily="34" charset="-120"/>
-              </a:rPr>
-              <a:t>Without the projector (Activity 4): draw a rising curve.</a:t>
-            </a:r>
-            <a:endParaRPr lang="en-US" sz="2000" dirty="0"/>
-          </a:p>
-          <a:p>
-            <a:pPr algn="l" marL="342900" indent="-342900">
-              <a:spcAft>
-                <a:spcPts val="800"/>
-              </a:spcAft>
-              <a:buSzPct val="100000"/>
-              <a:buChar char="•"/>
-            </a:pPr>
-            <a:r>
-              <a:rPr lang="en-US" sz="2000" dirty="0">
-                <a:solidFill>
-                  <a:srgbClr val="111111"/>
-                </a:solidFill>
-                <a:latin typeface="Calibri" pitchFamily="34" charset="0"/>
-                <a:ea typeface="Calibri" pitchFamily="34" charset="-122"/>
-                <a:cs typeface="Calibri" pitchFamily="34" charset="-120"/>
-              </a:rPr>
-              <a:t>Without the projector (Activity 5): let learners work in pairs.</a:t>
-            </a:r>
-            <a:endParaRPr lang="en-US" sz="2000" dirty="0"/>
-          </a:p>
-        </p:txBody>
-      </p:sp>
-      <p:sp>
-        <p:nvSpPr>
-          <p:cNvPr id="25" name="Slide Number Placeholder 0"/>
-          <p:cNvSpPr>
-            <a:spLocks noGrp="1"/>
-          </p:cNvSpPr>
-          <p:nvPr>
-            <p:ph type="sldNum" sz="quarter" idx="4294967295"/>
-          </p:nvPr>
-        </p:nvSpPr>
-        <p:spPr>
-          <a:xfrm>
-            <a:off x="27432" y="91440"/>
-            <a:ext cx="585216" cy="475488"/>
-          </a:xfrm>
-          <a:prstGeom prst="rect">
-            <a:avLst/>
-          </a:prstGeom>
-          <a:extLst>
-            <a:ext uri="{C572A759-6A51-4108-AA02-DFA0A04FC94B}">
-              <ma14:wrappingTextBoxFlag xmlns:ma14="http://schemas.microsoft.com/office/mac/drawingml/2011/main" val="0"/>
-            </a:ext>
-          </a:extLst>
-        </p:spPr>
-        <p:txBody>
-          <a:bodyPr/>
-          <a:lstStyle>
-            <a:lvl1pPr>
-              <a:defRPr sz="2000">
-                <a:solidFill>
-                  <a:srgbClr val="FFFFFF"/>
-                </a:solidFill>
-                <a:latin typeface="Calibri"/>
-                <a:ea typeface="Calibri"/>
-                <a:cs typeface="Calibri"/>
-              </a:defRPr>
-            </a:lvl1pPr>
-          </a:lstStyle>
-          <a:p>
-            <a:pPr algn="ctr"/>
-            <a:fld id="{F7021451-1387-4CA6-816F-3879F97B5CBC}" type="slidenum">
-              <a:rPr b="1" lang="en-US"/>
               <a:t>59</a:t>
             </a:fld>
             <a:endParaRPr lang="en-US"/>
@@ -23567,7 +23382,7 @@
                 <a:ea typeface="Calibri" pitchFamily="34" charset="-122"/>
                 <a:cs typeface="Calibri" pitchFamily="34" charset="-120"/>
               </a:rPr>
-              <a:t>REFERENCES</a:t>
+              <a:t>TEACHER'S NOTE</a:t>
             </a:r>
             <a:endParaRPr lang="en-US" sz="1400" dirty="0"/>
           </a:p>
@@ -23590,7 +23405,7 @@
         <p:spPr>
           <a:xfrm>
             <a:off x="0" y="658368"/>
-            <a:ext cx="5120640" cy="5833872"/>
+            <a:ext cx="3840480" cy="5833872"/>
           </a:xfrm>
           <a:prstGeom prst="rect">
             <a:avLst/>
@@ -23605,8 +23420,8 @@
         </p:nvSpPr>
         <p:spPr>
           <a:xfrm>
-            <a:off x="5349240" y="1005840"/>
-            <a:ext cx="6522415" cy="731520"/>
+            <a:off x="4069080" y="1005840"/>
+            <a:ext cx="7802575" cy="731520"/>
           </a:xfrm>
           <a:prstGeom prst="rect">
             <a:avLst/>
@@ -23632,7 +23447,7 @@
                 <a:ea typeface="Times New Roman" pitchFamily="34" charset="-122"/>
                 <a:cs typeface="Times New Roman" pitchFamily="34" charset="-120"/>
               </a:rPr>
-              <a:t>References</a:t>
+              <a:t>Teacher's Note</a:t>
             </a:r>
             <a:endParaRPr lang="en-US" sz="3600" dirty="0"/>
           </a:p>
@@ -23646,8 +23461,8 @@
         </p:nvSpPr>
         <p:spPr>
           <a:xfrm>
-            <a:off x="5349240" y="1783080"/>
-            <a:ext cx="6522415" cy="4663440"/>
+            <a:off x="4069080" y="1783080"/>
+            <a:ext cx="7802575" cy="4663440"/>
           </a:xfrm>
           <a:prstGeom prst="rect">
             <a:avLst/>
@@ -23667,7 +23482,7 @@
               <a:buChar char="•"/>
             </a:pPr>
             <a:r>
-              <a:rPr lang="en-US" sz="1800" dirty="0">
+              <a:rPr lang="en-US" sz="2000" dirty="0">
                 <a:solidFill>
                   <a:srgbClr val="111111"/>
                 </a:solidFill>
@@ -23675,9 +23490,9 @@
                 <a:ea typeface="Calibri" pitchFamily="34" charset="-122"/>
                 <a:cs typeface="Calibri" pitchFamily="34" charset="-120"/>
               </a:rPr>
-              <a:t>Geography Syllabus for Sixth Forms (Lower and Upper Sixth), MINESEC, 2019 — Module 4 (Population Geography).</a:t>
-            </a:r>
-            <a:endParaRPr lang="en-US" sz="1800" dirty="0"/>
+              <a:t>Timing: Homework correction, plan, objectives 8 min | Recall, situation, action 10 min | 5 activities 30 min | Board summary (copying) 30 min | Evaluation, remediation 10 min | Homework, next lesson 5 min | Logbook 7 min</a:t>
+            </a:r>
+            <a:endParaRPr lang="en-US" sz="2000" dirty="0"/>
           </a:p>
           <a:p>
             <a:pPr algn="l" marL="342900" indent="-342900">
@@ -23688,7 +23503,7 @@
               <a:buChar char="•"/>
             </a:pPr>
             <a:r>
-              <a:rPr lang="en-US" sz="1800" dirty="0">
+              <a:rPr lang="en-US" sz="2000" dirty="0">
                 <a:solidFill>
                   <a:srgbClr val="111111"/>
                 </a:solidFill>
@@ -23696,9 +23511,9 @@
                 <a:ea typeface="Calibri" pitchFamily="34" charset="-122"/>
                 <a:cs typeface="Calibri" pitchFamily="34" charset="-120"/>
               </a:rPr>
-              <a:t>Teacher's course notes: Mr KAMDEM E., Population Geography (USA), GBHS Garoua, 2026.</a:t>
-            </a:r>
-            <a:endParaRPr lang="en-US" sz="1800" dirty="0"/>
+              <a:t>Without the projector (Activity 1): write the formula on the board.</a:t>
+            </a:r>
+            <a:endParaRPr lang="en-US" sz="2000" dirty="0"/>
           </a:p>
           <a:p>
             <a:pPr algn="l" marL="342900" indent="-342900">
@@ -23709,7 +23524,7 @@
               <a:buChar char="•"/>
             </a:pPr>
             <a:r>
-              <a:rPr lang="en-US" sz="1800" dirty="0">
+              <a:rPr lang="en-US" sz="2000" dirty="0">
                 <a:solidFill>
                   <a:srgbClr val="111111"/>
                 </a:solidFill>
@@ -23717,9 +23532,9 @@
                 <a:ea typeface="Calibri" pitchFamily="34" charset="-122"/>
                 <a:cs typeface="Calibri" pitchFamily="34" charset="-120"/>
               </a:rPr>
-              <a:t>United Nations, World Population Prospects 2024.</a:t>
-            </a:r>
-            <a:endParaRPr lang="en-US" sz="1800" dirty="0"/>
+              <a:t>Without the projector (Activity 2): calculate on the board.</a:t>
+            </a:r>
+            <a:endParaRPr lang="en-US" sz="2000" dirty="0"/>
           </a:p>
           <a:p>
             <a:pPr algn="l" marL="342900" indent="-342900">
@@ -23730,7 +23545,7 @@
               <a:buChar char="•"/>
             </a:pPr>
             <a:r>
-              <a:rPr lang="en-US" sz="1800" dirty="0">
+              <a:rPr lang="en-US" sz="2000" dirty="0">
                 <a:solidFill>
                   <a:srgbClr val="111111"/>
                 </a:solidFill>
@@ -23738,9 +23553,51 @@
                 <a:ea typeface="Calibri" pitchFamily="34" charset="-122"/>
                 <a:cs typeface="Calibri" pitchFamily="34" charset="-120"/>
               </a:rPr>
-              <a:t>Diagrams and animations: drawn for this lesson (Geography Department).</a:t>
-            </a:r>
-            <a:endParaRPr lang="en-US" sz="1800" dirty="0"/>
+              <a:t>Without the projector (Activity 3): calculate with the class.</a:t>
+            </a:r>
+            <a:endParaRPr lang="en-US" sz="2000" dirty="0"/>
+          </a:p>
+          <a:p>
+            <a:pPr algn="l" marL="342900" indent="-342900">
+              <a:spcAft>
+                <a:spcPts val="800"/>
+              </a:spcAft>
+              <a:buSzPct val="100000"/>
+              <a:buChar char="•"/>
+            </a:pPr>
+            <a:r>
+              <a:rPr lang="en-US" sz="2000" dirty="0">
+                <a:solidFill>
+                  <a:srgbClr val="111111"/>
+                </a:solidFill>
+                <a:latin typeface="Calibri" pitchFamily="34" charset="0"/>
+                <a:ea typeface="Calibri" pitchFamily="34" charset="-122"/>
+                <a:cs typeface="Calibri" pitchFamily="34" charset="-120"/>
+              </a:rPr>
+              <a:t>Without the projector (Activity 4): draw a rising curve.</a:t>
+            </a:r>
+            <a:endParaRPr lang="en-US" sz="2000" dirty="0"/>
+          </a:p>
+          <a:p>
+            <a:pPr algn="l" marL="342900" indent="-342900">
+              <a:spcAft>
+                <a:spcPts val="800"/>
+              </a:spcAft>
+              <a:buSzPct val="100000"/>
+              <a:buChar char="•"/>
+            </a:pPr>
+            <a:r>
+              <a:rPr lang="en-US" sz="2000" dirty="0">
+                <a:solidFill>
+                  <a:srgbClr val="111111"/>
+                </a:solidFill>
+                <a:latin typeface="Calibri" pitchFamily="34" charset="0"/>
+                <a:ea typeface="Calibri" pitchFamily="34" charset="-122"/>
+                <a:cs typeface="Calibri" pitchFamily="34" charset="-120"/>
+              </a:rPr>
+              <a:t>Without the projector (Activity 5): let learners work in pairs.</a:t>
+            </a:r>
+            <a:endParaRPr lang="en-US" sz="2000" dirty="0"/>
           </a:p>
         </p:txBody>
       </p:sp>
@@ -23787,6 +23644,289 @@
             <a:fld id="{F7021451-1387-4CA6-816F-3879F97B5CBC}" type="slidenum">
               <a:rPr b="1" lang="en-US"/>
               <a:t>60</a:t>
+            </a:fld>
+            <a:endParaRPr lang="en-US"/>
+          </a:p>
+        </p:txBody>
+      </p:sp>
+    </p:spTree>
+  </p:cSld>
+  <p:clrMapOvr>
+    <a:masterClrMapping/>
+  </p:clrMapOvr>
+</p:sld>
+</file>
+
+<file path=ppt/slides/slide61.xml><?xml version="1.0" encoding="utf-8"?>
+<p:sld xmlns:a="http://schemas.openxmlformats.org/drawingml/2006/main" xmlns:r="http://schemas.openxmlformats.org/officeDocument/2006/relationships" xmlns:p="http://schemas.openxmlformats.org/presentationml/2006/main">
+  <p:cSld name="Slide 61">
+    <p:spTree>
+      <p:nvGrpSpPr>
+        <p:cNvPr id="1" name=""/>
+        <p:cNvGrpSpPr/>
+        <p:nvPr/>
+      </p:nvGrpSpPr>
+      <p:grpSpPr>
+        <a:xfrm>
+          <a:off x="0" y="0"/>
+          <a:ext cx="0" cy="0"/>
+          <a:chOff x="0" y="0"/>
+          <a:chExt cx="0" cy="0"/>
+        </a:xfrm>
+      </p:grpSpPr>
+      <p:sp>
+        <p:nvSpPr>
+          <p:cNvPr id="2" name="Text 0"/>
+          <p:cNvSpPr/>
+          <p:nvPr/>
+        </p:nvSpPr>
+        <p:spPr>
+          <a:xfrm>
+            <a:off x="457200" y="713232"/>
+            <a:ext cx="11368735" cy="274320"/>
+          </a:xfrm>
+          <a:prstGeom prst="rect">
+            <a:avLst/>
+          </a:prstGeom>
+          <a:noFill/>
+          <a:ln/>
+        </p:spPr>
+        <p:txBody>
+          <a:bodyPr wrap="square" lIns="0" tIns="0" rIns="0" bIns="0" rtlCol="0" anchor="ctr"/>
+          <a:lstStyle/>
+          <a:p>
+            <a:pPr algn="r" indent="0" marL="0">
+              <a:buNone/>
+            </a:pPr>
+            <a:r>
+              <a:rPr lang="en-US" sz="1400" b="1" dirty="0">
+                <a:solidFill>
+                  <a:srgbClr val="1C3F6E"/>
+                </a:solidFill>
+                <a:latin typeface="Calibri" pitchFamily="34" charset="0"/>
+                <a:ea typeface="Calibri" pitchFamily="34" charset="-122"/>
+                <a:cs typeface="Calibri" pitchFamily="34" charset="-120"/>
+              </a:rPr>
+              <a:t>REFERENCES</a:t>
+            </a:r>
+            <a:endParaRPr lang="en-US" sz="1400" dirty="0"/>
+          </a:p>
+        </p:txBody>
+      </p:sp>
+      <p:pic>
+        <p:nvPicPr>
+          <p:cNvPr id="3" name="Image 0" descr="/home/claude/f4/img/minesec_sheet.png">    </p:cNvPr>
+          <p:cNvPicPr>
+            <a:picLocks noChangeAspect="1"/>
+          </p:cNvPicPr>
+          <p:nvPr/>
+        </p:nvPicPr>
+        <p:blipFill>
+          <a:blip r:embed="rId1"/>
+          <a:stretch>
+            <a:fillRect/>
+          </a:stretch>
+        </p:blipFill>
+        <p:spPr>
+          <a:xfrm>
+            <a:off x="0" y="658368"/>
+            <a:ext cx="5120640" cy="5833872"/>
+          </a:xfrm>
+          <a:prstGeom prst="rect">
+            <a:avLst/>
+          </a:prstGeom>
+        </p:spPr>
+      </p:pic>
+      <p:sp>
+        <p:nvSpPr>
+          <p:cNvPr id="4" name="Text 1"/>
+          <p:cNvSpPr/>
+          <p:nvPr/>
+        </p:nvSpPr>
+        <p:spPr>
+          <a:xfrm>
+            <a:off x="5349240" y="1005840"/>
+            <a:ext cx="6522415" cy="731520"/>
+          </a:xfrm>
+          <a:prstGeom prst="rect">
+            <a:avLst/>
+          </a:prstGeom>
+          <a:noFill/>
+          <a:ln/>
+        </p:spPr>
+        <p:txBody>
+          <a:bodyPr wrap="square" lIns="0" tIns="0" rIns="0" bIns="0" rtlCol="0" anchor="ctr">
+            <a:normAutofit/>
+          </a:bodyPr>
+          <a:lstStyle/>
+          <a:p>
+            <a:pPr algn="ctr" indent="0" marL="0">
+              <a:buNone/>
+            </a:pPr>
+            <a:r>
+              <a:rPr lang="en-US" sz="3600" b="1" dirty="0">
+                <a:solidFill>
+                  <a:srgbClr val="990011"/>
+                </a:solidFill>
+                <a:latin typeface="Times New Roman" pitchFamily="34" charset="0"/>
+                <a:ea typeface="Times New Roman" pitchFamily="34" charset="-122"/>
+                <a:cs typeface="Times New Roman" pitchFamily="34" charset="-120"/>
+              </a:rPr>
+              <a:t>References</a:t>
+            </a:r>
+            <a:endParaRPr lang="en-US" sz="3600" dirty="0"/>
+          </a:p>
+        </p:txBody>
+      </p:sp>
+      <p:sp>
+        <p:nvSpPr>
+          <p:cNvPr id="5" name="Text 2"/>
+          <p:cNvSpPr/>
+          <p:nvPr/>
+        </p:nvSpPr>
+        <p:spPr>
+          <a:xfrm>
+            <a:off x="5349240" y="1783080"/>
+            <a:ext cx="6522415" cy="4663440"/>
+          </a:xfrm>
+          <a:prstGeom prst="rect">
+            <a:avLst/>
+          </a:prstGeom>
+          <a:noFill/>
+          <a:ln/>
+        </p:spPr>
+        <p:txBody>
+          <a:bodyPr wrap="square" lIns="0" tIns="0" rIns="0" bIns="0" rtlCol="0" anchor="t"/>
+          <a:lstStyle/>
+          <a:p>
+            <a:pPr algn="l" marL="342900" indent="-342900">
+              <a:spcAft>
+                <a:spcPts val="800"/>
+              </a:spcAft>
+              <a:buSzPct val="100000"/>
+              <a:buChar char="•"/>
+            </a:pPr>
+            <a:r>
+              <a:rPr lang="en-US" sz="1800" dirty="0">
+                <a:solidFill>
+                  <a:srgbClr val="111111"/>
+                </a:solidFill>
+                <a:latin typeface="Calibri" pitchFamily="34" charset="0"/>
+                <a:ea typeface="Calibri" pitchFamily="34" charset="-122"/>
+                <a:cs typeface="Calibri" pitchFamily="34" charset="-120"/>
+              </a:rPr>
+              <a:t>Geography Syllabus for Sixth Forms (Lower and Upper Sixth), MINESEC, 2019 — Module 4 (Population Geography).</a:t>
+            </a:r>
+            <a:endParaRPr lang="en-US" sz="1800" dirty="0"/>
+          </a:p>
+          <a:p>
+            <a:pPr algn="l" marL="342900" indent="-342900">
+              <a:spcAft>
+                <a:spcPts val="800"/>
+              </a:spcAft>
+              <a:buSzPct val="100000"/>
+              <a:buChar char="•"/>
+            </a:pPr>
+            <a:r>
+              <a:rPr lang="en-US" sz="1800" dirty="0">
+                <a:solidFill>
+                  <a:srgbClr val="111111"/>
+                </a:solidFill>
+                <a:latin typeface="Calibri" pitchFamily="34" charset="0"/>
+                <a:ea typeface="Calibri" pitchFamily="34" charset="-122"/>
+                <a:cs typeface="Calibri" pitchFamily="34" charset="-120"/>
+              </a:rPr>
+              <a:t>Teacher's course notes: Mr KAMDEM E., Population Geography (USA), GBHS Garoua, 2026.</a:t>
+            </a:r>
+            <a:endParaRPr lang="en-US" sz="1800" dirty="0"/>
+          </a:p>
+          <a:p>
+            <a:pPr algn="l" marL="342900" indent="-342900">
+              <a:spcAft>
+                <a:spcPts val="800"/>
+              </a:spcAft>
+              <a:buSzPct val="100000"/>
+              <a:buChar char="•"/>
+            </a:pPr>
+            <a:r>
+              <a:rPr lang="en-US" sz="1800" dirty="0">
+                <a:solidFill>
+                  <a:srgbClr val="111111"/>
+                </a:solidFill>
+                <a:latin typeface="Calibri" pitchFamily="34" charset="0"/>
+                <a:ea typeface="Calibri" pitchFamily="34" charset="-122"/>
+                <a:cs typeface="Calibri" pitchFamily="34" charset="-120"/>
+              </a:rPr>
+              <a:t>United Nations, World Population Prospects 2024.</a:t>
+            </a:r>
+            <a:endParaRPr lang="en-US" sz="1800" dirty="0"/>
+          </a:p>
+          <a:p>
+            <a:pPr algn="l" marL="342900" indent="-342900">
+              <a:spcAft>
+                <a:spcPts val="800"/>
+              </a:spcAft>
+              <a:buSzPct val="100000"/>
+              <a:buChar char="•"/>
+            </a:pPr>
+            <a:r>
+              <a:rPr lang="en-US" sz="1800" dirty="0">
+                <a:solidFill>
+                  <a:srgbClr val="111111"/>
+                </a:solidFill>
+                <a:latin typeface="Calibri" pitchFamily="34" charset="0"/>
+                <a:ea typeface="Calibri" pitchFamily="34" charset="-122"/>
+                <a:cs typeface="Calibri" pitchFamily="34" charset="-120"/>
+              </a:rPr>
+              <a:t>Diagrams and animations: drawn for this lesson (Geography Department).</a:t>
+            </a:r>
+            <a:endParaRPr lang="en-US" sz="1800" dirty="0"/>
+          </a:p>
+        </p:txBody>
+      </p:sp>
+      <p:sp>
+        <p:nvSpPr>
+          <p:cNvPr id="25" name="Slide Number Placeholder 0"/>
+          <p:cNvSpPr>
+            <a:spLocks noGrp="1"/>
+          </p:cNvSpPr>
+          <p:nvPr>
+            <p:ph type="sldNum" sz="quarter" idx="4294967295"/>
+          </p:nvPr>
+        </p:nvSpPr>
+        <p:spPr>
+          <a:xfrm>
+            <a:off x="27432" y="91440"/>
+            <a:ext cx="585216" cy="475488"/>
+          </a:xfrm>
+          <a:prstGeom prst="rect">
+            <a:avLst/>
+          </a:prstGeom>
+          <a:extLst>
+            <a:ext uri="{C572A759-6A51-4108-AA02-DFA0A04FC94B}">
+              <ma14:wrappingTextBoxFlag xmlns:ma14="http://schemas.microsoft.com/office/mac/drawingml/2011/main" val="0"/>
+            </a:ext>
+          </a:extLst>
+        </p:spPr>
+        <p:txBody>
+          <a:bodyPr/>
+          <a:lstStyle>
+            <a:lvl1pPr>
+              <a:defRPr sz="2000">
+                <a:solidFill>
+                  <a:srgbClr val="FFFFFF"/>
+                </a:solidFill>
+                <a:latin typeface="Calibri"/>
+                <a:ea typeface="Calibri"/>
+                <a:cs typeface="Calibri"/>
+              </a:defRPr>
+            </a:lvl1pPr>
+          </a:lstStyle>
+          <a:p>
+            <a:pPr algn="ctr"/>
+            <a:fld id="{F7021451-1387-4CA6-816F-3879F97B5CBC}" type="slidenum">
+              <a:rPr b="1" lang="en-US"/>
+              <a:t>61</a:t>
             </a:fld>
             <a:endParaRPr lang="en-US"/>
           </a:p>
